--- a/blocks/A_ros2_basics/M02_workspace_package/M02_Workspace_생성과_빌드.pptx
+++ b/blocks/A_ros2_basics/M02_workspace_package/M02_Workspace_생성과_빌드.pptx
@@ -6317,8 +6317,8 @@
         </p:nvSpPr>
         <p:spPr>
           <a:xfrm>
-            <a:off x="658368" y="1682496"/>
-            <a:ext cx="10972800" cy="347472"/>
+            <a:off x="658368" y="1627632"/>
+            <a:ext cx="10972800" cy="256032"/>
           </a:xfrm>
           <a:prstGeom prst="rect">
             <a:avLst/>
@@ -6335,7 +6335,7 @@
               <a:spcAft>
                 <a:spcPts val="0"/>
               </a:spcAft>
-              <a:defRPr sz="1700" b="1">
+              <a:defRPr sz="1500" b="1">
                 <a:solidFill>
                   <a:srgbClr val="122C4E"/>
                 </a:solidFill>
@@ -6356,8 +6356,8 @@
         </p:nvSpPr>
         <p:spPr>
           <a:xfrm>
-            <a:off x="658368" y="2103120"/>
-            <a:ext cx="10972800" cy="493776"/>
+            <a:off x="658368" y="1956816"/>
+            <a:ext cx="10972800" cy="603504"/>
           </a:xfrm>
           <a:prstGeom prst="rect">
             <a:avLst/>
@@ -6401,7 +6401,11 @@
               </a:defRPr>
             </a:pPr>
             <a:r>
-              <a:t>파일 생성/열기: mkdir -p ~/agv_ws/src/agv_control    &amp;&amp;    nano ~/agv_ws/src/agv_control/package.xml</a:t>
+              <a:t>파일 생성: mkdir -p ~/agv_ws/src/agv_control</a:t>
+            </a:r>
+            <a:br/>
+            <a:r>
+              <a:t>파일 열기: nano ~/agv_ws/src/agv_control/package.xml</a:t>
             </a:r>
           </a:p>
         </p:txBody>
@@ -6414,8 +6418,8 @@
         </p:nvSpPr>
         <p:spPr>
           <a:xfrm>
-            <a:off x="658368" y="2761488"/>
-            <a:ext cx="10972800" cy="3383280"/>
+            <a:off x="658368" y="2706624"/>
+            <a:ext cx="10972800" cy="3364992"/>
           </a:xfrm>
           <a:prstGeom prst="rect">
             <a:avLst/>
@@ -6459,10 +6463,18 @@
               </a:defRPr>
             </a:pPr>
             <a:r>
+              <a:t>  &lt;license&gt;Apache-2.0&lt;/license&gt;</a:t>
+            </a:r>
+            <a:br/>
+            <a:r>
               <a:t>  </a:t>
             </a:r>
             <a:br/>
             <a:r>
+              <a:t>  </a:t>
+            </a:r>
+            <a:br/>
+            <a:r>
               <a:t>  &lt;buildtool_depend&gt;ament_python&lt;/buildtool_depend&gt;</a:t>
             </a:r>
             <a:br/>
@@ -6496,22 +6508,6 @@
             <a:br/>
             <a:r>
               <a:t>  &lt;exec_depend&gt;sensor_msgs&lt;/exec_depend&gt;</a:t>
-            </a:r>
-            <a:br/>
-            <a:r>
-              <a:t>  &lt;exec_depend&gt;nav_msgs&lt;/exec_depend&gt;</a:t>
-            </a:r>
-            <a:br/>
-            <a:r>
-              <a:t>  </a:t>
-            </a:r>
-            <a:br/>
-            <a:r>
-              <a:t>  </a:t>
-            </a:r>
-            <a:br/>
-            <a:r>
-              <a:t>  &lt;export&gt;</a:t>
             </a:r>
           </a:p>
         </p:txBody>
@@ -6524,7 +6520,7 @@
         </p:nvSpPr>
         <p:spPr>
           <a:xfrm>
-            <a:off x="749808" y="6199632"/>
+            <a:off x="749808" y="6181344"/>
             <a:ext cx="10789920" cy="201168"/>
           </a:xfrm>
           <a:prstGeom prst="rect">
@@ -6795,8 +6791,8 @@
         </p:nvSpPr>
         <p:spPr>
           <a:xfrm>
-            <a:off x="658368" y="1682496"/>
-            <a:ext cx="10972800" cy="347472"/>
+            <a:off x="658368" y="1627632"/>
+            <a:ext cx="10972800" cy="256032"/>
           </a:xfrm>
           <a:prstGeom prst="rect">
             <a:avLst/>
@@ -6813,7 +6809,7 @@
               <a:spcAft>
                 <a:spcPts val="0"/>
               </a:spcAft>
-              <a:defRPr sz="1700" b="1">
+              <a:defRPr sz="1500" b="1">
                 <a:solidFill>
                   <a:srgbClr val="122C4E"/>
                 </a:solidFill>
@@ -6834,8 +6830,8 @@
         </p:nvSpPr>
         <p:spPr>
           <a:xfrm>
-            <a:off x="658368" y="2103120"/>
-            <a:ext cx="10972800" cy="493776"/>
+            <a:off x="658368" y="1956816"/>
+            <a:ext cx="10972800" cy="603504"/>
           </a:xfrm>
           <a:prstGeom prst="rect">
             <a:avLst/>
@@ -6879,7 +6875,11 @@
               </a:defRPr>
             </a:pPr>
             <a:r>
-              <a:t>파일 생성/열기: mkdir -p ~/agv_ws/src/agv_control    &amp;&amp;    nano ~/agv_ws/src/agv_control/package.xml</a:t>
+              <a:t>파일 생성: mkdir -p ~/agv_ws/src/agv_control</a:t>
+            </a:r>
+            <a:br/>
+            <a:r>
+              <a:t>파일 열기: nano ~/agv_ws/src/agv_control/package.xml</a:t>
             </a:r>
           </a:p>
         </p:txBody>
@@ -6892,8 +6892,8 @@
         </p:nvSpPr>
         <p:spPr>
           <a:xfrm>
-            <a:off x="658368" y="2761488"/>
-            <a:ext cx="10972800" cy="3383280"/>
+            <a:off x="658368" y="2706624"/>
+            <a:ext cx="10972800" cy="3364992"/>
           </a:xfrm>
           <a:prstGeom prst="rect">
             <a:avLst/>
@@ -6937,6 +6937,22 @@
               </a:defRPr>
             </a:pPr>
             <a:r>
+              <a:t>  &lt;exec_depend&gt;nav_msgs&lt;/exec_depend&gt;</a:t>
+            </a:r>
+            <a:br/>
+            <a:r>
+              <a:t>  </a:t>
+            </a:r>
+            <a:br/>
+            <a:r>
+              <a:t>  </a:t>
+            </a:r>
+            <a:br/>
+            <a:r>
+              <a:t>  &lt;export&gt;</a:t>
+            </a:r>
+            <a:br/>
+            <a:r>
               <a:t>    &lt;build_type&gt;ament_python&lt;/build_type&gt;</a:t>
             </a:r>
             <a:br/>
@@ -6963,7 +6979,7 @@
         </p:nvSpPr>
         <p:spPr>
           <a:xfrm>
-            <a:off x="749808" y="6199632"/>
+            <a:off x="749808" y="6181344"/>
             <a:ext cx="10789920" cy="201168"/>
           </a:xfrm>
           <a:prstGeom prst="rect">
@@ -7234,8 +7250,8 @@
         </p:nvSpPr>
         <p:spPr>
           <a:xfrm>
-            <a:off x="658368" y="1682496"/>
-            <a:ext cx="10972800" cy="347472"/>
+            <a:off x="658368" y="1627632"/>
+            <a:ext cx="10972800" cy="256032"/>
           </a:xfrm>
           <a:prstGeom prst="rect">
             <a:avLst/>
@@ -7252,7 +7268,7 @@
               <a:spcAft>
                 <a:spcPts val="0"/>
               </a:spcAft>
-              <a:defRPr sz="1700" b="1">
+              <a:defRPr sz="1500" b="1">
                 <a:solidFill>
                   <a:srgbClr val="122C4E"/>
                 </a:solidFill>
@@ -7273,8 +7289,8 @@
         </p:nvSpPr>
         <p:spPr>
           <a:xfrm>
-            <a:off x="658368" y="2103120"/>
-            <a:ext cx="10972800" cy="493776"/>
+            <a:off x="658368" y="1956816"/>
+            <a:ext cx="10972800" cy="603504"/>
           </a:xfrm>
           <a:prstGeom prst="rect">
             <a:avLst/>
@@ -7318,7 +7334,11 @@
               </a:defRPr>
             </a:pPr>
             <a:r>
-              <a:t>파일 생성/열기: mkdir -p ~/agv_ws/src/agv_control    &amp;&amp;    nano ~/agv_ws/src/agv_control/setup.py</a:t>
+              <a:t>파일 생성: mkdir -p ~/agv_ws/src/agv_control</a:t>
+            </a:r>
+            <a:br/>
+            <a:r>
+              <a:t>파일 열기: nano ~/agv_ws/src/agv_control/setup.py</a:t>
             </a:r>
           </a:p>
         </p:txBody>
@@ -7331,8 +7351,8 @@
         </p:nvSpPr>
         <p:spPr>
           <a:xfrm>
-            <a:off x="658368" y="2761488"/>
-            <a:ext cx="10972800" cy="3383280"/>
+            <a:off x="658368" y="2706624"/>
+            <a:ext cx="10972800" cy="3364992"/>
           </a:xfrm>
           <a:prstGeom prst="rect">
             <a:avLst/>
@@ -7433,7 +7453,7 @@
         </p:nvSpPr>
         <p:spPr>
           <a:xfrm>
-            <a:off x="749808" y="6199632"/>
+            <a:off x="749808" y="6181344"/>
             <a:ext cx="10789920" cy="201168"/>
           </a:xfrm>
           <a:prstGeom prst="rect">
@@ -7704,8 +7724,8 @@
         </p:nvSpPr>
         <p:spPr>
           <a:xfrm>
-            <a:off x="658368" y="1682496"/>
-            <a:ext cx="10972800" cy="347472"/>
+            <a:off x="658368" y="1627632"/>
+            <a:ext cx="10972800" cy="256032"/>
           </a:xfrm>
           <a:prstGeom prst="rect">
             <a:avLst/>
@@ -7722,7 +7742,7 @@
               <a:spcAft>
                 <a:spcPts val="0"/>
               </a:spcAft>
-              <a:defRPr sz="1700" b="1">
+              <a:defRPr sz="1500" b="1">
                 <a:solidFill>
                   <a:srgbClr val="122C4E"/>
                 </a:solidFill>
@@ -7743,8 +7763,8 @@
         </p:nvSpPr>
         <p:spPr>
           <a:xfrm>
-            <a:off x="658368" y="2103120"/>
-            <a:ext cx="10972800" cy="493776"/>
+            <a:off x="658368" y="1956816"/>
+            <a:ext cx="10972800" cy="603504"/>
           </a:xfrm>
           <a:prstGeom prst="rect">
             <a:avLst/>
@@ -7788,7 +7808,11 @@
               </a:defRPr>
             </a:pPr>
             <a:r>
-              <a:t>파일 생성/열기: mkdir -p ~/agv_ws/src/agv_cpp_examples    &amp;&amp;    nano ~/agv_ws/src/agv_cpp_examples/CMakeLists.txt</a:t>
+              <a:t>파일 생성: mkdir -p ~/agv_ws/src/agv_cpp_examples</a:t>
+            </a:r>
+            <a:br/>
+            <a:r>
+              <a:t>파일 열기: nano ~/agv_ws/src/agv_cpp_examples/CMakeLists.txt</a:t>
             </a:r>
           </a:p>
         </p:txBody>
@@ -7801,8 +7825,8 @@
         </p:nvSpPr>
         <p:spPr>
           <a:xfrm>
-            <a:off x="658368" y="2761488"/>
-            <a:ext cx="10972800" cy="3383280"/>
+            <a:off x="658368" y="2706624"/>
+            <a:ext cx="10972800" cy="3364992"/>
           </a:xfrm>
           <a:prstGeom prst="rect">
             <a:avLst/>
@@ -7883,14 +7907,6 @@
               <a:t>ament_target_dependencies(status_publisher rclcpp std_msgs)</a:t>
             </a:r>
             <a:br/>
-            <a:br/>
-            <a:r>
-              <a:t># ros2 run agv_cpp_examples status_publisher가 찾는 설치 경로입니다.</a:t>
-            </a:r>
-            <a:br/>
-            <a:r>
-              <a:t>install(TARGETS</a:t>
-            </a:r>
           </a:p>
         </p:txBody>
       </p:sp>
@@ -7902,7 +7918,7 @@
         </p:nvSpPr>
         <p:spPr>
           <a:xfrm>
-            <a:off x="749808" y="6199632"/>
+            <a:off x="749808" y="6181344"/>
             <a:ext cx="10789920" cy="201168"/>
           </a:xfrm>
           <a:prstGeom prst="rect">
@@ -8173,8 +8189,8 @@
         </p:nvSpPr>
         <p:spPr>
           <a:xfrm>
-            <a:off x="658368" y="1682496"/>
-            <a:ext cx="10972800" cy="347472"/>
+            <a:off x="658368" y="1627632"/>
+            <a:ext cx="10972800" cy="256032"/>
           </a:xfrm>
           <a:prstGeom prst="rect">
             <a:avLst/>
@@ -8191,7 +8207,7 @@
               <a:spcAft>
                 <a:spcPts val="0"/>
               </a:spcAft>
-              <a:defRPr sz="1700" b="1">
+              <a:defRPr sz="1500" b="1">
                 <a:solidFill>
                   <a:srgbClr val="122C4E"/>
                 </a:solidFill>
@@ -8212,8 +8228,8 @@
         </p:nvSpPr>
         <p:spPr>
           <a:xfrm>
-            <a:off x="658368" y="2103120"/>
-            <a:ext cx="10972800" cy="493776"/>
+            <a:off x="658368" y="1956816"/>
+            <a:ext cx="10972800" cy="603504"/>
           </a:xfrm>
           <a:prstGeom prst="rect">
             <a:avLst/>
@@ -8257,7 +8273,11 @@
               </a:defRPr>
             </a:pPr>
             <a:r>
-              <a:t>파일 생성/열기: mkdir -p ~/agv_ws/src/agv_cpp_examples    &amp;&amp;    nano ~/agv_ws/src/agv_cpp_examples/CMakeLists.txt</a:t>
+              <a:t>파일 생성: mkdir -p ~/agv_ws/src/agv_cpp_examples</a:t>
+            </a:r>
+            <a:br/>
+            <a:r>
+              <a:t>파일 열기: nano ~/agv_ws/src/agv_cpp_examples/CMakeLists.txt</a:t>
             </a:r>
           </a:p>
         </p:txBody>
@@ -8270,8 +8290,8 @@
         </p:nvSpPr>
         <p:spPr>
           <a:xfrm>
-            <a:off x="658368" y="2761488"/>
-            <a:ext cx="10972800" cy="3383280"/>
+            <a:off x="658368" y="2706624"/>
+            <a:ext cx="10972800" cy="3364992"/>
           </a:xfrm>
           <a:prstGeom prst="rect">
             <a:avLst/>
@@ -8315,6 +8335,14 @@
               </a:defRPr>
             </a:pPr>
             <a:r>
+              <a:t># ros2 run agv_cpp_examples status_publisher가 찾는 설치 경로입니다.</a:t>
+            </a:r>
+            <a:br/>
+            <a:r>
+              <a:t>install(TARGETS</a:t>
+            </a:r>
+            <a:br/>
+            <a:r>
               <a:t>  status_publisher</a:t>
             </a:r>
             <a:br/>
@@ -8337,7 +8365,7 @@
         </p:nvSpPr>
         <p:spPr>
           <a:xfrm>
-            <a:off x="749808" y="6199632"/>
+            <a:off x="749808" y="6181344"/>
             <a:ext cx="10789920" cy="201168"/>
           </a:xfrm>
           <a:prstGeom prst="rect">
@@ -8608,8 +8636,8 @@
         </p:nvSpPr>
         <p:spPr>
           <a:xfrm>
-            <a:off x="658368" y="1682496"/>
-            <a:ext cx="10972800" cy="347472"/>
+            <a:off x="658368" y="1627632"/>
+            <a:ext cx="10972800" cy="256032"/>
           </a:xfrm>
           <a:prstGeom prst="rect">
             <a:avLst/>
@@ -8626,7 +8654,7 @@
               <a:spcAft>
                 <a:spcPts val="0"/>
               </a:spcAft>
-              <a:defRPr sz="1700" b="1">
+              <a:defRPr sz="1500" b="1">
                 <a:solidFill>
                   <a:srgbClr val="122C4E"/>
                 </a:solidFill>
@@ -8647,8 +8675,8 @@
         </p:nvSpPr>
         <p:spPr>
           <a:xfrm>
-            <a:off x="658368" y="2103120"/>
-            <a:ext cx="10972800" cy="493776"/>
+            <a:off x="658368" y="1956816"/>
+            <a:ext cx="10972800" cy="603504"/>
           </a:xfrm>
           <a:prstGeom prst="rect">
             <a:avLst/>
@@ -8692,7 +8720,11 @@
               </a:defRPr>
             </a:pPr>
             <a:r>
-              <a:t>파일 생성/열기: mkdir -p ~/agv_ws/src/agv_cpp_examples/src    &amp;&amp;    nano ~/agv_ws/src/agv_cpp_examples/src/status_publisher.cpp</a:t>
+              <a:t>파일 생성: mkdir -p ~/agv_ws/src/agv_cpp_examples/src</a:t>
+            </a:r>
+            <a:br/>
+            <a:r>
+              <a:t>파일 열기: nano ~/agv_ws/src/agv_cpp_examples/src/status_publisher.cpp</a:t>
             </a:r>
           </a:p>
         </p:txBody>
@@ -8705,8 +8737,8 @@
         </p:nvSpPr>
         <p:spPr>
           <a:xfrm>
-            <a:off x="658368" y="2761488"/>
-            <a:ext cx="10972800" cy="3383280"/>
+            <a:off x="658368" y="2706624"/>
+            <a:ext cx="10972800" cy="3364992"/>
           </a:xfrm>
           <a:prstGeom prst="rect">
             <a:avLst/>
@@ -8787,14 +8819,6 @@
             <a:r>
               <a:t>class StatusPublisher : public rclcpp::Node</a:t>
             </a:r>
-            <a:br/>
-            <a:r>
-              <a:t>{</a:t>
-            </a:r>
-            <a:br/>
-            <a:r>
-              <a:t>public:</a:t>
-            </a:r>
           </a:p>
         </p:txBody>
       </p:sp>
@@ -8806,7 +8830,7 @@
         </p:nvSpPr>
         <p:spPr>
           <a:xfrm>
-            <a:off x="749808" y="6199632"/>
+            <a:off x="749808" y="6181344"/>
             <a:ext cx="10789920" cy="201168"/>
           </a:xfrm>
           <a:prstGeom prst="rect">
@@ -9077,8 +9101,8 @@
         </p:nvSpPr>
         <p:spPr>
           <a:xfrm>
-            <a:off x="658368" y="1682496"/>
-            <a:ext cx="10972800" cy="347472"/>
+            <a:off x="658368" y="1627632"/>
+            <a:ext cx="10972800" cy="256032"/>
           </a:xfrm>
           <a:prstGeom prst="rect">
             <a:avLst/>
@@ -9095,7 +9119,7 @@
               <a:spcAft>
                 <a:spcPts val="0"/>
               </a:spcAft>
-              <a:defRPr sz="1700" b="1">
+              <a:defRPr sz="1500" b="1">
                 <a:solidFill>
                   <a:srgbClr val="122C4E"/>
                 </a:solidFill>
@@ -9116,8 +9140,8 @@
         </p:nvSpPr>
         <p:spPr>
           <a:xfrm>
-            <a:off x="658368" y="2103120"/>
-            <a:ext cx="10972800" cy="493776"/>
+            <a:off x="658368" y="1956816"/>
+            <a:ext cx="10972800" cy="603504"/>
           </a:xfrm>
           <a:prstGeom prst="rect">
             <a:avLst/>
@@ -9161,7 +9185,11 @@
               </a:defRPr>
             </a:pPr>
             <a:r>
-              <a:t>파일 생성/열기: mkdir -p ~/agv_ws/src/agv_cpp_examples/src    &amp;&amp;    nano ~/agv_ws/src/agv_cpp_examples/src/status_publisher.cpp</a:t>
+              <a:t>파일 생성: mkdir -p ~/agv_ws/src/agv_cpp_examples/src</a:t>
+            </a:r>
+            <a:br/>
+            <a:r>
+              <a:t>파일 열기: nano ~/agv_ws/src/agv_cpp_examples/src/status_publisher.cpp</a:t>
             </a:r>
           </a:p>
         </p:txBody>
@@ -9174,8 +9202,8 @@
         </p:nvSpPr>
         <p:spPr>
           <a:xfrm>
-            <a:off x="658368" y="2761488"/>
-            <a:ext cx="10972800" cy="3383280"/>
+            <a:off x="658368" y="2706624"/>
+            <a:ext cx="10972800" cy="3364992"/>
           </a:xfrm>
           <a:prstGeom prst="rect">
             <a:avLst/>
@@ -9219,6 +9247,14 @@
               </a:defRPr>
             </a:pPr>
             <a:r>
+              <a:t>{</a:t>
+            </a:r>
+            <a:br/>
+            <a:r>
+              <a:t>public:</a:t>
+            </a:r>
+            <a:br/>
+            <a:r>
               <a:t>  StatusPublisher()</a:t>
             </a:r>
             <a:br/>
@@ -9254,19 +9290,6 @@
             <a:r>
               <a:t>  }</a:t>
             </a:r>
-            <a:br/>
-            <a:br/>
-            <a:r>
-              <a:t>private:</a:t>
-            </a:r>
-            <a:br/>
-            <a:r>
-              <a:t>  void publish_status()</a:t>
-            </a:r>
-            <a:br/>
-            <a:r>
-              <a:t>  {</a:t>
-            </a:r>
           </a:p>
         </p:txBody>
       </p:sp>
@@ -9278,7 +9301,7 @@
         </p:nvSpPr>
         <p:spPr>
           <a:xfrm>
-            <a:off x="749808" y="6199632"/>
+            <a:off x="749808" y="6181344"/>
             <a:ext cx="10789920" cy="201168"/>
           </a:xfrm>
           <a:prstGeom prst="rect">
@@ -9549,8 +9572,8 @@
         </p:nvSpPr>
         <p:spPr>
           <a:xfrm>
-            <a:off x="658368" y="1682496"/>
-            <a:ext cx="10972800" cy="347472"/>
+            <a:off x="658368" y="1627632"/>
+            <a:ext cx="10972800" cy="256032"/>
           </a:xfrm>
           <a:prstGeom prst="rect">
             <a:avLst/>
@@ -9567,7 +9590,7 @@
               <a:spcAft>
                 <a:spcPts val="0"/>
               </a:spcAft>
-              <a:defRPr sz="1700" b="1">
+              <a:defRPr sz="1500" b="1">
                 <a:solidFill>
                   <a:srgbClr val="122C4E"/>
                 </a:solidFill>
@@ -9588,8 +9611,8 @@
         </p:nvSpPr>
         <p:spPr>
           <a:xfrm>
-            <a:off x="658368" y="2103120"/>
-            <a:ext cx="10972800" cy="493776"/>
+            <a:off x="658368" y="1956816"/>
+            <a:ext cx="10972800" cy="603504"/>
           </a:xfrm>
           <a:prstGeom prst="rect">
             <a:avLst/>
@@ -9633,7 +9656,11 @@
               </a:defRPr>
             </a:pPr>
             <a:r>
-              <a:t>파일 생성/열기: mkdir -p ~/agv_ws/src/agv_cpp_examples/src    &amp;&amp;    nano ~/agv_ws/src/agv_cpp_examples/src/status_publisher.cpp</a:t>
+              <a:t>파일 생성: mkdir -p ~/agv_ws/src/agv_cpp_examples/src</a:t>
+            </a:r>
+            <a:br/>
+            <a:r>
+              <a:t>파일 열기: nano ~/agv_ws/src/agv_cpp_examples/src/status_publisher.cpp</a:t>
             </a:r>
           </a:p>
         </p:txBody>
@@ -9646,8 +9673,8 @@
         </p:nvSpPr>
         <p:spPr>
           <a:xfrm>
-            <a:off x="658368" y="2761488"/>
-            <a:ext cx="10972800" cy="3383280"/>
+            <a:off x="658368" y="2706624"/>
+            <a:ext cx="10972800" cy="3364992"/>
           </a:xfrm>
           <a:prstGeom prst="rect">
             <a:avLst/>
@@ -9690,6 +9717,19 @@
                 <a:latin typeface="DejaVu Sans Mono"/>
               </a:defRPr>
             </a:pPr>
+            <a:br/>
+            <a:r>
+              <a:t>private:</a:t>
+            </a:r>
+            <a:br/>
+            <a:r>
+              <a:t>  void publish_status()</a:t>
+            </a:r>
+            <a:br/>
+            <a:r>
+              <a:t>  {</a:t>
+            </a:r>
+            <a:br/>
             <a:r>
               <a:t>    auto message = std_msgs::msg::String();</a:t>
             </a:r>
@@ -9718,27 +9758,6 @@
             <a:r>
               <a:t>  rclcpp::Publisher&lt;std_msgs::msg::String&gt;::SharedPtr publisher_;</a:t>
             </a:r>
-            <a:br/>
-            <a:r>
-              <a:t>  rclcpp::TimerBase::SharedPtr timer_;</a:t>
-            </a:r>
-            <a:br/>
-            <a:r>
-              <a:t>};</a:t>
-            </a:r>
-            <a:br/>
-            <a:br/>
-            <a:r>
-              <a:t>int main(int argc, char * argv[])</a:t>
-            </a:r>
-            <a:br/>
-            <a:r>
-              <a:t>{</a:t>
-            </a:r>
-            <a:br/>
-            <a:r>
-              <a:t>  rclcpp::init(argc, argv);</a:t>
-            </a:r>
           </a:p>
         </p:txBody>
       </p:sp>
@@ -9750,7 +9769,7 @@
         </p:nvSpPr>
         <p:spPr>
           <a:xfrm>
-            <a:off x="749808" y="6199632"/>
+            <a:off x="749808" y="6181344"/>
             <a:ext cx="10789920" cy="201168"/>
           </a:xfrm>
           <a:prstGeom prst="rect">
@@ -10021,8 +10040,8 @@
         </p:nvSpPr>
         <p:spPr>
           <a:xfrm>
-            <a:off x="658368" y="1682496"/>
-            <a:ext cx="10972800" cy="347472"/>
+            <a:off x="658368" y="1627632"/>
+            <a:ext cx="10972800" cy="256032"/>
           </a:xfrm>
           <a:prstGeom prst="rect">
             <a:avLst/>
@@ -10039,7 +10058,7 @@
               <a:spcAft>
                 <a:spcPts val="0"/>
               </a:spcAft>
-              <a:defRPr sz="1700" b="1">
+              <a:defRPr sz="1500" b="1">
                 <a:solidFill>
                   <a:srgbClr val="122C4E"/>
                 </a:solidFill>
@@ -10060,8 +10079,8 @@
         </p:nvSpPr>
         <p:spPr>
           <a:xfrm>
-            <a:off x="658368" y="2103120"/>
-            <a:ext cx="10972800" cy="493776"/>
+            <a:off x="658368" y="1956816"/>
+            <a:ext cx="10972800" cy="603504"/>
           </a:xfrm>
           <a:prstGeom prst="rect">
             <a:avLst/>
@@ -10105,7 +10124,11 @@
               </a:defRPr>
             </a:pPr>
             <a:r>
-              <a:t>파일 생성/열기: mkdir -p ~/agv_ws/src/agv_cpp_examples/src    &amp;&amp;    nano ~/agv_ws/src/agv_cpp_examples/src/status_publisher.cpp</a:t>
+              <a:t>파일 생성: mkdir -p ~/agv_ws/src/agv_cpp_examples/src</a:t>
+            </a:r>
+            <a:br/>
+            <a:r>
+              <a:t>파일 열기: nano ~/agv_ws/src/agv_cpp_examples/src/status_publisher.cpp</a:t>
             </a:r>
           </a:p>
         </p:txBody>
@@ -10118,8 +10141,8 @@
         </p:nvSpPr>
         <p:spPr>
           <a:xfrm>
-            <a:off x="658368" y="2761488"/>
-            <a:ext cx="10972800" cy="3383280"/>
+            <a:off x="658368" y="2706624"/>
+            <a:ext cx="10972800" cy="3364992"/>
           </a:xfrm>
           <a:prstGeom prst="rect">
             <a:avLst/>
@@ -10163,6 +10186,27 @@
               </a:defRPr>
             </a:pPr>
             <a:r>
+              <a:t>  rclcpp::TimerBase::SharedPtr timer_;</a:t>
+            </a:r>
+            <a:br/>
+            <a:r>
+              <a:t>};</a:t>
+            </a:r>
+            <a:br/>
+            <a:br/>
+            <a:r>
+              <a:t>int main(int argc, char * argv[])</a:t>
+            </a:r>
+            <a:br/>
+            <a:r>
+              <a:t>{</a:t>
+            </a:r>
+            <a:br/>
+            <a:r>
+              <a:t>  rclcpp::init(argc, argv);</a:t>
+            </a:r>
+            <a:br/>
+            <a:r>
               <a:t>  rclcpp::spin(std::make_shared&lt;StatusPublisher&gt;());</a:t>
             </a:r>
             <a:br/>
@@ -10188,7 +10232,7 @@
         </p:nvSpPr>
         <p:spPr>
           <a:xfrm>
-            <a:off x="749808" y="6199632"/>
+            <a:off x="749808" y="6181344"/>
             <a:ext cx="10789920" cy="201168"/>
           </a:xfrm>
           <a:prstGeom prst="rect">
@@ -13208,7 +13252,7 @@
         </p:nvSpPr>
         <p:spPr>
           <a:xfrm>
-            <a:off x="914400" y="1810512"/>
+            <a:off x="914400" y="1773936"/>
             <a:ext cx="3840480" cy="256032"/>
           </a:xfrm>
           <a:prstGeom prst="rect">
@@ -13247,8 +13291,8 @@
         </p:nvSpPr>
         <p:spPr>
           <a:xfrm>
-            <a:off x="914400" y="2121408"/>
-            <a:ext cx="9966960" cy="256032"/>
+            <a:off x="914400" y="2048255"/>
+            <a:ext cx="9966960" cy="475488"/>
           </a:xfrm>
           <a:prstGeom prst="rect">
             <a:avLst/>
@@ -13265,7 +13309,7 @@
               <a:spcAft>
                 <a:spcPts val="0"/>
               </a:spcAft>
-              <a:defRPr sz="1200" b="0">
+              <a:defRPr sz="1000" b="0">
                 <a:solidFill>
                   <a:srgbClr val="225B9B"/>
                 </a:solidFill>
@@ -13286,7 +13330,7 @@
         </p:nvSpPr>
         <p:spPr>
           <a:xfrm>
-            <a:off x="914400" y="2816352"/>
+            <a:off x="914400" y="2852928"/>
             <a:ext cx="3840480" cy="256032"/>
           </a:xfrm>
           <a:prstGeom prst="rect">
@@ -13326,7 +13370,7 @@
         <p:spPr>
           <a:xfrm>
             <a:off x="914400" y="3127248"/>
-            <a:ext cx="9966960" cy="256032"/>
+            <a:ext cx="9966960" cy="475488"/>
           </a:xfrm>
           <a:prstGeom prst="rect">
             <a:avLst/>
@@ -13343,7 +13387,7 @@
               <a:spcAft>
                 <a:spcPts val="0"/>
               </a:spcAft>
-              <a:defRPr sz="1200" b="0">
+              <a:defRPr sz="1000" b="0">
                 <a:solidFill>
                   <a:srgbClr val="225B9B"/>
                 </a:solidFill>
@@ -13364,7 +13408,7 @@
         </p:nvSpPr>
         <p:spPr>
           <a:xfrm>
-            <a:off x="914400" y="3822191"/>
+            <a:off x="914400" y="3931920"/>
             <a:ext cx="3840480" cy="256032"/>
           </a:xfrm>
           <a:prstGeom prst="rect">
@@ -13403,8 +13447,8 @@
         </p:nvSpPr>
         <p:spPr>
           <a:xfrm>
-            <a:off x="914400" y="4133087"/>
-            <a:ext cx="9966960" cy="256032"/>
+            <a:off x="914400" y="4206240"/>
+            <a:ext cx="9966960" cy="475488"/>
           </a:xfrm>
           <a:prstGeom prst="rect">
             <a:avLst/>
@@ -13421,7 +13465,7 @@
               <a:spcAft>
                 <a:spcPts val="0"/>
               </a:spcAft>
-              <a:defRPr sz="1200" b="0">
+              <a:defRPr sz="1000" b="0">
                 <a:solidFill>
                   <a:srgbClr val="225B9B"/>
                 </a:solidFill>
@@ -13442,7 +13486,7 @@
         </p:nvSpPr>
         <p:spPr>
           <a:xfrm>
-            <a:off x="914400" y="4828032"/>
+            <a:off x="914400" y="5010912"/>
             <a:ext cx="3840480" cy="256032"/>
           </a:xfrm>
           <a:prstGeom prst="rect">
@@ -13481,8 +13525,8 @@
         </p:nvSpPr>
         <p:spPr>
           <a:xfrm>
-            <a:off x="914400" y="5138928"/>
-            <a:ext cx="9966960" cy="256032"/>
+            <a:off x="914400" y="5285232"/>
+            <a:ext cx="9966960" cy="475488"/>
           </a:xfrm>
           <a:prstGeom prst="rect">
             <a:avLst/>
@@ -13499,7 +13543,7 @@
               <a:spcAft>
                 <a:spcPts val="0"/>
               </a:spcAft>
-              <a:defRPr sz="1200" b="0">
+              <a:defRPr sz="1000" b="0">
                 <a:solidFill>
                   <a:srgbClr val="225B9B"/>
                 </a:solidFill>
@@ -16164,8 +16208,8 @@
         </p:nvSpPr>
         <p:spPr>
           <a:xfrm>
-            <a:off x="658368" y="1682496"/>
-            <a:ext cx="10972800" cy="347472"/>
+            <a:off x="658368" y="1627632"/>
+            <a:ext cx="10972800" cy="256032"/>
           </a:xfrm>
           <a:prstGeom prst="rect">
             <a:avLst/>
@@ -16182,7 +16226,7 @@
               <a:spcAft>
                 <a:spcPts val="0"/>
               </a:spcAft>
-              <a:defRPr sz="1700" b="1">
+              <a:defRPr sz="1500" b="1">
                 <a:solidFill>
                   <a:srgbClr val="122C4E"/>
                 </a:solidFill>
@@ -16203,8 +16247,8 @@
         </p:nvSpPr>
         <p:spPr>
           <a:xfrm>
-            <a:off x="658368" y="2103120"/>
-            <a:ext cx="10972800" cy="493776"/>
+            <a:off x="658368" y="1956816"/>
+            <a:ext cx="10972800" cy="603504"/>
           </a:xfrm>
           <a:prstGeom prst="rect">
             <a:avLst/>
@@ -16248,7 +16292,11 @@
               </a:defRPr>
             </a:pPr>
             <a:r>
-              <a:t>파일 생성/열기: mkdir -p ~/agv_ws/src/agv_control    &amp;&amp;    nano ~/agv_ws/src/agv_control/package.xml</a:t>
+              <a:t>파일 생성: mkdir -p ~/agv_ws/src/agv_control</a:t>
+            </a:r>
+            <a:br/>
+            <a:r>
+              <a:t>파일 열기: nano ~/agv_ws/src/agv_control/package.xml</a:t>
             </a:r>
           </a:p>
         </p:txBody>
@@ -16261,8 +16309,8 @@
         </p:nvSpPr>
         <p:spPr>
           <a:xfrm>
-            <a:off x="658368" y="2761488"/>
-            <a:ext cx="10972800" cy="3383280"/>
+            <a:off x="658368" y="2706624"/>
+            <a:ext cx="10972800" cy="3364992"/>
           </a:xfrm>
           <a:prstGeom prst="rect">
             <a:avLst/>
@@ -16352,14 +16400,6 @@
             <a:r>
               <a:t>  &lt;maintainer email="student@example.com"&gt;AGV student&lt;/maintainer&gt;</a:t>
             </a:r>
-            <a:br/>
-            <a:r>
-              <a:t>  &lt;license&gt;Apache-2.0&lt;/license&gt;</a:t>
-            </a:r>
-            <a:br/>
-            <a:r>
-              <a:t>  </a:t>
-            </a:r>
           </a:p>
         </p:txBody>
       </p:sp>
@@ -16371,7 +16411,7 @@
         </p:nvSpPr>
         <p:spPr>
           <a:xfrm>
-            <a:off x="749808" y="6199632"/>
+            <a:off x="749808" y="6181344"/>
             <a:ext cx="10789920" cy="201168"/>
           </a:xfrm>
           <a:prstGeom prst="rect">

--- a/blocks/A_ros2_basics/M02_workspace_package/M02_Workspace_생성과_빌드.pptx
+++ b/blocks/A_ros2_basics/M02_workspace_package/M02_Workspace_생성과_빌드.pptx
@@ -526,7 +526,7 @@
           <a:lstStyle/>
           <a:p>
             <a:r>
-              <a:t>[설명] ~/agv_ws를 만들고 Python ament_python과 C++ ament_cmake 패키지를 빌드한다.</a:t>
+              <a:t>[설명] ~/ros2_curri/agv_ws를 만들고 Python ament_python과 C++ ament_cmake 패키지를 빌드한다.</a:t>
             </a:r>
           </a:p>
           <a:p>
@@ -616,12 +616,12 @@
           <a:lstStyle/>
           <a:p>
             <a:r>
-              <a:t>[설명] ~/agv_ws/src/agv_control/package.xml의 전체 파일을 2/3 구간으로 작성한다.</a:t>
-            </a:r>
-          </a:p>
-          <a:p>
-            <a:r>
-              <a:t>[실행] nano ~/agv_ws/src/agv_control/package.xml</a:t>
+              <a:t>[설명] ~/ros2_curri/agv_ws/src/agv_control/package.xml의 전체 파일을 2/3 구간으로 작성한다.</a:t>
+            </a:r>
+          </a:p>
+          <a:p>
+            <a:r>
+              <a:t>[실행] nano ~/ros2_curri/agv_ws/src/agv_control/package.xml</a:t>
             </a:r>
           </a:p>
           <a:p>
@@ -706,12 +706,12 @@
           <a:lstStyle/>
           <a:p>
             <a:r>
-              <a:t>[설명] ~/agv_ws/src/agv_control/package.xml의 전체 파일을 3/3 구간으로 작성한다.</a:t>
-            </a:r>
-          </a:p>
-          <a:p>
-            <a:r>
-              <a:t>[실행] nano ~/agv_ws/src/agv_control/package.xml</a:t>
+              <a:t>[설명] ~/ros2_curri/agv_ws/src/agv_control/package.xml의 전체 파일을 3/3 구간으로 작성한다.</a:t>
+            </a:r>
+          </a:p>
+          <a:p>
+            <a:r>
+              <a:t>[실행] nano ~/ros2_curri/agv_ws/src/agv_control/package.xml</a:t>
             </a:r>
           </a:p>
           <a:p>
@@ -796,12 +796,12 @@
           <a:lstStyle/>
           <a:p>
             <a:r>
-              <a:t>[설명] ~/agv_ws/src/agv_control/setup.py의 전체 파일을 1/1 구간으로 작성한다.</a:t>
-            </a:r>
-          </a:p>
-          <a:p>
-            <a:r>
-              <a:t>[실행] nano ~/agv_ws/src/agv_control/setup.py</a:t>
+              <a:t>[설명] ~/ros2_curri/agv_ws/src/agv_control/setup.py의 전체 파일을 1/1 구간으로 작성한다.</a:t>
+            </a:r>
+          </a:p>
+          <a:p>
+            <a:r>
+              <a:t>[실행] nano ~/ros2_curri/agv_ws/src/agv_control/setup.py</a:t>
             </a:r>
           </a:p>
           <a:p>
@@ -886,12 +886,12 @@
           <a:lstStyle/>
           <a:p>
             <a:r>
-              <a:t>[설명] ~/agv_ws/src/agv_cpp_examples/CMakeLists.txt의 전체 파일을 1/2 구간으로 작성한다.</a:t>
-            </a:r>
-          </a:p>
-          <a:p>
-            <a:r>
-              <a:t>[실행] nano ~/agv_ws/src/agv_cpp_examples/CMakeLists.txt</a:t>
+              <a:t>[설명] ~/ros2_curri/agv_ws/src/agv_cpp_examples/CMakeLists.txt의 전체 파일을 1/2 구간으로 작성한다.</a:t>
+            </a:r>
+          </a:p>
+          <a:p>
+            <a:r>
+              <a:t>[실행] nano ~/ros2_curri/agv_ws/src/agv_cpp_examples/CMakeLists.txt</a:t>
             </a:r>
           </a:p>
           <a:p>
@@ -976,12 +976,12 @@
           <a:lstStyle/>
           <a:p>
             <a:r>
-              <a:t>[설명] ~/agv_ws/src/agv_cpp_examples/CMakeLists.txt의 전체 파일을 2/2 구간으로 작성한다.</a:t>
-            </a:r>
-          </a:p>
-          <a:p>
-            <a:r>
-              <a:t>[실행] nano ~/agv_ws/src/agv_cpp_examples/CMakeLists.txt</a:t>
+              <a:t>[설명] ~/ros2_curri/agv_ws/src/agv_cpp_examples/CMakeLists.txt의 전체 파일을 2/2 구간으로 작성한다.</a:t>
+            </a:r>
+          </a:p>
+          <a:p>
+            <a:r>
+              <a:t>[실행] nano ~/ros2_curri/agv_ws/src/agv_cpp_examples/CMakeLists.txt</a:t>
             </a:r>
           </a:p>
           <a:p>
@@ -1066,12 +1066,12 @@
           <a:lstStyle/>
           <a:p>
             <a:r>
-              <a:t>[설명] ~/agv_ws/src/agv_cpp_examples/src/status_publisher.cpp의 전체 파일을 1/4 구간으로 작성한다.</a:t>
-            </a:r>
-          </a:p>
-          <a:p>
-            <a:r>
-              <a:t>[실행] nano ~/agv_ws/src/agv_cpp_examples/src/status_publisher.cpp</a:t>
+              <a:t>[설명] ~/ros2_curri/agv_ws/src/agv_cpp_examples/src/status_publisher.cpp의 전체 파일을 1/4 구간으로 작성한다.</a:t>
+            </a:r>
+          </a:p>
+          <a:p>
+            <a:r>
+              <a:t>[실행] nano ~/ros2_curri/agv_ws/src/agv_cpp_examples/src/status_publisher.cpp</a:t>
             </a:r>
           </a:p>
           <a:p>
@@ -1156,12 +1156,12 @@
           <a:lstStyle/>
           <a:p>
             <a:r>
-              <a:t>[설명] ~/agv_ws/src/agv_cpp_examples/src/status_publisher.cpp의 전체 파일을 2/4 구간으로 작성한다.</a:t>
-            </a:r>
-          </a:p>
-          <a:p>
-            <a:r>
-              <a:t>[실행] nano ~/agv_ws/src/agv_cpp_examples/src/status_publisher.cpp</a:t>
+              <a:t>[설명] ~/ros2_curri/agv_ws/src/agv_cpp_examples/src/status_publisher.cpp의 전체 파일을 2/4 구간으로 작성한다.</a:t>
+            </a:r>
+          </a:p>
+          <a:p>
+            <a:r>
+              <a:t>[실행] nano ~/ros2_curri/agv_ws/src/agv_cpp_examples/src/status_publisher.cpp</a:t>
             </a:r>
           </a:p>
           <a:p>
@@ -1246,12 +1246,12 @@
           <a:lstStyle/>
           <a:p>
             <a:r>
-              <a:t>[설명] ~/agv_ws/src/agv_cpp_examples/src/status_publisher.cpp의 전체 파일을 3/4 구간으로 작성한다.</a:t>
-            </a:r>
-          </a:p>
-          <a:p>
-            <a:r>
-              <a:t>[실행] nano ~/agv_ws/src/agv_cpp_examples/src/status_publisher.cpp</a:t>
+              <a:t>[설명] ~/ros2_curri/agv_ws/src/agv_cpp_examples/src/status_publisher.cpp의 전체 파일을 3/4 구간으로 작성한다.</a:t>
+            </a:r>
+          </a:p>
+          <a:p>
+            <a:r>
+              <a:t>[실행] nano ~/ros2_curri/agv_ws/src/agv_cpp_examples/src/status_publisher.cpp</a:t>
             </a:r>
           </a:p>
           <a:p>
@@ -1336,12 +1336,12 @@
           <a:lstStyle/>
           <a:p>
             <a:r>
-              <a:t>[설명] ~/agv_ws/src/agv_cpp_examples/src/status_publisher.cpp의 전체 파일을 4/4 구간으로 작성한다.</a:t>
-            </a:r>
-          </a:p>
-          <a:p>
-            <a:r>
-              <a:t>[실행] nano ~/agv_ws/src/agv_cpp_examples/src/status_publisher.cpp</a:t>
+              <a:t>[설명] ~/ros2_curri/agv_ws/src/agv_cpp_examples/src/status_publisher.cpp의 전체 파일을 4/4 구간으로 작성한다.</a:t>
+            </a:r>
+          </a:p>
+          <a:p>
+            <a:r>
+              <a:t>[실행] nano ~/ros2_curri/agv_ws/src/agv_cpp_examples/src/status_publisher.cpp</a:t>
             </a:r>
           </a:p>
           <a:p>
@@ -1431,7 +1431,7 @@
           </a:p>
           <a:p>
             <a:r>
-              <a:t>[실행] cd ~/agv_ws</a:t>
+              <a:t>[실행] cd ~/ros2_curri/agv_ws</a:t>
             </a:r>
           </a:p>
           <a:p>
@@ -2181,7 +2181,7 @@
           </a:p>
           <a:p>
             <a:r>
-              <a:t>[실행] pwd; source /opt/ros/jazzy/setup.bash; source ~/agv_ws/install/setup.bash</a:t>
+              <a:t>[실행] pwd; source /opt/ros/jazzy/setup.bash; source ~/ros2_curri/agv_ws/install/setup.bash</a:t>
             </a:r>
           </a:p>
           <a:p>
@@ -2266,7 +2266,7 @@
           <a:lstStyle/>
           <a:p>
             <a:r>
-              <a:t>[설명] ~/agv_ws를 만들고 Python ament_python과 C++ ament_cmake 패키지를 빌드한다.</a:t>
+              <a:t>[설명] ~/ros2_curri/agv_ws를 만들고 Python ament_python과 C++ ament_cmake 패키지를 빌드한다.</a:t>
             </a:r>
           </a:p>
           <a:p>
@@ -2541,12 +2541,12 @@
           </a:p>
           <a:p>
             <a:r>
-              <a:t>[실행] mkdir -p ~/agv_ws/src</a:t>
-            </a:r>
-          </a:p>
-          <a:p>
-            <a:r>
-              <a:t>cd ~/agv_ws</a:t>
+              <a:t>[실행] mkdir -p ~/ros2_curri/agv_ws/src</a:t>
+            </a:r>
+          </a:p>
+          <a:p>
+            <a:r>
+              <a:t>cd ~/ros2_curri/agv_ws</a:t>
             </a:r>
           </a:p>
           <a:p>
@@ -2646,7 +2646,7 @@
           </a:p>
           <a:p>
             <a:r>
-              <a:t>source ~/agv_ws/install/setup.bash</a:t>
+              <a:t>source ~/ros2_curri/agv_ws/install/setup.bash</a:t>
             </a:r>
           </a:p>
           <a:p>
@@ -2736,12 +2736,12 @@
           <a:lstStyle/>
           <a:p>
             <a:r>
-              <a:t>[설명] ~/agv_ws/src/agv_control/package.xml의 전체 파일을 1/3 구간으로 작성한다.</a:t>
-            </a:r>
-          </a:p>
-          <a:p>
-            <a:r>
-              <a:t>[실행] nano ~/agv_ws/src/agv_control/package.xml</a:t>
+              <a:t>[설명] ~/ros2_curri/agv_ws/src/agv_control/package.xml의 전체 파일을 1/3 구간으로 작성한다.</a:t>
+            </a:r>
+          </a:p>
+          <a:p>
+            <a:r>
+              <a:t>[실행] nano ~/ros2_curri/agv_ws/src/agv_control/package.xml</a:t>
             </a:r>
           </a:p>
           <a:p>
@@ -6168,7 +6168,7 @@
               </a:defRPr>
             </a:pPr>
             <a:r>
-              <a:t>~/agv_ws/src/agv_control/package.xml</a:t>
+              <a:t>~/ros2_curri/agv_ws/src/agv_control/package.xml</a:t>
             </a:r>
           </a:p>
         </p:txBody>
@@ -6304,7 +6304,7 @@
               </a:defRPr>
             </a:pPr>
             <a:r>
-              <a:t>현재 단계 4/6    |    현재 폴더 ~/agv_ws    |    현재 터미널</a:t>
+              <a:t>현재 단계 4/6    |    현재 폴더 ~/ros2_curri/agv_ws    |    현재 터미널</a:t>
             </a:r>
           </a:p>
         </p:txBody>
@@ -6401,11 +6401,11 @@
               </a:defRPr>
             </a:pPr>
             <a:r>
-              <a:t>파일 생성: mkdir -p ~/agv_ws/src/agv_control</a:t>
+              <a:t>파일 생성: mkdir -p ~/ros2_curri/agv_ws/src/agv_control</a:t>
             </a:r>
             <a:br/>
             <a:r>
-              <a:t>파일 열기: nano ~/agv_ws/src/agv_control/package.xml</a:t>
+              <a:t>파일 열기: nano ~/ros2_curri/agv_ws/src/agv_control/package.xml</a:t>
             </a:r>
           </a:p>
         </p:txBody>
@@ -6642,7 +6642,7 @@
               </a:defRPr>
             </a:pPr>
             <a:r>
-              <a:t>~/agv_ws/src/agv_control/package.xml</a:t>
+              <a:t>~/ros2_curri/agv_ws/src/agv_control/package.xml</a:t>
             </a:r>
           </a:p>
         </p:txBody>
@@ -6778,7 +6778,7 @@
               </a:defRPr>
             </a:pPr>
             <a:r>
-              <a:t>현재 단계 5/6    |    현재 폴더 ~/agv_ws    |    현재 터미널</a:t>
+              <a:t>현재 단계 5/6    |    현재 폴더 ~/ros2_curri/agv_ws    |    현재 터미널</a:t>
             </a:r>
           </a:p>
         </p:txBody>
@@ -6875,11 +6875,11 @@
               </a:defRPr>
             </a:pPr>
             <a:r>
-              <a:t>파일 생성: mkdir -p ~/agv_ws/src/agv_control</a:t>
+              <a:t>파일 생성: mkdir -p ~/ros2_curri/agv_ws/src/agv_control</a:t>
             </a:r>
             <a:br/>
             <a:r>
-              <a:t>파일 열기: nano ~/agv_ws/src/agv_control/package.xml</a:t>
+              <a:t>파일 열기: nano ~/ros2_curri/agv_ws/src/agv_control/package.xml</a:t>
             </a:r>
           </a:p>
         </p:txBody>
@@ -7101,7 +7101,7 @@
               </a:defRPr>
             </a:pPr>
             <a:r>
-              <a:t>~/agv_ws/src/agv_control/setup.py</a:t>
+              <a:t>~/ros2_curri/agv_ws/src/agv_control/setup.py</a:t>
             </a:r>
           </a:p>
         </p:txBody>
@@ -7237,7 +7237,7 @@
               </a:defRPr>
             </a:pPr>
             <a:r>
-              <a:t>현재 단계 6/7    |    현재 폴더 ~/agv_ws    |    현재 터미널</a:t>
+              <a:t>현재 단계 6/7    |    현재 폴더 ~/ros2_curri/agv_ws    |    현재 터미널</a:t>
             </a:r>
           </a:p>
         </p:txBody>
@@ -7334,11 +7334,11 @@
               </a:defRPr>
             </a:pPr>
             <a:r>
-              <a:t>파일 생성: mkdir -p ~/agv_ws/src/agv_control</a:t>
+              <a:t>파일 생성: mkdir -p ~/ros2_curri/agv_ws/src/agv_control</a:t>
             </a:r>
             <a:br/>
             <a:r>
-              <a:t>파일 열기: nano ~/agv_ws/src/agv_control/setup.py</a:t>
+              <a:t>파일 열기: nano ~/ros2_curri/agv_ws/src/agv_control/setup.py</a:t>
             </a:r>
           </a:p>
         </p:txBody>
@@ -7575,7 +7575,7 @@
               </a:defRPr>
             </a:pPr>
             <a:r>
-              <a:t>~/agv_ws/src/agv_cpp_examples/CMakeLists.txt</a:t>
+              <a:t>~/ros2_curri/agv_ws/src/agv_cpp_examples/CMakeLists.txt</a:t>
             </a:r>
           </a:p>
         </p:txBody>
@@ -7711,7 +7711,7 @@
               </a:defRPr>
             </a:pPr>
             <a:r>
-              <a:t>현재 단계 7/9    |    현재 폴더 ~/agv_ws    |    현재 터미널</a:t>
+              <a:t>현재 단계 7/9    |    현재 폴더 ~/ros2_curri/agv_ws    |    현재 터미널</a:t>
             </a:r>
           </a:p>
         </p:txBody>
@@ -7808,11 +7808,11 @@
               </a:defRPr>
             </a:pPr>
             <a:r>
-              <a:t>파일 생성: mkdir -p ~/agv_ws/src/agv_cpp_examples</a:t>
+              <a:t>파일 생성: mkdir -p ~/ros2_curri/agv_ws/src/agv_cpp_examples</a:t>
             </a:r>
             <a:br/>
             <a:r>
-              <a:t>파일 열기: nano ~/agv_ws/src/agv_cpp_examples/CMakeLists.txt</a:t>
+              <a:t>파일 열기: nano ~/ros2_curri/agv_ws/src/agv_cpp_examples/CMakeLists.txt</a:t>
             </a:r>
           </a:p>
         </p:txBody>
@@ -8040,7 +8040,7 @@
               </a:defRPr>
             </a:pPr>
             <a:r>
-              <a:t>~/agv_ws/src/agv_cpp_examples/CMakeLists.txt</a:t>
+              <a:t>~/ros2_curri/agv_ws/src/agv_cpp_examples/CMakeLists.txt</a:t>
             </a:r>
           </a:p>
         </p:txBody>
@@ -8176,7 +8176,7 @@
               </a:defRPr>
             </a:pPr>
             <a:r>
-              <a:t>현재 단계 8/9    |    현재 폴더 ~/agv_ws    |    현재 터미널</a:t>
+              <a:t>현재 단계 8/9    |    현재 폴더 ~/ros2_curri/agv_ws    |    현재 터미널</a:t>
             </a:r>
           </a:p>
         </p:txBody>
@@ -8273,11 +8273,11 @@
               </a:defRPr>
             </a:pPr>
             <a:r>
-              <a:t>파일 생성: mkdir -p ~/agv_ws/src/agv_cpp_examples</a:t>
+              <a:t>파일 생성: mkdir -p ~/ros2_curri/agv_ws/src/agv_cpp_examples</a:t>
             </a:r>
             <a:br/>
             <a:r>
-              <a:t>파일 열기: nano ~/agv_ws/src/agv_cpp_examples/CMakeLists.txt</a:t>
+              <a:t>파일 열기: nano ~/ros2_curri/agv_ws/src/agv_cpp_examples/CMakeLists.txt</a:t>
             </a:r>
           </a:p>
         </p:txBody>
@@ -8487,7 +8487,7 @@
               </a:defRPr>
             </a:pPr>
             <a:r>
-              <a:t>~/agv_ws/src/agv_cpp_examples/src/status_publisher.cpp</a:t>
+              <a:t>~/ros2_curri/agv_ws/src/agv_cpp_examples/src/status_publisher.cpp</a:t>
             </a:r>
           </a:p>
         </p:txBody>
@@ -8623,7 +8623,7 @@
               </a:defRPr>
             </a:pPr>
             <a:r>
-              <a:t>현재 단계 9/13    |    현재 폴더 ~/agv_ws    |    현재 터미널</a:t>
+              <a:t>현재 단계 9/13    |    현재 폴더 ~/ros2_curri/agv_ws    |    현재 터미널</a:t>
             </a:r>
           </a:p>
         </p:txBody>
@@ -8720,11 +8720,11 @@
               </a:defRPr>
             </a:pPr>
             <a:r>
-              <a:t>파일 생성: mkdir -p ~/agv_ws/src/agv_cpp_examples/src</a:t>
+              <a:t>파일 생성: mkdir -p ~/ros2_curri/agv_ws/src/agv_cpp_examples/src</a:t>
             </a:r>
             <a:br/>
             <a:r>
-              <a:t>파일 열기: nano ~/agv_ws/src/agv_cpp_examples/src/status_publisher.cpp</a:t>
+              <a:t>파일 열기: nano ~/ros2_curri/agv_ws/src/agv_cpp_examples/src/status_publisher.cpp</a:t>
             </a:r>
           </a:p>
         </p:txBody>
@@ -8952,7 +8952,7 @@
               </a:defRPr>
             </a:pPr>
             <a:r>
-              <a:t>~/agv_ws/src/agv_cpp_examples/src/status_publisher.cpp</a:t>
+              <a:t>~/ros2_curri/agv_ws/src/agv_cpp_examples/src/status_publisher.cpp</a:t>
             </a:r>
           </a:p>
         </p:txBody>
@@ -9088,7 +9088,7 @@
               </a:defRPr>
             </a:pPr>
             <a:r>
-              <a:t>현재 단계 10/13    |    현재 폴더 ~/agv_ws    |    현재 터미널</a:t>
+              <a:t>현재 단계 10/13    |    현재 폴더 ~/ros2_curri/agv_ws    |    현재 터미널</a:t>
             </a:r>
           </a:p>
         </p:txBody>
@@ -9185,11 +9185,11 @@
               </a:defRPr>
             </a:pPr>
             <a:r>
-              <a:t>파일 생성: mkdir -p ~/agv_ws/src/agv_cpp_examples/src</a:t>
+              <a:t>파일 생성: mkdir -p ~/ros2_curri/agv_ws/src/agv_cpp_examples/src</a:t>
             </a:r>
             <a:br/>
             <a:r>
-              <a:t>파일 열기: nano ~/agv_ws/src/agv_cpp_examples/src/status_publisher.cpp</a:t>
+              <a:t>파일 열기: nano ~/ros2_curri/agv_ws/src/agv_cpp_examples/src/status_publisher.cpp</a:t>
             </a:r>
           </a:p>
         </p:txBody>
@@ -9423,7 +9423,7 @@
               </a:defRPr>
             </a:pPr>
             <a:r>
-              <a:t>~/agv_ws/src/agv_cpp_examples/src/status_publisher.cpp</a:t>
+              <a:t>~/ros2_curri/agv_ws/src/agv_cpp_examples/src/status_publisher.cpp</a:t>
             </a:r>
           </a:p>
         </p:txBody>
@@ -9559,7 +9559,7 @@
               </a:defRPr>
             </a:pPr>
             <a:r>
-              <a:t>현재 단계 11/13    |    현재 폴더 ~/agv_ws    |    현재 터미널</a:t>
+              <a:t>현재 단계 11/13    |    현재 폴더 ~/ros2_curri/agv_ws    |    현재 터미널</a:t>
             </a:r>
           </a:p>
         </p:txBody>
@@ -9656,11 +9656,11 @@
               </a:defRPr>
             </a:pPr>
             <a:r>
-              <a:t>파일 생성: mkdir -p ~/agv_ws/src/agv_cpp_examples/src</a:t>
+              <a:t>파일 생성: mkdir -p ~/ros2_curri/agv_ws/src/agv_cpp_examples/src</a:t>
             </a:r>
             <a:br/>
             <a:r>
-              <a:t>파일 열기: nano ~/agv_ws/src/agv_cpp_examples/src/status_publisher.cpp</a:t>
+              <a:t>파일 열기: nano ~/ros2_curri/agv_ws/src/agv_cpp_examples/src/status_publisher.cpp</a:t>
             </a:r>
           </a:p>
         </p:txBody>
@@ -9891,7 +9891,7 @@
               </a:defRPr>
             </a:pPr>
             <a:r>
-              <a:t>~/agv_ws/src/agv_cpp_examples/src/status_publisher.cpp</a:t>
+              <a:t>~/ros2_curri/agv_ws/src/agv_cpp_examples/src/status_publisher.cpp</a:t>
             </a:r>
           </a:p>
         </p:txBody>
@@ -10027,7 +10027,7 @@
               </a:defRPr>
             </a:pPr>
             <a:r>
-              <a:t>현재 단계 12/13    |    현재 폴더 ~/agv_ws    |    현재 터미널</a:t>
+              <a:t>현재 단계 12/13    |    현재 폴더 ~/ros2_curri/agv_ws    |    현재 터미널</a:t>
             </a:r>
           </a:p>
         </p:txBody>
@@ -10124,11 +10124,11 @@
               </a:defRPr>
             </a:pPr>
             <a:r>
-              <a:t>파일 생성: mkdir -p ~/agv_ws/src/agv_cpp_examples/src</a:t>
+              <a:t>파일 생성: mkdir -p ~/ros2_curri/agv_ws/src/agv_cpp_examples/src</a:t>
             </a:r>
             <a:br/>
             <a:r>
-              <a:t>파일 열기: nano ~/agv_ws/src/agv_cpp_examples/src/status_publisher.cpp</a:t>
+              <a:t>파일 열기: nano ~/ros2_curri/agv_ws/src/agv_cpp_examples/src/status_publisher.cpp</a:t>
             </a:r>
           </a:p>
         </p:txBody>
@@ -10490,7 +10490,7 @@
               </a:defRPr>
             </a:pPr>
             <a:r>
-              <a:t>현재 단계 실행    |    현재 폴더 ~/agv_ws    |    현재 터미널</a:t>
+              <a:t>현재 단계 실행    |    현재 폴더 ~/ros2_curri/agv_ws    |    현재 터미널</a:t>
             </a:r>
           </a:p>
         </p:txBody>
@@ -10548,7 +10548,7 @@
               </a:defRPr>
             </a:pPr>
             <a:r>
-              <a:t>cd ~/agv_ws</a:t>
+              <a:t>cd ~/ros2_curri/agv_ws</a:t>
             </a:r>
             <a:br/>
             <a:r>
@@ -11572,7 +11572,7 @@
               </a:defRPr>
             </a:pPr>
             <a:r>
-              <a:t>현재 단계 검증    |    현재 폴더 ~/agv_ws    |    현재 터미널</a:t>
+              <a:t>현재 단계 검증    |    현재 폴더 ~/ros2_curri/agv_ws    |    현재 터미널</a:t>
             </a:r>
           </a:p>
         </p:txBody>
@@ -11979,7 +11979,7 @@
               </a:defRPr>
             </a:pPr>
             <a:r>
-              <a:t>현재 단계 오류 대응    |    현재 폴더 ~/agv_ws    |    현재 터미널</a:t>
+              <a:t>현재 단계 오류 대응    |    현재 폴더 ~/ros2_curri/agv_ws    |    현재 터미널</a:t>
             </a:r>
           </a:p>
         </p:txBody>
@@ -12102,7 +12102,7 @@
               </a:defRPr>
             </a:pPr>
             <a:r>
-              <a:t>우선 확인: ~/agv_ws에서 build했는지와 install/setup.bash source를 확인한다.</a:t>
+              <a:t>우선 확인: ~/ros2_curri/agv_ws에서 build했는지와 install/setup.bash source를 확인한다.</a:t>
             </a:r>
             <a:br/>
             <a:r>
@@ -12504,7 +12504,7 @@
               </a:defRPr>
             </a:pPr>
             <a:r>
-              <a:t>현재 단계 미니 실습    |    현재 폴더 ~/agv_ws    |    현재 터미널</a:t>
+              <a:t>현재 단계 미니 실습    |    현재 폴더 ~/ros2_curri/agv_ws    |    현재 터미널</a:t>
             </a:r>
           </a:p>
         </p:txBody>
@@ -12833,7 +12833,7 @@
               </a:defRPr>
             </a:pPr>
             <a:r>
-              <a:t>현재 단계 체크포인트    |    현재 폴더 ~/agv_ws    |    현재 터미널</a:t>
+              <a:t>현재 단계 체크포인트    |    현재 폴더 ~/ros2_curri/agv_ws    |    현재 터미널</a:t>
             </a:r>
           </a:p>
         </p:txBody>
@@ -13783,7 +13783,7 @@
               </a:defRPr>
             </a:pPr>
             <a:r>
-              <a:t>현재 단계 시작    |    현재 폴더 ~/agv_ws    |    현재 터미널</a:t>
+              <a:t>현재 단계 시작    |    현재 폴더 ~/ros2_curri/agv_ws    |    현재 터미널</a:t>
             </a:r>
           </a:p>
         </p:txBody>
@@ -13867,7 +13867,7 @@
               </a:defRPr>
             </a:pPr>
             <a:r>
-              <a:t>• 시작 상태: M01을 끝낸 터미널. ~/agv_ws가 없거나, 기존 폴더를 별도로 백업한 상태.</a:t>
+              <a:t>• 시작 상태: M01을 끝낸 터미널. ~/ros2_curri/agv_ws가 없거나, 기존 폴더를 별도로 백업한 상태.</a:t>
             </a:r>
           </a:p>
           <a:p>
@@ -13899,7 +13899,7 @@
               </a:defRPr>
             </a:pPr>
             <a:r>
-              <a:t>• 현재 폴더: ~/agv_ws</a:t>
+              <a:t>• 현재 폴더: ~/ros2_curri/agv_ws</a:t>
             </a:r>
           </a:p>
           <a:p>
@@ -13970,7 +13970,7 @@
               </a:defRPr>
             </a:pPr>
             <a:r>
-              <a:t>확인: pwd가 ~/agv_ws이고, 이전 모듈의 완료 조건을 한 문장으로 설명할 수 있으면 시작합니다.</a:t>
+              <a:t>확인: pwd가 ~/ros2_curri/agv_ws이고, 이전 모듈의 완료 조건을 한 문장으로 설명할 수 있으면 시작합니다.</a:t>
             </a:r>
           </a:p>
         </p:txBody>
@@ -14202,7 +14202,7 @@
               </a:defRPr>
             </a:pPr>
             <a:r>
-              <a:t>~/agv_ws를 만들고 Python ament_python과 C++ ament_cmake 패키지를 빌드한다.</a:t>
+              <a:t>~/ros2_curri/agv_ws를 만들고 Python ament_python과 C++ ament_cmake 패키지를 빌드한다.</a:t>
             </a:r>
           </a:p>
         </p:txBody>
@@ -15000,7 +15000,7 @@
               </a:defRPr>
             </a:pPr>
             <a:r>
-              <a:t>~/agv_ws/src/</a:t>
+              <a:t>~/ros2_curri/agv_ws/src/</a:t>
             </a:r>
             <a:br/>
             <a:r>
@@ -15287,7 +15287,7 @@
               </a:defRPr>
             </a:pPr>
             <a:r>
-              <a:t>현재 단계 1/2    |    현재 폴더 ~/agv_ws    |    현재 터미널</a:t>
+              <a:t>현재 단계 1/2    |    현재 폴더 ~/ros2_curri/agv_ws    |    현재 터미널</a:t>
             </a:r>
           </a:p>
         </p:txBody>
@@ -15423,11 +15423,11 @@
               </a:defRPr>
             </a:pPr>
             <a:r>
-              <a:t>mkdir -p ~/agv_ws/src</a:t>
+              <a:t>mkdir -p ~/ros2_curri/agv_ws/src</a:t>
             </a:r>
             <a:br/>
             <a:r>
-              <a:t>cd ~/agv_ws</a:t>
+              <a:t>cd ~/ros2_curri/agv_ws</a:t>
             </a:r>
             <a:br/>
             <a:r>
@@ -15741,7 +15741,7 @@
               </a:defRPr>
             </a:pPr>
             <a:r>
-              <a:t>현재 단계 2/2    |    현재 폴더 ~/agv_ws    |    현재 터미널</a:t>
+              <a:t>현재 단계 2/2    |    현재 폴더 ~/ros2_curri/agv_ws    |    현재 터미널</a:t>
             </a:r>
           </a:p>
         </p:txBody>
@@ -15881,7 +15881,7 @@
             </a:r>
             <a:br/>
             <a:r>
-              <a:t>source ~/agv_ws/install/setup.bash</a:t>
+              <a:t>source ~/ros2_curri/agv_ws/install/setup.bash</a:t>
             </a:r>
             <a:br/>
             <a:r>
@@ -16059,7 +16059,7 @@
               </a:defRPr>
             </a:pPr>
             <a:r>
-              <a:t>~/agv_ws/src/agv_control/package.xml</a:t>
+              <a:t>~/ros2_curri/agv_ws/src/agv_control/package.xml</a:t>
             </a:r>
           </a:p>
         </p:txBody>
@@ -16195,7 +16195,7 @@
               </a:defRPr>
             </a:pPr>
             <a:r>
-              <a:t>현재 단계 3/6    |    현재 폴더 ~/agv_ws    |    현재 터미널</a:t>
+              <a:t>현재 단계 3/6    |    현재 폴더 ~/ros2_curri/agv_ws    |    현재 터미널</a:t>
             </a:r>
           </a:p>
         </p:txBody>
@@ -16292,11 +16292,11 @@
               </a:defRPr>
             </a:pPr>
             <a:r>
-              <a:t>파일 생성: mkdir -p ~/agv_ws/src/agv_control</a:t>
+              <a:t>파일 생성: mkdir -p ~/ros2_curri/agv_ws/src/agv_control</a:t>
             </a:r>
             <a:br/>
             <a:r>
-              <a:t>파일 열기: nano ~/agv_ws/src/agv_control/package.xml</a:t>
+              <a:t>파일 열기: nano ~/ros2_curri/agv_ws/src/agv_control/package.xml</a:t>
             </a:r>
           </a:p>
         </p:txBody>

--- a/blocks/A_ros2_basics/M02_workspace_package/M02_Workspace_생성과_빌드.pptx
+++ b/blocks/A_ros2_basics/M02_workspace_package/M02_Workspace_생성과_빌드.pptx
@@ -30,6 +30,8 @@
     <p:sldId id="278" r:id="rId30"/>
     <p:sldId id="279" r:id="rId31"/>
     <p:sldId id="280" r:id="rId32"/>
+    <p:sldId id="281" r:id="rId33"/>
+    <p:sldId id="282" r:id="rId34"/>
   </p:sldIdLst>
   <p:sldSz cx="12191999" cy="6858000" type="screen4x3"/>
   <p:notesSz cx="6858000" cy="9144000"/>
@@ -616,17 +618,27 @@
           <a:lstStyle/>
           <a:p>
             <a:r>
-              <a:t>[설명] ~/ros2_curri/agv_ws/src/agv_control/package.xml의 전체 파일을 2/3 구간으로 작성한다.</a:t>
-            </a:r>
-          </a:p>
-          <a:p>
-            <a:r>
-              <a:t>[실행] nano ~/ros2_curri/agv_ws/src/agv_control/package.xml</a:t>
-            </a:r>
-          </a:p>
-          <a:p>
-            <a:r>
-              <a:t>[확인] 코드를 저장하고 다음 코드 슬라이드 또는 build 단계로 이동한다.</a:t>
+              <a:t>[설명] 기본 ROS와 내가 만든 패키지는 서로 다른 setup 파일이다.</a:t>
+            </a:r>
+          </a:p>
+          <a:p>
+            <a:r>
+              <a:t>[실행] source /opt/ros/jazzy/setup.bash</a:t>
+            </a:r>
+          </a:p>
+          <a:p>
+            <a:r>
+              <a:t>source ~/ros2_curri/agv_ws/install/setup.bash</a:t>
+            </a:r>
+          </a:p>
+          <a:p>
+            <a:r>
+              <a:t>ros2 pkg executables agv_cpp_examples</a:t>
+            </a:r>
+          </a:p>
+          <a:p>
+            <a:r>
+              <a:t>[확인] 명령 출력에서 슬라이드의 확인 항목을 찾는다.</a:t>
             </a:r>
           </a:p>
           <a:p>
@@ -636,7 +648,7 @@
           </a:p>
           <a:p>
             <a:r>
-              <a:t>[오류] 들여쓰기·XML 태그·따옴표가 슬라이드와 정확히 같은지 확인한다.</a:t>
+              <a:t>[오류] 오류가 나면 현재 폴더, source, 파일 경로를 먼저 확인한다.</a:t>
             </a:r>
           </a:p>
         </p:txBody>
@@ -706,7 +718,7 @@
           <a:lstStyle/>
           <a:p>
             <a:r>
-              <a:t>[설명] ~/ros2_curri/agv_ws/src/agv_control/package.xml의 전체 파일을 3/3 구간으로 작성한다.</a:t>
+              <a:t>[설명] ~/ros2_curri/agv_ws/src/agv_control/package.xml의 전체 파일을 1/3 구간으로 작성한다.</a:t>
             </a:r>
           </a:p>
           <a:p>
@@ -796,12 +808,12 @@
           <a:lstStyle/>
           <a:p>
             <a:r>
-              <a:t>[설명] ~/ros2_curri/agv_ws/src/agv_control/setup.py의 전체 파일을 1/1 구간으로 작성한다.</a:t>
-            </a:r>
-          </a:p>
-          <a:p>
-            <a:r>
-              <a:t>[실행] nano ~/ros2_curri/agv_ws/src/agv_control/setup.py</a:t>
+              <a:t>[설명] ~/ros2_curri/agv_ws/src/agv_control/package.xml의 전체 파일을 2/3 구간으로 작성한다.</a:t>
+            </a:r>
+          </a:p>
+          <a:p>
+            <a:r>
+              <a:t>[실행] nano ~/ros2_curri/agv_ws/src/agv_control/package.xml</a:t>
             </a:r>
           </a:p>
           <a:p>
@@ -886,12 +898,12 @@
           <a:lstStyle/>
           <a:p>
             <a:r>
-              <a:t>[설명] ~/ros2_curri/agv_ws/src/agv_cpp_examples/CMakeLists.txt의 전체 파일을 1/2 구간으로 작성한다.</a:t>
-            </a:r>
-          </a:p>
-          <a:p>
-            <a:r>
-              <a:t>[실행] nano ~/ros2_curri/agv_ws/src/agv_cpp_examples/CMakeLists.txt</a:t>
+              <a:t>[설명] ~/ros2_curri/agv_ws/src/agv_control/package.xml의 전체 파일을 3/3 구간으로 작성한다.</a:t>
+            </a:r>
+          </a:p>
+          <a:p>
+            <a:r>
+              <a:t>[실행] nano ~/ros2_curri/agv_ws/src/agv_control/package.xml</a:t>
             </a:r>
           </a:p>
           <a:p>
@@ -976,12 +988,12 @@
           <a:lstStyle/>
           <a:p>
             <a:r>
-              <a:t>[설명] ~/ros2_curri/agv_ws/src/agv_cpp_examples/CMakeLists.txt의 전체 파일을 2/2 구간으로 작성한다.</a:t>
-            </a:r>
-          </a:p>
-          <a:p>
-            <a:r>
-              <a:t>[실행] nano ~/ros2_curri/agv_ws/src/agv_cpp_examples/CMakeLists.txt</a:t>
+              <a:t>[설명] ~/ros2_curri/agv_ws/src/agv_control/setup.py의 전체 파일을 1/1 구간으로 작성한다.</a:t>
+            </a:r>
+          </a:p>
+          <a:p>
+            <a:r>
+              <a:t>[실행] nano ~/ros2_curri/agv_ws/src/agv_control/setup.py</a:t>
             </a:r>
           </a:p>
           <a:p>
@@ -1066,12 +1078,12 @@
           <a:lstStyle/>
           <a:p>
             <a:r>
-              <a:t>[설명] ~/ros2_curri/agv_ws/src/agv_cpp_examples/src/status_publisher.cpp의 전체 파일을 1/4 구간으로 작성한다.</a:t>
-            </a:r>
-          </a:p>
-          <a:p>
-            <a:r>
-              <a:t>[실행] nano ~/ros2_curri/agv_ws/src/agv_cpp_examples/src/status_publisher.cpp</a:t>
+              <a:t>[설명] ~/ros2_curri/agv_ws/src/agv_cpp_examples/CMakeLists.txt의 전체 파일을 1/2 구간으로 작성한다.</a:t>
+            </a:r>
+          </a:p>
+          <a:p>
+            <a:r>
+              <a:t>[실행] nano ~/ros2_curri/agv_ws/src/agv_cpp_examples/CMakeLists.txt</a:t>
             </a:r>
           </a:p>
           <a:p>
@@ -1156,12 +1168,12 @@
           <a:lstStyle/>
           <a:p>
             <a:r>
-              <a:t>[설명] ~/ros2_curri/agv_ws/src/agv_cpp_examples/src/status_publisher.cpp의 전체 파일을 2/4 구간으로 작성한다.</a:t>
-            </a:r>
-          </a:p>
-          <a:p>
-            <a:r>
-              <a:t>[실행] nano ~/ros2_curri/agv_ws/src/agv_cpp_examples/src/status_publisher.cpp</a:t>
+              <a:t>[설명] ~/ros2_curri/agv_ws/src/agv_cpp_examples/CMakeLists.txt의 전체 파일을 2/2 구간으로 작성한다.</a:t>
+            </a:r>
+          </a:p>
+          <a:p>
+            <a:r>
+              <a:t>[실행] nano ~/ros2_curri/agv_ws/src/agv_cpp_examples/CMakeLists.txt</a:t>
             </a:r>
           </a:p>
           <a:p>
@@ -1246,7 +1258,7 @@
           <a:lstStyle/>
           <a:p>
             <a:r>
-              <a:t>[설명] ~/ros2_curri/agv_ws/src/agv_cpp_examples/src/status_publisher.cpp의 전체 파일을 3/4 구간으로 작성한다.</a:t>
+              <a:t>[설명] ~/ros2_curri/agv_ws/src/agv_cpp_examples/src/status_publisher.cpp의 전체 파일을 1/4 구간으로 작성한다.</a:t>
             </a:r>
           </a:p>
           <a:p>
@@ -1336,7 +1348,7 @@
           <a:lstStyle/>
           <a:p>
             <a:r>
-              <a:t>[설명] ~/ros2_curri/agv_ws/src/agv_cpp_examples/src/status_publisher.cpp의 전체 파일을 4/4 구간으로 작성한다.</a:t>
+              <a:t>[설명] ~/ros2_curri/agv_ws/src/agv_cpp_examples/src/status_publisher.cpp의 전체 파일을 2/4 구간으로 작성한다.</a:t>
             </a:r>
           </a:p>
           <a:p>
@@ -1426,37 +1438,17 @@
           <a:lstStyle/>
           <a:p>
             <a:r>
-              <a:t>[설명] build/source/run을 생략 없이 실행한다.</a:t>
-            </a:r>
-          </a:p>
-          <a:p>
-            <a:r>
-              <a:t>[실행] cd ~/ros2_curri/agv_ws</a:t>
-            </a:r>
-          </a:p>
-          <a:p>
-            <a:r>
-              <a:t>source /opt/ros/jazzy/setup.bash</a:t>
-            </a:r>
-          </a:p>
-          <a:p>
-            <a:r>
-              <a:t>colcon build --symlink-install</a:t>
-            </a:r>
-          </a:p>
-          <a:p>
-            <a:r>
-              <a:t>source install/setup.bash</a:t>
-            </a:r>
-          </a:p>
-          <a:p>
-            <a:r>
-              <a:t>ros2 run agv_cpp_examples status_publisher</a:t>
-            </a:r>
-          </a:p>
-          <a:p>
-            <a:r>
-              <a:t>[확인] build/install/log와 두 언어의 실행 파일을 source 뒤에 확인한다.</a:t>
+              <a:t>[설명] ~/ros2_curri/agv_ws/src/agv_cpp_examples/src/status_publisher.cpp의 전체 파일을 3/4 구간으로 작성한다.</a:t>
+            </a:r>
+          </a:p>
+          <a:p>
+            <a:r>
+              <a:t>[실행] nano ~/ros2_curri/agv_ws/src/agv_cpp_examples/src/status_publisher.cpp</a:t>
+            </a:r>
+          </a:p>
+          <a:p>
+            <a:r>
+              <a:t>[확인] 코드를 저장하고 다음 코드 슬라이드 또는 build 단계로 이동한다.</a:t>
             </a:r>
           </a:p>
           <a:p>
@@ -1466,7 +1458,7 @@
           </a:p>
           <a:p>
             <a:r>
-              <a:t>[오류] 오류가 나면 현재 폴더, source, 파일 경로를 먼저 확인한다.</a:t>
+              <a:t>[오류] 들여쓰기·XML 태그·따옴표가 슬라이드와 정확히 같은지 확인한다.</a:t>
             </a:r>
           </a:p>
         </p:txBody>
@@ -1626,17 +1618,17 @@
           <a:lstStyle/>
           <a:p>
             <a:r>
-              <a:t>[설명] 실제 Ubuntu/ROS 2 환경에서 생성한 검증 화면이다.</a:t>
-            </a:r>
-          </a:p>
-          <a:p>
-            <a:r>
-              <a:t>[실행] 슬라이드의 명령 또는 파일 작성 단계를 진행한다.</a:t>
-            </a:r>
-          </a:p>
-          <a:p>
-            <a:r>
-              <a:t>[확인] 캡처의 명령과 다음 슬라이드의 검증 명령을 비교한다.</a:t>
+              <a:t>[설명] ~/ros2_curri/agv_ws/src/agv_cpp_examples/src/status_publisher.cpp의 전체 파일을 4/4 구간으로 작성한다.</a:t>
+            </a:r>
+          </a:p>
+          <a:p>
+            <a:r>
+              <a:t>[실행] nano ~/ros2_curri/agv_ws/src/agv_cpp_examples/src/status_publisher.cpp</a:t>
+            </a:r>
+          </a:p>
+          <a:p>
+            <a:r>
+              <a:t>[확인] 코드를 저장하고 다음 코드 슬라이드 또는 build 단계로 이동한다.</a:t>
             </a:r>
           </a:p>
           <a:p>
@@ -1646,7 +1638,7 @@
           </a:p>
           <a:p>
             <a:r>
-              <a:t>[오류] 오류가 나면 현재 폴더, source, 파일 경로를 먼저 확인한다.</a:t>
+              <a:t>[오류] 들여쓰기·XML 태그·따옴표가 슬라이드와 정확히 같은지 확인한다.</a:t>
             </a:r>
           </a:p>
         </p:txBody>
@@ -1716,22 +1708,32 @@
           <a:lstStyle/>
           <a:p>
             <a:r>
-              <a:t>[설명] 검증 명령은 GUI 결과와 별도로 실행해 재현 가능한 완료 기준을 만든다.</a:t>
-            </a:r>
-          </a:p>
-          <a:p>
-            <a:r>
-              <a:t>[실행] pwd</a:t>
-            </a:r>
-          </a:p>
-          <a:p>
-            <a:r>
-              <a:t>find src -maxdepth 2 -name package.xml -o -name CMakeLists.txt</a:t>
-            </a:r>
-          </a:p>
-          <a:p>
-            <a:r>
-              <a:t>ros2 pkg prefix agv_cpp_examples</a:t>
+              <a:t>[설명] build/source/run을 생략 없이 실행한다.</a:t>
+            </a:r>
+          </a:p>
+          <a:p>
+            <a:r>
+              <a:t>[실행] cd ~/ros2_curri/agv_ws</a:t>
+            </a:r>
+          </a:p>
+          <a:p>
+            <a:r>
+              <a:t>source /opt/ros/jazzy/setup.bash</a:t>
+            </a:r>
+          </a:p>
+          <a:p>
+            <a:r>
+              <a:t>colcon build --symlink-install</a:t>
+            </a:r>
+          </a:p>
+          <a:p>
+            <a:r>
+              <a:t>source install/setup.bash</a:t>
+            </a:r>
+          </a:p>
+          <a:p>
+            <a:r>
+              <a:t>ros2 run agv_cpp_examples status_publisher</a:t>
             </a:r>
           </a:p>
           <a:p>
@@ -1816,7 +1818,7 @@
           <a:lstStyle/>
           <a:p>
             <a:r>
-              <a:t>[설명] 오류를 대신 해결하지 말고 증상부터 우선 확인 순서대로 교육생이 실행하게 한다.</a:t>
+              <a:t>[설명] 실제 Ubuntu/ROS 2 환경에서 생성한 검증 화면이다.</a:t>
             </a:r>
           </a:p>
           <a:p>
@@ -1826,7 +1828,7 @@
           </a:p>
           <a:p>
             <a:r>
-              <a:t>[확인] 수정 뒤 첫 검증 명령을 다시 실행한다.</a:t>
+              <a:t>[확인] ① 명령/설정  ② 정상 출력 또는 화면  ③ 다음 검증 명령으로 재확인</a:t>
             </a:r>
           </a:p>
           <a:p>
@@ -1836,7 +1838,7 @@
           </a:p>
           <a:p>
             <a:r>
-              <a:t>[오류] 슬라이드의 두 대표 오류를 먼저 사용한다.</a:t>
+              <a:t>[오류] 오류가 나면 현재 폴더, source, 파일 경로를 먼저 확인한다.</a:t>
             </a:r>
           </a:p>
         </p:txBody>
@@ -1906,17 +1908,27 @@
           <a:lstStyle/>
           <a:p>
             <a:r>
-              <a:t>[설명] 교육생이 직접 한 값만 바꿔 원인과 결과를 연결하게 한다.</a:t>
-            </a:r>
-          </a:p>
-          <a:p>
-            <a:r>
-              <a:t>[실행] 슬라이드의 명령 또는 파일 작성 단계를 진행한다.</a:t>
-            </a:r>
-          </a:p>
-          <a:p>
-            <a:r>
-              <a:t>[확인] 원래 값과 변경 값을 모두 기록한다.</a:t>
+              <a:t>[설명] 검증 명령은 GUI 결과와 별도로 실행해 재현 가능한 완료 기준을 만든다.</a:t>
+            </a:r>
+          </a:p>
+          <a:p>
+            <a:r>
+              <a:t>[실행] pwd</a:t>
+            </a:r>
+          </a:p>
+          <a:p>
+            <a:r>
+              <a:t>find src -maxdepth 2 -name package.xml -o -name CMakeLists.txt</a:t>
+            </a:r>
+          </a:p>
+          <a:p>
+            <a:r>
+              <a:t>ros2 pkg prefix agv_cpp_examples</a:t>
+            </a:r>
+          </a:p>
+          <a:p>
+            <a:r>
+              <a:t>[확인] build/install/log와 두 언어의 실행 파일을 source 뒤에 확인한다.</a:t>
             </a:r>
           </a:p>
           <a:p>
@@ -1996,7 +2008,7 @@
           <a:lstStyle/>
           <a:p>
             <a:r>
-              <a:t>[설명] 교육생이 Complete·캡처·로그를 저장했는지 확인하고 다음 모듈의 시작 상태를 읽는다.</a:t>
+              <a:t>[설명] 오류를 대신 해결하지 말고 증상부터 우선 확인 순서대로 교육생이 실행하게 한다.</a:t>
             </a:r>
           </a:p>
           <a:p>
@@ -2006,7 +2018,7 @@
           </a:p>
           <a:p>
             <a:r>
-              <a:t>[확인] M03 Python Pub/Sub 시작 조건을 말할 수 있다.</a:t>
+              <a:t>[확인] 수정 뒤 첫 검증 명령을 다시 실행한다.</a:t>
             </a:r>
           </a:p>
           <a:p>
@@ -2016,7 +2028,7 @@
           </a:p>
           <a:p>
             <a:r>
-              <a:t>[오류] 오류가 나면 현재 폴더, source, 파일 경로를 먼저 확인한다.</a:t>
+              <a:t>[오류] 슬라이드의 두 대표 오류를 먼저 사용한다.</a:t>
             </a:r>
           </a:p>
         </p:txBody>
@@ -2086,6 +2098,186 @@
           <a:lstStyle/>
           <a:p>
             <a:r>
+              <a:t>[설명] 교육생이 직접 한 값만 바꿔 원인과 결과를 연결하게 한다.</a:t>
+            </a:r>
+          </a:p>
+          <a:p>
+            <a:r>
+              <a:t>[실행] 슬라이드의 명령 또는 파일 작성 단계를 진행한다.</a:t>
+            </a:r>
+          </a:p>
+          <a:p>
+            <a:r>
+              <a:t>[확인] 원래 값과 변경 값을 모두 기록한다.</a:t>
+            </a:r>
+          </a:p>
+          <a:p>
+            <a:r>
+              <a:t>[멈춤] 교육생이 현재 체크포인트를 통과할 때까지 기다린다.</a:t>
+            </a:r>
+          </a:p>
+          <a:p>
+            <a:r>
+              <a:t>[오류] 오류가 나면 현재 폴더, source, 파일 경로를 먼저 확인한다.</a:t>
+            </a:r>
+          </a:p>
+        </p:txBody>
+      </p:sp>
+      <p:sp>
+        <p:nvSpPr>
+          <p:cNvPr id="4" name="Slide Number Placeholder 3"/>
+          <p:cNvSpPr>
+            <a:spLocks noGrp="1"/>
+          </p:cNvSpPr>
+          <p:nvPr>
+            <p:ph type="sldNum" idx="5" sz="quarter"/>
+          </p:nvPr>
+        </p:nvSpPr>
+        <p:spPr/>
+      </p:sp>
+    </p:spTree>
+  </p:cSld>
+  <p:clrMapOvr>
+    <a:masterClrMapping/>
+  </p:clrMapOvr>
+</p:notes>
+</file>
+
+<file path=ppt/notesSlides/notesSlide26.xml><?xml version="1.0" encoding="utf-8"?>
+<p:notes xmlns:a="http://schemas.openxmlformats.org/drawingml/2006/main" xmlns:p="http://schemas.openxmlformats.org/presentationml/2006/main" xmlns:r="http://schemas.openxmlformats.org/officeDocument/2006/relationships">
+  <p:cSld>
+    <p:spTree>
+      <p:nvGrpSpPr>
+        <p:cNvPr id="1" name=""/>
+        <p:cNvGrpSpPr/>
+        <p:nvPr/>
+      </p:nvGrpSpPr>
+      <p:grpSpPr>
+        <a:xfrm>
+          <a:off x="0" y="0"/>
+          <a:ext cx="0" cy="0"/>
+          <a:chOff x="0" y="0"/>
+          <a:chExt cx="0" cy="0"/>
+        </a:xfrm>
+      </p:grpSpPr>
+      <p:sp>
+        <p:nvSpPr>
+          <p:cNvPr id="2" name="Slide Image Placeholder 1"/>
+          <p:cNvSpPr>
+            <a:spLocks noGrp="1"/>
+          </p:cNvSpPr>
+          <p:nvPr>
+            <p:ph type="sldImg" idx="2"/>
+          </p:nvPr>
+        </p:nvSpPr>
+        <p:spPr/>
+      </p:sp>
+      <p:sp>
+        <p:nvSpPr>
+          <p:cNvPr id="3" name="Notes Placeholder 2"/>
+          <p:cNvSpPr>
+            <a:spLocks noGrp="1"/>
+          </p:cNvSpPr>
+          <p:nvPr>
+            <p:ph type="body" idx="3" sz="quarter"/>
+          </p:nvPr>
+        </p:nvSpPr>
+        <p:spPr/>
+        <p:txBody>
+          <a:bodyPr/>
+          <a:lstStyle/>
+          <a:p>
+            <a:r>
+              <a:t>[설명] 교육생이 Complete·캡처·로그를 저장했는지 확인하고 다음 모듈의 시작 상태를 읽는다.</a:t>
+            </a:r>
+          </a:p>
+          <a:p>
+            <a:r>
+              <a:t>[실행] 슬라이드의 명령 또는 파일 작성 단계를 진행한다.</a:t>
+            </a:r>
+          </a:p>
+          <a:p>
+            <a:r>
+              <a:t>[확인] M03 Python Pub/Sub 시작 조건을 말할 수 있다.</a:t>
+            </a:r>
+          </a:p>
+          <a:p>
+            <a:r>
+              <a:t>[멈춤] 교육생이 현재 체크포인트를 통과할 때까지 기다린다.</a:t>
+            </a:r>
+          </a:p>
+          <a:p>
+            <a:r>
+              <a:t>[오류] 오류가 나면 현재 폴더, source, 파일 경로를 먼저 확인한다.</a:t>
+            </a:r>
+          </a:p>
+        </p:txBody>
+      </p:sp>
+      <p:sp>
+        <p:nvSpPr>
+          <p:cNvPr id="4" name="Slide Number Placeholder 3"/>
+          <p:cNvSpPr>
+            <a:spLocks noGrp="1"/>
+          </p:cNvSpPr>
+          <p:nvPr>
+            <p:ph type="sldNum" idx="5" sz="quarter"/>
+          </p:nvPr>
+        </p:nvSpPr>
+        <p:spPr/>
+      </p:sp>
+    </p:spTree>
+  </p:cSld>
+  <p:clrMapOvr>
+    <a:masterClrMapping/>
+  </p:clrMapOvr>
+</p:notes>
+</file>
+
+<file path=ppt/notesSlides/notesSlide27.xml><?xml version="1.0" encoding="utf-8"?>
+<p:notes xmlns:a="http://schemas.openxmlformats.org/drawingml/2006/main" xmlns:p="http://schemas.openxmlformats.org/presentationml/2006/main" xmlns:r="http://schemas.openxmlformats.org/officeDocument/2006/relationships">
+  <p:cSld>
+    <p:spTree>
+      <p:nvGrpSpPr>
+        <p:cNvPr id="1" name=""/>
+        <p:cNvGrpSpPr/>
+        <p:nvPr/>
+      </p:nvGrpSpPr>
+      <p:grpSpPr>
+        <a:xfrm>
+          <a:off x="0" y="0"/>
+          <a:ext cx="0" cy="0"/>
+          <a:chOff x="0" y="0"/>
+          <a:chExt cx="0" cy="0"/>
+        </a:xfrm>
+      </p:grpSpPr>
+      <p:sp>
+        <p:nvSpPr>
+          <p:cNvPr id="2" name="Slide Image Placeholder 1"/>
+          <p:cNvSpPr>
+            <a:spLocks noGrp="1"/>
+          </p:cNvSpPr>
+          <p:nvPr>
+            <p:ph type="sldImg" idx="2"/>
+          </p:nvPr>
+        </p:nvSpPr>
+        <p:spPr/>
+      </p:sp>
+      <p:sp>
+        <p:nvSpPr>
+          <p:cNvPr id="3" name="Notes Placeholder 2"/>
+          <p:cNvSpPr>
+            <a:spLocks noGrp="1"/>
+          </p:cNvSpPr>
+          <p:nvPr>
+            <p:ph type="body" idx="3" sz="quarter"/>
+          </p:nvPr>
+        </p:nvSpPr>
+        <p:spPr/>
+        <p:txBody>
+          <a:bodyPr/>
+          <a:lstStyle/>
+          <a:p>
+            <a:r>
               <a:t>[설명] 공식 문서는 버전 차이와 확장 학습을 확인할 때 사용한다.</a:t>
             </a:r>
           </a:p>
@@ -2536,27 +2728,17 @@
           <a:lstStyle/>
           <a:p>
             <a:r>
-              <a:t>[설명] colcon은 src 아래 패키지를 찾아 build/install/log를 만든다.</a:t>
-            </a:r>
-          </a:p>
-          <a:p>
-            <a:r>
-              <a:t>[실행] mkdir -p ~/ros2_curri/agv_ws/src</a:t>
-            </a:r>
-          </a:p>
-          <a:p>
-            <a:r>
-              <a:t>cd ~/ros2_curri/agv_ws</a:t>
-            </a:r>
-          </a:p>
-          <a:p>
-            <a:r>
-              <a:t>colcon build --symlink-install</a:t>
-            </a:r>
-          </a:p>
-          <a:p>
-            <a:r>
-              <a:t>[확인] 명령 출력에서 슬라이드의 확인 항목을 찾는다.</a:t>
+              <a:t>[설명] 파일을 코드 문법보다 먼저 역할·사용법·확인 화면으로 설명한다.</a:t>
+            </a:r>
+          </a:p>
+          <a:p>
+            <a:r>
+              <a:t>[실행] 슬라이드의 명령 또는 파일 작성 단계를 진행한다.</a:t>
+            </a:r>
+          </a:p>
+          <a:p>
+            <a:r>
+              <a:t>[확인] 교육생이 각 파일의 산출물과 확인 위치를 말할 수 있다.</a:t>
             </a:r>
           </a:p>
           <a:p>
@@ -2636,27 +2818,17 @@
           <a:lstStyle/>
           <a:p>
             <a:r>
-              <a:t>[설명] 기본 ROS와 내가 만든 패키지는 서로 다른 setup 파일이다.</a:t>
-            </a:r>
-          </a:p>
-          <a:p>
-            <a:r>
-              <a:t>[실행] source /opt/ros/jazzy/setup.bash</a:t>
-            </a:r>
-          </a:p>
-          <a:p>
-            <a:r>
-              <a:t>source ~/ros2_curri/agv_ws/install/setup.bash</a:t>
-            </a:r>
-          </a:p>
-          <a:p>
-            <a:r>
-              <a:t>ros2 pkg executables agv_cpp_examples</a:t>
-            </a:r>
-          </a:p>
-          <a:p>
-            <a:r>
-              <a:t>[확인] 명령 출력에서 슬라이드의 확인 항목을 찾는다.</a:t>
+              <a:t>[설명] 파일을 코드 문법보다 먼저 역할·사용법·확인 화면으로 설명한다.</a:t>
+            </a:r>
+          </a:p>
+          <a:p>
+            <a:r>
+              <a:t>[실행] 슬라이드의 명령 또는 파일 작성 단계를 진행한다.</a:t>
+            </a:r>
+          </a:p>
+          <a:p>
+            <a:r>
+              <a:t>[확인] 교육생이 각 파일의 산출물과 확인 위치를 말할 수 있다.</a:t>
             </a:r>
           </a:p>
           <a:p>
@@ -2736,17 +2908,27 @@
           <a:lstStyle/>
           <a:p>
             <a:r>
-              <a:t>[설명] ~/ros2_curri/agv_ws/src/agv_control/package.xml의 전체 파일을 1/3 구간으로 작성한다.</a:t>
-            </a:r>
-          </a:p>
-          <a:p>
-            <a:r>
-              <a:t>[실행] nano ~/ros2_curri/agv_ws/src/agv_control/package.xml</a:t>
-            </a:r>
-          </a:p>
-          <a:p>
-            <a:r>
-              <a:t>[확인] 코드를 저장하고 다음 코드 슬라이드 또는 build 단계로 이동한다.</a:t>
+              <a:t>[설명] colcon은 src 아래 패키지를 찾아 build/install/log를 만든다.</a:t>
+            </a:r>
+          </a:p>
+          <a:p>
+            <a:r>
+              <a:t>[실행] mkdir -p ~/ros2_curri/agv_ws/src</a:t>
+            </a:r>
+          </a:p>
+          <a:p>
+            <a:r>
+              <a:t>cd ~/ros2_curri/agv_ws</a:t>
+            </a:r>
+          </a:p>
+          <a:p>
+            <a:r>
+              <a:t>colcon build --symlink-install</a:t>
+            </a:r>
+          </a:p>
+          <a:p>
+            <a:r>
+              <a:t>[확인] 명령 출력에서 슬라이드의 확인 항목을 찾는다.</a:t>
             </a:r>
           </a:p>
           <a:p>
@@ -2756,7 +2938,7 @@
           </a:p>
           <a:p>
             <a:r>
-              <a:t>[오류] 들여쓰기·XML 태그·따옴표가 슬라이드와 정확히 같은지 확인한다.</a:t>
+              <a:t>[오류] 오류가 나면 현재 폴더, source, 파일 경로를 먼저 확인한다.</a:t>
             </a:r>
           </a:p>
         </p:txBody>
@@ -6129,7 +6311,7 @@
               </a:defRPr>
             </a:pPr>
             <a:r>
-              <a:t>파일을 계속 작성하고 저장한다 (2/3)</a:t>
+              <a:t>새 터미널에서 overlay를 source한다</a:t>
             </a:r>
           </a:p>
         </p:txBody>
@@ -6168,7 +6350,7 @@
               </a:defRPr>
             </a:pPr>
             <a:r>
-              <a:t>~/ros2_curri/agv_ws/src/agv_control/package.xml</a:t>
+              <a:t>한 장에는 한 행동만 수행합니다.</a:t>
             </a:r>
           </a:p>
         </p:txBody>
@@ -6304,7 +6486,7 @@
               </a:defRPr>
             </a:pPr>
             <a:r>
-              <a:t>현재 단계 4/6    |    현재 폴더 ~/ros2_curri/agv_ws    |    현재 터미널</a:t>
+              <a:t>현재 단계 2/2    |    현재 폴더 ~/ros2_curri/agv_ws    |    현재 터미널</a:t>
             </a:r>
           </a:p>
         </p:txBody>
@@ -6317,8 +6499,8 @@
         </p:nvSpPr>
         <p:spPr>
           <a:xfrm>
-            <a:off x="658368" y="1627632"/>
-            <a:ext cx="10972800" cy="256032"/>
+            <a:off x="676656" y="1764792"/>
+            <a:ext cx="1828800" cy="347472"/>
           </a:xfrm>
           <a:prstGeom prst="rect">
             <a:avLst/>
@@ -6335,7 +6517,46 @@
               <a:spcAft>
                 <a:spcPts val="0"/>
               </a:spcAft>
-              <a:defRPr sz="1500" b="1">
+              <a:defRPr sz="1800" b="1">
+                <a:solidFill>
+                  <a:srgbClr val="225B9B"/>
+                </a:solidFill>
+                <a:latin typeface="Noto Sans CJK KR"/>
+              </a:defRPr>
+            </a:pPr>
+            <a:r>
+              <a:t>왜 하는가</a:t>
+            </a:r>
+          </a:p>
+        </p:txBody>
+      </p:sp>
+      <p:sp>
+        <p:nvSpPr>
+          <p:cNvPr id="8" name="TextBox 7"/>
+          <p:cNvSpPr txBox="1"/>
+          <p:nvPr/>
+        </p:nvSpPr>
+        <p:spPr>
+          <a:xfrm>
+            <a:off x="676656" y="2103120"/>
+            <a:ext cx="10789920" cy="512064"/>
+          </a:xfrm>
+          <a:prstGeom prst="rect">
+            <a:avLst/>
+          </a:prstGeom>
+          <a:noFill/>
+        </p:spPr>
+        <p:txBody>
+          <a:bodyPr wrap="square" lIns="73152" rIns="73152" tIns="36576" bIns="36576">
+            <a:spAutoFit/>
+          </a:bodyPr>
+          <a:lstStyle/>
+          <a:p>
+            <a:pPr algn="l">
+              <a:spcAft>
+                <a:spcPts val="0"/>
+              </a:spcAft>
+              <a:defRPr sz="2000" b="0">
                 <a:solidFill>
                   <a:srgbClr val="122C4E"/>
                 </a:solidFill>
@@ -6343,85 +6564,23 @@
               </a:defRPr>
             </a:pPr>
             <a:r>
-              <a:t>이번 단계: 파일의 전체 내용을 중간 생략 없이 작성합니다. 아래 줄 범위를 끝까지 입력하세요.</a:t>
-            </a:r>
-          </a:p>
-        </p:txBody>
-      </p:sp>
-      <p:sp>
-        <p:nvSpPr>
-          <p:cNvPr id="8" name="Rectangle 7"/>
+              <a:t>기본 ROS와 내가 만든 패키지는 서로 다른 setup 파일이다.</a:t>
+            </a:r>
+          </a:p>
+        </p:txBody>
+      </p:sp>
+      <p:sp>
+        <p:nvSpPr>
+          <p:cNvPr id="9" name="Rounded Rectangle 8"/>
           <p:cNvSpPr/>
           <p:nvPr/>
         </p:nvSpPr>
         <p:spPr>
           <a:xfrm>
-            <a:off x="658368" y="1956816"/>
-            <a:ext cx="10972800" cy="603504"/>
-          </a:xfrm>
-          <a:prstGeom prst="rect">
-            <a:avLst/>
-          </a:prstGeom>
-          <a:solidFill>
-            <a:srgbClr val="F4F7FB"/>
-          </a:solidFill>
-          <a:ln>
-            <a:solidFill>
-              <a:srgbClr val="F4F7FB"/>
-            </a:solidFill>
-          </a:ln>
-        </p:spPr>
-        <p:style>
-          <a:lnRef idx="1">
-            <a:schemeClr val="accent1"/>
-          </a:lnRef>
-          <a:fillRef idx="3">
-            <a:schemeClr val="accent1"/>
-          </a:fillRef>
-          <a:effectRef idx="2">
-            <a:schemeClr val="accent1"/>
-          </a:effectRef>
-          <a:fontRef idx="minor">
-            <a:schemeClr val="lt1"/>
-          </a:fontRef>
-        </p:style>
-        <p:txBody>
-          <a:bodyPr rtlCol="0" anchor="ctr" wrap="square" lIns="73152" rIns="73152" tIns="36576" bIns="36576"/>
-          <a:lstStyle/>
-          <a:p>
-            <a:pPr algn="l">
-              <a:spcAft>
-                <a:spcPts val="0"/>
-              </a:spcAft>
-              <a:defRPr sz="1400" b="0">
-                <a:solidFill>
-                  <a:srgbClr val="122C4E"/>
-                </a:solidFill>
-                <a:latin typeface="DejaVu Sans Mono"/>
-              </a:defRPr>
-            </a:pPr>
-            <a:r>
-              <a:t>파일 생성: mkdir -p ~/ros2_curri/agv_ws/src/agv_control</a:t>
-            </a:r>
-            <a:br/>
-            <a:r>
-              <a:t>파일 열기: nano ~/ros2_curri/agv_ws/src/agv_control/package.xml</a:t>
-            </a:r>
-          </a:p>
-        </p:txBody>
-      </p:sp>
-      <p:sp>
-        <p:nvSpPr>
-          <p:cNvPr id="9" name="Rectangle 8"/>
-          <p:cNvSpPr/>
-          <p:nvPr/>
-        </p:nvSpPr>
-        <p:spPr>
-          <a:xfrm>
-            <a:off x="658368" y="2706624"/>
-            <a:ext cx="10972800" cy="3364992"/>
-          </a:xfrm>
-          <a:prstGeom prst="rect">
+            <a:off x="676656" y="2871216"/>
+            <a:ext cx="10835640" cy="2331720"/>
+          </a:xfrm>
+          <a:prstGeom prst="roundRect">
             <a:avLst/>
           </a:prstGeom>
           <a:solidFill>
@@ -6448,14 +6607,14 @@
           </a:fontRef>
         </p:style>
         <p:txBody>
-          <a:bodyPr rtlCol="0" anchor="ctr" wrap="square" lIns="164592" rIns="164592" tIns="109728" bIns="36576"/>
-          <a:lstStyle/>
-          <a:p>
-            <a:pPr algn="l">
-              <a:spcAft>
-                <a:spcPts val="0"/>
-              </a:spcAft>
-              <a:defRPr sz="1400" b="0">
+          <a:bodyPr rtlCol="0" anchor="ctr" wrap="square" lIns="73152" rIns="73152" tIns="36576" bIns="36576"/>
+          <a:lstStyle/>
+          <a:p>
+            <a:pPr algn="l">
+              <a:spcAft>
+                <a:spcPts val="0"/>
+              </a:spcAft>
+              <a:defRPr sz="1600" b="0">
                 <a:solidFill>
                   <a:srgbClr val="FFFFFF"/>
                 </a:solidFill>
@@ -6463,51 +6622,15 @@
               </a:defRPr>
             </a:pPr>
             <a:r>
-              <a:t>  &lt;license&gt;Apache-2.0&lt;/license&gt;</a:t>
+              <a:t>source /opt/ros/jazzy/setup.bash</a:t>
             </a:r>
             <a:br/>
             <a:r>
-              <a:t>  </a:t>
+              <a:t>source ~/ros2_curri/agv_ws/install/setup.bash</a:t>
             </a:r>
             <a:br/>
             <a:r>
-              <a:t>  </a:t>
-            </a:r>
-            <a:br/>
-            <a:r>
-              <a:t>  &lt;buildtool_depend&gt;ament_python&lt;/buildtool_depend&gt;</a:t>
-            </a:r>
-            <a:br/>
-            <a:r>
-              <a:t>  </a:t>
-            </a:r>
-            <a:br/>
-            <a:r>
-              <a:t>  </a:t>
-            </a:r>
-            <a:br/>
-            <a:r>
-              <a:t>  &lt;exec_depend&gt;rclpy&lt;/exec_depend&gt;</a:t>
-            </a:r>
-            <a:br/>
-            <a:r>
-              <a:t>  &lt;exec_depend&gt;std_msgs&lt;/exec_depend&gt;</a:t>
-            </a:r>
-            <a:br/>
-            <a:r>
-              <a:t>  &lt;exec_depend&gt;geometry_msgs&lt;/exec_depend&gt;</a:t>
-            </a:r>
-            <a:br/>
-            <a:r>
-              <a:t>  </a:t>
-            </a:r>
-            <a:br/>
-            <a:r>
-              <a:t>  </a:t>
-            </a:r>
-            <a:br/>
-            <a:r>
-              <a:t>  &lt;exec_depend&gt;sensor_msgs&lt;/exec_depend&gt;</a:t>
+              <a:t>ros2 pkg executables agv_cpp_examples</a:t>
             </a:r>
           </a:p>
         </p:txBody>
@@ -6520,8 +6643,8 @@
         </p:nvSpPr>
         <p:spPr>
           <a:xfrm>
-            <a:off x="749808" y="6181344"/>
-            <a:ext cx="10789920" cy="201168"/>
+            <a:off x="768096" y="5468112"/>
+            <a:ext cx="1143000" cy="256032"/>
           </a:xfrm>
           <a:prstGeom prst="rect">
             <a:avLst/>
@@ -6538,15 +6661,54 @@
               <a:spcAft>
                 <a:spcPts val="0"/>
               </a:spcAft>
-              <a:defRPr sz="1000" b="0">
-                <a:solidFill>
-                  <a:srgbClr val="5C6672"/>
-                </a:solidFill>
-                <a:latin typeface="Noto Sans CJK KR"/>
-              </a:defRPr>
-            </a:pPr>
-            <a:r>
-              <a:t>파일 전체 2/3 · 이 슬라이드 다음에 같은 파일의 나머지 줄이 이어집니다.</a:t>
+              <a:defRPr sz="1800" b="1">
+                <a:solidFill>
+                  <a:srgbClr val="2A8B5A"/>
+                </a:solidFill>
+                <a:latin typeface="Noto Sans CJK KR"/>
+              </a:defRPr>
+            </a:pPr>
+            <a:r>
+              <a:t>확인</a:t>
+            </a:r>
+          </a:p>
+        </p:txBody>
+      </p:sp>
+      <p:sp>
+        <p:nvSpPr>
+          <p:cNvPr id="11" name="TextBox 10"/>
+          <p:cNvSpPr txBox="1"/>
+          <p:nvPr/>
+        </p:nvSpPr>
+        <p:spPr>
+          <a:xfrm>
+            <a:off x="768096" y="5742432"/>
+            <a:ext cx="10561320" cy="347472"/>
+          </a:xfrm>
+          <a:prstGeom prst="rect">
+            <a:avLst/>
+          </a:prstGeom>
+          <a:noFill/>
+        </p:spPr>
+        <p:txBody>
+          <a:bodyPr wrap="square" lIns="73152" rIns="73152" tIns="36576" bIns="36576">
+            <a:spAutoFit/>
+          </a:bodyPr>
+          <a:lstStyle/>
+          <a:p>
+            <a:pPr algn="l">
+              <a:spcAft>
+                <a:spcPts val="0"/>
+              </a:spcAft>
+              <a:defRPr sz="1800" b="0">
+                <a:solidFill>
+                  <a:srgbClr val="122C4E"/>
+                </a:solidFill>
+                <a:latin typeface="Noto Sans CJK KR"/>
+              </a:defRPr>
+            </a:pPr>
+            <a:r>
+              <a:t>명령의 출력에서 topic·frame·파일 이름 또는 성공 메시지를 찾으면 이 단계가 완료됩니다.</a:t>
             </a:r>
           </a:p>
         </p:txBody>
@@ -6603,7 +6765,7 @@
               </a:defRPr>
             </a:pPr>
             <a:r>
-              <a:t>파일을 계속 작성하고 저장한다 (3/3)</a:t>
+              <a:t>파일을 새로 만들고 저장한다 (1/3)</a:t>
             </a:r>
           </a:p>
         </p:txBody>
@@ -6778,7 +6940,7 @@
               </a:defRPr>
             </a:pPr>
             <a:r>
-              <a:t>현재 단계 5/6    |    현재 폴더 ~/ros2_curri/agv_ws    |    현재 터미널</a:t>
+              <a:t>현재 단계 3/6    |    현재 폴더 ~/ros2_curri/agv_ws    |    현재 터미널</a:t>
             </a:r>
           </a:p>
         </p:txBody>
@@ -6937,10 +7099,14 @@
               </a:defRPr>
             </a:pPr>
             <a:r>
-              <a:t>  &lt;exec_depend&gt;nav_msgs&lt;/exec_depend&gt;</a:t>
+              <a:t>&lt;?xml version="1.0" ?&gt;</a:t>
             </a:r>
             <a:br/>
             <a:r>
+              <a:t>&lt;package format="3"&gt;</a:t>
+            </a:r>
+            <a:br/>
+            <a:r>
               <a:t>  </a:t>
             </a:r>
             <a:br/>
@@ -6949,24 +7115,35 @@
             </a:r>
             <a:br/>
             <a:r>
-              <a:t>  &lt;export&gt;</a:t>
+              <a:t>  &lt;name&gt;agv_control&lt;/name&gt;</a:t>
             </a:r>
             <a:br/>
             <a:r>
-              <a:t>    &lt;build_type&gt;ament_python&lt;/build_type&gt;</a:t>
+              <a:t>  &lt;version&gt;0.1.0&lt;/version&gt;</a:t>
             </a:r>
             <a:br/>
             <a:r>
-              <a:t>  &lt;/export&gt;</a:t>
+              <a:t>  </a:t>
             </a:r>
             <a:br/>
             <a:r>
               <a:t>  </a:t>
             </a:r>
             <a:br/>
+            <a:r>
+              <a:t>  &lt;description&gt;Small ROS 2 control nodes for the educational AGV.&lt;/description&gt;</a:t>
+            </a:r>
             <a:br/>
             <a:r>
-              <a:t>&lt;/package&gt;</a:t>
+              <a:t>  </a:t>
+            </a:r>
+            <a:br/>
+            <a:r>
+              <a:t>  </a:t>
+            </a:r>
+            <a:br/>
+            <a:r>
+              <a:t>  &lt;maintainer email="student@example.com"&gt;AGV student&lt;/maintainer&gt;</a:t>
             </a:r>
           </a:p>
         </p:txBody>
@@ -7005,7 +7182,7 @@
               </a:defRPr>
             </a:pPr>
             <a:r>
-              <a:t>파일 전체 3/3 · 이 슬라이드 다음에 같은 파일의 나머지 줄이 이어집니다.</a:t>
+              <a:t>파일 전체 1/3 · 이 슬라이드 다음에 같은 파일의 나머지 줄이 이어집니다.</a:t>
             </a:r>
           </a:p>
         </p:txBody>
@@ -7062,7 +7239,7 @@
               </a:defRPr>
             </a:pPr>
             <a:r>
-              <a:t>파일을 새로 만들고 저장한다 (1/1)</a:t>
+              <a:t>파일을 계속 작성하고 저장한다 (2/3)</a:t>
             </a:r>
           </a:p>
         </p:txBody>
@@ -7101,7 +7278,7 @@
               </a:defRPr>
             </a:pPr>
             <a:r>
-              <a:t>~/ros2_curri/agv_ws/src/agv_control/setup.py</a:t>
+              <a:t>~/ros2_curri/agv_ws/src/agv_control/package.xml</a:t>
             </a:r>
           </a:p>
         </p:txBody>
@@ -7237,7 +7414,7 @@
               </a:defRPr>
             </a:pPr>
             <a:r>
-              <a:t>현재 단계 6/7    |    현재 폴더 ~/ros2_curri/agv_ws    |    현재 터미널</a:t>
+              <a:t>현재 단계 4/6    |    현재 폴더 ~/ros2_curri/agv_ws    |    현재 터미널</a:t>
             </a:r>
           </a:p>
         </p:txBody>
@@ -7338,7 +7515,7 @@
             </a:r>
             <a:br/>
             <a:r>
-              <a:t>파일 열기: nano ~/ros2_curri/agv_ws/src/agv_control/setup.py</a:t>
+              <a:t>파일 열기: nano ~/ros2_curri/agv_ws/src/agv_control/package.xml</a:t>
             </a:r>
           </a:p>
         </p:txBody>
@@ -7396,51 +7573,51 @@
               </a:defRPr>
             </a:pPr>
             <a:r>
-              <a:t>from setuptools import find_packages, setup</a:t>
+              <a:t>  &lt;license&gt;Apache-2.0&lt;/license&gt;</a:t>
             </a:r>
             <a:br/>
             <a:r>
-              <a:t>package_name = 'agv_control'</a:t>
+              <a:t>  </a:t>
             </a:r>
             <a:br/>
             <a:r>
-              <a:t>setup(name=package_name, version='0.1.0', packages=find_packages(exclude=['test']),</a:t>
+              <a:t>  </a:t>
             </a:r>
             <a:br/>
             <a:r>
-              <a:t>    data_files=[('share/ament_index/resource_index/packages',</a:t>
+              <a:t>  &lt;buildtool_depend&gt;ament_python&lt;/buildtool_depend&gt;</a:t>
             </a:r>
             <a:br/>
             <a:r>
-              <a:t>    ['resource/' + package_name]), ('share/' + package_name, ['package.xml']),</a:t>
+              <a:t>  </a:t>
             </a:r>
             <a:br/>
             <a:r>
-              <a:t>    ('share/' + package_name + '/config', ['config/controllers.yaml'])],</a:t>
+              <a:t>  </a:t>
             </a:r>
             <a:br/>
             <a:r>
-              <a:t>    install_requires=['setuptools'], zip_safe=True, maintainer='AGV student',</a:t>
+              <a:t>  &lt;exec_depend&gt;rclpy&lt;/exec_depend&gt;</a:t>
             </a:r>
             <a:br/>
             <a:r>
-              <a:t>    maintainer_email='student@example.com', license='Apache-2.0',</a:t>
+              <a:t>  &lt;exec_depend&gt;std_msgs&lt;/exec_depend&gt;</a:t>
             </a:r>
             <a:br/>
             <a:r>
-              <a:t>    entry_points={'console_scripts': ['counter_publisher = agv_control.counter_publisher:main',</a:t>
+              <a:t>  &lt;exec_depend&gt;geometry_msgs&lt;/exec_depend&gt;</a:t>
             </a:r>
             <a:br/>
             <a:r>
-              <a:t>     'counter_monitor = agv_control.counter_monitor:main', 'cmd_test_node = agv_control.cmd_test_node:main',</a:t>
+              <a:t>  </a:t>
             </a:r>
             <a:br/>
             <a:r>
-              <a:t>     'velocity_monitor = agv_control.velocity_monitor:main', 'safety_controller = agv_control.safety_controller:main',</a:t>
+              <a:t>  </a:t>
             </a:r>
             <a:br/>
             <a:r>
-              <a:t>     'pid_controller = agv_control.pid_controller:main']})</a:t>
+              <a:t>  &lt;exec_depend&gt;sensor_msgs&lt;/exec_depend&gt;</a:t>
             </a:r>
           </a:p>
         </p:txBody>
@@ -7479,7 +7656,7 @@
               </a:defRPr>
             </a:pPr>
             <a:r>
-              <a:t>파일 전체 1/1 · 이 슬라이드 다음에 같은 파일의 나머지 줄이 이어집니다.</a:t>
+              <a:t>파일 전체 2/3 · 이 슬라이드 다음에 같은 파일의 나머지 줄이 이어집니다.</a:t>
             </a:r>
           </a:p>
         </p:txBody>
@@ -7536,7 +7713,7 @@
               </a:defRPr>
             </a:pPr>
             <a:r>
-              <a:t>파일을 새로 만들고 저장한다 (1/2)</a:t>
+              <a:t>파일을 계속 작성하고 저장한다 (3/3)</a:t>
             </a:r>
           </a:p>
         </p:txBody>
@@ -7575,7 +7752,7 @@
               </a:defRPr>
             </a:pPr>
             <a:r>
-              <a:t>~/ros2_curri/agv_ws/src/agv_cpp_examples/CMakeLists.txt</a:t>
+              <a:t>~/ros2_curri/agv_ws/src/agv_control/package.xml</a:t>
             </a:r>
           </a:p>
         </p:txBody>
@@ -7711,7 +7888,7 @@
               </a:defRPr>
             </a:pPr>
             <a:r>
-              <a:t>현재 단계 7/9    |    현재 폴더 ~/ros2_curri/agv_ws    |    현재 터미널</a:t>
+              <a:t>현재 단계 5/6    |    현재 폴더 ~/ros2_curri/agv_ws    |    현재 터미널</a:t>
             </a:r>
           </a:p>
         </p:txBody>
@@ -7808,11 +7985,11 @@
               </a:defRPr>
             </a:pPr>
             <a:r>
-              <a:t>파일 생성: mkdir -p ~/ros2_curri/agv_ws/src/agv_cpp_examples</a:t>
+              <a:t>파일 생성: mkdir -p ~/ros2_curri/agv_ws/src/agv_control</a:t>
             </a:r>
             <a:br/>
             <a:r>
-              <a:t>파일 열기: nano ~/ros2_curri/agv_ws/src/agv_cpp_examples/CMakeLists.txt</a:t>
+              <a:t>파일 열기: nano ~/ros2_curri/agv_ws/src/agv_control/package.xml</a:t>
             </a:r>
           </a:p>
         </p:txBody>
@@ -7870,43 +8047,37 @@
               </a:defRPr>
             </a:pPr>
             <a:r>
-              <a:t>cmake_minimum_required(VERSION 3.8)</a:t>
+              <a:t>  &lt;exec_depend&gt;nav_msgs&lt;/exec_depend&gt;</a:t>
             </a:r>
             <a:br/>
             <a:r>
-              <a:t>project(agv_cpp_examples)</a:t>
+              <a:t>  </a:t>
+            </a:r>
+            <a:br/>
+            <a:r>
+              <a:t>  </a:t>
+            </a:r>
+            <a:br/>
+            <a:r>
+              <a:t>  &lt;export&gt;</a:t>
+            </a:r>
+            <a:br/>
+            <a:r>
+              <a:t>    &lt;build_type&gt;ament_python&lt;/build_type&gt;</a:t>
+            </a:r>
+            <a:br/>
+            <a:r>
+              <a:t>  &lt;/export&gt;</a:t>
+            </a:r>
+            <a:br/>
+            <a:r>
+              <a:t>  </a:t>
             </a:r>
             <a:br/>
             <a:br/>
             <a:r>
-              <a:t># ament_cmake가 ROS 2 패키지를 빌드·설치하는 기본 도구입니다.</a:t>
-            </a:r>
-            <a:br/>
-            <a:r>
-              <a:t>find_package(ament_cmake REQUIRED)</a:t>
-            </a:r>
-            <a:br/>
-            <a:r>
-              <a:t>find_package(rclcpp REQUIRED)</a:t>
-            </a:r>
-            <a:br/>
-            <a:r>
-              <a:t>find_package(std_msgs REQUIRED)</a:t>
-            </a:r>
-            <a:br/>
-            <a:br/>
-            <a:r>
-              <a:t># src/status_publisher.cpp를 실행 파일 하나로 컴파일합니다.</a:t>
-            </a:r>
-            <a:br/>
-            <a:r>
-              <a:t>add_executable(status_publisher src/status_publisher.cpp)</a:t>
-            </a:r>
-            <a:br/>
-            <a:r>
-              <a:t>ament_target_dependencies(status_publisher rclcpp std_msgs)</a:t>
-            </a:r>
-            <a:br/>
+              <a:t>&lt;/package&gt;</a:t>
+            </a:r>
           </a:p>
         </p:txBody>
       </p:sp>
@@ -7944,7 +8115,7 @@
               </a:defRPr>
             </a:pPr>
             <a:r>
-              <a:t>파일 전체 1/2 · 이 슬라이드 다음에 같은 파일의 나머지 줄이 이어집니다.</a:t>
+              <a:t>파일 전체 3/3 · 이 슬라이드 다음에 같은 파일의 나머지 줄이 이어집니다.</a:t>
             </a:r>
           </a:p>
         </p:txBody>
@@ -8001,7 +8172,7 @@
               </a:defRPr>
             </a:pPr>
             <a:r>
-              <a:t>파일을 계속 작성하고 저장한다 (2/2)</a:t>
+              <a:t>파일을 새로 만들고 저장한다 (1/1)</a:t>
             </a:r>
           </a:p>
         </p:txBody>
@@ -8040,7 +8211,7 @@
               </a:defRPr>
             </a:pPr>
             <a:r>
-              <a:t>~/ros2_curri/agv_ws/src/agv_cpp_examples/CMakeLists.txt</a:t>
+              <a:t>~/ros2_curri/agv_ws/src/agv_control/setup.py</a:t>
             </a:r>
           </a:p>
         </p:txBody>
@@ -8176,7 +8347,7 @@
               </a:defRPr>
             </a:pPr>
             <a:r>
-              <a:t>현재 단계 8/9    |    현재 폴더 ~/ros2_curri/agv_ws    |    현재 터미널</a:t>
+              <a:t>현재 단계 6/7    |    현재 폴더 ~/ros2_curri/agv_ws    |    현재 터미널</a:t>
             </a:r>
           </a:p>
         </p:txBody>
@@ -8273,11 +8444,11 @@
               </a:defRPr>
             </a:pPr>
             <a:r>
-              <a:t>파일 생성: mkdir -p ~/ros2_curri/agv_ws/src/agv_cpp_examples</a:t>
+              <a:t>파일 생성: mkdir -p ~/ros2_curri/agv_ws/src/agv_control</a:t>
             </a:r>
             <a:br/>
             <a:r>
-              <a:t>파일 열기: nano ~/ros2_curri/agv_ws/src/agv_cpp_examples/CMakeLists.txt</a:t>
+              <a:t>파일 열기: nano ~/ros2_curri/agv_ws/src/agv_control/setup.py</a:t>
             </a:r>
           </a:p>
         </p:txBody>
@@ -8335,24 +8506,51 @@
               </a:defRPr>
             </a:pPr>
             <a:r>
-              <a:t># ros2 run agv_cpp_examples status_publisher가 찾는 설치 경로입니다.</a:t>
+              <a:t>from setuptools import find_packages, setup</a:t>
             </a:r>
             <a:br/>
             <a:r>
-              <a:t>install(TARGETS</a:t>
+              <a:t>package_name = 'agv_control'</a:t>
             </a:r>
             <a:br/>
             <a:r>
-              <a:t>  status_publisher</a:t>
+              <a:t>setup(name=package_name, version='0.1.0', packages=find_packages(exclude=['test']),</a:t>
             </a:r>
             <a:br/>
             <a:r>
-              <a:t>  DESTINATION lib/${PROJECT_NAME})</a:t>
+              <a:t>    data_files=[('share/ament_index/resource_index/packages',</a:t>
             </a:r>
             <a:br/>
+            <a:r>
+              <a:t>    ['resource/' + package_name]), ('share/' + package_name, ['package.xml']),</a:t>
+            </a:r>
             <a:br/>
             <a:r>
-              <a:t>ament_package()</a:t>
+              <a:t>    ('share/' + package_name + '/config', ['config/controllers.yaml'])],</a:t>
+            </a:r>
+            <a:br/>
+            <a:r>
+              <a:t>    install_requires=['setuptools'], zip_safe=True, maintainer='AGV student',</a:t>
+            </a:r>
+            <a:br/>
+            <a:r>
+              <a:t>    maintainer_email='student@example.com', license='Apache-2.0',</a:t>
+            </a:r>
+            <a:br/>
+            <a:r>
+              <a:t>    entry_points={'console_scripts': ['counter_publisher = agv_control.counter_publisher:main',</a:t>
+            </a:r>
+            <a:br/>
+            <a:r>
+              <a:t>     'counter_monitor = agv_control.counter_monitor:main', 'cmd_test_node = agv_control.cmd_test_node:main',</a:t>
+            </a:r>
+            <a:br/>
+            <a:r>
+              <a:t>     'velocity_monitor = agv_control.velocity_monitor:main', 'safety_controller = agv_control.safety_controller:main',</a:t>
+            </a:r>
+            <a:br/>
+            <a:r>
+              <a:t>     'pid_controller = agv_control.pid_controller:main']})</a:t>
             </a:r>
           </a:p>
         </p:txBody>
@@ -8391,7 +8589,7 @@
               </a:defRPr>
             </a:pPr>
             <a:r>
-              <a:t>파일 전체 2/2 · 이 슬라이드 다음에 같은 파일의 나머지 줄이 이어집니다.</a:t>
+              <a:t>파일 전체 1/1 · 이 슬라이드 다음에 같은 파일의 나머지 줄이 이어집니다.</a:t>
             </a:r>
           </a:p>
         </p:txBody>
@@ -8448,7 +8646,7 @@
               </a:defRPr>
             </a:pPr>
             <a:r>
-              <a:t>파일을 새로 만들고 저장한다 (1/4)</a:t>
+              <a:t>파일을 새로 만들고 저장한다 (1/2)</a:t>
             </a:r>
           </a:p>
         </p:txBody>
@@ -8487,7 +8685,7 @@
               </a:defRPr>
             </a:pPr>
             <a:r>
-              <a:t>~/ros2_curri/agv_ws/src/agv_cpp_examples/src/status_publisher.cpp</a:t>
+              <a:t>~/ros2_curri/agv_ws/src/agv_cpp_examples/CMakeLists.txt</a:t>
             </a:r>
           </a:p>
         </p:txBody>
@@ -8623,7 +8821,7 @@
               </a:defRPr>
             </a:pPr>
             <a:r>
-              <a:t>현재 단계 9/13    |    현재 폴더 ~/ros2_curri/agv_ws    |    현재 터미널</a:t>
+              <a:t>현재 단계 7/9    |    현재 폴더 ~/ros2_curri/agv_ws    |    현재 터미널</a:t>
             </a:r>
           </a:p>
         </p:txBody>
@@ -8720,11 +8918,11 @@
               </a:defRPr>
             </a:pPr>
             <a:r>
-              <a:t>파일 생성: mkdir -p ~/ros2_curri/agv_ws/src/agv_cpp_examples/src</a:t>
+              <a:t>파일 생성: mkdir -p ~/ros2_curri/agv_ws/src/agv_cpp_examples</a:t>
             </a:r>
             <a:br/>
             <a:r>
-              <a:t>파일 열기: nano ~/ros2_curri/agv_ws/src/agv_cpp_examples/src/status_publisher.cpp</a:t>
+              <a:t>파일 열기: nano ~/ros2_curri/agv_ws/src/agv_cpp_examples/CMakeLists.txt</a:t>
             </a:r>
           </a:p>
         </p:txBody>
@@ -8782,43 +8980,43 @@
               </a:defRPr>
             </a:pPr>
             <a:r>
-              <a:t>#include &lt;chrono&gt;</a:t>
+              <a:t>cmake_minimum_required(VERSION 3.8)</a:t>
             </a:r>
             <a:br/>
             <a:r>
-              <a:t>#include &lt;functional&gt;</a:t>
-            </a:r>
-            <a:br/>
-            <a:r>
-              <a:t>#include &lt;memory&gt;</a:t>
-            </a:r>
-            <a:br/>
-            <a:r>
-              <a:t>#include &lt;string&gt;</a:t>
+              <a:t>project(agv_cpp_examples)</a:t>
             </a:r>
             <a:br/>
             <a:br/>
             <a:r>
-              <a:t>#include "rclcpp/rclcpp.hpp"</a:t>
+              <a:t># ament_cmake가 ROS 2 패키지를 빌드·설치하는 기본 도구입니다.</a:t>
             </a:r>
             <a:br/>
             <a:r>
-              <a:t>#include "std_msgs/msg/string.hpp"</a:t>
+              <a:t>find_package(ament_cmake REQUIRED)</a:t>
+            </a:r>
+            <a:br/>
+            <a:r>
+              <a:t>find_package(rclcpp REQUIRED)</a:t>
+            </a:r>
+            <a:br/>
+            <a:r>
+              <a:t>find_package(std_msgs REQUIRED)</a:t>
             </a:r>
             <a:br/>
             <a:br/>
             <a:r>
-              <a:t>using namespace std::chrono_literals;</a:t>
+              <a:t># src/status_publisher.cpp를 실행 파일 하나로 컴파일합니다.</a:t>
             </a:r>
             <a:br/>
+            <a:r>
+              <a:t>add_executable(status_publisher src/status_publisher.cpp)</a:t>
+            </a:r>
             <a:br/>
             <a:r>
-              <a:t>// Python의 Node 클래스와 같은 역할을 하는 C++ ROS 2 node입니다.</a:t>
+              <a:t>ament_target_dependencies(status_publisher rclcpp std_msgs)</a:t>
             </a:r>
             <a:br/>
-            <a:r>
-              <a:t>class StatusPublisher : public rclcpp::Node</a:t>
-            </a:r>
           </a:p>
         </p:txBody>
       </p:sp>
@@ -8856,7 +9054,7 @@
               </a:defRPr>
             </a:pPr>
             <a:r>
-              <a:t>파일 전체 1/4 · 이 슬라이드 다음에 같은 파일의 나머지 줄이 이어집니다.</a:t>
+              <a:t>파일 전체 1/2 · 이 슬라이드 다음에 같은 파일의 나머지 줄이 이어집니다.</a:t>
             </a:r>
           </a:p>
         </p:txBody>
@@ -8913,7 +9111,7 @@
               </a:defRPr>
             </a:pPr>
             <a:r>
-              <a:t>파일을 계속 작성하고 저장한다 (2/4)</a:t>
+              <a:t>파일을 계속 작성하고 저장한다 (2/2)</a:t>
             </a:r>
           </a:p>
         </p:txBody>
@@ -8952,7 +9150,7 @@
               </a:defRPr>
             </a:pPr>
             <a:r>
-              <a:t>~/ros2_curri/agv_ws/src/agv_cpp_examples/src/status_publisher.cpp</a:t>
+              <a:t>~/ros2_curri/agv_ws/src/agv_cpp_examples/CMakeLists.txt</a:t>
             </a:r>
           </a:p>
         </p:txBody>
@@ -9088,7 +9286,7 @@
               </a:defRPr>
             </a:pPr>
             <a:r>
-              <a:t>현재 단계 10/13    |    현재 폴더 ~/ros2_curri/agv_ws    |    현재 터미널</a:t>
+              <a:t>현재 단계 8/9    |    현재 폴더 ~/ros2_curri/agv_ws    |    현재 터미널</a:t>
             </a:r>
           </a:p>
         </p:txBody>
@@ -9185,11 +9383,11 @@
               </a:defRPr>
             </a:pPr>
             <a:r>
-              <a:t>파일 생성: mkdir -p ~/ros2_curri/agv_ws/src/agv_cpp_examples/src</a:t>
+              <a:t>파일 생성: mkdir -p ~/ros2_curri/agv_ws/src/agv_cpp_examples</a:t>
             </a:r>
             <a:br/>
             <a:r>
-              <a:t>파일 열기: nano ~/ros2_curri/agv_ws/src/agv_cpp_examples/src/status_publisher.cpp</a:t>
+              <a:t>파일 열기: nano ~/ros2_curri/agv_ws/src/agv_cpp_examples/CMakeLists.txt</a:t>
             </a:r>
           </a:p>
         </p:txBody>
@@ -9247,48 +9445,24 @@
               </a:defRPr>
             </a:pPr>
             <a:r>
-              <a:t>{</a:t>
+              <a:t># ros2 run agv_cpp_examples status_publisher가 찾는 설치 경로입니다.</a:t>
             </a:r>
             <a:br/>
             <a:r>
-              <a:t>public:</a:t>
+              <a:t>install(TARGETS</a:t>
             </a:r>
             <a:br/>
             <a:r>
-              <a:t>  StatusPublisher()</a:t>
+              <a:t>  status_publisher</a:t>
             </a:r>
             <a:br/>
             <a:r>
-              <a:t>  : Node("cpp_status_publisher"), sequence_(0)</a:t>
-            </a:r>
-            <a:br/>
-            <a:r>
-              <a:t>  {</a:t>
-            </a:r>
-            <a:br/>
-            <a:r>
-              <a:t>    // ros2 run 뒤 --ros-args -p message:=... 로 바꿀 수 있는 parameter입니다.</a:t>
-            </a:r>
-            <a:br/>
-            <a:r>
-              <a:t>    this-&gt;declare_parameter&lt;std::string&gt;("message", "C++ AGV 상태 정상");</a:t>
+              <a:t>  DESTINATION lib/${PROJECT_NAME})</a:t>
             </a:r>
             <a:br/>
             <a:br/>
             <a:r>
-              <a:t>    // String 메시지를 /cpp_status topic으로 publish합니다. 마지막 10은 queue depth입니다.</a:t>
-            </a:r>
-            <a:br/>
-            <a:r>
-              <a:t>    publisher_ = this-&gt;create_publisher&lt;std_msgs::msg::String&gt;("/cpp_status", 10);</a:t>
-            </a:r>
-            <a:br/>
-            <a:r>
-              <a:t>    timer_ = this-&gt;create_wall_timer(1s, std::bind(&amp;StatusPublisher::publish_status, this));</a:t>
-            </a:r>
-            <a:br/>
-            <a:r>
-              <a:t>  }</a:t>
+              <a:t>ament_package()</a:t>
             </a:r>
           </a:p>
         </p:txBody>
@@ -9327,7 +9501,7 @@
               </a:defRPr>
             </a:pPr>
             <a:r>
-              <a:t>파일 전체 2/4 · 이 슬라이드 다음에 같은 파일의 나머지 줄이 이어집니다.</a:t>
+              <a:t>파일 전체 2/2 · 이 슬라이드 다음에 같은 파일의 나머지 줄이 이어집니다.</a:t>
             </a:r>
           </a:p>
         </p:txBody>
@@ -9384,7 +9558,7 @@
               </a:defRPr>
             </a:pPr>
             <a:r>
-              <a:t>파일을 계속 작성하고 저장한다 (3/4)</a:t>
+              <a:t>파일을 새로 만들고 저장한다 (1/4)</a:t>
             </a:r>
           </a:p>
         </p:txBody>
@@ -9559,7 +9733,7 @@
               </a:defRPr>
             </a:pPr>
             <a:r>
-              <a:t>현재 단계 11/13    |    현재 폴더 ~/ros2_curri/agv_ws    |    현재 터미널</a:t>
+              <a:t>현재 단계 9/13    |    현재 폴더 ~/ros2_curri/agv_ws    |    현재 터미널</a:t>
             </a:r>
           </a:p>
         </p:txBody>
@@ -9717,46 +9891,43 @@
                 <a:latin typeface="DejaVu Sans Mono"/>
               </a:defRPr>
             </a:pPr>
+            <a:r>
+              <a:t>#include &lt;chrono&gt;</a:t>
+            </a:r>
             <a:br/>
             <a:r>
-              <a:t>private:</a:t>
+              <a:t>#include &lt;functional&gt;</a:t>
             </a:r>
             <a:br/>
             <a:r>
-              <a:t>  void publish_status()</a:t>
+              <a:t>#include &lt;memory&gt;</a:t>
             </a:r>
             <a:br/>
             <a:r>
-              <a:t>  {</a:t>
-            </a:r>
-            <a:br/>
-            <a:r>
-              <a:t>    auto message = std_msgs::msg::String();</a:t>
-            </a:r>
-            <a:br/>
-            <a:r>
-              <a:t>    message.data = this-&gt;get_parameter("message").as_string() + " #" + std::to_string(sequence_++);</a:t>
-            </a:r>
-            <a:br/>
-            <a:r>
-              <a:t>    publisher_-&gt;publish(message);</a:t>
-            </a:r>
-            <a:br/>
-            <a:r>
-              <a:t>    RCLCPP_INFO(this-&gt;get_logger(), "published: %s", message.data.c_str());</a:t>
-            </a:r>
-            <a:br/>
-            <a:r>
-              <a:t>  }</a:t>
+              <a:t>#include &lt;string&gt;</a:t>
             </a:r>
             <a:br/>
             <a:br/>
             <a:r>
-              <a:t>  std::size_t sequence_;</a:t>
+              <a:t>#include "rclcpp/rclcpp.hpp"</a:t>
             </a:r>
             <a:br/>
             <a:r>
-              <a:t>  rclcpp::Publisher&lt;std_msgs::msg::String&gt;::SharedPtr publisher_;</a:t>
+              <a:t>#include "std_msgs/msg/string.hpp"</a:t>
+            </a:r>
+            <a:br/>
+            <a:br/>
+            <a:r>
+              <a:t>using namespace std::chrono_literals;</a:t>
+            </a:r>
+            <a:br/>
+            <a:br/>
+            <a:r>
+              <a:t>// Python의 Node 클래스와 같은 역할을 하는 C++ ROS 2 node입니다.</a:t>
+            </a:r>
+            <a:br/>
+            <a:r>
+              <a:t>class StatusPublisher : public rclcpp::Node</a:t>
             </a:r>
           </a:p>
         </p:txBody>
@@ -9795,7 +9966,7 @@
               </a:defRPr>
             </a:pPr>
             <a:r>
-              <a:t>파일 전체 3/4 · 이 슬라이드 다음에 같은 파일의 나머지 줄이 이어집니다.</a:t>
+              <a:t>파일 전체 1/4 · 이 슬라이드 다음에 같은 파일의 나머지 줄이 이어집니다.</a:t>
             </a:r>
           </a:p>
         </p:txBody>
@@ -9852,7 +10023,7 @@
               </a:defRPr>
             </a:pPr>
             <a:r>
-              <a:t>파일을 계속 작성하고 저장한다 (4/4)</a:t>
+              <a:t>파일을 계속 작성하고 저장한다 (2/4)</a:t>
             </a:r>
           </a:p>
         </p:txBody>
@@ -10027,7 +10198,7 @@
               </a:defRPr>
             </a:pPr>
             <a:r>
-              <a:t>현재 단계 12/13    |    현재 폴더 ~/ros2_curri/agv_ws    |    현재 터미널</a:t>
+              <a:t>현재 단계 10/13    |    현재 폴더 ~/ros2_curri/agv_ws    |    현재 터미널</a:t>
             </a:r>
           </a:p>
         </p:txBody>
@@ -10186,40 +10357,48 @@
               </a:defRPr>
             </a:pPr>
             <a:r>
-              <a:t>  rclcpp::TimerBase::SharedPtr timer_;</a:t>
+              <a:t>{</a:t>
             </a:r>
             <a:br/>
             <a:r>
-              <a:t>};</a:t>
+              <a:t>public:</a:t>
+            </a:r>
+            <a:br/>
+            <a:r>
+              <a:t>  StatusPublisher()</a:t>
+            </a:r>
+            <a:br/>
+            <a:r>
+              <a:t>  : Node("cpp_status_publisher"), sequence_(0)</a:t>
+            </a:r>
+            <a:br/>
+            <a:r>
+              <a:t>  {</a:t>
+            </a:r>
+            <a:br/>
+            <a:r>
+              <a:t>    // ros2 run 뒤 --ros-args -p message:=... 로 바꿀 수 있는 parameter입니다.</a:t>
+            </a:r>
+            <a:br/>
+            <a:r>
+              <a:t>    this-&gt;declare_parameter&lt;std::string&gt;("message", "C++ AGV 상태 정상");</a:t>
             </a:r>
             <a:br/>
             <a:br/>
             <a:r>
-              <a:t>int main(int argc, char * argv[])</a:t>
+              <a:t>    // String 메시지를 /cpp_status topic으로 publish합니다. 마지막 10은 queue depth입니다.</a:t>
             </a:r>
             <a:br/>
             <a:r>
-              <a:t>{</a:t>
+              <a:t>    publisher_ = this-&gt;create_publisher&lt;std_msgs::msg::String&gt;("/cpp_status", 10);</a:t>
             </a:r>
             <a:br/>
             <a:r>
-              <a:t>  rclcpp::init(argc, argv);</a:t>
+              <a:t>    timer_ = this-&gt;create_wall_timer(1s, std::bind(&amp;StatusPublisher::publish_status, this));</a:t>
             </a:r>
             <a:br/>
             <a:r>
-              <a:t>  rclcpp::spin(std::make_shared&lt;StatusPublisher&gt;());</a:t>
-            </a:r>
-            <a:br/>
-            <a:r>
-              <a:t>  rclcpp::shutdown();</a:t>
-            </a:r>
-            <a:br/>
-            <a:r>
-              <a:t>  return 0;</a:t>
-            </a:r>
-            <a:br/>
-            <a:r>
-              <a:t>}</a:t>
+              <a:t>  }</a:t>
             </a:r>
           </a:p>
         </p:txBody>
@@ -10258,7 +10437,7 @@
               </a:defRPr>
             </a:pPr>
             <a:r>
-              <a:t>파일 전체 4/4 · 이 슬라이드 다음에 같은 파일의 나머지 줄이 이어집니다.</a:t>
+              <a:t>파일 전체 2/4 · 이 슬라이드 다음에 같은 파일의 나머지 줄이 이어집니다.</a:t>
             </a:r>
           </a:p>
         </p:txBody>
@@ -10315,7 +10494,7 @@
               </a:defRPr>
             </a:pPr>
             <a:r>
-              <a:t>build → source → run 순서로 실행한다</a:t>
+              <a:t>파일을 계속 작성하고 저장한다 (3/4)</a:t>
             </a:r>
           </a:p>
         </p:txBody>
@@ -10354,7 +10533,7 @@
               </a:defRPr>
             </a:pPr>
             <a:r>
-              <a:t>새 파일 또는 수정 파일은 build와 source 뒤에만 실행 이름·설정에 반영됩니다.</a:t>
+              <a:t>~/ros2_curri/agv_ws/src/agv_cpp_examples/src/status_publisher.cpp</a:t>
             </a:r>
           </a:p>
         </p:txBody>
@@ -10490,23 +10669,124 @@
               </a:defRPr>
             </a:pPr>
             <a:r>
-              <a:t>현재 단계 실행    |    현재 폴더 ~/ros2_curri/agv_ws    |    현재 터미널</a:t>
-            </a:r>
-          </a:p>
-        </p:txBody>
-      </p:sp>
-      <p:sp>
-        <p:nvSpPr>
-          <p:cNvPr id="7" name="Rounded Rectangle 6"/>
+              <a:t>현재 단계 11/13    |    현재 폴더 ~/ros2_curri/agv_ws    |    현재 터미널</a:t>
+            </a:r>
+          </a:p>
+        </p:txBody>
+      </p:sp>
+      <p:sp>
+        <p:nvSpPr>
+          <p:cNvPr id="7" name="TextBox 6"/>
+          <p:cNvSpPr txBox="1"/>
+          <p:nvPr/>
+        </p:nvSpPr>
+        <p:spPr>
+          <a:xfrm>
+            <a:off x="658368" y="1627632"/>
+            <a:ext cx="10972800" cy="256032"/>
+          </a:xfrm>
+          <a:prstGeom prst="rect">
+            <a:avLst/>
+          </a:prstGeom>
+          <a:noFill/>
+        </p:spPr>
+        <p:txBody>
+          <a:bodyPr wrap="square" lIns="73152" rIns="73152" tIns="36576" bIns="36576">
+            <a:spAutoFit/>
+          </a:bodyPr>
+          <a:lstStyle/>
+          <a:p>
+            <a:pPr algn="l">
+              <a:spcAft>
+                <a:spcPts val="0"/>
+              </a:spcAft>
+              <a:defRPr sz="1500" b="1">
+                <a:solidFill>
+                  <a:srgbClr val="122C4E"/>
+                </a:solidFill>
+                <a:latin typeface="Noto Sans CJK KR"/>
+              </a:defRPr>
+            </a:pPr>
+            <a:r>
+              <a:t>이번 단계: 파일의 전체 내용을 중간 생략 없이 작성합니다. 아래 줄 범위를 끝까지 입력하세요.</a:t>
+            </a:r>
+          </a:p>
+        </p:txBody>
+      </p:sp>
+      <p:sp>
+        <p:nvSpPr>
+          <p:cNvPr id="8" name="Rectangle 7"/>
           <p:cNvSpPr/>
           <p:nvPr/>
         </p:nvSpPr>
         <p:spPr>
           <a:xfrm>
-            <a:off x="658368" y="1700784"/>
-            <a:ext cx="10972800" cy="3182112"/>
-          </a:xfrm>
-          <a:prstGeom prst="roundRect">
+            <a:off x="658368" y="1956816"/>
+            <a:ext cx="10972800" cy="603504"/>
+          </a:xfrm>
+          <a:prstGeom prst="rect">
+            <a:avLst/>
+          </a:prstGeom>
+          <a:solidFill>
+            <a:srgbClr val="F4F7FB"/>
+          </a:solidFill>
+          <a:ln>
+            <a:solidFill>
+              <a:srgbClr val="F4F7FB"/>
+            </a:solidFill>
+          </a:ln>
+        </p:spPr>
+        <p:style>
+          <a:lnRef idx="1">
+            <a:schemeClr val="accent1"/>
+          </a:lnRef>
+          <a:fillRef idx="3">
+            <a:schemeClr val="accent1"/>
+          </a:fillRef>
+          <a:effectRef idx="2">
+            <a:schemeClr val="accent1"/>
+          </a:effectRef>
+          <a:fontRef idx="minor">
+            <a:schemeClr val="lt1"/>
+          </a:fontRef>
+        </p:style>
+        <p:txBody>
+          <a:bodyPr rtlCol="0" anchor="ctr" wrap="square" lIns="73152" rIns="73152" tIns="36576" bIns="36576"/>
+          <a:lstStyle/>
+          <a:p>
+            <a:pPr algn="l">
+              <a:spcAft>
+                <a:spcPts val="0"/>
+              </a:spcAft>
+              <a:defRPr sz="1400" b="0">
+                <a:solidFill>
+                  <a:srgbClr val="122C4E"/>
+                </a:solidFill>
+                <a:latin typeface="DejaVu Sans Mono"/>
+              </a:defRPr>
+            </a:pPr>
+            <a:r>
+              <a:t>파일 생성: mkdir -p ~/ros2_curri/agv_ws/src/agv_cpp_examples/src</a:t>
+            </a:r>
+            <a:br/>
+            <a:r>
+              <a:t>파일 열기: nano ~/ros2_curri/agv_ws/src/agv_cpp_examples/src/status_publisher.cpp</a:t>
+            </a:r>
+          </a:p>
+        </p:txBody>
+      </p:sp>
+      <p:sp>
+        <p:nvSpPr>
+          <p:cNvPr id="9" name="Rectangle 8"/>
+          <p:cNvSpPr/>
+          <p:nvPr/>
+        </p:nvSpPr>
+        <p:spPr>
+          <a:xfrm>
+            <a:off x="658368" y="2706624"/>
+            <a:ext cx="10972800" cy="3364992"/>
+          </a:xfrm>
+          <a:prstGeom prst="rect">
             <a:avLst/>
           </a:prstGeom>
           <a:solidFill>
@@ -10533,52 +10813,74 @@
           </a:fontRef>
         </p:style>
         <p:txBody>
-          <a:bodyPr rtlCol="0" anchor="ctr" wrap="square" lIns="73152" rIns="73152" tIns="36576" bIns="36576"/>
-          <a:lstStyle/>
-          <a:p>
-            <a:pPr algn="l">
-              <a:spcAft>
-                <a:spcPts val="0"/>
-              </a:spcAft>
-              <a:defRPr sz="1600" b="0">
+          <a:bodyPr rtlCol="0" anchor="ctr" wrap="square" lIns="164592" rIns="164592" tIns="109728" bIns="36576"/>
+          <a:lstStyle/>
+          <a:p>
+            <a:pPr algn="l">
+              <a:spcAft>
+                <a:spcPts val="0"/>
+              </a:spcAft>
+              <a:defRPr sz="1400" b="0">
                 <a:solidFill>
                   <a:srgbClr val="FFFFFF"/>
                 </a:solidFill>
                 <a:latin typeface="DejaVu Sans Mono"/>
               </a:defRPr>
             </a:pPr>
-            <a:r>
-              <a:t>cd ~/ros2_curri/agv_ws</a:t>
-            </a:r>
             <a:br/>
             <a:r>
-              <a:t>source /opt/ros/jazzy/setup.bash</a:t>
+              <a:t>private:</a:t>
             </a:r>
             <a:br/>
             <a:r>
-              <a:t>colcon build --symlink-install</a:t>
+              <a:t>  void publish_status()</a:t>
             </a:r>
             <a:br/>
             <a:r>
-              <a:t>source install/setup.bash</a:t>
+              <a:t>  {</a:t>
             </a:r>
             <a:br/>
             <a:r>
-              <a:t>ros2 run agv_cpp_examples status_publisher</a:t>
-            </a:r>
-          </a:p>
-        </p:txBody>
-      </p:sp>
-      <p:sp>
-        <p:nvSpPr>
-          <p:cNvPr id="8" name="TextBox 7"/>
+              <a:t>    auto message = std_msgs::msg::String();</a:t>
+            </a:r>
+            <a:br/>
+            <a:r>
+              <a:t>    message.data = this-&gt;get_parameter("message").as_string() + " #" + std::to_string(sequence_++);</a:t>
+            </a:r>
+            <a:br/>
+            <a:r>
+              <a:t>    publisher_-&gt;publish(message);</a:t>
+            </a:r>
+            <a:br/>
+            <a:r>
+              <a:t>    RCLCPP_INFO(this-&gt;get_logger(), "published: %s", message.data.c_str());</a:t>
+            </a:r>
+            <a:br/>
+            <a:r>
+              <a:t>  }</a:t>
+            </a:r>
+            <a:br/>
+            <a:br/>
+            <a:r>
+              <a:t>  std::size_t sequence_;</a:t>
+            </a:r>
+            <a:br/>
+            <a:r>
+              <a:t>  rclcpp::Publisher&lt;std_msgs::msg::String&gt;::SharedPtr publisher_;</a:t>
+            </a:r>
+          </a:p>
+        </p:txBody>
+      </p:sp>
+      <p:sp>
+        <p:nvSpPr>
+          <p:cNvPr id="10" name="TextBox 9"/>
           <p:cNvSpPr txBox="1"/>
           <p:nvPr/>
         </p:nvSpPr>
         <p:spPr>
           <a:xfrm>
-            <a:off x="786384" y="5239512"/>
-            <a:ext cx="1261872" cy="237744"/>
+            <a:off x="749808" y="6181344"/>
+            <a:ext cx="10789920" cy="201168"/>
           </a:xfrm>
           <a:prstGeom prst="rect">
             <a:avLst/>
@@ -10595,54 +10897,15 @@
               <a:spcAft>
                 <a:spcPts val="0"/>
               </a:spcAft>
-              <a:defRPr sz="1800" b="1">
-                <a:solidFill>
-                  <a:srgbClr val="2A8B5A"/>
-                </a:solidFill>
-                <a:latin typeface="Noto Sans CJK KR"/>
-              </a:defRPr>
-            </a:pPr>
-            <a:r>
-              <a:t>확인 기준</a:t>
-            </a:r>
-          </a:p>
-        </p:txBody>
-      </p:sp>
-      <p:sp>
-        <p:nvSpPr>
-          <p:cNvPr id="9" name="TextBox 8"/>
-          <p:cNvSpPr txBox="1"/>
-          <p:nvPr/>
-        </p:nvSpPr>
-        <p:spPr>
-          <a:xfrm>
-            <a:off x="786384" y="5532120"/>
-            <a:ext cx="10469880" cy="420624"/>
-          </a:xfrm>
-          <a:prstGeom prst="rect">
-            <a:avLst/>
-          </a:prstGeom>
-          <a:noFill/>
-        </p:spPr>
-        <p:txBody>
-          <a:bodyPr wrap="square" lIns="73152" rIns="73152" tIns="36576" bIns="36576">
-            <a:spAutoFit/>
-          </a:bodyPr>
-          <a:lstStyle/>
-          <a:p>
-            <a:pPr algn="l">
-              <a:spcAft>
-                <a:spcPts val="0"/>
-              </a:spcAft>
-              <a:defRPr sz="1800" b="0">
-                <a:solidFill>
-                  <a:srgbClr val="122C4E"/>
-                </a:solidFill>
-                <a:latin typeface="Noto Sans CJK KR"/>
-              </a:defRPr>
-            </a:pPr>
-            <a:r>
-              <a:t>build/install/log와 두 언어의 실행 파일을 source 뒤에 확인한다.</a:t>
+              <a:defRPr sz="1000" b="0">
+                <a:solidFill>
+                  <a:srgbClr val="5C6672"/>
+                </a:solidFill>
+                <a:latin typeface="Noto Sans CJK KR"/>
+              </a:defRPr>
+            </a:pPr>
+            <a:r>
+              <a:t>파일 전체 3/4 · 이 슬라이드 다음에 같은 파일의 나머지 줄이 이어집니다.</a:t>
             </a:r>
           </a:p>
         </p:txBody>
@@ -11160,7 +11423,7 @@
               </a:defRPr>
             </a:pPr>
             <a:r>
-              <a:t>정상 결과: 실제 환경에서 확인한 출력</a:t>
+              <a:t>파일을 계속 작성하고 저장한다 (4/4)</a:t>
             </a:r>
           </a:p>
         </p:txBody>
@@ -11199,7 +11462,7 @@
               </a:defRPr>
             </a:pPr>
             <a:r>
-              <a:t>실제 ROS 2 환경의 파일·패키지·구성 검증 로그</a:t>
+              <a:t>~/ros2_curri/agv_ws/src/agv_cpp_examples/src/status_publisher.cpp</a:t>
             </a:r>
           </a:p>
         </p:txBody>
@@ -11282,30 +11545,64 @@
           </a:p>
         </p:txBody>
       </p:sp>
-      <p:pic>
-        <p:nvPicPr>
-          <p:cNvPr id="6" name="Picture 5" descr="validation_terminal.png"/>
-          <p:cNvPicPr>
-            <a:picLocks noChangeAspect="1"/>
-          </p:cNvPicPr>
-          <p:nvPr/>
-        </p:nvPicPr>
-        <p:blipFill>
-          <a:blip r:embed="rId2"/>
-          <a:stretch>
-            <a:fillRect/>
-          </a:stretch>
-        </p:blipFill>
-        <p:spPr>
-          <a:xfrm>
-            <a:off x="790956" y="1884338"/>
-            <a:ext cx="10607040" cy="3738546"/>
-          </a:xfrm>
-          <a:prstGeom prst="rect">
-            <a:avLst/>
-          </a:prstGeom>
-        </p:spPr>
-      </p:pic>
+      <p:sp>
+        <p:nvSpPr>
+          <p:cNvPr id="6" name="Rectangle 5"/>
+          <p:cNvSpPr/>
+          <p:nvPr/>
+        </p:nvSpPr>
+        <p:spPr>
+          <a:xfrm>
+            <a:off x="566928" y="1188720"/>
+            <a:ext cx="11064240" cy="347472"/>
+          </a:xfrm>
+          <a:prstGeom prst="rect">
+            <a:avLst/>
+          </a:prstGeom>
+          <a:solidFill>
+            <a:srgbClr val="F4F7FB"/>
+          </a:solidFill>
+          <a:ln>
+            <a:solidFill>
+              <a:srgbClr val="F4F7FB"/>
+            </a:solidFill>
+          </a:ln>
+        </p:spPr>
+        <p:style>
+          <a:lnRef idx="1">
+            <a:schemeClr val="accent1"/>
+          </a:lnRef>
+          <a:fillRef idx="3">
+            <a:schemeClr val="accent1"/>
+          </a:fillRef>
+          <a:effectRef idx="2">
+            <a:schemeClr val="accent1"/>
+          </a:effectRef>
+          <a:fontRef idx="minor">
+            <a:schemeClr val="lt1"/>
+          </a:fontRef>
+        </p:style>
+        <p:txBody>
+          <a:bodyPr rtlCol="0" anchor="ctr" wrap="square" lIns="73152" rIns="73152" tIns="36576" bIns="36576"/>
+          <a:lstStyle/>
+          <a:p>
+            <a:pPr algn="l">
+              <a:spcAft>
+                <a:spcPts val="0"/>
+              </a:spcAft>
+              <a:defRPr sz="1300" b="1">
+                <a:solidFill>
+                  <a:srgbClr val="122C4E"/>
+                </a:solidFill>
+                <a:latin typeface="Noto Sans CJK KR"/>
+              </a:defRPr>
+            </a:pPr>
+            <a:r>
+              <a:t>현재 단계 12/13    |    현재 폴더 ~/ros2_curri/agv_ws    |    현재 터미널</a:t>
+            </a:r>
+          </a:p>
+        </p:txBody>
+      </p:sp>
       <p:sp>
         <p:nvSpPr>
           <p:cNvPr id="7" name="TextBox 6"/>
@@ -11314,8 +11611,8 @@
         </p:nvSpPr>
         <p:spPr>
           <a:xfrm>
-            <a:off x="777240" y="6217920"/>
-            <a:ext cx="10607040" cy="182880"/>
+            <a:off x="658368" y="1627632"/>
+            <a:ext cx="10972800" cy="256032"/>
           </a:xfrm>
           <a:prstGeom prst="rect">
             <a:avLst/>
@@ -11328,19 +11625,211 @@
           </a:bodyPr>
           <a:lstStyle/>
           <a:p>
-            <a:pPr algn="ctr">
-              <a:spcAft>
-                <a:spcPts val="0"/>
-              </a:spcAft>
-              <a:defRPr sz="1100" b="1">
-                <a:solidFill>
-                  <a:srgbClr val="2A8B5A"/>
-                </a:solidFill>
-                <a:latin typeface="Noto Sans CJK KR"/>
-              </a:defRPr>
-            </a:pPr>
-            <a:r>
-              <a:t>① 명령/설정  ② 정상 출력 또는 화면  ③ 다음 검증 명령으로 재확인</a:t>
+            <a:pPr algn="l">
+              <a:spcAft>
+                <a:spcPts val="0"/>
+              </a:spcAft>
+              <a:defRPr sz="1500" b="1">
+                <a:solidFill>
+                  <a:srgbClr val="122C4E"/>
+                </a:solidFill>
+                <a:latin typeface="Noto Sans CJK KR"/>
+              </a:defRPr>
+            </a:pPr>
+            <a:r>
+              <a:t>이번 단계: 파일의 전체 내용을 중간 생략 없이 작성합니다. 아래 줄 범위를 끝까지 입력하세요.</a:t>
+            </a:r>
+          </a:p>
+        </p:txBody>
+      </p:sp>
+      <p:sp>
+        <p:nvSpPr>
+          <p:cNvPr id="8" name="Rectangle 7"/>
+          <p:cNvSpPr/>
+          <p:nvPr/>
+        </p:nvSpPr>
+        <p:spPr>
+          <a:xfrm>
+            <a:off x="658368" y="1956816"/>
+            <a:ext cx="10972800" cy="603504"/>
+          </a:xfrm>
+          <a:prstGeom prst="rect">
+            <a:avLst/>
+          </a:prstGeom>
+          <a:solidFill>
+            <a:srgbClr val="F4F7FB"/>
+          </a:solidFill>
+          <a:ln>
+            <a:solidFill>
+              <a:srgbClr val="F4F7FB"/>
+            </a:solidFill>
+          </a:ln>
+        </p:spPr>
+        <p:style>
+          <a:lnRef idx="1">
+            <a:schemeClr val="accent1"/>
+          </a:lnRef>
+          <a:fillRef idx="3">
+            <a:schemeClr val="accent1"/>
+          </a:fillRef>
+          <a:effectRef idx="2">
+            <a:schemeClr val="accent1"/>
+          </a:effectRef>
+          <a:fontRef idx="minor">
+            <a:schemeClr val="lt1"/>
+          </a:fontRef>
+        </p:style>
+        <p:txBody>
+          <a:bodyPr rtlCol="0" anchor="ctr" wrap="square" lIns="73152" rIns="73152" tIns="36576" bIns="36576"/>
+          <a:lstStyle/>
+          <a:p>
+            <a:pPr algn="l">
+              <a:spcAft>
+                <a:spcPts val="0"/>
+              </a:spcAft>
+              <a:defRPr sz="1400" b="0">
+                <a:solidFill>
+                  <a:srgbClr val="122C4E"/>
+                </a:solidFill>
+                <a:latin typeface="DejaVu Sans Mono"/>
+              </a:defRPr>
+            </a:pPr>
+            <a:r>
+              <a:t>파일 생성: mkdir -p ~/ros2_curri/agv_ws/src/agv_cpp_examples/src</a:t>
+            </a:r>
+            <a:br/>
+            <a:r>
+              <a:t>파일 열기: nano ~/ros2_curri/agv_ws/src/agv_cpp_examples/src/status_publisher.cpp</a:t>
+            </a:r>
+          </a:p>
+        </p:txBody>
+      </p:sp>
+      <p:sp>
+        <p:nvSpPr>
+          <p:cNvPr id="9" name="Rectangle 8"/>
+          <p:cNvSpPr/>
+          <p:nvPr/>
+        </p:nvSpPr>
+        <p:spPr>
+          <a:xfrm>
+            <a:off x="658368" y="2706624"/>
+            <a:ext cx="10972800" cy="3364992"/>
+          </a:xfrm>
+          <a:prstGeom prst="rect">
+            <a:avLst/>
+          </a:prstGeom>
+          <a:solidFill>
+            <a:srgbClr val="1D232D"/>
+          </a:solidFill>
+          <a:ln>
+            <a:solidFill>
+              <a:srgbClr val="1D232D"/>
+            </a:solidFill>
+          </a:ln>
+        </p:spPr>
+        <p:style>
+          <a:lnRef idx="1">
+            <a:schemeClr val="accent1"/>
+          </a:lnRef>
+          <a:fillRef idx="3">
+            <a:schemeClr val="accent1"/>
+          </a:fillRef>
+          <a:effectRef idx="2">
+            <a:schemeClr val="accent1"/>
+          </a:effectRef>
+          <a:fontRef idx="minor">
+            <a:schemeClr val="lt1"/>
+          </a:fontRef>
+        </p:style>
+        <p:txBody>
+          <a:bodyPr rtlCol="0" anchor="ctr" wrap="square" lIns="164592" rIns="164592" tIns="109728" bIns="36576"/>
+          <a:lstStyle/>
+          <a:p>
+            <a:pPr algn="l">
+              <a:spcAft>
+                <a:spcPts val="0"/>
+              </a:spcAft>
+              <a:defRPr sz="1400" b="0">
+                <a:solidFill>
+                  <a:srgbClr val="FFFFFF"/>
+                </a:solidFill>
+                <a:latin typeface="DejaVu Sans Mono"/>
+              </a:defRPr>
+            </a:pPr>
+            <a:r>
+              <a:t>  rclcpp::TimerBase::SharedPtr timer_;</a:t>
+            </a:r>
+            <a:br/>
+            <a:r>
+              <a:t>};</a:t>
+            </a:r>
+            <a:br/>
+            <a:br/>
+            <a:r>
+              <a:t>int main(int argc, char * argv[])</a:t>
+            </a:r>
+            <a:br/>
+            <a:r>
+              <a:t>{</a:t>
+            </a:r>
+            <a:br/>
+            <a:r>
+              <a:t>  rclcpp::init(argc, argv);</a:t>
+            </a:r>
+            <a:br/>
+            <a:r>
+              <a:t>  rclcpp::spin(std::make_shared&lt;StatusPublisher&gt;());</a:t>
+            </a:r>
+            <a:br/>
+            <a:r>
+              <a:t>  rclcpp::shutdown();</a:t>
+            </a:r>
+            <a:br/>
+            <a:r>
+              <a:t>  return 0;</a:t>
+            </a:r>
+            <a:br/>
+            <a:r>
+              <a:t>}</a:t>
+            </a:r>
+          </a:p>
+        </p:txBody>
+      </p:sp>
+      <p:sp>
+        <p:nvSpPr>
+          <p:cNvPr id="10" name="TextBox 9"/>
+          <p:cNvSpPr txBox="1"/>
+          <p:nvPr/>
+        </p:nvSpPr>
+        <p:spPr>
+          <a:xfrm>
+            <a:off x="749808" y="6181344"/>
+            <a:ext cx="10789920" cy="201168"/>
+          </a:xfrm>
+          <a:prstGeom prst="rect">
+            <a:avLst/>
+          </a:prstGeom>
+          <a:noFill/>
+        </p:spPr>
+        <p:txBody>
+          <a:bodyPr wrap="square" lIns="73152" rIns="73152" tIns="36576" bIns="36576">
+            <a:spAutoFit/>
+          </a:bodyPr>
+          <a:lstStyle/>
+          <a:p>
+            <a:pPr algn="l">
+              <a:spcAft>
+                <a:spcPts val="0"/>
+              </a:spcAft>
+              <a:defRPr sz="1000" b="0">
+                <a:solidFill>
+                  <a:srgbClr val="5C6672"/>
+                </a:solidFill>
+                <a:latin typeface="Noto Sans CJK KR"/>
+              </a:defRPr>
+            </a:pPr>
+            <a:r>
+              <a:t>파일 전체 4/4 · 이 슬라이드 다음에 같은 파일의 나머지 줄이 이어집니다.</a:t>
             </a:r>
           </a:p>
         </p:txBody>
@@ -11397,7 +11886,7 @@
               </a:defRPr>
             </a:pPr>
             <a:r>
-              <a:t>객관적 검증 명령으로 완료를 확인한다</a:t>
+              <a:t>build → source → run 순서로 실행한다</a:t>
             </a:r>
           </a:p>
         </p:txBody>
@@ -11436,7 +11925,7 @@
               </a:defRPr>
             </a:pPr>
             <a:r>
-              <a:t>화면만 보지 말고 topic·frame·파일·parameter를 다시 확인합니다.</a:t>
+              <a:t>새 파일 또는 수정 파일은 build와 source 뒤에만 실행 이름·설정에 반영됩니다.</a:t>
             </a:r>
           </a:p>
         </p:txBody>
@@ -11572,7 +12061,7 @@
               </a:defRPr>
             </a:pPr>
             <a:r>
-              <a:t>현재 단계 검증    |    현재 폴더 ~/ros2_curri/agv_ws    |    현재 터미널</a:t>
+              <a:t>현재 단계 실행    |    현재 폴더 ~/ros2_curri/agv_ws    |    현재 터미널</a:t>
             </a:r>
           </a:p>
         </p:txBody>
@@ -11585,8 +12074,8 @@
         </p:nvSpPr>
         <p:spPr>
           <a:xfrm>
-            <a:off x="658368" y="1755648"/>
-            <a:ext cx="10972800" cy="2148840"/>
+            <a:off x="658368" y="1700784"/>
+            <a:ext cx="10972800" cy="3182112"/>
           </a:xfrm>
           <a:prstGeom prst="roundRect">
             <a:avLst/>
@@ -11630,58 +12119,47 @@
               </a:defRPr>
             </a:pPr>
             <a:r>
-              <a:t>pwd</a:t>
+              <a:t>cd ~/ros2_curri/agv_ws</a:t>
             </a:r>
             <a:br/>
             <a:r>
-              <a:t>find src -maxdepth 2 -name package.xml -o -name CMakeLists.txt</a:t>
+              <a:t>source /opt/ros/jazzy/setup.bash</a:t>
             </a:r>
             <a:br/>
             <a:r>
-              <a:t>ros2 pkg prefix agv_cpp_examples</a:t>
-            </a:r>
-          </a:p>
-        </p:txBody>
-      </p:sp>
-      <p:sp>
-        <p:nvSpPr>
-          <p:cNvPr id="8" name="Rounded Rectangle 7"/>
-          <p:cNvSpPr/>
-          <p:nvPr/>
-        </p:nvSpPr>
-        <p:spPr>
-          <a:xfrm>
-            <a:off x="658368" y="4206240"/>
-            <a:ext cx="10972800" cy="1554480"/>
-          </a:xfrm>
-          <a:prstGeom prst="roundRect">
-            <a:avLst/>
-          </a:prstGeom>
-          <a:solidFill>
-            <a:srgbClr val="F4F7FB"/>
-          </a:solidFill>
-          <a:ln>
-            <a:solidFill>
-              <a:srgbClr val="D1DFD5"/>
-            </a:solidFill>
-          </a:ln>
-        </p:spPr>
-        <p:style>
-          <a:lnRef idx="1">
-            <a:schemeClr val="accent1"/>
-          </a:lnRef>
-          <a:fillRef idx="3">
-            <a:schemeClr val="accent1"/>
-          </a:fillRef>
-          <a:effectRef idx="2">
-            <a:schemeClr val="accent1"/>
-          </a:effectRef>
-          <a:fontRef idx="minor">
-            <a:schemeClr val="lt1"/>
-          </a:fontRef>
-        </p:style>
-        <p:txBody>
-          <a:bodyPr rtlCol="0" anchor="ctr" wrap="square" lIns="73152" rIns="73152" tIns="36576" bIns="36576"/>
+              <a:t>colcon build --symlink-install</a:t>
+            </a:r>
+            <a:br/>
+            <a:r>
+              <a:t>source install/setup.bash</a:t>
+            </a:r>
+            <a:br/>
+            <a:r>
+              <a:t>ros2 run agv_cpp_examples status_publisher</a:t>
+            </a:r>
+          </a:p>
+        </p:txBody>
+      </p:sp>
+      <p:sp>
+        <p:nvSpPr>
+          <p:cNvPr id="8" name="TextBox 7"/>
+          <p:cNvSpPr txBox="1"/>
+          <p:nvPr/>
+        </p:nvSpPr>
+        <p:spPr>
+          <a:xfrm>
+            <a:off x="786384" y="5239512"/>
+            <a:ext cx="1261872" cy="237744"/>
+          </a:xfrm>
+          <a:prstGeom prst="rect">
+            <a:avLst/>
+          </a:prstGeom>
+          <a:noFill/>
+        </p:spPr>
+        <p:txBody>
+          <a:bodyPr wrap="square" lIns="73152" rIns="73152" tIns="36576" bIns="36576">
+            <a:spAutoFit/>
+          </a:bodyPr>
           <a:lstStyle/>
           <a:p>
             <a:pPr algn="l">
@@ -11696,19 +12174,7 @@
               </a:defRPr>
             </a:pPr>
             <a:r>
-              <a:t>완료 체크</a:t>
-            </a:r>
-            <a:br/>
-            <a:r>
-              <a:t>□ 명령이 오류 없이 실행된다.</a:t>
-            </a:r>
-            <a:br/>
-            <a:r>
-              <a:t>□ 기대한 파일·topic·frame·parameter 이름이 보인다.</a:t>
-            </a:r>
-            <a:br/>
-            <a:r>
-              <a:t>□ 값의 단위와 방향을 한 문장으로 설명할 수 있다.</a:t>
+              <a:t>확인 기준</a:t>
             </a:r>
           </a:p>
         </p:txBody>
@@ -11721,8 +12187,8 @@
         </p:nvSpPr>
         <p:spPr>
           <a:xfrm>
-            <a:off x="731520" y="5989320"/>
-            <a:ext cx="10789920" cy="237744"/>
+            <a:off x="786384" y="5532120"/>
+            <a:ext cx="10469880" cy="420624"/>
           </a:xfrm>
           <a:prstGeom prst="rect">
             <a:avLst/>
@@ -11739,7 +12205,7 @@
               <a:spcAft>
                 <a:spcPts val="0"/>
               </a:spcAft>
-              <a:defRPr sz="1500" b="1">
+              <a:defRPr sz="1800" b="0">
                 <a:solidFill>
                   <a:srgbClr val="122C4E"/>
                 </a:solidFill>
@@ -11747,7 +12213,7 @@
               </a:defRPr>
             </a:pPr>
             <a:r>
-              <a:t>완료 조건: build/install/log와 두 언어의 실행 파일을 source 뒤에 확인한다.</a:t>
+              <a:t>build/install/log와 두 언어의 실행 파일을 source 뒤에 확인한다.</a:t>
             </a:r>
           </a:p>
         </p:txBody>
@@ -11804,7 +12270,7 @@
               </a:defRPr>
             </a:pPr>
             <a:r>
-              <a:t>막히면: 증상 → 우선 확인 → 재검증</a:t>
+              <a:t>정상 결과: 실제 환경에서 확인한 출력</a:t>
             </a:r>
           </a:p>
         </p:txBody>
@@ -11843,7 +12309,7 @@
               </a:defRPr>
             </a:pPr>
             <a:r>
-              <a:t>오류 메시지를 숨기지 않고 같은 순서로 점검합니다.</a:t>
+              <a:t>실제 ROS 2 환경의 파일·패키지·구성 검증 로그</a:t>
             </a:r>
           </a:p>
         </p:txBody>
@@ -11926,119 +12392,40 @@
           </a:p>
         </p:txBody>
       </p:sp>
-      <p:sp>
-        <p:nvSpPr>
-          <p:cNvPr id="6" name="Rectangle 5"/>
-          <p:cNvSpPr/>
-          <p:nvPr/>
-        </p:nvSpPr>
-        <p:spPr>
-          <a:xfrm>
-            <a:off x="566928" y="1188720"/>
-            <a:ext cx="11064240" cy="347472"/>
-          </a:xfrm>
-          <a:prstGeom prst="rect">
-            <a:avLst/>
-          </a:prstGeom>
-          <a:solidFill>
-            <a:srgbClr val="F4F7FB"/>
-          </a:solidFill>
-          <a:ln>
-            <a:solidFill>
-              <a:srgbClr val="F4F7FB"/>
-            </a:solidFill>
-          </a:ln>
-        </p:spPr>
-        <p:style>
-          <a:lnRef idx="1">
-            <a:schemeClr val="accent1"/>
-          </a:lnRef>
-          <a:fillRef idx="3">
-            <a:schemeClr val="accent1"/>
-          </a:fillRef>
-          <a:effectRef idx="2">
-            <a:schemeClr val="accent1"/>
-          </a:effectRef>
-          <a:fontRef idx="minor">
-            <a:schemeClr val="lt1"/>
-          </a:fontRef>
-        </p:style>
-        <p:txBody>
-          <a:bodyPr rtlCol="0" anchor="ctr" wrap="square" lIns="73152" rIns="73152" tIns="36576" bIns="36576"/>
-          <a:lstStyle/>
-          <a:p>
-            <a:pPr algn="l">
-              <a:spcAft>
-                <a:spcPts val="0"/>
-              </a:spcAft>
-              <a:defRPr sz="1300" b="1">
-                <a:solidFill>
-                  <a:srgbClr val="122C4E"/>
-                </a:solidFill>
-                <a:latin typeface="Noto Sans CJK KR"/>
-              </a:defRPr>
-            </a:pPr>
-            <a:r>
-              <a:t>현재 단계 오류 대응    |    현재 폴더 ~/ros2_curri/agv_ws    |    현재 터미널</a:t>
-            </a:r>
-          </a:p>
-        </p:txBody>
-      </p:sp>
-      <p:sp>
-        <p:nvSpPr>
-          <p:cNvPr id="7" name="Rounded Rectangle 6"/>
-          <p:cNvSpPr/>
-          <p:nvPr/>
-        </p:nvSpPr>
-        <p:spPr>
-          <a:xfrm>
-            <a:off x="694944" y="1755648"/>
-            <a:ext cx="10972800" cy="1115568"/>
-          </a:xfrm>
-          <a:prstGeom prst="roundRect">
-            <a:avLst/>
-          </a:prstGeom>
-          <a:solidFill>
-            <a:srgbClr val="FFF7F4"/>
-          </a:solidFill>
-          <a:ln>
-            <a:solidFill>
-              <a:srgbClr val="EDBEB4"/>
-            </a:solidFill>
-          </a:ln>
-        </p:spPr>
-        <p:style>
-          <a:lnRef idx="1">
-            <a:schemeClr val="accent1"/>
-          </a:lnRef>
-          <a:fillRef idx="3">
-            <a:schemeClr val="accent1"/>
-          </a:fillRef>
-          <a:effectRef idx="2">
-            <a:schemeClr val="accent1"/>
-          </a:effectRef>
-          <a:fontRef idx="minor">
-            <a:schemeClr val="lt1"/>
-          </a:fontRef>
-        </p:style>
-        <p:txBody>
-          <a:bodyPr rtlCol="0" anchor="ctr"/>
-          <a:lstStyle/>
-          <a:p>
-            <a:pPr algn="ctr"/>
-          </a:p>
-        </p:txBody>
-      </p:sp>
-      <p:sp>
-        <p:nvSpPr>
-          <p:cNvPr id="8" name="TextBox 7"/>
+      <p:pic>
+        <p:nvPicPr>
+          <p:cNvPr id="6" name="Picture 5" descr="validation_terminal.png"/>
+          <p:cNvPicPr>
+            <a:picLocks noChangeAspect="1"/>
+          </p:cNvPicPr>
+          <p:nvPr/>
+        </p:nvPicPr>
+        <p:blipFill>
+          <a:blip r:embed="rId2"/>
+          <a:stretch>
+            <a:fillRect/>
+          </a:stretch>
+        </p:blipFill>
+        <p:spPr>
+          <a:xfrm>
+            <a:off x="790956" y="1884338"/>
+            <a:ext cx="10607040" cy="3738546"/>
+          </a:xfrm>
+          <a:prstGeom prst="rect">
+            <a:avLst/>
+          </a:prstGeom>
+        </p:spPr>
+      </p:pic>
+      <p:sp>
+        <p:nvSpPr>
+          <p:cNvPr id="7" name="TextBox 6"/>
           <p:cNvSpPr txBox="1"/>
           <p:nvPr/>
         </p:nvSpPr>
         <p:spPr>
           <a:xfrm>
-            <a:off x="896112" y="1901952"/>
-            <a:ext cx="2926080" cy="274320"/>
+            <a:off x="777240" y="6144768"/>
+            <a:ext cx="10607040" cy="310896"/>
           </a:xfrm>
           <a:prstGeom prst="rect">
             <a:avLst/>
@@ -12051,228 +12438,19 @@
           </a:bodyPr>
           <a:lstStyle/>
           <a:p>
-            <a:pPr algn="l">
-              <a:spcAft>
-                <a:spcPts val="0"/>
-              </a:spcAft>
-              <a:defRPr sz="1800" b="1">
-                <a:solidFill>
-                  <a:srgbClr val="BE3B3B"/>
-                </a:solidFill>
-                <a:latin typeface="Noto Sans CJK KR"/>
-              </a:defRPr>
-            </a:pPr>
-            <a:r>
-              <a:t>증상 1: 패키지를 찾을 수 없음</a:t>
-            </a:r>
-          </a:p>
-        </p:txBody>
-      </p:sp>
-      <p:sp>
-        <p:nvSpPr>
-          <p:cNvPr id="9" name="TextBox 8"/>
-          <p:cNvSpPr txBox="1"/>
-          <p:nvPr/>
-        </p:nvSpPr>
-        <p:spPr>
-          <a:xfrm>
-            <a:off x="3794760" y="1883664"/>
-            <a:ext cx="7543800" cy="621792"/>
-          </a:xfrm>
-          <a:prstGeom prst="rect">
-            <a:avLst/>
-          </a:prstGeom>
-          <a:noFill/>
-        </p:spPr>
-        <p:txBody>
-          <a:bodyPr wrap="square" lIns="73152" rIns="73152" tIns="36576" bIns="36576">
-            <a:spAutoFit/>
-          </a:bodyPr>
-          <a:lstStyle/>
-          <a:p>
-            <a:pPr algn="l">
-              <a:spcAft>
-                <a:spcPts val="0"/>
-              </a:spcAft>
-              <a:defRPr sz="1600" b="0">
-                <a:solidFill>
-                  <a:srgbClr val="122C4E"/>
-                </a:solidFill>
-                <a:latin typeface="Noto Sans CJK KR"/>
-              </a:defRPr>
-            </a:pPr>
-            <a:r>
-              <a:t>우선 확인: ~/ros2_curri/agv_ws에서 build했는지와 install/setup.bash source를 확인한다.</a:t>
-            </a:r>
-            <a:br/>
-            <a:r>
-              <a:t>수정 후: pwd</a:t>
-            </a:r>
-          </a:p>
-        </p:txBody>
-      </p:sp>
-      <p:sp>
-        <p:nvSpPr>
-          <p:cNvPr id="10" name="Rounded Rectangle 9"/>
-          <p:cNvSpPr/>
-          <p:nvPr/>
-        </p:nvSpPr>
-        <p:spPr>
-          <a:xfrm>
-            <a:off x="694944" y="3172968"/>
-            <a:ext cx="10972800" cy="1115568"/>
-          </a:xfrm>
-          <a:prstGeom prst="roundRect">
-            <a:avLst/>
-          </a:prstGeom>
-          <a:solidFill>
-            <a:srgbClr val="FFF7F4"/>
-          </a:solidFill>
-          <a:ln>
-            <a:solidFill>
-              <a:srgbClr val="EDBEB4"/>
-            </a:solidFill>
-          </a:ln>
-        </p:spPr>
-        <p:style>
-          <a:lnRef idx="1">
-            <a:schemeClr val="accent1"/>
-          </a:lnRef>
-          <a:fillRef idx="3">
-            <a:schemeClr val="accent1"/>
-          </a:fillRef>
-          <a:effectRef idx="2">
-            <a:schemeClr val="accent1"/>
-          </a:effectRef>
-          <a:fontRef idx="minor">
-            <a:schemeClr val="lt1"/>
-          </a:fontRef>
-        </p:style>
-        <p:txBody>
-          <a:bodyPr rtlCol="0" anchor="ctr"/>
-          <a:lstStyle/>
-          <a:p>
-            <a:pPr algn="ctr"/>
-          </a:p>
-        </p:txBody>
-      </p:sp>
-      <p:sp>
-        <p:nvSpPr>
-          <p:cNvPr id="11" name="TextBox 10"/>
-          <p:cNvSpPr txBox="1"/>
-          <p:nvPr/>
-        </p:nvSpPr>
-        <p:spPr>
-          <a:xfrm>
-            <a:off x="896112" y="3319272"/>
-            <a:ext cx="2926080" cy="274320"/>
-          </a:xfrm>
-          <a:prstGeom prst="rect">
-            <a:avLst/>
-          </a:prstGeom>
-          <a:noFill/>
-        </p:spPr>
-        <p:txBody>
-          <a:bodyPr wrap="square" lIns="73152" rIns="73152" tIns="36576" bIns="36576">
-            <a:spAutoFit/>
-          </a:bodyPr>
-          <a:lstStyle/>
-          <a:p>
-            <a:pPr algn="l">
-              <a:spcAft>
-                <a:spcPts val="0"/>
-              </a:spcAft>
-              <a:defRPr sz="1800" b="1">
-                <a:solidFill>
-                  <a:srgbClr val="BE3B3B"/>
-                </a:solidFill>
-                <a:latin typeface="Noto Sans CJK KR"/>
-              </a:defRPr>
-            </a:pPr>
-            <a:r>
-              <a:t>증상 2: 중복 패키지 오류</a:t>
-            </a:r>
-          </a:p>
-        </p:txBody>
-      </p:sp>
-      <p:sp>
-        <p:nvSpPr>
-          <p:cNvPr id="12" name="TextBox 11"/>
-          <p:cNvSpPr txBox="1"/>
-          <p:nvPr/>
-        </p:nvSpPr>
-        <p:spPr>
-          <a:xfrm>
-            <a:off x="3794760" y="3300984"/>
-            <a:ext cx="7543800" cy="621792"/>
-          </a:xfrm>
-          <a:prstGeom prst="rect">
-            <a:avLst/>
-          </a:prstGeom>
-          <a:noFill/>
-        </p:spPr>
-        <p:txBody>
-          <a:bodyPr wrap="square" lIns="73152" rIns="73152" tIns="36576" bIns="36576">
-            <a:spAutoFit/>
-          </a:bodyPr>
-          <a:lstStyle/>
-          <a:p>
-            <a:pPr algn="l">
-              <a:spcAft>
-                <a:spcPts val="0"/>
-              </a:spcAft>
-              <a:defRPr sz="1600" b="0">
-                <a:solidFill>
-                  <a:srgbClr val="122C4E"/>
-                </a:solidFill>
-                <a:latin typeface="Noto Sans CJK KR"/>
-              </a:defRPr>
-            </a:pPr>
-            <a:r>
-              <a:t>우선 확인: src 안에 같은 package name이 두 개 없는지 확인한다.</a:t>
-            </a:r>
-            <a:br/>
-            <a:r>
-              <a:t>수정 후: pwd</a:t>
-            </a:r>
-          </a:p>
-        </p:txBody>
-      </p:sp>
-      <p:sp>
-        <p:nvSpPr>
-          <p:cNvPr id="13" name="TextBox 12"/>
-          <p:cNvSpPr txBox="1"/>
-          <p:nvPr/>
-        </p:nvSpPr>
-        <p:spPr>
-          <a:xfrm>
-            <a:off x="822960" y="5102352"/>
-            <a:ext cx="10607040" cy="402336"/>
-          </a:xfrm>
-          <a:prstGeom prst="rect">
-            <a:avLst/>
-          </a:prstGeom>
-          <a:noFill/>
-        </p:spPr>
-        <p:txBody>
-          <a:bodyPr wrap="square" lIns="73152" rIns="73152" tIns="36576" bIns="36576">
-            <a:spAutoFit/>
-          </a:bodyPr>
-          <a:lstStyle/>
-          <a:p>
             <a:pPr algn="ctr">
               <a:spcAft>
                 <a:spcPts val="0"/>
               </a:spcAft>
-              <a:defRPr sz="1800" b="1">
-                <a:solidFill>
-                  <a:srgbClr val="DB7E22"/>
-                </a:solidFill>
-                <a:latin typeface="Noto Sans CJK KR"/>
-              </a:defRPr>
-            </a:pPr>
-            <a:r>
-              <a:t>공통 순서: ① 현재 폴더 ② source ③ 파일 경로 ④ 이름/타입/단위 ⑤ build·source 후 재실행</a:t>
+              <a:defRPr sz="1100" b="1">
+                <a:solidFill>
+                  <a:srgbClr val="2A8B5A"/>
+                </a:solidFill>
+                <a:latin typeface="Noto Sans CJK KR"/>
+              </a:defRPr>
+            </a:pPr>
+            <a:r>
+              <a:t>화면에서 확인: ① 명령/설정  ② 정상 출력 또는 화면  ③ 다음 검증 명령으로 재확인</a:t>
             </a:r>
           </a:p>
         </p:txBody>
@@ -12329,7 +12507,7 @@
               </a:defRPr>
             </a:pPr>
             <a:r>
-              <a:t>미니 실습: 값 하나를 바꾸고 결과를 비교한다</a:t>
+              <a:t>객관적 검증 명령으로 완료를 확인한다</a:t>
             </a:r>
           </a:p>
         </p:txBody>
@@ -12368,7 +12546,7 @@
               </a:defRPr>
             </a:pPr>
             <a:r>
-              <a:t>정상 결과를 만든 뒤에는 한 번에 하나의 값만 바꿉니다.</a:t>
+              <a:t>화면만 보지 말고 topic·frame·파일·parameter를 다시 확인합니다.</a:t>
             </a:r>
           </a:p>
         </p:txBody>
@@ -12504,7 +12682,7 @@
               </a:defRPr>
             </a:pPr>
             <a:r>
-              <a:t>현재 단계 미니 실습    |    현재 폴더 ~/ros2_curri/agv_ws    |    현재 터미널</a:t>
+              <a:t>현재 단계 검증    |    현재 폴더 ~/ros2_curri/agv_ws    |    현재 터미널</a:t>
             </a:r>
           </a:p>
         </p:txBody>
@@ -12517,18 +12695,18 @@
         </p:nvSpPr>
         <p:spPr>
           <a:xfrm>
-            <a:off x="749808" y="1874519"/>
-            <a:ext cx="10652760" cy="1993392"/>
+            <a:off x="658368" y="1755648"/>
+            <a:ext cx="10972800" cy="2148840"/>
           </a:xfrm>
           <a:prstGeom prst="roundRect">
             <a:avLst/>
           </a:prstGeom>
           <a:solidFill>
-            <a:srgbClr val="FFF8EB"/>
+            <a:srgbClr val="1D232D"/>
           </a:solidFill>
           <a:ln>
             <a:solidFill>
-              <a:srgbClr val="ECC680"/>
+              <a:srgbClr val="1D232D"/>
             </a:solidFill>
           </a:ln>
         </p:spPr>
@@ -12550,33 +12728,111 @@
           <a:bodyPr rtlCol="0" anchor="ctr" wrap="square" lIns="73152" rIns="73152" tIns="36576" bIns="36576"/>
           <a:lstStyle/>
           <a:p>
-            <a:pPr algn="ctr">
-              <a:spcAft>
-                <a:spcPts val="0"/>
-              </a:spcAft>
-              <a:defRPr sz="2300" b="1">
-                <a:solidFill>
-                  <a:srgbClr val="122C4E"/>
-                </a:solidFill>
-                <a:latin typeface="Noto Sans CJK KR"/>
-              </a:defRPr>
-            </a:pPr>
-            <a:r>
-              <a:t>C++ publisher의 message 파라미터를 바꾸고 /cpp_status에서 바뀐 문자열을 확인한다.</a:t>
-            </a:r>
-          </a:p>
-        </p:txBody>
-      </p:sp>
-      <p:sp>
-        <p:nvSpPr>
-          <p:cNvPr id="8" name="TextBox 7"/>
+            <a:pPr algn="l">
+              <a:spcAft>
+                <a:spcPts val="0"/>
+              </a:spcAft>
+              <a:defRPr sz="1600" b="0">
+                <a:solidFill>
+                  <a:srgbClr val="FFFFFF"/>
+                </a:solidFill>
+                <a:latin typeface="DejaVu Sans Mono"/>
+              </a:defRPr>
+            </a:pPr>
+            <a:r>
+              <a:t>pwd</a:t>
+            </a:r>
+            <a:br/>
+            <a:r>
+              <a:t>find src -maxdepth 2 -name package.xml -o -name CMakeLists.txt</a:t>
+            </a:r>
+            <a:br/>
+            <a:r>
+              <a:t>ros2 pkg prefix agv_cpp_examples</a:t>
+            </a:r>
+          </a:p>
+        </p:txBody>
+      </p:sp>
+      <p:sp>
+        <p:nvSpPr>
+          <p:cNvPr id="8" name="Rounded Rectangle 7"/>
+          <p:cNvSpPr/>
+          <p:nvPr/>
+        </p:nvSpPr>
+        <p:spPr>
+          <a:xfrm>
+            <a:off x="658368" y="4206240"/>
+            <a:ext cx="10972800" cy="1554480"/>
+          </a:xfrm>
+          <a:prstGeom prst="roundRect">
+            <a:avLst/>
+          </a:prstGeom>
+          <a:solidFill>
+            <a:srgbClr val="F4F7FB"/>
+          </a:solidFill>
+          <a:ln>
+            <a:solidFill>
+              <a:srgbClr val="D1DFD5"/>
+            </a:solidFill>
+          </a:ln>
+        </p:spPr>
+        <p:style>
+          <a:lnRef idx="1">
+            <a:schemeClr val="accent1"/>
+          </a:lnRef>
+          <a:fillRef idx="3">
+            <a:schemeClr val="accent1"/>
+          </a:fillRef>
+          <a:effectRef idx="2">
+            <a:schemeClr val="accent1"/>
+          </a:effectRef>
+          <a:fontRef idx="minor">
+            <a:schemeClr val="lt1"/>
+          </a:fontRef>
+        </p:style>
+        <p:txBody>
+          <a:bodyPr rtlCol="0" anchor="ctr" wrap="square" lIns="73152" rIns="73152" tIns="36576" bIns="36576"/>
+          <a:lstStyle/>
+          <a:p>
+            <a:pPr algn="l">
+              <a:spcAft>
+                <a:spcPts val="0"/>
+              </a:spcAft>
+              <a:defRPr sz="1800" b="1">
+                <a:solidFill>
+                  <a:srgbClr val="2A8B5A"/>
+                </a:solidFill>
+                <a:latin typeface="Noto Sans CJK KR"/>
+              </a:defRPr>
+            </a:pPr>
+            <a:r>
+              <a:t>완료 체크</a:t>
+            </a:r>
+            <a:br/>
+            <a:r>
+              <a:t>□ 명령이 오류 없이 실행된다.</a:t>
+            </a:r>
+            <a:br/>
+            <a:r>
+              <a:t>□ 기대한 파일·topic·frame·parameter 이름이 보인다.</a:t>
+            </a:r>
+            <a:br/>
+            <a:r>
+              <a:t>□ 값의 단위와 방향을 한 문장으로 설명할 수 있다.</a:t>
+            </a:r>
+          </a:p>
+        </p:txBody>
+      </p:sp>
+      <p:sp>
+        <p:nvSpPr>
+          <p:cNvPr id="9" name="TextBox 8"/>
           <p:cNvSpPr txBox="1"/>
           <p:nvPr/>
         </p:nvSpPr>
         <p:spPr>
           <a:xfrm>
-            <a:off x="877824" y="4590288"/>
-            <a:ext cx="10241280" cy="594360"/>
+            <a:off x="731520" y="5989320"/>
+            <a:ext cx="10789920" cy="237744"/>
           </a:xfrm>
           <a:prstGeom prst="rect">
             <a:avLst/>
@@ -12589,19 +12845,19 @@
           </a:bodyPr>
           <a:lstStyle/>
           <a:p>
-            <a:pPr algn="ctr">
-              <a:spcAft>
-                <a:spcPts val="0"/>
-              </a:spcAft>
-              <a:defRPr sz="1900" b="1">
-                <a:solidFill>
-                  <a:srgbClr val="DB7E22"/>
-                </a:solidFill>
-                <a:latin typeface="Noto Sans CJK KR"/>
-              </a:defRPr>
-            </a:pPr>
-            <a:r>
-              <a:t>기록할 것: 바꾼 값(단위) · 기대한 변화 · 실제 출력/화면 · 원래 값으로 되돌린 결과</a:t>
+            <a:pPr algn="l">
+              <a:spcAft>
+                <a:spcPts val="0"/>
+              </a:spcAft>
+              <a:defRPr sz="1500" b="1">
+                <a:solidFill>
+                  <a:srgbClr val="122C4E"/>
+                </a:solidFill>
+                <a:latin typeface="Noto Sans CJK KR"/>
+              </a:defRPr>
+            </a:pPr>
+            <a:r>
+              <a:t>완료 조건: build/install/log와 두 언어의 실행 파일을 source 뒤에 확인한다.</a:t>
             </a:r>
           </a:p>
         </p:txBody>
@@ -12658,7 +12914,7 @@
               </a:defRPr>
             </a:pPr>
             <a:r>
-              <a:t>체크포인트를 저장하고 다음 모듈로 넘긴다</a:t>
+              <a:t>막히면: 증상 → 우선 확인 → 재검증</a:t>
             </a:r>
           </a:p>
         </p:txBody>
@@ -12697,7 +12953,7 @@
               </a:defRPr>
             </a:pPr>
             <a:r>
-              <a:t>현재 Complete는 다음 Starter의 기준선입니다.</a:t>
+              <a:t>오류 메시지를 숨기지 않고 같은 순서로 점검합니다.</a:t>
             </a:r>
           </a:p>
         </p:txBody>
@@ -12833,7 +13089,7 @@
               </a:defRPr>
             </a:pPr>
             <a:r>
-              <a:t>현재 단계 체크포인트    |    현재 폴더 ~/ros2_curri/agv_ws    |    현재 터미널</a:t>
+              <a:t>현재 단계 오류 대응    |    현재 폴더 ~/ros2_curri/agv_ws    |    현재 터미널</a:t>
             </a:r>
           </a:p>
         </p:txBody>
@@ -12846,18 +13102,18 @@
         </p:nvSpPr>
         <p:spPr>
           <a:xfrm>
-            <a:off x="685800" y="1737360"/>
-            <a:ext cx="10972800" cy="3611880"/>
+            <a:off x="694944" y="1755648"/>
+            <a:ext cx="10972800" cy="1115568"/>
           </a:xfrm>
           <a:prstGeom prst="roundRect">
             <a:avLst/>
           </a:prstGeom>
           <a:solidFill>
-            <a:srgbClr val="F4F7FB"/>
+            <a:srgbClr val="FFF7F4"/>
           </a:solidFill>
           <a:ln>
             <a:solidFill>
-              <a:srgbClr val="D2DCE8"/>
+              <a:srgbClr val="EDBEB4"/>
             </a:solidFill>
           </a:ln>
         </p:spPr>
@@ -12891,97 +13147,33 @@
         </p:nvSpPr>
         <p:spPr>
           <a:xfrm>
-            <a:off x="896112" y="1993392"/>
-            <a:ext cx="10332720" cy="2971800"/>
-          </a:xfrm>
-          <a:prstGeom prst="rect">
-            <a:avLst/>
-          </a:prstGeom>
-          <a:noFill/>
-        </p:spPr>
-        <p:txBody>
-          <a:bodyPr wrap="square" lIns="109728" rIns="109728">
+            <a:off x="896112" y="1901952"/>
+            <a:ext cx="2926080" cy="274320"/>
+          </a:xfrm>
+          <a:prstGeom prst="rect">
+            <a:avLst/>
+          </a:prstGeom>
+          <a:noFill/>
+        </p:spPr>
+        <p:txBody>
+          <a:bodyPr wrap="square" lIns="73152" rIns="73152" tIns="36576" bIns="36576">
             <a:spAutoFit/>
           </a:bodyPr>
           <a:lstStyle/>
           <a:p>
-            <a:pPr>
-              <a:spcAft>
-                <a:spcPts val="800"/>
-              </a:spcAft>
-              <a:defRPr sz="1800">
-                <a:solidFill>
-                  <a:srgbClr val="122C4E"/>
-                </a:solidFill>
-                <a:latin typeface="Noto Sans CJK KR"/>
-              </a:defRPr>
-            </a:pPr>
-            <a:r>
-              <a:t>• □ 완료 화면: build/install/log와 두 언어의 실행 파일을 source 뒤에 확인한다.</a:t>
-            </a:r>
-          </a:p>
-          <a:p>
-            <a:pPr>
-              <a:spcAft>
-                <a:spcPts val="800"/>
-              </a:spcAft>
-              <a:defRPr sz="1800">
-                <a:solidFill>
-                  <a:srgbClr val="122C4E"/>
-                </a:solidFill>
-                <a:latin typeface="Noto Sans CJK KR"/>
-              </a:defRPr>
-            </a:pPr>
-            <a:r>
-              <a:t>• □ Complete 파일: blocks/A_ros2_basics/M02_workspace_package/complete/</a:t>
-            </a:r>
-          </a:p>
-          <a:p>
-            <a:pPr>
-              <a:spcAft>
-                <a:spcPts val="800"/>
-              </a:spcAft>
-              <a:defRPr sz="1800">
-                <a:solidFill>
-                  <a:srgbClr val="122C4E"/>
-                </a:solidFill>
-                <a:latin typeface="Noto Sans CJK KR"/>
-              </a:defRPr>
-            </a:pPr>
-            <a:r>
-              <a:t>• □ 정상 로그·캡처: logs/validation.log, screenshots/validation_terminal.png</a:t>
-            </a:r>
-          </a:p>
-          <a:p>
-            <a:pPr>
-              <a:spcAft>
-                <a:spcPts val="800"/>
-              </a:spcAft>
-              <a:defRPr sz="1800">
-                <a:solidFill>
-                  <a:srgbClr val="122C4E"/>
-                </a:solidFill>
-                <a:latin typeface="Noto Sans CJK KR"/>
-              </a:defRPr>
-            </a:pPr>
-            <a:r>
-              <a:t>• □ 버전 식별: CHECKSUM_or_TAG.txt의 SHA-256 manifest</a:t>
-            </a:r>
-          </a:p>
-          <a:p>
-            <a:pPr>
-              <a:spcAft>
-                <a:spcPts val="800"/>
-              </a:spcAft>
-              <a:defRPr sz="1800">
-                <a:solidFill>
-                  <a:srgbClr val="122C4E"/>
-                </a:solidFill>
-                <a:latin typeface="Noto Sans CJK KR"/>
-              </a:defRPr>
-            </a:pPr>
-            <a:r>
-              <a:t>• □ 다음 시작 조건: M03 Python Pub/Sub</a:t>
+            <a:pPr algn="l">
+              <a:spcAft>
+                <a:spcPts val="0"/>
+              </a:spcAft>
+              <a:defRPr sz="1800" b="1">
+                <a:solidFill>
+                  <a:srgbClr val="BE3B3B"/>
+                </a:solidFill>
+                <a:latin typeface="Noto Sans CJK KR"/>
+              </a:defRPr>
+            </a:pPr>
+            <a:r>
+              <a:t>증상 1: 패키지를 찾을 수 없음</a:t>
             </a:r>
           </a:p>
         </p:txBody>
@@ -12994,8 +13186,8 @@
         </p:nvSpPr>
         <p:spPr>
           <a:xfrm>
-            <a:off x="868680" y="5596128"/>
-            <a:ext cx="10515600" cy="338328"/>
+            <a:off x="3794760" y="1883664"/>
+            <a:ext cx="7543800" cy="621792"/>
           </a:xfrm>
           <a:prstGeom prst="rect">
             <a:avLst/>
@@ -13008,19 +13200,189 @@
           </a:bodyPr>
           <a:lstStyle/>
           <a:p>
+            <a:pPr algn="l">
+              <a:spcAft>
+                <a:spcPts val="0"/>
+              </a:spcAft>
+              <a:defRPr sz="1600" b="0">
+                <a:solidFill>
+                  <a:srgbClr val="122C4E"/>
+                </a:solidFill>
+                <a:latin typeface="Noto Sans CJK KR"/>
+              </a:defRPr>
+            </a:pPr>
+            <a:r>
+              <a:t>우선 확인: ~/ros2_curri/agv_ws에서 build했는지와 install/setup.bash source를 확인한다.</a:t>
+            </a:r>
+            <a:br/>
+            <a:r>
+              <a:t>수정 후: pwd</a:t>
+            </a:r>
+          </a:p>
+        </p:txBody>
+      </p:sp>
+      <p:sp>
+        <p:nvSpPr>
+          <p:cNvPr id="10" name="Rounded Rectangle 9"/>
+          <p:cNvSpPr/>
+          <p:nvPr/>
+        </p:nvSpPr>
+        <p:spPr>
+          <a:xfrm>
+            <a:off x="694944" y="3172968"/>
+            <a:ext cx="10972800" cy="1115568"/>
+          </a:xfrm>
+          <a:prstGeom prst="roundRect">
+            <a:avLst/>
+          </a:prstGeom>
+          <a:solidFill>
+            <a:srgbClr val="FFF7F4"/>
+          </a:solidFill>
+          <a:ln>
+            <a:solidFill>
+              <a:srgbClr val="EDBEB4"/>
+            </a:solidFill>
+          </a:ln>
+        </p:spPr>
+        <p:style>
+          <a:lnRef idx="1">
+            <a:schemeClr val="accent1"/>
+          </a:lnRef>
+          <a:fillRef idx="3">
+            <a:schemeClr val="accent1"/>
+          </a:fillRef>
+          <a:effectRef idx="2">
+            <a:schemeClr val="accent1"/>
+          </a:effectRef>
+          <a:fontRef idx="minor">
+            <a:schemeClr val="lt1"/>
+          </a:fontRef>
+        </p:style>
+        <p:txBody>
+          <a:bodyPr rtlCol="0" anchor="ctr"/>
+          <a:lstStyle/>
+          <a:p>
+            <a:pPr algn="ctr"/>
+          </a:p>
+        </p:txBody>
+      </p:sp>
+      <p:sp>
+        <p:nvSpPr>
+          <p:cNvPr id="11" name="TextBox 10"/>
+          <p:cNvSpPr txBox="1"/>
+          <p:nvPr/>
+        </p:nvSpPr>
+        <p:spPr>
+          <a:xfrm>
+            <a:off x="896112" y="3319272"/>
+            <a:ext cx="2926080" cy="274320"/>
+          </a:xfrm>
+          <a:prstGeom prst="rect">
+            <a:avLst/>
+          </a:prstGeom>
+          <a:noFill/>
+        </p:spPr>
+        <p:txBody>
+          <a:bodyPr wrap="square" lIns="73152" rIns="73152" tIns="36576" bIns="36576">
+            <a:spAutoFit/>
+          </a:bodyPr>
+          <a:lstStyle/>
+          <a:p>
+            <a:pPr algn="l">
+              <a:spcAft>
+                <a:spcPts val="0"/>
+              </a:spcAft>
+              <a:defRPr sz="1800" b="1">
+                <a:solidFill>
+                  <a:srgbClr val="BE3B3B"/>
+                </a:solidFill>
+                <a:latin typeface="Noto Sans CJK KR"/>
+              </a:defRPr>
+            </a:pPr>
+            <a:r>
+              <a:t>증상 2: 중복 패키지 오류</a:t>
+            </a:r>
+          </a:p>
+        </p:txBody>
+      </p:sp>
+      <p:sp>
+        <p:nvSpPr>
+          <p:cNvPr id="12" name="TextBox 11"/>
+          <p:cNvSpPr txBox="1"/>
+          <p:nvPr/>
+        </p:nvSpPr>
+        <p:spPr>
+          <a:xfrm>
+            <a:off x="3794760" y="3300984"/>
+            <a:ext cx="7543800" cy="621792"/>
+          </a:xfrm>
+          <a:prstGeom prst="rect">
+            <a:avLst/>
+          </a:prstGeom>
+          <a:noFill/>
+        </p:spPr>
+        <p:txBody>
+          <a:bodyPr wrap="square" lIns="73152" rIns="73152" tIns="36576" bIns="36576">
+            <a:spAutoFit/>
+          </a:bodyPr>
+          <a:lstStyle/>
+          <a:p>
+            <a:pPr algn="l">
+              <a:spcAft>
+                <a:spcPts val="0"/>
+              </a:spcAft>
+              <a:defRPr sz="1600" b="0">
+                <a:solidFill>
+                  <a:srgbClr val="122C4E"/>
+                </a:solidFill>
+                <a:latin typeface="Noto Sans CJK KR"/>
+              </a:defRPr>
+            </a:pPr>
+            <a:r>
+              <a:t>우선 확인: src 안에 같은 package name이 두 개 없는지 확인한다.</a:t>
+            </a:r>
+            <a:br/>
+            <a:r>
+              <a:t>수정 후: pwd</a:t>
+            </a:r>
+          </a:p>
+        </p:txBody>
+      </p:sp>
+      <p:sp>
+        <p:nvSpPr>
+          <p:cNvPr id="13" name="TextBox 12"/>
+          <p:cNvSpPr txBox="1"/>
+          <p:nvPr/>
+        </p:nvSpPr>
+        <p:spPr>
+          <a:xfrm>
+            <a:off x="822960" y="5102352"/>
+            <a:ext cx="10607040" cy="402336"/>
+          </a:xfrm>
+          <a:prstGeom prst="rect">
+            <a:avLst/>
+          </a:prstGeom>
+          <a:noFill/>
+        </p:spPr>
+        <p:txBody>
+          <a:bodyPr wrap="square" lIns="73152" rIns="73152" tIns="36576" bIns="36576">
+            <a:spAutoFit/>
+          </a:bodyPr>
+          <a:lstStyle/>
+          <a:p>
             <a:pPr algn="ctr">
               <a:spcAft>
                 <a:spcPts val="0"/>
               </a:spcAft>
-              <a:defRPr sz="1700" b="1">
-                <a:solidFill>
-                  <a:srgbClr val="2A8B5A"/>
-                </a:solidFill>
-                <a:latin typeface="Noto Sans CJK KR"/>
-              </a:defRPr>
-            </a:pPr>
-            <a:r>
-              <a:t>다음 모듈을 시작하기 전, 이 슬라이드의 Complete와 다음 모듈의 Starter를 비교합니다.</a:t>
+              <a:defRPr sz="1800" b="1">
+                <a:solidFill>
+                  <a:srgbClr val="DB7E22"/>
+                </a:solidFill>
+                <a:latin typeface="Noto Sans CJK KR"/>
+              </a:defRPr>
+            </a:pPr>
+            <a:r>
+              <a:t>공통 순서: ① 현재 폴더 ② source ③ 파일 경로 ④ 이름/타입/단위 ⑤ build·source 후 재실행</a:t>
             </a:r>
           </a:p>
         </p:txBody>
@@ -13077,6 +13439,754 @@
               </a:defRPr>
             </a:pPr>
             <a:r>
+              <a:t>미니 실습: 값 하나를 바꾸고 결과를 비교한다</a:t>
+            </a:r>
+          </a:p>
+        </p:txBody>
+      </p:sp>
+      <p:sp>
+        <p:nvSpPr>
+          <p:cNvPr id="3" name="TextBox 2"/>
+          <p:cNvSpPr txBox="1"/>
+          <p:nvPr/>
+        </p:nvSpPr>
+        <p:spPr>
+          <a:xfrm>
+            <a:off x="603504" y="859536"/>
+            <a:ext cx="10698480" cy="292608"/>
+          </a:xfrm>
+          <a:prstGeom prst="rect">
+            <a:avLst/>
+          </a:prstGeom>
+          <a:noFill/>
+        </p:spPr>
+        <p:txBody>
+          <a:bodyPr wrap="square" lIns="73152" rIns="73152" tIns="36576" bIns="36576">
+            <a:spAutoFit/>
+          </a:bodyPr>
+          <a:lstStyle/>
+          <a:p>
+            <a:pPr algn="l">
+              <a:spcAft>
+                <a:spcPts val="0"/>
+              </a:spcAft>
+              <a:defRPr sz="1700" b="0">
+                <a:solidFill>
+                  <a:srgbClr val="5C6672"/>
+                </a:solidFill>
+                <a:latin typeface="Noto Sans CJK KR"/>
+              </a:defRPr>
+            </a:pPr>
+            <a:r>
+              <a:t>정상 결과를 만든 뒤에는 한 번에 하나의 값만 바꿉니다.</a:t>
+            </a:r>
+          </a:p>
+        </p:txBody>
+      </p:sp>
+      <p:sp>
+        <p:nvSpPr>
+          <p:cNvPr id="4" name="TextBox 3"/>
+          <p:cNvSpPr txBox="1"/>
+          <p:nvPr/>
+        </p:nvSpPr>
+        <p:spPr>
+          <a:xfrm>
+            <a:off x="530352" y="6510528"/>
+            <a:ext cx="7772400" cy="201168"/>
+          </a:xfrm>
+          <a:prstGeom prst="rect">
+            <a:avLst/>
+          </a:prstGeom>
+          <a:noFill/>
+        </p:spPr>
+        <p:txBody>
+          <a:bodyPr wrap="square" lIns="73152" rIns="73152" tIns="36576" bIns="36576">
+            <a:spAutoFit/>
+          </a:bodyPr>
+          <a:lstStyle/>
+          <a:p>
+            <a:pPr algn="l">
+              <a:spcAft>
+                <a:spcPts val="0"/>
+              </a:spcAft>
+              <a:defRPr sz="1000" b="0">
+                <a:solidFill>
+                  <a:srgbClr val="5C6672"/>
+                </a:solidFill>
+                <a:latin typeface="Noto Sans CJK KR"/>
+              </a:defRPr>
+            </a:pPr>
+            <a:r>
+              <a:t>ROS 2 Jazzy · Gazebo Harmonic · M02 · 따라 하기형 AGV 실습</a:t>
+            </a:r>
+          </a:p>
+        </p:txBody>
+      </p:sp>
+      <p:sp>
+        <p:nvSpPr>
+          <p:cNvPr id="5" name="TextBox 4"/>
+          <p:cNvSpPr txBox="1"/>
+          <p:nvPr/>
+        </p:nvSpPr>
+        <p:spPr>
+          <a:xfrm>
+            <a:off x="9144000" y="6510528"/>
+            <a:ext cx="2468880" cy="201168"/>
+          </a:xfrm>
+          <a:prstGeom prst="rect">
+            <a:avLst/>
+          </a:prstGeom>
+          <a:noFill/>
+        </p:spPr>
+        <p:txBody>
+          <a:bodyPr wrap="square" lIns="73152" rIns="73152" tIns="36576" bIns="36576">
+            <a:spAutoFit/>
+          </a:bodyPr>
+          <a:lstStyle/>
+          <a:p>
+            <a:pPr algn="r">
+              <a:spcAft>
+                <a:spcPts val="0"/>
+              </a:spcAft>
+              <a:defRPr sz="1000" b="0">
+                <a:solidFill>
+                  <a:srgbClr val="5C6672"/>
+                </a:solidFill>
+                <a:latin typeface="Noto Sans CJK KR"/>
+              </a:defRPr>
+            </a:pPr>
+            <a:r>
+              <a:t>명령·파일 경로는 슬라이드에서 복사 가능</a:t>
+            </a:r>
+          </a:p>
+        </p:txBody>
+      </p:sp>
+      <p:sp>
+        <p:nvSpPr>
+          <p:cNvPr id="6" name="Rectangle 5"/>
+          <p:cNvSpPr/>
+          <p:nvPr/>
+        </p:nvSpPr>
+        <p:spPr>
+          <a:xfrm>
+            <a:off x="566928" y="1188720"/>
+            <a:ext cx="11064240" cy="347472"/>
+          </a:xfrm>
+          <a:prstGeom prst="rect">
+            <a:avLst/>
+          </a:prstGeom>
+          <a:solidFill>
+            <a:srgbClr val="F4F7FB"/>
+          </a:solidFill>
+          <a:ln>
+            <a:solidFill>
+              <a:srgbClr val="F4F7FB"/>
+            </a:solidFill>
+          </a:ln>
+        </p:spPr>
+        <p:style>
+          <a:lnRef idx="1">
+            <a:schemeClr val="accent1"/>
+          </a:lnRef>
+          <a:fillRef idx="3">
+            <a:schemeClr val="accent1"/>
+          </a:fillRef>
+          <a:effectRef idx="2">
+            <a:schemeClr val="accent1"/>
+          </a:effectRef>
+          <a:fontRef idx="minor">
+            <a:schemeClr val="lt1"/>
+          </a:fontRef>
+        </p:style>
+        <p:txBody>
+          <a:bodyPr rtlCol="0" anchor="ctr" wrap="square" lIns="73152" rIns="73152" tIns="36576" bIns="36576"/>
+          <a:lstStyle/>
+          <a:p>
+            <a:pPr algn="l">
+              <a:spcAft>
+                <a:spcPts val="0"/>
+              </a:spcAft>
+              <a:defRPr sz="1300" b="1">
+                <a:solidFill>
+                  <a:srgbClr val="122C4E"/>
+                </a:solidFill>
+                <a:latin typeface="Noto Sans CJK KR"/>
+              </a:defRPr>
+            </a:pPr>
+            <a:r>
+              <a:t>현재 단계 미니 실습    |    현재 폴더 ~/ros2_curri/agv_ws    |    현재 터미널</a:t>
+            </a:r>
+          </a:p>
+        </p:txBody>
+      </p:sp>
+      <p:sp>
+        <p:nvSpPr>
+          <p:cNvPr id="7" name="Rounded Rectangle 6"/>
+          <p:cNvSpPr/>
+          <p:nvPr/>
+        </p:nvSpPr>
+        <p:spPr>
+          <a:xfrm>
+            <a:off x="749808" y="1874519"/>
+            <a:ext cx="10652760" cy="1993392"/>
+          </a:xfrm>
+          <a:prstGeom prst="roundRect">
+            <a:avLst/>
+          </a:prstGeom>
+          <a:solidFill>
+            <a:srgbClr val="FFF8EB"/>
+          </a:solidFill>
+          <a:ln>
+            <a:solidFill>
+              <a:srgbClr val="ECC680"/>
+            </a:solidFill>
+          </a:ln>
+        </p:spPr>
+        <p:style>
+          <a:lnRef idx="1">
+            <a:schemeClr val="accent1"/>
+          </a:lnRef>
+          <a:fillRef idx="3">
+            <a:schemeClr val="accent1"/>
+          </a:fillRef>
+          <a:effectRef idx="2">
+            <a:schemeClr val="accent1"/>
+          </a:effectRef>
+          <a:fontRef idx="minor">
+            <a:schemeClr val="lt1"/>
+          </a:fontRef>
+        </p:style>
+        <p:txBody>
+          <a:bodyPr rtlCol="0" anchor="ctr" wrap="square" lIns="73152" rIns="73152" tIns="36576" bIns="36576"/>
+          <a:lstStyle/>
+          <a:p>
+            <a:pPr algn="ctr">
+              <a:spcAft>
+                <a:spcPts val="0"/>
+              </a:spcAft>
+              <a:defRPr sz="2300" b="1">
+                <a:solidFill>
+                  <a:srgbClr val="122C4E"/>
+                </a:solidFill>
+                <a:latin typeface="Noto Sans CJK KR"/>
+              </a:defRPr>
+            </a:pPr>
+            <a:r>
+              <a:t>C++ publisher의 message 파라미터를 바꾸고 /cpp_status에서 바뀐 문자열을 확인한다.</a:t>
+            </a:r>
+          </a:p>
+        </p:txBody>
+      </p:sp>
+      <p:sp>
+        <p:nvSpPr>
+          <p:cNvPr id="8" name="TextBox 7"/>
+          <p:cNvSpPr txBox="1"/>
+          <p:nvPr/>
+        </p:nvSpPr>
+        <p:spPr>
+          <a:xfrm>
+            <a:off x="877824" y="4590288"/>
+            <a:ext cx="10241280" cy="594360"/>
+          </a:xfrm>
+          <a:prstGeom prst="rect">
+            <a:avLst/>
+          </a:prstGeom>
+          <a:noFill/>
+        </p:spPr>
+        <p:txBody>
+          <a:bodyPr wrap="square" lIns="73152" rIns="73152" tIns="36576" bIns="36576">
+            <a:spAutoFit/>
+          </a:bodyPr>
+          <a:lstStyle/>
+          <a:p>
+            <a:pPr algn="ctr">
+              <a:spcAft>
+                <a:spcPts val="0"/>
+              </a:spcAft>
+              <a:defRPr sz="1900" b="1">
+                <a:solidFill>
+                  <a:srgbClr val="DB7E22"/>
+                </a:solidFill>
+                <a:latin typeface="Noto Sans CJK KR"/>
+              </a:defRPr>
+            </a:pPr>
+            <a:r>
+              <a:t>기록할 것: 바꾼 값(단위) · 기대한 변화 · 실제 출력/화면 · 원래 값으로 되돌린 결과</a:t>
+            </a:r>
+          </a:p>
+        </p:txBody>
+      </p:sp>
+    </p:spTree>
+  </p:cSld>
+  <p:clrMapOvr>
+    <a:masterClrMapping/>
+  </p:clrMapOvr>
+</p:sld>
+</file>
+
+<file path=ppt/slides/slide26.xml><?xml version="1.0" encoding="utf-8"?>
+<p:sld xmlns:a="http://schemas.openxmlformats.org/drawingml/2006/main" xmlns:p="http://schemas.openxmlformats.org/presentationml/2006/main" xmlns:r="http://schemas.openxmlformats.org/officeDocument/2006/relationships">
+  <p:cSld>
+    <p:spTree>
+      <p:nvGrpSpPr>
+        <p:cNvPr id="1" name=""/>
+        <p:cNvGrpSpPr/>
+        <p:nvPr/>
+      </p:nvGrpSpPr>
+      <p:grpSpPr/>
+      <p:sp>
+        <p:nvSpPr>
+          <p:cNvPr id="2" name="TextBox 1"/>
+          <p:cNvSpPr txBox="1"/>
+          <p:nvPr/>
+        </p:nvSpPr>
+        <p:spPr>
+          <a:xfrm>
+            <a:off x="566928" y="347472"/>
+            <a:ext cx="10881360" cy="438912"/>
+          </a:xfrm>
+          <a:prstGeom prst="rect">
+            <a:avLst/>
+          </a:prstGeom>
+          <a:noFill/>
+        </p:spPr>
+        <p:txBody>
+          <a:bodyPr wrap="square" lIns="73152" rIns="73152" tIns="36576" bIns="36576">
+            <a:spAutoFit/>
+          </a:bodyPr>
+          <a:lstStyle/>
+          <a:p>
+            <a:pPr algn="l">
+              <a:spcAft>
+                <a:spcPts val="0"/>
+              </a:spcAft>
+              <a:defRPr sz="3200" b="1">
+                <a:solidFill>
+                  <a:srgbClr val="122C4E"/>
+                </a:solidFill>
+                <a:latin typeface="Noto Sans CJK KR"/>
+              </a:defRPr>
+            </a:pPr>
+            <a:r>
+              <a:t>체크포인트를 저장하고 다음 모듈로 넘긴다</a:t>
+            </a:r>
+          </a:p>
+        </p:txBody>
+      </p:sp>
+      <p:sp>
+        <p:nvSpPr>
+          <p:cNvPr id="3" name="TextBox 2"/>
+          <p:cNvSpPr txBox="1"/>
+          <p:nvPr/>
+        </p:nvSpPr>
+        <p:spPr>
+          <a:xfrm>
+            <a:off x="603504" y="859536"/>
+            <a:ext cx="10698480" cy="292608"/>
+          </a:xfrm>
+          <a:prstGeom prst="rect">
+            <a:avLst/>
+          </a:prstGeom>
+          <a:noFill/>
+        </p:spPr>
+        <p:txBody>
+          <a:bodyPr wrap="square" lIns="73152" rIns="73152" tIns="36576" bIns="36576">
+            <a:spAutoFit/>
+          </a:bodyPr>
+          <a:lstStyle/>
+          <a:p>
+            <a:pPr algn="l">
+              <a:spcAft>
+                <a:spcPts val="0"/>
+              </a:spcAft>
+              <a:defRPr sz="1700" b="0">
+                <a:solidFill>
+                  <a:srgbClr val="5C6672"/>
+                </a:solidFill>
+                <a:latin typeface="Noto Sans CJK KR"/>
+              </a:defRPr>
+            </a:pPr>
+            <a:r>
+              <a:t>현재 Complete는 다음 Starter의 기준선입니다.</a:t>
+            </a:r>
+          </a:p>
+        </p:txBody>
+      </p:sp>
+      <p:sp>
+        <p:nvSpPr>
+          <p:cNvPr id="4" name="TextBox 3"/>
+          <p:cNvSpPr txBox="1"/>
+          <p:nvPr/>
+        </p:nvSpPr>
+        <p:spPr>
+          <a:xfrm>
+            <a:off x="530352" y="6510528"/>
+            <a:ext cx="7772400" cy="201168"/>
+          </a:xfrm>
+          <a:prstGeom prst="rect">
+            <a:avLst/>
+          </a:prstGeom>
+          <a:noFill/>
+        </p:spPr>
+        <p:txBody>
+          <a:bodyPr wrap="square" lIns="73152" rIns="73152" tIns="36576" bIns="36576">
+            <a:spAutoFit/>
+          </a:bodyPr>
+          <a:lstStyle/>
+          <a:p>
+            <a:pPr algn="l">
+              <a:spcAft>
+                <a:spcPts val="0"/>
+              </a:spcAft>
+              <a:defRPr sz="1000" b="0">
+                <a:solidFill>
+                  <a:srgbClr val="5C6672"/>
+                </a:solidFill>
+                <a:latin typeface="Noto Sans CJK KR"/>
+              </a:defRPr>
+            </a:pPr>
+            <a:r>
+              <a:t>ROS 2 Jazzy · Gazebo Harmonic · M02 · 따라 하기형 AGV 실습</a:t>
+            </a:r>
+          </a:p>
+        </p:txBody>
+      </p:sp>
+      <p:sp>
+        <p:nvSpPr>
+          <p:cNvPr id="5" name="TextBox 4"/>
+          <p:cNvSpPr txBox="1"/>
+          <p:nvPr/>
+        </p:nvSpPr>
+        <p:spPr>
+          <a:xfrm>
+            <a:off x="9144000" y="6510528"/>
+            <a:ext cx="2468880" cy="201168"/>
+          </a:xfrm>
+          <a:prstGeom prst="rect">
+            <a:avLst/>
+          </a:prstGeom>
+          <a:noFill/>
+        </p:spPr>
+        <p:txBody>
+          <a:bodyPr wrap="square" lIns="73152" rIns="73152" tIns="36576" bIns="36576">
+            <a:spAutoFit/>
+          </a:bodyPr>
+          <a:lstStyle/>
+          <a:p>
+            <a:pPr algn="r">
+              <a:spcAft>
+                <a:spcPts val="0"/>
+              </a:spcAft>
+              <a:defRPr sz="1000" b="0">
+                <a:solidFill>
+                  <a:srgbClr val="5C6672"/>
+                </a:solidFill>
+                <a:latin typeface="Noto Sans CJK KR"/>
+              </a:defRPr>
+            </a:pPr>
+            <a:r>
+              <a:t>명령·파일 경로는 슬라이드에서 복사 가능</a:t>
+            </a:r>
+          </a:p>
+        </p:txBody>
+      </p:sp>
+      <p:sp>
+        <p:nvSpPr>
+          <p:cNvPr id="6" name="Rectangle 5"/>
+          <p:cNvSpPr/>
+          <p:nvPr/>
+        </p:nvSpPr>
+        <p:spPr>
+          <a:xfrm>
+            <a:off x="566928" y="1188720"/>
+            <a:ext cx="11064240" cy="347472"/>
+          </a:xfrm>
+          <a:prstGeom prst="rect">
+            <a:avLst/>
+          </a:prstGeom>
+          <a:solidFill>
+            <a:srgbClr val="F4F7FB"/>
+          </a:solidFill>
+          <a:ln>
+            <a:solidFill>
+              <a:srgbClr val="F4F7FB"/>
+            </a:solidFill>
+          </a:ln>
+        </p:spPr>
+        <p:style>
+          <a:lnRef idx="1">
+            <a:schemeClr val="accent1"/>
+          </a:lnRef>
+          <a:fillRef idx="3">
+            <a:schemeClr val="accent1"/>
+          </a:fillRef>
+          <a:effectRef idx="2">
+            <a:schemeClr val="accent1"/>
+          </a:effectRef>
+          <a:fontRef idx="minor">
+            <a:schemeClr val="lt1"/>
+          </a:fontRef>
+        </p:style>
+        <p:txBody>
+          <a:bodyPr rtlCol="0" anchor="ctr" wrap="square" lIns="73152" rIns="73152" tIns="36576" bIns="36576"/>
+          <a:lstStyle/>
+          <a:p>
+            <a:pPr algn="l">
+              <a:spcAft>
+                <a:spcPts val="0"/>
+              </a:spcAft>
+              <a:defRPr sz="1300" b="1">
+                <a:solidFill>
+                  <a:srgbClr val="122C4E"/>
+                </a:solidFill>
+                <a:latin typeface="Noto Sans CJK KR"/>
+              </a:defRPr>
+            </a:pPr>
+            <a:r>
+              <a:t>현재 단계 체크포인트    |    현재 폴더 ~/ros2_curri/agv_ws    |    현재 터미널</a:t>
+            </a:r>
+          </a:p>
+        </p:txBody>
+      </p:sp>
+      <p:sp>
+        <p:nvSpPr>
+          <p:cNvPr id="7" name="Rounded Rectangle 6"/>
+          <p:cNvSpPr/>
+          <p:nvPr/>
+        </p:nvSpPr>
+        <p:spPr>
+          <a:xfrm>
+            <a:off x="685800" y="1737360"/>
+            <a:ext cx="10972800" cy="3611880"/>
+          </a:xfrm>
+          <a:prstGeom prst="roundRect">
+            <a:avLst/>
+          </a:prstGeom>
+          <a:solidFill>
+            <a:srgbClr val="F4F7FB"/>
+          </a:solidFill>
+          <a:ln>
+            <a:solidFill>
+              <a:srgbClr val="D2DCE8"/>
+            </a:solidFill>
+          </a:ln>
+        </p:spPr>
+        <p:style>
+          <a:lnRef idx="1">
+            <a:schemeClr val="accent1"/>
+          </a:lnRef>
+          <a:fillRef idx="3">
+            <a:schemeClr val="accent1"/>
+          </a:fillRef>
+          <a:effectRef idx="2">
+            <a:schemeClr val="accent1"/>
+          </a:effectRef>
+          <a:fontRef idx="minor">
+            <a:schemeClr val="lt1"/>
+          </a:fontRef>
+        </p:style>
+        <p:txBody>
+          <a:bodyPr rtlCol="0" anchor="ctr"/>
+          <a:lstStyle/>
+          <a:p>
+            <a:pPr algn="ctr"/>
+          </a:p>
+        </p:txBody>
+      </p:sp>
+      <p:sp>
+        <p:nvSpPr>
+          <p:cNvPr id="8" name="TextBox 7"/>
+          <p:cNvSpPr txBox="1"/>
+          <p:nvPr/>
+        </p:nvSpPr>
+        <p:spPr>
+          <a:xfrm>
+            <a:off x="896112" y="1993392"/>
+            <a:ext cx="10332720" cy="2971800"/>
+          </a:xfrm>
+          <a:prstGeom prst="rect">
+            <a:avLst/>
+          </a:prstGeom>
+          <a:noFill/>
+        </p:spPr>
+        <p:txBody>
+          <a:bodyPr wrap="square" lIns="109728" rIns="109728">
+            <a:spAutoFit/>
+          </a:bodyPr>
+          <a:lstStyle/>
+          <a:p>
+            <a:pPr>
+              <a:spcAft>
+                <a:spcPts val="800"/>
+              </a:spcAft>
+              <a:defRPr sz="1800">
+                <a:solidFill>
+                  <a:srgbClr val="122C4E"/>
+                </a:solidFill>
+                <a:latin typeface="Noto Sans CJK KR"/>
+              </a:defRPr>
+            </a:pPr>
+            <a:r>
+              <a:t>• □ 완료 화면: build/install/log와 두 언어의 실행 파일을 source 뒤에 확인한다.</a:t>
+            </a:r>
+          </a:p>
+          <a:p>
+            <a:pPr>
+              <a:spcAft>
+                <a:spcPts val="800"/>
+              </a:spcAft>
+              <a:defRPr sz="1800">
+                <a:solidFill>
+                  <a:srgbClr val="122C4E"/>
+                </a:solidFill>
+                <a:latin typeface="Noto Sans CJK KR"/>
+              </a:defRPr>
+            </a:pPr>
+            <a:r>
+              <a:t>• □ Complete 파일: blocks/A_ros2_basics/M02_workspace_package/complete/</a:t>
+            </a:r>
+          </a:p>
+          <a:p>
+            <a:pPr>
+              <a:spcAft>
+                <a:spcPts val="800"/>
+              </a:spcAft>
+              <a:defRPr sz="1800">
+                <a:solidFill>
+                  <a:srgbClr val="122C4E"/>
+                </a:solidFill>
+                <a:latin typeface="Noto Sans CJK KR"/>
+              </a:defRPr>
+            </a:pPr>
+            <a:r>
+              <a:t>• □ 정상 로그·캡처: logs/validation.log, screenshots/validation_terminal.png</a:t>
+            </a:r>
+          </a:p>
+          <a:p>
+            <a:pPr>
+              <a:spcAft>
+                <a:spcPts val="800"/>
+              </a:spcAft>
+              <a:defRPr sz="1800">
+                <a:solidFill>
+                  <a:srgbClr val="122C4E"/>
+                </a:solidFill>
+                <a:latin typeface="Noto Sans CJK KR"/>
+              </a:defRPr>
+            </a:pPr>
+            <a:r>
+              <a:t>• □ 버전 식별: CHECKSUM_or_TAG.txt의 SHA-256 manifest</a:t>
+            </a:r>
+          </a:p>
+          <a:p>
+            <a:pPr>
+              <a:spcAft>
+                <a:spcPts val="800"/>
+              </a:spcAft>
+              <a:defRPr sz="1800">
+                <a:solidFill>
+                  <a:srgbClr val="122C4E"/>
+                </a:solidFill>
+                <a:latin typeface="Noto Sans CJK KR"/>
+              </a:defRPr>
+            </a:pPr>
+            <a:r>
+              <a:t>• □ 다음 시작 조건: M03 Python Pub/Sub</a:t>
+            </a:r>
+          </a:p>
+        </p:txBody>
+      </p:sp>
+      <p:sp>
+        <p:nvSpPr>
+          <p:cNvPr id="9" name="TextBox 8"/>
+          <p:cNvSpPr txBox="1"/>
+          <p:nvPr/>
+        </p:nvSpPr>
+        <p:spPr>
+          <a:xfrm>
+            <a:off x="868680" y="5596128"/>
+            <a:ext cx="10515600" cy="338328"/>
+          </a:xfrm>
+          <a:prstGeom prst="rect">
+            <a:avLst/>
+          </a:prstGeom>
+          <a:noFill/>
+        </p:spPr>
+        <p:txBody>
+          <a:bodyPr wrap="square" lIns="73152" rIns="73152" tIns="36576" bIns="36576">
+            <a:spAutoFit/>
+          </a:bodyPr>
+          <a:lstStyle/>
+          <a:p>
+            <a:pPr algn="ctr">
+              <a:spcAft>
+                <a:spcPts val="0"/>
+              </a:spcAft>
+              <a:defRPr sz="1700" b="1">
+                <a:solidFill>
+                  <a:srgbClr val="2A8B5A"/>
+                </a:solidFill>
+                <a:latin typeface="Noto Sans CJK KR"/>
+              </a:defRPr>
+            </a:pPr>
+            <a:r>
+              <a:t>다음 모듈을 시작하기 전, 이 슬라이드의 Complete와 다음 모듈의 Starter를 비교합니다.</a:t>
+            </a:r>
+          </a:p>
+        </p:txBody>
+      </p:sp>
+    </p:spTree>
+  </p:cSld>
+  <p:clrMapOvr>
+    <a:masterClrMapping/>
+  </p:clrMapOvr>
+</p:sld>
+</file>
+
+<file path=ppt/slides/slide27.xml><?xml version="1.0" encoding="utf-8"?>
+<p:sld xmlns:a="http://schemas.openxmlformats.org/drawingml/2006/main" xmlns:p="http://schemas.openxmlformats.org/presentationml/2006/main" xmlns:r="http://schemas.openxmlformats.org/officeDocument/2006/relationships">
+  <p:cSld>
+    <p:spTree>
+      <p:nvGrpSpPr>
+        <p:cNvPr id="1" name=""/>
+        <p:cNvGrpSpPr/>
+        <p:nvPr/>
+      </p:nvGrpSpPr>
+      <p:grpSpPr/>
+      <p:sp>
+        <p:nvSpPr>
+          <p:cNvPr id="2" name="TextBox 1"/>
+          <p:cNvSpPr txBox="1"/>
+          <p:nvPr/>
+        </p:nvSpPr>
+        <p:spPr>
+          <a:xfrm>
+            <a:off x="566928" y="347472"/>
+            <a:ext cx="10881360" cy="438912"/>
+          </a:xfrm>
+          <a:prstGeom prst="rect">
+            <a:avLst/>
+          </a:prstGeom>
+          <a:noFill/>
+        </p:spPr>
+        <p:txBody>
+          <a:bodyPr wrap="square" lIns="73152" rIns="73152" tIns="36576" bIns="36576">
+            <a:spAutoFit/>
+          </a:bodyPr>
+          <a:lstStyle/>
+          <a:p>
+            <a:pPr algn="l">
+              <a:spcAft>
+                <a:spcPts val="0"/>
+              </a:spcAft>
+              <a:defRPr sz="3200" b="1">
+                <a:solidFill>
+                  <a:srgbClr val="122C4E"/>
+                </a:solidFill>
+                <a:latin typeface="Noto Sans CJK KR"/>
+              </a:defRPr>
+            </a:pPr>
+            <a:r>
               <a:t>공식 참고 자료</a:t>
             </a:r>
           </a:p>
@@ -15112,7 +16222,7 @@
               </a:defRPr>
             </a:pPr>
             <a:r>
-              <a:t>workspace 뼈대를 만든다</a:t>
+              <a:t>코드/설정이 실제로 만드는 것 (1/2)</a:t>
             </a:r>
           </a:p>
         </p:txBody>
@@ -15151,7 +16261,7 @@
               </a:defRPr>
             </a:pPr>
             <a:r>
-              <a:t>한 장에는 한 행동만 수행합니다.</a:t>
+              <a:t>파일을 입력하기 전에 ‘무엇을 만들고 어디서 볼지’를 먼저 연결합니다.</a:t>
             </a:r>
           </a:p>
         </p:txBody>
@@ -15287,109 +16397,31 @@
               </a:defRPr>
             </a:pPr>
             <a:r>
-              <a:t>현재 단계 1/2    |    현재 폴더 ~/ros2_curri/agv_ws    |    현재 터미널</a:t>
-            </a:r>
-          </a:p>
-        </p:txBody>
-      </p:sp>
-      <p:sp>
-        <p:nvSpPr>
-          <p:cNvPr id="7" name="TextBox 6"/>
-          <p:cNvSpPr txBox="1"/>
-          <p:nvPr/>
-        </p:nvSpPr>
-        <p:spPr>
-          <a:xfrm>
-            <a:off x="676656" y="1764792"/>
-            <a:ext cx="1828800" cy="347472"/>
-          </a:xfrm>
-          <a:prstGeom prst="rect">
-            <a:avLst/>
-          </a:prstGeom>
-          <a:noFill/>
-        </p:spPr>
-        <p:txBody>
-          <a:bodyPr wrap="square" lIns="73152" rIns="73152" tIns="36576" bIns="36576">
-            <a:spAutoFit/>
-          </a:bodyPr>
-          <a:lstStyle/>
-          <a:p>
-            <a:pPr algn="l">
-              <a:spcAft>
-                <a:spcPts val="0"/>
-              </a:spcAft>
-              <a:defRPr sz="1800" b="1">
-                <a:solidFill>
-                  <a:srgbClr val="225B9B"/>
-                </a:solidFill>
-                <a:latin typeface="Noto Sans CJK KR"/>
-              </a:defRPr>
-            </a:pPr>
-            <a:r>
-              <a:t>왜 하는가</a:t>
-            </a:r>
-          </a:p>
-        </p:txBody>
-      </p:sp>
-      <p:sp>
-        <p:nvSpPr>
-          <p:cNvPr id="8" name="TextBox 7"/>
-          <p:cNvSpPr txBox="1"/>
-          <p:nvPr/>
-        </p:nvSpPr>
-        <p:spPr>
-          <a:xfrm>
-            <a:off x="676656" y="2103120"/>
-            <a:ext cx="10789920" cy="512064"/>
-          </a:xfrm>
-          <a:prstGeom prst="rect">
-            <a:avLst/>
-          </a:prstGeom>
-          <a:noFill/>
-        </p:spPr>
-        <p:txBody>
-          <a:bodyPr wrap="square" lIns="73152" rIns="73152" tIns="36576" bIns="36576">
-            <a:spAutoFit/>
-          </a:bodyPr>
-          <a:lstStyle/>
-          <a:p>
-            <a:pPr algn="l">
-              <a:spcAft>
-                <a:spcPts val="0"/>
-              </a:spcAft>
-              <a:defRPr sz="2000" b="0">
-                <a:solidFill>
-                  <a:srgbClr val="122C4E"/>
-                </a:solidFill>
-                <a:latin typeface="Noto Sans CJK KR"/>
-              </a:defRPr>
-            </a:pPr>
-            <a:r>
-              <a:t>colcon은 src 아래 패키지를 찾아 build/install/log를 만든다.</a:t>
-            </a:r>
-          </a:p>
-        </p:txBody>
-      </p:sp>
-      <p:sp>
-        <p:nvSpPr>
-          <p:cNvPr id="9" name="Rounded Rectangle 8"/>
+              <a:t>현재 단계 파일 역할    |    현재 폴더 ~/ros2_curri/agv_ws    |    현재 터미널</a:t>
+            </a:r>
+          </a:p>
+        </p:txBody>
+      </p:sp>
+      <p:sp>
+        <p:nvSpPr>
+          <p:cNvPr id="7" name="Rounded Rectangle 6"/>
           <p:cNvSpPr/>
           <p:nvPr/>
         </p:nvSpPr>
         <p:spPr>
           <a:xfrm>
-            <a:off x="676656" y="2871216"/>
-            <a:ext cx="10835640" cy="2331720"/>
+            <a:off x="640080" y="1627632"/>
+            <a:ext cx="10972800" cy="2048256"/>
           </a:xfrm>
           <a:prstGeom prst="roundRect">
             <a:avLst/>
           </a:prstGeom>
           <a:solidFill>
-            <a:srgbClr val="1D232D"/>
+            <a:srgbClr val="F4F7FB"/>
           </a:solidFill>
           <a:ln>
             <a:solidFill>
-              <a:srgbClr val="1D232D"/>
+              <a:srgbClr val="CCDBEB"/>
             </a:solidFill>
           </a:ln>
         </p:spPr>
@@ -15408,30 +16440,87 @@
           </a:fontRef>
         </p:style>
         <p:txBody>
-          <a:bodyPr rtlCol="0" anchor="ctr" wrap="square" lIns="73152" rIns="73152" tIns="36576" bIns="36576"/>
-          <a:lstStyle/>
-          <a:p>
-            <a:pPr algn="l">
-              <a:spcAft>
-                <a:spcPts val="0"/>
-              </a:spcAft>
-              <a:defRPr sz="1600" b="0">
-                <a:solidFill>
-                  <a:srgbClr val="FFFFFF"/>
+          <a:bodyPr rtlCol="0" anchor="ctr"/>
+          <a:lstStyle/>
+          <a:p>
+            <a:pPr algn="ctr"/>
+          </a:p>
+        </p:txBody>
+      </p:sp>
+      <p:sp>
+        <p:nvSpPr>
+          <p:cNvPr id="8" name="TextBox 7"/>
+          <p:cNvSpPr txBox="1"/>
+          <p:nvPr/>
+        </p:nvSpPr>
+        <p:spPr>
+          <a:xfrm>
+            <a:off x="850392" y="1764792"/>
+            <a:ext cx="10424160" cy="256032"/>
+          </a:xfrm>
+          <a:prstGeom prst="rect">
+            <a:avLst/>
+          </a:prstGeom>
+          <a:noFill/>
+        </p:spPr>
+        <p:txBody>
+          <a:bodyPr wrap="square" lIns="73152" rIns="73152" tIns="36576" bIns="36576">
+            <a:spAutoFit/>
+          </a:bodyPr>
+          <a:lstStyle/>
+          <a:p>
+            <a:pPr algn="l">
+              <a:spcAft>
+                <a:spcPts val="0"/>
+              </a:spcAft>
+              <a:defRPr sz="1300" b="1">
+                <a:solidFill>
+                  <a:srgbClr val="225B9B"/>
                 </a:solidFill>
                 <a:latin typeface="DejaVu Sans Mono"/>
               </a:defRPr>
             </a:pPr>
             <a:r>
-              <a:t>mkdir -p ~/ros2_curri/agv_ws/src</a:t>
-            </a:r>
-            <a:br/>
-            <a:r>
-              <a:t>cd ~/ros2_curri/agv_ws</a:t>
-            </a:r>
-            <a:br/>
-            <a:r>
-              <a:t>colcon build --symlink-install</a:t>
+              <a:t>~/ros2_curri/agv_ws/src/agv_control/package.xml</a:t>
+            </a:r>
+          </a:p>
+        </p:txBody>
+      </p:sp>
+      <p:sp>
+        <p:nvSpPr>
+          <p:cNvPr id="9" name="TextBox 8"/>
+          <p:cNvSpPr txBox="1"/>
+          <p:nvPr/>
+        </p:nvSpPr>
+        <p:spPr>
+          <a:xfrm>
+            <a:off x="868680" y="2130552"/>
+            <a:ext cx="1234440" cy="228600"/>
+          </a:xfrm>
+          <a:prstGeom prst="rect">
+            <a:avLst/>
+          </a:prstGeom>
+          <a:noFill/>
+        </p:spPr>
+        <p:txBody>
+          <a:bodyPr wrap="square" lIns="73152" rIns="73152" tIns="36576" bIns="36576">
+            <a:spAutoFit/>
+          </a:bodyPr>
+          <a:lstStyle/>
+          <a:p>
+            <a:pPr algn="l">
+              <a:spcAft>
+                <a:spcPts val="0"/>
+              </a:spcAft>
+              <a:defRPr sz="1500" b="1">
+                <a:solidFill>
+                  <a:srgbClr val="2A8B5A"/>
+                </a:solidFill>
+                <a:latin typeface="Noto Sans CJK KR"/>
+              </a:defRPr>
+            </a:pPr>
+            <a:r>
+              <a:t>만드는 것</a:t>
             </a:r>
           </a:p>
         </p:txBody>
@@ -15444,8 +16533,8 @@
         </p:nvSpPr>
         <p:spPr>
           <a:xfrm>
-            <a:off x="768096" y="5468112"/>
-            <a:ext cx="1143000" cy="256032"/>
+            <a:off x="1975104" y="2112264"/>
+            <a:ext cx="9189720" cy="274320"/>
           </a:xfrm>
           <a:prstGeom prst="rect">
             <a:avLst/>
@@ -15462,15 +16551,15 @@
               <a:spcAft>
                 <a:spcPts val="0"/>
               </a:spcAft>
-              <a:defRPr sz="1800" b="1">
-                <a:solidFill>
-                  <a:srgbClr val="2A8B5A"/>
-                </a:solidFill>
-                <a:latin typeface="Noto Sans CJK KR"/>
-              </a:defRPr>
-            </a:pPr>
-            <a:r>
-              <a:t>확인</a:t>
+              <a:defRPr sz="1500" b="0">
+                <a:solidFill>
+                  <a:srgbClr val="122C4E"/>
+                </a:solidFill>
+                <a:latin typeface="Noto Sans CJK KR"/>
+              </a:defRPr>
+            </a:pPr>
+            <a:r>
+              <a:t>이번 모듈의 재현 가능한 파일</a:t>
             </a:r>
           </a:p>
         </p:txBody>
@@ -15483,8 +16572,8 @@
         </p:nvSpPr>
         <p:spPr>
           <a:xfrm>
-            <a:off x="768096" y="5742432"/>
-            <a:ext cx="10561320" cy="347472"/>
+            <a:off x="868680" y="2505456"/>
+            <a:ext cx="1234440" cy="228600"/>
           </a:xfrm>
           <a:prstGeom prst="rect">
             <a:avLst/>
@@ -15501,7 +16590,46 @@
               <a:spcAft>
                 <a:spcPts val="0"/>
               </a:spcAft>
-              <a:defRPr sz="1800" b="0">
+              <a:defRPr sz="1500" b="1">
+                <a:solidFill>
+                  <a:srgbClr val="DB7E22"/>
+                </a:solidFill>
+                <a:latin typeface="Noto Sans CJK KR"/>
+              </a:defRPr>
+            </a:pPr>
+            <a:r>
+              <a:t>코드 읽기</a:t>
+            </a:r>
+          </a:p>
+        </p:txBody>
+      </p:sp>
+      <p:sp>
+        <p:nvSpPr>
+          <p:cNvPr id="12" name="TextBox 11"/>
+          <p:cNvSpPr txBox="1"/>
+          <p:nvPr/>
+        </p:nvSpPr>
+        <p:spPr>
+          <a:xfrm>
+            <a:off x="1975104" y="2487168"/>
+            <a:ext cx="9189720" cy="301752"/>
+          </a:xfrm>
+          <a:prstGeom prst="rect">
+            <a:avLst/>
+          </a:prstGeom>
+          <a:noFill/>
+        </p:spPr>
+        <p:txBody>
+          <a:bodyPr wrap="square" lIns="73152" rIns="73152" tIns="36576" bIns="36576">
+            <a:spAutoFit/>
+          </a:bodyPr>
+          <a:lstStyle/>
+          <a:p>
+            <a:pPr algn="l">
+              <a:spcAft>
+                <a:spcPts val="0"/>
+              </a:spcAft>
+              <a:defRPr sz="1400" b="0">
                 <a:solidFill>
                   <a:srgbClr val="122C4E"/>
                 </a:solidFill>
@@ -15509,7 +16637,411 @@
               </a:defRPr>
             </a:pPr>
             <a:r>
-              <a:t>명령의 출력에서 topic·frame·파일 이름 또는 성공 메시지를 찾으면 이 단계가 완료됩니다.</a:t>
+              <a:t>파일명·경로·핵심 이름을 슬라이드와 동일하게 작성한다.</a:t>
+            </a:r>
+          </a:p>
+        </p:txBody>
+      </p:sp>
+      <p:sp>
+        <p:nvSpPr>
+          <p:cNvPr id="13" name="TextBox 12"/>
+          <p:cNvSpPr txBox="1"/>
+          <p:nvPr/>
+        </p:nvSpPr>
+        <p:spPr>
+          <a:xfrm>
+            <a:off x="868680" y="2889504"/>
+            <a:ext cx="1234440" cy="228600"/>
+          </a:xfrm>
+          <a:prstGeom prst="rect">
+            <a:avLst/>
+          </a:prstGeom>
+          <a:noFill/>
+        </p:spPr>
+        <p:txBody>
+          <a:bodyPr wrap="square" lIns="73152" rIns="73152" tIns="36576" bIns="36576">
+            <a:spAutoFit/>
+          </a:bodyPr>
+          <a:lstStyle/>
+          <a:p>
+            <a:pPr algn="l">
+              <a:spcAft>
+                <a:spcPts val="0"/>
+              </a:spcAft>
+              <a:defRPr sz="1500" b="1">
+                <a:solidFill>
+                  <a:srgbClr val="225B9B"/>
+                </a:solidFill>
+                <a:latin typeface="Noto Sans CJK KR"/>
+              </a:defRPr>
+            </a:pPr>
+            <a:r>
+              <a:t>사용/확인</a:t>
+            </a:r>
+          </a:p>
+        </p:txBody>
+      </p:sp>
+      <p:sp>
+        <p:nvSpPr>
+          <p:cNvPr id="14" name="TextBox 13"/>
+          <p:cNvSpPr txBox="1"/>
+          <p:nvPr/>
+        </p:nvSpPr>
+        <p:spPr>
+          <a:xfrm>
+            <a:off x="1975104" y="2871216"/>
+            <a:ext cx="9189720" cy="512064"/>
+          </a:xfrm>
+          <a:prstGeom prst="rect">
+            <a:avLst/>
+          </a:prstGeom>
+          <a:noFill/>
+        </p:spPr>
+        <p:txBody>
+          <a:bodyPr wrap="square" lIns="73152" rIns="73152" tIns="36576" bIns="36576">
+            <a:spAutoFit/>
+          </a:bodyPr>
+          <a:lstStyle/>
+          <a:p>
+            <a:pPr algn="l">
+              <a:spcAft>
+                <a:spcPts val="0"/>
+              </a:spcAft>
+              <a:defRPr sz="1300" b="0">
+                <a:solidFill>
+                  <a:srgbClr val="122C4E"/>
+                </a:solidFill>
+                <a:latin typeface="Noto Sans CJK KR"/>
+              </a:defRPr>
+            </a:pPr>
+            <a:r>
+              <a:t>사용: build/source 뒤 실행 단계에서 사용한다.</a:t>
+            </a:r>
+            <a:br/>
+            <a:r>
+              <a:t>화면/출력: 검증 명령의 파일·topic 이름</a:t>
+            </a:r>
+          </a:p>
+        </p:txBody>
+      </p:sp>
+      <p:sp>
+        <p:nvSpPr>
+          <p:cNvPr id="15" name="Rounded Rectangle 14"/>
+          <p:cNvSpPr/>
+          <p:nvPr/>
+        </p:nvSpPr>
+        <p:spPr>
+          <a:xfrm>
+            <a:off x="640080" y="3941063"/>
+            <a:ext cx="10972800" cy="2048256"/>
+          </a:xfrm>
+          <a:prstGeom prst="roundRect">
+            <a:avLst/>
+          </a:prstGeom>
+          <a:solidFill>
+            <a:srgbClr val="F4F7FB"/>
+          </a:solidFill>
+          <a:ln>
+            <a:solidFill>
+              <a:srgbClr val="CCDBEB"/>
+            </a:solidFill>
+          </a:ln>
+        </p:spPr>
+        <p:style>
+          <a:lnRef idx="1">
+            <a:schemeClr val="accent1"/>
+          </a:lnRef>
+          <a:fillRef idx="3">
+            <a:schemeClr val="accent1"/>
+          </a:fillRef>
+          <a:effectRef idx="2">
+            <a:schemeClr val="accent1"/>
+          </a:effectRef>
+          <a:fontRef idx="minor">
+            <a:schemeClr val="lt1"/>
+          </a:fontRef>
+        </p:style>
+        <p:txBody>
+          <a:bodyPr rtlCol="0" anchor="ctr"/>
+          <a:lstStyle/>
+          <a:p>
+            <a:pPr algn="ctr"/>
+          </a:p>
+        </p:txBody>
+      </p:sp>
+      <p:sp>
+        <p:nvSpPr>
+          <p:cNvPr id="16" name="TextBox 15"/>
+          <p:cNvSpPr txBox="1"/>
+          <p:nvPr/>
+        </p:nvSpPr>
+        <p:spPr>
+          <a:xfrm>
+            <a:off x="850392" y="4078224"/>
+            <a:ext cx="10424160" cy="256032"/>
+          </a:xfrm>
+          <a:prstGeom prst="rect">
+            <a:avLst/>
+          </a:prstGeom>
+          <a:noFill/>
+        </p:spPr>
+        <p:txBody>
+          <a:bodyPr wrap="square" lIns="73152" rIns="73152" tIns="36576" bIns="36576">
+            <a:spAutoFit/>
+          </a:bodyPr>
+          <a:lstStyle/>
+          <a:p>
+            <a:pPr algn="l">
+              <a:spcAft>
+                <a:spcPts val="0"/>
+              </a:spcAft>
+              <a:defRPr sz="1300" b="1">
+                <a:solidFill>
+                  <a:srgbClr val="225B9B"/>
+                </a:solidFill>
+                <a:latin typeface="DejaVu Sans Mono"/>
+              </a:defRPr>
+            </a:pPr>
+            <a:r>
+              <a:t>~/ros2_curri/agv_ws/src/agv_control/setup.py</a:t>
+            </a:r>
+          </a:p>
+        </p:txBody>
+      </p:sp>
+      <p:sp>
+        <p:nvSpPr>
+          <p:cNvPr id="17" name="TextBox 16"/>
+          <p:cNvSpPr txBox="1"/>
+          <p:nvPr/>
+        </p:nvSpPr>
+        <p:spPr>
+          <a:xfrm>
+            <a:off x="868680" y="4443983"/>
+            <a:ext cx="1234440" cy="228600"/>
+          </a:xfrm>
+          <a:prstGeom prst="rect">
+            <a:avLst/>
+          </a:prstGeom>
+          <a:noFill/>
+        </p:spPr>
+        <p:txBody>
+          <a:bodyPr wrap="square" lIns="73152" rIns="73152" tIns="36576" bIns="36576">
+            <a:spAutoFit/>
+          </a:bodyPr>
+          <a:lstStyle/>
+          <a:p>
+            <a:pPr algn="l">
+              <a:spcAft>
+                <a:spcPts val="0"/>
+              </a:spcAft>
+              <a:defRPr sz="1500" b="1">
+                <a:solidFill>
+                  <a:srgbClr val="2A8B5A"/>
+                </a:solidFill>
+                <a:latin typeface="Noto Sans CJK KR"/>
+              </a:defRPr>
+            </a:pPr>
+            <a:r>
+              <a:t>만드는 것</a:t>
+            </a:r>
+          </a:p>
+        </p:txBody>
+      </p:sp>
+      <p:sp>
+        <p:nvSpPr>
+          <p:cNvPr id="18" name="TextBox 17"/>
+          <p:cNvSpPr txBox="1"/>
+          <p:nvPr/>
+        </p:nvSpPr>
+        <p:spPr>
+          <a:xfrm>
+            <a:off x="1975104" y="4425696"/>
+            <a:ext cx="9189720" cy="274320"/>
+          </a:xfrm>
+          <a:prstGeom prst="rect">
+            <a:avLst/>
+          </a:prstGeom>
+          <a:noFill/>
+        </p:spPr>
+        <p:txBody>
+          <a:bodyPr wrap="square" lIns="73152" rIns="73152" tIns="36576" bIns="36576">
+            <a:spAutoFit/>
+          </a:bodyPr>
+          <a:lstStyle/>
+          <a:p>
+            <a:pPr algn="l">
+              <a:spcAft>
+                <a:spcPts val="0"/>
+              </a:spcAft>
+              <a:defRPr sz="1500" b="0">
+                <a:solidFill>
+                  <a:srgbClr val="122C4E"/>
+                </a:solidFill>
+                <a:latin typeface="Noto Sans CJK KR"/>
+              </a:defRPr>
+            </a:pPr>
+            <a:r>
+              <a:t>ROS 2 node 또는 실행 보조 로직</a:t>
+            </a:r>
+          </a:p>
+        </p:txBody>
+      </p:sp>
+      <p:sp>
+        <p:nvSpPr>
+          <p:cNvPr id="19" name="TextBox 18"/>
+          <p:cNvSpPr txBox="1"/>
+          <p:nvPr/>
+        </p:nvSpPr>
+        <p:spPr>
+          <a:xfrm>
+            <a:off x="868680" y="4818888"/>
+            <a:ext cx="1234440" cy="228600"/>
+          </a:xfrm>
+          <a:prstGeom prst="rect">
+            <a:avLst/>
+          </a:prstGeom>
+          <a:noFill/>
+        </p:spPr>
+        <p:txBody>
+          <a:bodyPr wrap="square" lIns="73152" rIns="73152" tIns="36576" bIns="36576">
+            <a:spAutoFit/>
+          </a:bodyPr>
+          <a:lstStyle/>
+          <a:p>
+            <a:pPr algn="l">
+              <a:spcAft>
+                <a:spcPts val="0"/>
+              </a:spcAft>
+              <a:defRPr sz="1500" b="1">
+                <a:solidFill>
+                  <a:srgbClr val="DB7E22"/>
+                </a:solidFill>
+                <a:latin typeface="Noto Sans CJK KR"/>
+              </a:defRPr>
+            </a:pPr>
+            <a:r>
+              <a:t>코드 읽기</a:t>
+            </a:r>
+          </a:p>
+        </p:txBody>
+      </p:sp>
+      <p:sp>
+        <p:nvSpPr>
+          <p:cNvPr id="20" name="TextBox 19"/>
+          <p:cNvSpPr txBox="1"/>
+          <p:nvPr/>
+        </p:nvSpPr>
+        <p:spPr>
+          <a:xfrm>
+            <a:off x="1975104" y="4800600"/>
+            <a:ext cx="9189720" cy="301752"/>
+          </a:xfrm>
+          <a:prstGeom prst="rect">
+            <a:avLst/>
+          </a:prstGeom>
+          <a:noFill/>
+        </p:spPr>
+        <p:txBody>
+          <a:bodyPr wrap="square" lIns="73152" rIns="73152" tIns="36576" bIns="36576">
+            <a:spAutoFit/>
+          </a:bodyPr>
+          <a:lstStyle/>
+          <a:p>
+            <a:pPr algn="l">
+              <a:spcAft>
+                <a:spcPts val="0"/>
+              </a:spcAft>
+              <a:defRPr sz="1400" b="0">
+                <a:solidFill>
+                  <a:srgbClr val="122C4E"/>
+                </a:solidFill>
+                <a:latin typeface="Noto Sans CJK KR"/>
+              </a:defRPr>
+            </a:pPr>
+            <a:r>
+              <a:t>import → Node 생성 → publisher/subscription → callback/main 순서로 읽는다.</a:t>
+            </a:r>
+          </a:p>
+        </p:txBody>
+      </p:sp>
+      <p:sp>
+        <p:nvSpPr>
+          <p:cNvPr id="21" name="TextBox 20"/>
+          <p:cNvSpPr txBox="1"/>
+          <p:nvPr/>
+        </p:nvSpPr>
+        <p:spPr>
+          <a:xfrm>
+            <a:off x="868680" y="5202936"/>
+            <a:ext cx="1234440" cy="228600"/>
+          </a:xfrm>
+          <a:prstGeom prst="rect">
+            <a:avLst/>
+          </a:prstGeom>
+          <a:noFill/>
+        </p:spPr>
+        <p:txBody>
+          <a:bodyPr wrap="square" lIns="73152" rIns="73152" tIns="36576" bIns="36576">
+            <a:spAutoFit/>
+          </a:bodyPr>
+          <a:lstStyle/>
+          <a:p>
+            <a:pPr algn="l">
+              <a:spcAft>
+                <a:spcPts val="0"/>
+              </a:spcAft>
+              <a:defRPr sz="1500" b="1">
+                <a:solidFill>
+                  <a:srgbClr val="225B9B"/>
+                </a:solidFill>
+                <a:latin typeface="Noto Sans CJK KR"/>
+              </a:defRPr>
+            </a:pPr>
+            <a:r>
+              <a:t>사용/확인</a:t>
+            </a:r>
+          </a:p>
+        </p:txBody>
+      </p:sp>
+      <p:sp>
+        <p:nvSpPr>
+          <p:cNvPr id="22" name="TextBox 21"/>
+          <p:cNvSpPr txBox="1"/>
+          <p:nvPr/>
+        </p:nvSpPr>
+        <p:spPr>
+          <a:xfrm>
+            <a:off x="1975104" y="5184648"/>
+            <a:ext cx="9189720" cy="512064"/>
+          </a:xfrm>
+          <a:prstGeom prst="rect">
+            <a:avLst/>
+          </a:prstGeom>
+          <a:noFill/>
+        </p:spPr>
+        <p:txBody>
+          <a:bodyPr wrap="square" lIns="73152" rIns="73152" tIns="36576" bIns="36576">
+            <a:spAutoFit/>
+          </a:bodyPr>
+          <a:lstStyle/>
+          <a:p>
+            <a:pPr algn="l">
+              <a:spcAft>
+                <a:spcPts val="0"/>
+              </a:spcAft>
+              <a:defRPr sz="1300" b="0">
+                <a:solidFill>
+                  <a:srgbClr val="122C4E"/>
+                </a:solidFill>
+                <a:latin typeface="Noto Sans CJK KR"/>
+              </a:defRPr>
+            </a:pPr>
+            <a:r>
+              <a:t>사용: package를 build·source한 뒤 ros2 run 또는 launch에서 실행한다.</a:t>
+            </a:r>
+            <a:br/>
+            <a:r>
+              <a:t>화면/출력: terminal의 node/topic/log 출력</a:t>
             </a:r>
           </a:p>
         </p:txBody>
@@ -15566,7 +17098,7 @@
               </a:defRPr>
             </a:pPr>
             <a:r>
-              <a:t>새 터미널에서 overlay를 source한다</a:t>
+              <a:t>코드/설정이 실제로 만드는 것 (2/2)</a:t>
             </a:r>
           </a:p>
         </p:txBody>
@@ -15605,7 +17137,7 @@
               </a:defRPr>
             </a:pPr>
             <a:r>
-              <a:t>한 장에는 한 행동만 수행합니다.</a:t>
+              <a:t>파일을 입력하기 전에 ‘무엇을 만들고 어디서 볼지’를 먼저 연결합니다.</a:t>
             </a:r>
           </a:p>
         </p:txBody>
@@ -15741,109 +17273,31 @@
               </a:defRPr>
             </a:pPr>
             <a:r>
-              <a:t>현재 단계 2/2    |    현재 폴더 ~/ros2_curri/agv_ws    |    현재 터미널</a:t>
-            </a:r>
-          </a:p>
-        </p:txBody>
-      </p:sp>
-      <p:sp>
-        <p:nvSpPr>
-          <p:cNvPr id="7" name="TextBox 6"/>
-          <p:cNvSpPr txBox="1"/>
-          <p:nvPr/>
-        </p:nvSpPr>
-        <p:spPr>
-          <a:xfrm>
-            <a:off x="676656" y="1764792"/>
-            <a:ext cx="1828800" cy="347472"/>
-          </a:xfrm>
-          <a:prstGeom prst="rect">
-            <a:avLst/>
-          </a:prstGeom>
-          <a:noFill/>
-        </p:spPr>
-        <p:txBody>
-          <a:bodyPr wrap="square" lIns="73152" rIns="73152" tIns="36576" bIns="36576">
-            <a:spAutoFit/>
-          </a:bodyPr>
-          <a:lstStyle/>
-          <a:p>
-            <a:pPr algn="l">
-              <a:spcAft>
-                <a:spcPts val="0"/>
-              </a:spcAft>
-              <a:defRPr sz="1800" b="1">
-                <a:solidFill>
-                  <a:srgbClr val="225B9B"/>
-                </a:solidFill>
-                <a:latin typeface="Noto Sans CJK KR"/>
-              </a:defRPr>
-            </a:pPr>
-            <a:r>
-              <a:t>왜 하는가</a:t>
-            </a:r>
-          </a:p>
-        </p:txBody>
-      </p:sp>
-      <p:sp>
-        <p:nvSpPr>
-          <p:cNvPr id="8" name="TextBox 7"/>
-          <p:cNvSpPr txBox="1"/>
-          <p:nvPr/>
-        </p:nvSpPr>
-        <p:spPr>
-          <a:xfrm>
-            <a:off x="676656" y="2103120"/>
-            <a:ext cx="10789920" cy="512064"/>
-          </a:xfrm>
-          <a:prstGeom prst="rect">
-            <a:avLst/>
-          </a:prstGeom>
-          <a:noFill/>
-        </p:spPr>
-        <p:txBody>
-          <a:bodyPr wrap="square" lIns="73152" rIns="73152" tIns="36576" bIns="36576">
-            <a:spAutoFit/>
-          </a:bodyPr>
-          <a:lstStyle/>
-          <a:p>
-            <a:pPr algn="l">
-              <a:spcAft>
-                <a:spcPts val="0"/>
-              </a:spcAft>
-              <a:defRPr sz="2000" b="0">
-                <a:solidFill>
-                  <a:srgbClr val="122C4E"/>
-                </a:solidFill>
-                <a:latin typeface="Noto Sans CJK KR"/>
-              </a:defRPr>
-            </a:pPr>
-            <a:r>
-              <a:t>기본 ROS와 내가 만든 패키지는 서로 다른 setup 파일이다.</a:t>
-            </a:r>
-          </a:p>
-        </p:txBody>
-      </p:sp>
-      <p:sp>
-        <p:nvSpPr>
-          <p:cNvPr id="9" name="Rounded Rectangle 8"/>
+              <a:t>현재 단계 파일 역할    |    현재 폴더 ~/ros2_curri/agv_ws    |    현재 터미널</a:t>
+            </a:r>
+          </a:p>
+        </p:txBody>
+      </p:sp>
+      <p:sp>
+        <p:nvSpPr>
+          <p:cNvPr id="7" name="Rounded Rectangle 6"/>
           <p:cNvSpPr/>
           <p:nvPr/>
         </p:nvSpPr>
         <p:spPr>
           <a:xfrm>
-            <a:off x="676656" y="2871216"/>
-            <a:ext cx="10835640" cy="2331720"/>
+            <a:off x="640080" y="1627632"/>
+            <a:ext cx="10972800" cy="2048256"/>
           </a:xfrm>
           <a:prstGeom prst="roundRect">
             <a:avLst/>
           </a:prstGeom>
           <a:solidFill>
-            <a:srgbClr val="1D232D"/>
+            <a:srgbClr val="F4F7FB"/>
           </a:solidFill>
           <a:ln>
             <a:solidFill>
-              <a:srgbClr val="1D232D"/>
+              <a:srgbClr val="CCDBEB"/>
             </a:solidFill>
           </a:ln>
         </p:spPr>
@@ -15862,30 +17316,87 @@
           </a:fontRef>
         </p:style>
         <p:txBody>
-          <a:bodyPr rtlCol="0" anchor="ctr" wrap="square" lIns="73152" rIns="73152" tIns="36576" bIns="36576"/>
-          <a:lstStyle/>
-          <a:p>
-            <a:pPr algn="l">
-              <a:spcAft>
-                <a:spcPts val="0"/>
-              </a:spcAft>
-              <a:defRPr sz="1600" b="0">
-                <a:solidFill>
-                  <a:srgbClr val="FFFFFF"/>
+          <a:bodyPr rtlCol="0" anchor="ctr"/>
+          <a:lstStyle/>
+          <a:p>
+            <a:pPr algn="ctr"/>
+          </a:p>
+        </p:txBody>
+      </p:sp>
+      <p:sp>
+        <p:nvSpPr>
+          <p:cNvPr id="8" name="TextBox 7"/>
+          <p:cNvSpPr txBox="1"/>
+          <p:nvPr/>
+        </p:nvSpPr>
+        <p:spPr>
+          <a:xfrm>
+            <a:off x="850392" y="1764792"/>
+            <a:ext cx="10424160" cy="256032"/>
+          </a:xfrm>
+          <a:prstGeom prst="rect">
+            <a:avLst/>
+          </a:prstGeom>
+          <a:noFill/>
+        </p:spPr>
+        <p:txBody>
+          <a:bodyPr wrap="square" lIns="73152" rIns="73152" tIns="36576" bIns="36576">
+            <a:spAutoFit/>
+          </a:bodyPr>
+          <a:lstStyle/>
+          <a:p>
+            <a:pPr algn="l">
+              <a:spcAft>
+                <a:spcPts val="0"/>
+              </a:spcAft>
+              <a:defRPr sz="1300" b="1">
+                <a:solidFill>
+                  <a:srgbClr val="225B9B"/>
                 </a:solidFill>
                 <a:latin typeface="DejaVu Sans Mono"/>
               </a:defRPr>
             </a:pPr>
             <a:r>
-              <a:t>source /opt/ros/jazzy/setup.bash</a:t>
-            </a:r>
-            <a:br/>
-            <a:r>
-              <a:t>source ~/ros2_curri/agv_ws/install/setup.bash</a:t>
-            </a:r>
-            <a:br/>
-            <a:r>
-              <a:t>ros2 pkg executables agv_cpp_examples</a:t>
+              <a:t>~/ros2_curri/agv_ws/src/agv_cpp_examples/CMakeLists.txt</a:t>
+            </a:r>
+          </a:p>
+        </p:txBody>
+      </p:sp>
+      <p:sp>
+        <p:nvSpPr>
+          <p:cNvPr id="9" name="TextBox 8"/>
+          <p:cNvSpPr txBox="1"/>
+          <p:nvPr/>
+        </p:nvSpPr>
+        <p:spPr>
+          <a:xfrm>
+            <a:off x="868680" y="2130552"/>
+            <a:ext cx="1234440" cy="228600"/>
+          </a:xfrm>
+          <a:prstGeom prst="rect">
+            <a:avLst/>
+          </a:prstGeom>
+          <a:noFill/>
+        </p:spPr>
+        <p:txBody>
+          <a:bodyPr wrap="square" lIns="73152" rIns="73152" tIns="36576" bIns="36576">
+            <a:spAutoFit/>
+          </a:bodyPr>
+          <a:lstStyle/>
+          <a:p>
+            <a:pPr algn="l">
+              <a:spcAft>
+                <a:spcPts val="0"/>
+              </a:spcAft>
+              <a:defRPr sz="1500" b="1">
+                <a:solidFill>
+                  <a:srgbClr val="2A8B5A"/>
+                </a:solidFill>
+                <a:latin typeface="Noto Sans CJK KR"/>
+              </a:defRPr>
+            </a:pPr>
+            <a:r>
+              <a:t>만드는 것</a:t>
             </a:r>
           </a:p>
         </p:txBody>
@@ -15898,8 +17409,8 @@
         </p:nvSpPr>
         <p:spPr>
           <a:xfrm>
-            <a:off x="768096" y="5468112"/>
-            <a:ext cx="1143000" cy="256032"/>
+            <a:off x="1975104" y="2112264"/>
+            <a:ext cx="9189720" cy="274320"/>
           </a:xfrm>
           <a:prstGeom prst="rect">
             <a:avLst/>
@@ -15916,15 +17427,15 @@
               <a:spcAft>
                 <a:spcPts val="0"/>
               </a:spcAft>
-              <a:defRPr sz="1800" b="1">
-                <a:solidFill>
-                  <a:srgbClr val="2A8B5A"/>
-                </a:solidFill>
-                <a:latin typeface="Noto Sans CJK KR"/>
-              </a:defRPr>
-            </a:pPr>
-            <a:r>
-              <a:t>확인</a:t>
+              <a:defRPr sz="1500" b="0">
+                <a:solidFill>
+                  <a:srgbClr val="122C4E"/>
+                </a:solidFill>
+                <a:latin typeface="Noto Sans CJK KR"/>
+              </a:defRPr>
+            </a:pPr>
+            <a:r>
+              <a:t>이번 모듈의 재현 가능한 파일</a:t>
             </a:r>
           </a:p>
         </p:txBody>
@@ -15937,8 +17448,8 @@
         </p:nvSpPr>
         <p:spPr>
           <a:xfrm>
-            <a:off x="768096" y="5742432"/>
-            <a:ext cx="10561320" cy="347472"/>
+            <a:off x="868680" y="2505456"/>
+            <a:ext cx="1234440" cy="228600"/>
           </a:xfrm>
           <a:prstGeom prst="rect">
             <a:avLst/>
@@ -15955,7 +17466,46 @@
               <a:spcAft>
                 <a:spcPts val="0"/>
               </a:spcAft>
-              <a:defRPr sz="1800" b="0">
+              <a:defRPr sz="1500" b="1">
+                <a:solidFill>
+                  <a:srgbClr val="DB7E22"/>
+                </a:solidFill>
+                <a:latin typeface="Noto Sans CJK KR"/>
+              </a:defRPr>
+            </a:pPr>
+            <a:r>
+              <a:t>코드 읽기</a:t>
+            </a:r>
+          </a:p>
+        </p:txBody>
+      </p:sp>
+      <p:sp>
+        <p:nvSpPr>
+          <p:cNvPr id="12" name="TextBox 11"/>
+          <p:cNvSpPr txBox="1"/>
+          <p:nvPr/>
+        </p:nvSpPr>
+        <p:spPr>
+          <a:xfrm>
+            <a:off x="1975104" y="2487168"/>
+            <a:ext cx="9189720" cy="301752"/>
+          </a:xfrm>
+          <a:prstGeom prst="rect">
+            <a:avLst/>
+          </a:prstGeom>
+          <a:noFill/>
+        </p:spPr>
+        <p:txBody>
+          <a:bodyPr wrap="square" lIns="73152" rIns="73152" tIns="36576" bIns="36576">
+            <a:spAutoFit/>
+          </a:bodyPr>
+          <a:lstStyle/>
+          <a:p>
+            <a:pPr algn="l">
+              <a:spcAft>
+                <a:spcPts val="0"/>
+              </a:spcAft>
+              <a:defRPr sz="1400" b="0">
                 <a:solidFill>
                   <a:srgbClr val="122C4E"/>
                 </a:solidFill>
@@ -15963,7 +17513,411 @@
               </a:defRPr>
             </a:pPr>
             <a:r>
-              <a:t>명령의 출력에서 topic·frame·파일 이름 또는 성공 메시지를 찾으면 이 단계가 완료됩니다.</a:t>
+              <a:t>파일명·경로·핵심 이름을 슬라이드와 동일하게 작성한다.</a:t>
+            </a:r>
+          </a:p>
+        </p:txBody>
+      </p:sp>
+      <p:sp>
+        <p:nvSpPr>
+          <p:cNvPr id="13" name="TextBox 12"/>
+          <p:cNvSpPr txBox="1"/>
+          <p:nvPr/>
+        </p:nvSpPr>
+        <p:spPr>
+          <a:xfrm>
+            <a:off x="868680" y="2889504"/>
+            <a:ext cx="1234440" cy="228600"/>
+          </a:xfrm>
+          <a:prstGeom prst="rect">
+            <a:avLst/>
+          </a:prstGeom>
+          <a:noFill/>
+        </p:spPr>
+        <p:txBody>
+          <a:bodyPr wrap="square" lIns="73152" rIns="73152" tIns="36576" bIns="36576">
+            <a:spAutoFit/>
+          </a:bodyPr>
+          <a:lstStyle/>
+          <a:p>
+            <a:pPr algn="l">
+              <a:spcAft>
+                <a:spcPts val="0"/>
+              </a:spcAft>
+              <a:defRPr sz="1500" b="1">
+                <a:solidFill>
+                  <a:srgbClr val="225B9B"/>
+                </a:solidFill>
+                <a:latin typeface="Noto Sans CJK KR"/>
+              </a:defRPr>
+            </a:pPr>
+            <a:r>
+              <a:t>사용/확인</a:t>
+            </a:r>
+          </a:p>
+        </p:txBody>
+      </p:sp>
+      <p:sp>
+        <p:nvSpPr>
+          <p:cNvPr id="14" name="TextBox 13"/>
+          <p:cNvSpPr txBox="1"/>
+          <p:nvPr/>
+        </p:nvSpPr>
+        <p:spPr>
+          <a:xfrm>
+            <a:off x="1975104" y="2871216"/>
+            <a:ext cx="9189720" cy="512064"/>
+          </a:xfrm>
+          <a:prstGeom prst="rect">
+            <a:avLst/>
+          </a:prstGeom>
+          <a:noFill/>
+        </p:spPr>
+        <p:txBody>
+          <a:bodyPr wrap="square" lIns="73152" rIns="73152" tIns="36576" bIns="36576">
+            <a:spAutoFit/>
+          </a:bodyPr>
+          <a:lstStyle/>
+          <a:p>
+            <a:pPr algn="l">
+              <a:spcAft>
+                <a:spcPts val="0"/>
+              </a:spcAft>
+              <a:defRPr sz="1300" b="0">
+                <a:solidFill>
+                  <a:srgbClr val="122C4E"/>
+                </a:solidFill>
+                <a:latin typeface="Noto Sans CJK KR"/>
+              </a:defRPr>
+            </a:pPr>
+            <a:r>
+              <a:t>사용: build/source 뒤 실행 단계에서 사용한다.</a:t>
+            </a:r>
+            <a:br/>
+            <a:r>
+              <a:t>화면/출력: 검증 명령의 파일·topic 이름</a:t>
+            </a:r>
+          </a:p>
+        </p:txBody>
+      </p:sp>
+      <p:sp>
+        <p:nvSpPr>
+          <p:cNvPr id="15" name="Rounded Rectangle 14"/>
+          <p:cNvSpPr/>
+          <p:nvPr/>
+        </p:nvSpPr>
+        <p:spPr>
+          <a:xfrm>
+            <a:off x="640080" y="3941063"/>
+            <a:ext cx="10972800" cy="2048256"/>
+          </a:xfrm>
+          <a:prstGeom prst="roundRect">
+            <a:avLst/>
+          </a:prstGeom>
+          <a:solidFill>
+            <a:srgbClr val="F4F7FB"/>
+          </a:solidFill>
+          <a:ln>
+            <a:solidFill>
+              <a:srgbClr val="CCDBEB"/>
+            </a:solidFill>
+          </a:ln>
+        </p:spPr>
+        <p:style>
+          <a:lnRef idx="1">
+            <a:schemeClr val="accent1"/>
+          </a:lnRef>
+          <a:fillRef idx="3">
+            <a:schemeClr val="accent1"/>
+          </a:fillRef>
+          <a:effectRef idx="2">
+            <a:schemeClr val="accent1"/>
+          </a:effectRef>
+          <a:fontRef idx="minor">
+            <a:schemeClr val="lt1"/>
+          </a:fontRef>
+        </p:style>
+        <p:txBody>
+          <a:bodyPr rtlCol="0" anchor="ctr"/>
+          <a:lstStyle/>
+          <a:p>
+            <a:pPr algn="ctr"/>
+          </a:p>
+        </p:txBody>
+      </p:sp>
+      <p:sp>
+        <p:nvSpPr>
+          <p:cNvPr id="16" name="TextBox 15"/>
+          <p:cNvSpPr txBox="1"/>
+          <p:nvPr/>
+        </p:nvSpPr>
+        <p:spPr>
+          <a:xfrm>
+            <a:off x="850392" y="4078224"/>
+            <a:ext cx="10424160" cy="256032"/>
+          </a:xfrm>
+          <a:prstGeom prst="rect">
+            <a:avLst/>
+          </a:prstGeom>
+          <a:noFill/>
+        </p:spPr>
+        <p:txBody>
+          <a:bodyPr wrap="square" lIns="73152" rIns="73152" tIns="36576" bIns="36576">
+            <a:spAutoFit/>
+          </a:bodyPr>
+          <a:lstStyle/>
+          <a:p>
+            <a:pPr algn="l">
+              <a:spcAft>
+                <a:spcPts val="0"/>
+              </a:spcAft>
+              <a:defRPr sz="1300" b="1">
+                <a:solidFill>
+                  <a:srgbClr val="225B9B"/>
+                </a:solidFill>
+                <a:latin typeface="DejaVu Sans Mono"/>
+              </a:defRPr>
+            </a:pPr>
+            <a:r>
+              <a:t>~/ros2_curri/agv_ws/src/agv_cpp_examples/src/status_publisher.cpp</a:t>
+            </a:r>
+          </a:p>
+        </p:txBody>
+      </p:sp>
+      <p:sp>
+        <p:nvSpPr>
+          <p:cNvPr id="17" name="TextBox 16"/>
+          <p:cNvSpPr txBox="1"/>
+          <p:nvPr/>
+        </p:nvSpPr>
+        <p:spPr>
+          <a:xfrm>
+            <a:off x="868680" y="4443983"/>
+            <a:ext cx="1234440" cy="228600"/>
+          </a:xfrm>
+          <a:prstGeom prst="rect">
+            <a:avLst/>
+          </a:prstGeom>
+          <a:noFill/>
+        </p:spPr>
+        <p:txBody>
+          <a:bodyPr wrap="square" lIns="73152" rIns="73152" tIns="36576" bIns="36576">
+            <a:spAutoFit/>
+          </a:bodyPr>
+          <a:lstStyle/>
+          <a:p>
+            <a:pPr algn="l">
+              <a:spcAft>
+                <a:spcPts val="0"/>
+              </a:spcAft>
+              <a:defRPr sz="1500" b="1">
+                <a:solidFill>
+                  <a:srgbClr val="2A8B5A"/>
+                </a:solidFill>
+                <a:latin typeface="Noto Sans CJK KR"/>
+              </a:defRPr>
+            </a:pPr>
+            <a:r>
+              <a:t>만드는 것</a:t>
+            </a:r>
+          </a:p>
+        </p:txBody>
+      </p:sp>
+      <p:sp>
+        <p:nvSpPr>
+          <p:cNvPr id="18" name="TextBox 17"/>
+          <p:cNvSpPr txBox="1"/>
+          <p:nvPr/>
+        </p:nvSpPr>
+        <p:spPr>
+          <a:xfrm>
+            <a:off x="1975104" y="4425696"/>
+            <a:ext cx="9189720" cy="274320"/>
+          </a:xfrm>
+          <a:prstGeom prst="rect">
+            <a:avLst/>
+          </a:prstGeom>
+          <a:noFill/>
+        </p:spPr>
+        <p:txBody>
+          <a:bodyPr wrap="square" lIns="73152" rIns="73152" tIns="36576" bIns="36576">
+            <a:spAutoFit/>
+          </a:bodyPr>
+          <a:lstStyle/>
+          <a:p>
+            <a:pPr algn="l">
+              <a:spcAft>
+                <a:spcPts val="0"/>
+              </a:spcAft>
+              <a:defRPr sz="1500" b="0">
+                <a:solidFill>
+                  <a:srgbClr val="122C4E"/>
+                </a:solidFill>
+                <a:latin typeface="Noto Sans CJK KR"/>
+              </a:defRPr>
+            </a:pPr>
+            <a:r>
+              <a:t>이번 모듈의 재현 가능한 파일</a:t>
+            </a:r>
+          </a:p>
+        </p:txBody>
+      </p:sp>
+      <p:sp>
+        <p:nvSpPr>
+          <p:cNvPr id="19" name="TextBox 18"/>
+          <p:cNvSpPr txBox="1"/>
+          <p:nvPr/>
+        </p:nvSpPr>
+        <p:spPr>
+          <a:xfrm>
+            <a:off x="868680" y="4818888"/>
+            <a:ext cx="1234440" cy="228600"/>
+          </a:xfrm>
+          <a:prstGeom prst="rect">
+            <a:avLst/>
+          </a:prstGeom>
+          <a:noFill/>
+        </p:spPr>
+        <p:txBody>
+          <a:bodyPr wrap="square" lIns="73152" rIns="73152" tIns="36576" bIns="36576">
+            <a:spAutoFit/>
+          </a:bodyPr>
+          <a:lstStyle/>
+          <a:p>
+            <a:pPr algn="l">
+              <a:spcAft>
+                <a:spcPts val="0"/>
+              </a:spcAft>
+              <a:defRPr sz="1500" b="1">
+                <a:solidFill>
+                  <a:srgbClr val="DB7E22"/>
+                </a:solidFill>
+                <a:latin typeface="Noto Sans CJK KR"/>
+              </a:defRPr>
+            </a:pPr>
+            <a:r>
+              <a:t>코드 읽기</a:t>
+            </a:r>
+          </a:p>
+        </p:txBody>
+      </p:sp>
+      <p:sp>
+        <p:nvSpPr>
+          <p:cNvPr id="20" name="TextBox 19"/>
+          <p:cNvSpPr txBox="1"/>
+          <p:nvPr/>
+        </p:nvSpPr>
+        <p:spPr>
+          <a:xfrm>
+            <a:off x="1975104" y="4800600"/>
+            <a:ext cx="9189720" cy="301752"/>
+          </a:xfrm>
+          <a:prstGeom prst="rect">
+            <a:avLst/>
+          </a:prstGeom>
+          <a:noFill/>
+        </p:spPr>
+        <p:txBody>
+          <a:bodyPr wrap="square" lIns="73152" rIns="73152" tIns="36576" bIns="36576">
+            <a:spAutoFit/>
+          </a:bodyPr>
+          <a:lstStyle/>
+          <a:p>
+            <a:pPr algn="l">
+              <a:spcAft>
+                <a:spcPts val="0"/>
+              </a:spcAft>
+              <a:defRPr sz="1400" b="0">
+                <a:solidFill>
+                  <a:srgbClr val="122C4E"/>
+                </a:solidFill>
+                <a:latin typeface="Noto Sans CJK KR"/>
+              </a:defRPr>
+            </a:pPr>
+            <a:r>
+              <a:t>파일명·경로·핵심 이름을 슬라이드와 동일하게 작성한다.</a:t>
+            </a:r>
+          </a:p>
+        </p:txBody>
+      </p:sp>
+      <p:sp>
+        <p:nvSpPr>
+          <p:cNvPr id="21" name="TextBox 20"/>
+          <p:cNvSpPr txBox="1"/>
+          <p:nvPr/>
+        </p:nvSpPr>
+        <p:spPr>
+          <a:xfrm>
+            <a:off x="868680" y="5202936"/>
+            <a:ext cx="1234440" cy="228600"/>
+          </a:xfrm>
+          <a:prstGeom prst="rect">
+            <a:avLst/>
+          </a:prstGeom>
+          <a:noFill/>
+        </p:spPr>
+        <p:txBody>
+          <a:bodyPr wrap="square" lIns="73152" rIns="73152" tIns="36576" bIns="36576">
+            <a:spAutoFit/>
+          </a:bodyPr>
+          <a:lstStyle/>
+          <a:p>
+            <a:pPr algn="l">
+              <a:spcAft>
+                <a:spcPts val="0"/>
+              </a:spcAft>
+              <a:defRPr sz="1500" b="1">
+                <a:solidFill>
+                  <a:srgbClr val="225B9B"/>
+                </a:solidFill>
+                <a:latin typeface="Noto Sans CJK KR"/>
+              </a:defRPr>
+            </a:pPr>
+            <a:r>
+              <a:t>사용/확인</a:t>
+            </a:r>
+          </a:p>
+        </p:txBody>
+      </p:sp>
+      <p:sp>
+        <p:nvSpPr>
+          <p:cNvPr id="22" name="TextBox 21"/>
+          <p:cNvSpPr txBox="1"/>
+          <p:nvPr/>
+        </p:nvSpPr>
+        <p:spPr>
+          <a:xfrm>
+            <a:off x="1975104" y="5184648"/>
+            <a:ext cx="9189720" cy="512064"/>
+          </a:xfrm>
+          <a:prstGeom prst="rect">
+            <a:avLst/>
+          </a:prstGeom>
+          <a:noFill/>
+        </p:spPr>
+        <p:txBody>
+          <a:bodyPr wrap="square" lIns="73152" rIns="73152" tIns="36576" bIns="36576">
+            <a:spAutoFit/>
+          </a:bodyPr>
+          <a:lstStyle/>
+          <a:p>
+            <a:pPr algn="l">
+              <a:spcAft>
+                <a:spcPts val="0"/>
+              </a:spcAft>
+              <a:defRPr sz="1300" b="0">
+                <a:solidFill>
+                  <a:srgbClr val="122C4E"/>
+                </a:solidFill>
+                <a:latin typeface="Noto Sans CJK KR"/>
+              </a:defRPr>
+            </a:pPr>
+            <a:r>
+              <a:t>사용: build/source 뒤 실행 단계에서 사용한다.</a:t>
+            </a:r>
+            <a:br/>
+            <a:r>
+              <a:t>화면/출력: 검증 명령의 파일·topic 이름</a:t>
             </a:r>
           </a:p>
         </p:txBody>
@@ -16020,7 +17974,7 @@
               </a:defRPr>
             </a:pPr>
             <a:r>
-              <a:t>파일을 새로 만들고 저장한다 (1/3)</a:t>
+              <a:t>workspace 뼈대를 만든다</a:t>
             </a:r>
           </a:p>
         </p:txBody>
@@ -16059,7 +18013,7 @@
               </a:defRPr>
             </a:pPr>
             <a:r>
-              <a:t>~/ros2_curri/agv_ws/src/agv_control/package.xml</a:t>
+              <a:t>한 장에는 한 행동만 수행합니다.</a:t>
             </a:r>
           </a:p>
         </p:txBody>
@@ -16195,7 +18149,7 @@
               </a:defRPr>
             </a:pPr>
             <a:r>
-              <a:t>현재 단계 3/6    |    현재 폴더 ~/ros2_curri/agv_ws    |    현재 터미널</a:t>
+              <a:t>현재 단계 1/2    |    현재 폴더 ~/ros2_curri/agv_ws    |    현재 터미널</a:t>
             </a:r>
           </a:p>
         </p:txBody>
@@ -16208,8 +18162,8 @@
         </p:nvSpPr>
         <p:spPr>
           <a:xfrm>
-            <a:off x="658368" y="1627632"/>
-            <a:ext cx="10972800" cy="256032"/>
+            <a:off x="676656" y="1764792"/>
+            <a:ext cx="1828800" cy="347472"/>
           </a:xfrm>
           <a:prstGeom prst="rect">
             <a:avLst/>
@@ -16226,7 +18180,46 @@
               <a:spcAft>
                 <a:spcPts val="0"/>
               </a:spcAft>
-              <a:defRPr sz="1500" b="1">
+              <a:defRPr sz="1800" b="1">
+                <a:solidFill>
+                  <a:srgbClr val="225B9B"/>
+                </a:solidFill>
+                <a:latin typeface="Noto Sans CJK KR"/>
+              </a:defRPr>
+            </a:pPr>
+            <a:r>
+              <a:t>왜 하는가</a:t>
+            </a:r>
+          </a:p>
+        </p:txBody>
+      </p:sp>
+      <p:sp>
+        <p:nvSpPr>
+          <p:cNvPr id="8" name="TextBox 7"/>
+          <p:cNvSpPr txBox="1"/>
+          <p:nvPr/>
+        </p:nvSpPr>
+        <p:spPr>
+          <a:xfrm>
+            <a:off x="676656" y="2103120"/>
+            <a:ext cx="10789920" cy="512064"/>
+          </a:xfrm>
+          <a:prstGeom prst="rect">
+            <a:avLst/>
+          </a:prstGeom>
+          <a:noFill/>
+        </p:spPr>
+        <p:txBody>
+          <a:bodyPr wrap="square" lIns="73152" rIns="73152" tIns="36576" bIns="36576">
+            <a:spAutoFit/>
+          </a:bodyPr>
+          <a:lstStyle/>
+          <a:p>
+            <a:pPr algn="l">
+              <a:spcAft>
+                <a:spcPts val="0"/>
+              </a:spcAft>
+              <a:defRPr sz="2000" b="0">
                 <a:solidFill>
                   <a:srgbClr val="122C4E"/>
                 </a:solidFill>
@@ -16234,85 +18227,23 @@
               </a:defRPr>
             </a:pPr>
             <a:r>
-              <a:t>이번 단계: 파일의 전체 내용을 중간 생략 없이 작성합니다. 아래 줄 범위를 끝까지 입력하세요.</a:t>
-            </a:r>
-          </a:p>
-        </p:txBody>
-      </p:sp>
-      <p:sp>
-        <p:nvSpPr>
-          <p:cNvPr id="8" name="Rectangle 7"/>
+              <a:t>colcon은 src 아래 패키지를 찾아 build/install/log를 만든다.</a:t>
+            </a:r>
+          </a:p>
+        </p:txBody>
+      </p:sp>
+      <p:sp>
+        <p:nvSpPr>
+          <p:cNvPr id="9" name="Rounded Rectangle 8"/>
           <p:cNvSpPr/>
           <p:nvPr/>
         </p:nvSpPr>
         <p:spPr>
           <a:xfrm>
-            <a:off x="658368" y="1956816"/>
-            <a:ext cx="10972800" cy="603504"/>
-          </a:xfrm>
-          <a:prstGeom prst="rect">
-            <a:avLst/>
-          </a:prstGeom>
-          <a:solidFill>
-            <a:srgbClr val="F4F7FB"/>
-          </a:solidFill>
-          <a:ln>
-            <a:solidFill>
-              <a:srgbClr val="F4F7FB"/>
-            </a:solidFill>
-          </a:ln>
-        </p:spPr>
-        <p:style>
-          <a:lnRef idx="1">
-            <a:schemeClr val="accent1"/>
-          </a:lnRef>
-          <a:fillRef idx="3">
-            <a:schemeClr val="accent1"/>
-          </a:fillRef>
-          <a:effectRef idx="2">
-            <a:schemeClr val="accent1"/>
-          </a:effectRef>
-          <a:fontRef idx="minor">
-            <a:schemeClr val="lt1"/>
-          </a:fontRef>
-        </p:style>
-        <p:txBody>
-          <a:bodyPr rtlCol="0" anchor="ctr" wrap="square" lIns="73152" rIns="73152" tIns="36576" bIns="36576"/>
-          <a:lstStyle/>
-          <a:p>
-            <a:pPr algn="l">
-              <a:spcAft>
-                <a:spcPts val="0"/>
-              </a:spcAft>
-              <a:defRPr sz="1400" b="0">
-                <a:solidFill>
-                  <a:srgbClr val="122C4E"/>
-                </a:solidFill>
-                <a:latin typeface="DejaVu Sans Mono"/>
-              </a:defRPr>
-            </a:pPr>
-            <a:r>
-              <a:t>파일 생성: mkdir -p ~/ros2_curri/agv_ws/src/agv_control</a:t>
-            </a:r>
-            <a:br/>
-            <a:r>
-              <a:t>파일 열기: nano ~/ros2_curri/agv_ws/src/agv_control/package.xml</a:t>
-            </a:r>
-          </a:p>
-        </p:txBody>
-      </p:sp>
-      <p:sp>
-        <p:nvSpPr>
-          <p:cNvPr id="9" name="Rectangle 8"/>
-          <p:cNvSpPr/>
-          <p:nvPr/>
-        </p:nvSpPr>
-        <p:spPr>
-          <a:xfrm>
-            <a:off x="658368" y="2706624"/>
-            <a:ext cx="10972800" cy="3364992"/>
-          </a:xfrm>
-          <a:prstGeom prst="rect">
+            <a:off x="676656" y="2871216"/>
+            <a:ext cx="10835640" cy="2331720"/>
+          </a:xfrm>
+          <a:prstGeom prst="roundRect">
             <a:avLst/>
           </a:prstGeom>
           <a:solidFill>
@@ -16339,14 +18270,14 @@
           </a:fontRef>
         </p:style>
         <p:txBody>
-          <a:bodyPr rtlCol="0" anchor="ctr" wrap="square" lIns="164592" rIns="164592" tIns="109728" bIns="36576"/>
-          <a:lstStyle/>
-          <a:p>
-            <a:pPr algn="l">
-              <a:spcAft>
-                <a:spcPts val="0"/>
-              </a:spcAft>
-              <a:defRPr sz="1400" b="0">
+          <a:bodyPr rtlCol="0" anchor="ctr" wrap="square" lIns="73152" rIns="73152" tIns="36576" bIns="36576"/>
+          <a:lstStyle/>
+          <a:p>
+            <a:pPr algn="l">
+              <a:spcAft>
+                <a:spcPts val="0"/>
+              </a:spcAft>
+              <a:defRPr sz="1600" b="0">
                 <a:solidFill>
                   <a:srgbClr val="FFFFFF"/>
                 </a:solidFill>
@@ -16354,51 +18285,15 @@
               </a:defRPr>
             </a:pPr>
             <a:r>
-              <a:t>&lt;?xml version="1.0" ?&gt;</a:t>
+              <a:t>mkdir -p ~/ros2_curri/agv_ws/src</a:t>
             </a:r>
             <a:br/>
             <a:r>
-              <a:t>&lt;package format="3"&gt;</a:t>
+              <a:t>cd ~/ros2_curri/agv_ws</a:t>
             </a:r>
             <a:br/>
             <a:r>
-              <a:t>  </a:t>
-            </a:r>
-            <a:br/>
-            <a:r>
-              <a:t>  </a:t>
-            </a:r>
-            <a:br/>
-            <a:r>
-              <a:t>  &lt;name&gt;agv_control&lt;/name&gt;</a:t>
-            </a:r>
-            <a:br/>
-            <a:r>
-              <a:t>  &lt;version&gt;0.1.0&lt;/version&gt;</a:t>
-            </a:r>
-            <a:br/>
-            <a:r>
-              <a:t>  </a:t>
-            </a:r>
-            <a:br/>
-            <a:r>
-              <a:t>  </a:t>
-            </a:r>
-            <a:br/>
-            <a:r>
-              <a:t>  &lt;description&gt;Small ROS 2 control nodes for the educational AGV.&lt;/description&gt;</a:t>
-            </a:r>
-            <a:br/>
-            <a:r>
-              <a:t>  </a:t>
-            </a:r>
-            <a:br/>
-            <a:r>
-              <a:t>  </a:t>
-            </a:r>
-            <a:br/>
-            <a:r>
-              <a:t>  &lt;maintainer email="student@example.com"&gt;AGV student&lt;/maintainer&gt;</a:t>
+              <a:t>colcon build --symlink-install</a:t>
             </a:r>
           </a:p>
         </p:txBody>
@@ -16411,8 +18306,8 @@
         </p:nvSpPr>
         <p:spPr>
           <a:xfrm>
-            <a:off x="749808" y="6181344"/>
-            <a:ext cx="10789920" cy="201168"/>
+            <a:off x="768096" y="5468112"/>
+            <a:ext cx="1143000" cy="256032"/>
           </a:xfrm>
           <a:prstGeom prst="rect">
             <a:avLst/>
@@ -16429,15 +18324,54 @@
               <a:spcAft>
                 <a:spcPts val="0"/>
               </a:spcAft>
-              <a:defRPr sz="1000" b="0">
-                <a:solidFill>
-                  <a:srgbClr val="5C6672"/>
-                </a:solidFill>
-                <a:latin typeface="Noto Sans CJK KR"/>
-              </a:defRPr>
-            </a:pPr>
-            <a:r>
-              <a:t>파일 전체 1/3 · 이 슬라이드 다음에 같은 파일의 나머지 줄이 이어집니다.</a:t>
+              <a:defRPr sz="1800" b="1">
+                <a:solidFill>
+                  <a:srgbClr val="2A8B5A"/>
+                </a:solidFill>
+                <a:latin typeface="Noto Sans CJK KR"/>
+              </a:defRPr>
+            </a:pPr>
+            <a:r>
+              <a:t>확인</a:t>
+            </a:r>
+          </a:p>
+        </p:txBody>
+      </p:sp>
+      <p:sp>
+        <p:nvSpPr>
+          <p:cNvPr id="11" name="TextBox 10"/>
+          <p:cNvSpPr txBox="1"/>
+          <p:nvPr/>
+        </p:nvSpPr>
+        <p:spPr>
+          <a:xfrm>
+            <a:off x="768096" y="5742432"/>
+            <a:ext cx="10561320" cy="347472"/>
+          </a:xfrm>
+          <a:prstGeom prst="rect">
+            <a:avLst/>
+          </a:prstGeom>
+          <a:noFill/>
+        </p:spPr>
+        <p:txBody>
+          <a:bodyPr wrap="square" lIns="73152" rIns="73152" tIns="36576" bIns="36576">
+            <a:spAutoFit/>
+          </a:bodyPr>
+          <a:lstStyle/>
+          <a:p>
+            <a:pPr algn="l">
+              <a:spcAft>
+                <a:spcPts val="0"/>
+              </a:spcAft>
+              <a:defRPr sz="1800" b="0">
+                <a:solidFill>
+                  <a:srgbClr val="122C4E"/>
+                </a:solidFill>
+                <a:latin typeface="Noto Sans CJK KR"/>
+              </a:defRPr>
+            </a:pPr>
+            <a:r>
+              <a:t>명령의 출력에서 topic·frame·파일 이름 또는 성공 메시지를 찾으면 이 단계가 완료됩니다.</a:t>
             </a:r>
           </a:p>
         </p:txBody>

--- a/blocks/A_ros2_basics/M02_workspace_package/M02_Workspace_생성과_빌드.pptx
+++ b/blocks/A_ros2_basics/M02_workspace_package/M02_Workspace_생성과_빌드.pptx
@@ -7404,7 +7404,7 @@
               <a:spcAft>
                 <a:spcPts val="0"/>
               </a:spcAft>
-              <a:defRPr sz="1800" b="1">
+              <a:defRPr sz="1400" b="1">
                 <a:solidFill>
                   <a:srgbClr val="FFFFFF"/>
                 </a:solidFill>
@@ -7412,7 +7412,7 @@
               </a:defRPr>
             </a:pPr>
             <a:r>
-              <a:t>M02 · Block A · ROS 2 + Gazebo Sim AGV</a:t>
+              <a:t>ROS 2 기반 AGV End-to-End 개발 커리큘럼 · M02 · Block A</a:t>
             </a:r>
           </a:p>
         </p:txBody>
@@ -7622,7 +7622,7 @@
               <a:spcAft>
                 <a:spcPts val="0"/>
               </a:spcAft>
-              <a:defRPr sz="1000" b="0">
+              <a:defRPr sz="900" b="0">
                 <a:solidFill>
                   <a:srgbClr val="5C6672"/>
                 </a:solidFill>
@@ -7630,7 +7630,7 @@
               </a:defRPr>
             </a:pPr>
             <a:r>
-              <a:t>ROS 2 Jazzy · Gazebo Harmonic · M02 · 따라 하기형 AGV 실습</a:t>
+              <a:t>ROS 2 기반 AGV End-to-End 개발 커리큘럼 · M02 · Block A</a:t>
             </a:r>
           </a:p>
         </p:txBody>
@@ -7796,7 +7796,7 @@
               <a:spcAft>
                 <a:spcPts val="0"/>
               </a:spcAft>
-              <a:defRPr sz="1000" b="0">
+              <a:defRPr sz="900" b="0">
                 <a:solidFill>
                   <a:srgbClr val="5C6672"/>
                 </a:solidFill>
@@ -7804,7 +7804,7 @@
               </a:defRPr>
             </a:pPr>
             <a:r>
-              <a:t>ROS 2 Jazzy · Gazebo Harmonic · M02 · 따라 하기형 AGV 실습</a:t>
+              <a:t>ROS 2 기반 AGV End-to-End 개발 커리큘럼 · M02 · Block A</a:t>
             </a:r>
           </a:p>
         </p:txBody>
@@ -8215,7 +8215,7 @@
               <a:spcAft>
                 <a:spcPts val="0"/>
               </a:spcAft>
-              <a:defRPr sz="1000" b="0">
+              <a:defRPr sz="900" b="0">
                 <a:solidFill>
                   <a:srgbClr val="5C6672"/>
                 </a:solidFill>
@@ -8223,7 +8223,7 @@
               </a:defRPr>
             </a:pPr>
             <a:r>
-              <a:t>ROS 2 Jazzy · Gazebo Harmonic · M02 · 따라 하기형 AGV 실습</a:t>
+              <a:t>ROS 2 기반 AGV End-to-End 개발 커리큘럼 · M02 · Block A</a:t>
             </a:r>
           </a:p>
         </p:txBody>
@@ -8743,7 +8743,7 @@
               <a:spcAft>
                 <a:spcPts val="0"/>
               </a:spcAft>
-              <a:defRPr sz="1000" b="0">
+              <a:defRPr sz="900" b="0">
                 <a:solidFill>
                   <a:srgbClr val="5C6672"/>
                 </a:solidFill>
@@ -8751,7 +8751,7 @@
               </a:defRPr>
             </a:pPr>
             <a:r>
-              <a:t>ROS 2 Jazzy · Gazebo Harmonic · M02 · 따라 하기형 AGV 실습</a:t>
+              <a:t>ROS 2 기반 AGV End-to-End 개발 커리큘럼 · M02 · Block A</a:t>
             </a:r>
           </a:p>
         </p:txBody>
@@ -9532,7 +9532,7 @@
               <a:spcAft>
                 <a:spcPts val="0"/>
               </a:spcAft>
-              <a:defRPr sz="1000" b="0">
+              <a:defRPr sz="900" b="0">
                 <a:solidFill>
                   <a:srgbClr val="5C6672"/>
                 </a:solidFill>
@@ -9540,7 +9540,7 @@
               </a:defRPr>
             </a:pPr>
             <a:r>
-              <a:t>ROS 2 Jazzy · Gazebo Harmonic · M02 · 따라 하기형 AGV 실습</a:t>
+              <a:t>ROS 2 기반 AGV End-to-End 개발 커리큘럼 · M02 · Block A</a:t>
             </a:r>
           </a:p>
         </p:txBody>
@@ -10101,7 +10101,7 @@
               <a:spcAft>
                 <a:spcPts val="0"/>
               </a:spcAft>
-              <a:defRPr sz="1000" b="0">
+              <a:defRPr sz="900" b="0">
                 <a:solidFill>
                   <a:srgbClr val="5C6672"/>
                 </a:solidFill>
@@ -10109,7 +10109,7 @@
               </a:defRPr>
             </a:pPr>
             <a:r>
-              <a:t>ROS 2 Jazzy · Gazebo Harmonic · M02 · 따라 하기형 AGV 실습</a:t>
+              <a:t>ROS 2 기반 AGV End-to-End 개발 커리큘럼 · M02 · Block A</a:t>
             </a:r>
           </a:p>
         </p:txBody>
@@ -10575,7 +10575,7 @@
               <a:spcAft>
                 <a:spcPts val="0"/>
               </a:spcAft>
-              <a:defRPr sz="1000" b="0">
+              <a:defRPr sz="900" b="0">
                 <a:solidFill>
                   <a:srgbClr val="5C6672"/>
                 </a:solidFill>
@@ -10583,7 +10583,7 @@
               </a:defRPr>
             </a:pPr>
             <a:r>
-              <a:t>ROS 2 Jazzy · Gazebo Harmonic · M02 · 따라 하기형 AGV 실습</a:t>
+              <a:t>ROS 2 기반 AGV End-to-End 개발 커리큘럼 · M02 · Block A</a:t>
             </a:r>
           </a:p>
         </p:txBody>
@@ -11049,7 +11049,7 @@
               <a:spcAft>
                 <a:spcPts val="0"/>
               </a:spcAft>
-              <a:defRPr sz="1000" b="0">
+              <a:defRPr sz="900" b="0">
                 <a:solidFill>
                   <a:srgbClr val="5C6672"/>
                 </a:solidFill>
@@ -11057,7 +11057,7 @@
               </a:defRPr>
             </a:pPr>
             <a:r>
-              <a:t>ROS 2 Jazzy · Gazebo Harmonic · M02 · 따라 하기형 AGV 실습</a:t>
+              <a:t>ROS 2 기반 AGV End-to-End 개발 커리큘럼 · M02 · Block A</a:t>
             </a:r>
           </a:p>
         </p:txBody>
@@ -11508,7 +11508,7 @@
               <a:spcAft>
                 <a:spcPts val="0"/>
               </a:spcAft>
-              <a:defRPr sz="1000" b="0">
+              <a:defRPr sz="900" b="0">
                 <a:solidFill>
                   <a:srgbClr val="5C6672"/>
                 </a:solidFill>
@@ -11516,7 +11516,7 @@
               </a:defRPr>
             </a:pPr>
             <a:r>
-              <a:t>ROS 2 Jazzy · Gazebo Harmonic · M02 · 따라 하기형 AGV 실습</a:t>
+              <a:t>ROS 2 기반 AGV End-to-End 개발 커리큘럼 · M02 · Block A</a:t>
             </a:r>
           </a:p>
         </p:txBody>
@@ -12036,7 +12036,7 @@
               <a:spcAft>
                 <a:spcPts val="0"/>
               </a:spcAft>
-              <a:defRPr sz="1000" b="0">
+              <a:defRPr sz="900" b="0">
                 <a:solidFill>
                   <a:srgbClr val="5C6672"/>
                 </a:solidFill>
@@ -12044,7 +12044,7 @@
               </a:defRPr>
             </a:pPr>
             <a:r>
-              <a:t>ROS 2 Jazzy · Gazebo Harmonic · M02 · 따라 하기형 AGV 실습</a:t>
+              <a:t>ROS 2 기반 AGV End-to-End 개발 커리큘럼 · M02 · Block A</a:t>
             </a:r>
           </a:p>
         </p:txBody>
@@ -12829,7 +12829,7 @@
               <a:spcAft>
                 <a:spcPts val="0"/>
               </a:spcAft>
-              <a:defRPr sz="1000" b="0">
+              <a:defRPr sz="900" b="0">
                 <a:solidFill>
                   <a:srgbClr val="5C6672"/>
                 </a:solidFill>
@@ -12837,7 +12837,7 @@
               </a:defRPr>
             </a:pPr>
             <a:r>
-              <a:t>ROS 2 Jazzy · Gazebo Harmonic · M02 · 따라 하기형 AGV 실습</a:t>
+              <a:t>ROS 2 기반 AGV End-to-End 개발 커리큘럼 · M02 · Block A</a:t>
             </a:r>
           </a:p>
         </p:txBody>
@@ -13622,7 +13622,7 @@
               <a:spcAft>
                 <a:spcPts val="0"/>
               </a:spcAft>
-              <a:defRPr sz="1000" b="0">
+              <a:defRPr sz="900" b="0">
                 <a:solidFill>
                   <a:srgbClr val="5C6672"/>
                 </a:solidFill>
@@ -13630,7 +13630,7 @@
               </a:defRPr>
             </a:pPr>
             <a:r>
-              <a:t>ROS 2 Jazzy · Gazebo Harmonic · M02 · 따라 하기형 AGV 실습</a:t>
+              <a:t>ROS 2 기반 AGV End-to-End 개발 커리큘럼 · M02 · Block A</a:t>
             </a:r>
           </a:p>
         </p:txBody>
@@ -14083,7 +14083,7 @@
               <a:spcAft>
                 <a:spcPts val="0"/>
               </a:spcAft>
-              <a:defRPr sz="1000" b="0">
+              <a:defRPr sz="900" b="0">
                 <a:solidFill>
                   <a:srgbClr val="5C6672"/>
                 </a:solidFill>
@@ -14091,7 +14091,7 @@
               </a:defRPr>
             </a:pPr>
             <a:r>
-              <a:t>ROS 2 Jazzy · Gazebo Harmonic · M02 · 따라 하기형 AGV 실습</a:t>
+              <a:t>ROS 2 기반 AGV End-to-End 개발 커리큘럼 · M02 · Block A</a:t>
             </a:r>
           </a:p>
         </p:txBody>
@@ -14557,7 +14557,7 @@
               <a:spcAft>
                 <a:spcPts val="0"/>
               </a:spcAft>
-              <a:defRPr sz="1000" b="0">
+              <a:defRPr sz="900" b="0">
                 <a:solidFill>
                   <a:srgbClr val="5C6672"/>
                 </a:solidFill>
@@ -14565,7 +14565,7 @@
               </a:defRPr>
             </a:pPr>
             <a:r>
-              <a:t>ROS 2 Jazzy · Gazebo Harmonic · M02 · 따라 하기형 AGV 실습</a:t>
+              <a:t>ROS 2 기반 AGV End-to-End 개발 커리큘럼 · M02 · Block A</a:t>
             </a:r>
           </a:p>
         </p:txBody>
@@ -15085,7 +15085,7 @@
               <a:spcAft>
                 <a:spcPts val="0"/>
               </a:spcAft>
-              <a:defRPr sz="1000" b="0">
+              <a:defRPr sz="900" b="0">
                 <a:solidFill>
                   <a:srgbClr val="5C6672"/>
                 </a:solidFill>
@@ -15093,7 +15093,7 @@
               </a:defRPr>
             </a:pPr>
             <a:r>
-              <a:t>ROS 2 Jazzy · Gazebo Harmonic · M02 · 따라 하기형 AGV 실습</a:t>
+              <a:t>ROS 2 기반 AGV End-to-End 개발 커리큘럼 · M02 · Block A</a:t>
             </a:r>
           </a:p>
         </p:txBody>
@@ -15874,7 +15874,7 @@
               <a:spcAft>
                 <a:spcPts val="0"/>
               </a:spcAft>
-              <a:defRPr sz="1000" b="0">
+              <a:defRPr sz="900" b="0">
                 <a:solidFill>
                   <a:srgbClr val="5C6672"/>
                 </a:solidFill>
@@ -15882,7 +15882,7 @@
               </a:defRPr>
             </a:pPr>
             <a:r>
-              <a:t>ROS 2 Jazzy · Gazebo Harmonic · M02 · 따라 하기형 AGV 실습</a:t>
+              <a:t>ROS 2 기반 AGV End-to-End 개발 커리큘럼 · M02 · Block A</a:t>
             </a:r>
           </a:p>
         </p:txBody>
@@ -16667,7 +16667,7 @@
               <a:spcAft>
                 <a:spcPts val="0"/>
               </a:spcAft>
-              <a:defRPr sz="1000" b="0">
+              <a:defRPr sz="900" b="0">
                 <a:solidFill>
                   <a:srgbClr val="5C6672"/>
                 </a:solidFill>
@@ -16675,7 +16675,7 @@
               </a:defRPr>
             </a:pPr>
             <a:r>
-              <a:t>ROS 2 Jazzy · Gazebo Harmonic · M02 · 따라 하기형 AGV 실습</a:t>
+              <a:t>ROS 2 기반 AGV End-to-End 개발 커리큘럼 · M02 · Block A</a:t>
             </a:r>
           </a:p>
         </p:txBody>
@@ -17132,7 +17132,7 @@
               <a:spcAft>
                 <a:spcPts val="0"/>
               </a:spcAft>
-              <a:defRPr sz="1000" b="0">
+              <a:defRPr sz="900" b="0">
                 <a:solidFill>
                   <a:srgbClr val="5C6672"/>
                 </a:solidFill>
@@ -17140,7 +17140,7 @@
               </a:defRPr>
             </a:pPr>
             <a:r>
-              <a:t>ROS 2 Jazzy · Gazebo Harmonic · M02 · 따라 하기형 AGV 실습</a:t>
+              <a:t>ROS 2 기반 AGV End-to-End 개발 커리큘럼 · M02 · Block A</a:t>
             </a:r>
           </a:p>
         </p:txBody>
@@ -17579,7 +17579,7 @@
               <a:spcAft>
                 <a:spcPts val="0"/>
               </a:spcAft>
-              <a:defRPr sz="1000" b="0">
+              <a:defRPr sz="900" b="0">
                 <a:solidFill>
                   <a:srgbClr val="5C6672"/>
                 </a:solidFill>
@@ -17587,7 +17587,7 @@
               </a:defRPr>
             </a:pPr>
             <a:r>
-              <a:t>ROS 2 Jazzy · Gazebo Harmonic · M02 · 따라 하기형 AGV 실습</a:t>
+              <a:t>ROS 2 기반 AGV End-to-End 개발 커리큘럼 · M02 · Block A</a:t>
             </a:r>
           </a:p>
         </p:txBody>
@@ -18107,7 +18107,7 @@
               <a:spcAft>
                 <a:spcPts val="0"/>
               </a:spcAft>
-              <a:defRPr sz="1000" b="0">
+              <a:defRPr sz="900" b="0">
                 <a:solidFill>
                   <a:srgbClr val="5C6672"/>
                 </a:solidFill>
@@ -18115,7 +18115,7 @@
               </a:defRPr>
             </a:pPr>
             <a:r>
-              <a:t>ROS 2 Jazzy · Gazebo Harmonic · M02 · 따라 하기형 AGV 실습</a:t>
+              <a:t>ROS 2 기반 AGV End-to-End 개발 커리큘럼 · M02 · Block A</a:t>
             </a:r>
           </a:p>
         </p:txBody>
@@ -18896,7 +18896,7 @@
               <a:spcAft>
                 <a:spcPts val="0"/>
               </a:spcAft>
-              <a:defRPr sz="1000" b="0">
+              <a:defRPr sz="900" b="0">
                 <a:solidFill>
                   <a:srgbClr val="5C6672"/>
                 </a:solidFill>
@@ -18904,7 +18904,7 @@
               </a:defRPr>
             </a:pPr>
             <a:r>
-              <a:t>ROS 2 Jazzy · Gazebo Harmonic · M02 · 따라 하기형 AGV 실습</a:t>
+              <a:t>ROS 2 기반 AGV End-to-End 개발 커리큘럼 · M02 · Block A</a:t>
             </a:r>
           </a:p>
         </p:txBody>
@@ -19693,7 +19693,7 @@
               <a:spcAft>
                 <a:spcPts val="0"/>
               </a:spcAft>
-              <a:defRPr sz="1000" b="0">
+              <a:defRPr sz="900" b="0">
                 <a:solidFill>
                   <a:srgbClr val="5C6672"/>
                 </a:solidFill>
@@ -19701,7 +19701,7 @@
               </a:defRPr>
             </a:pPr>
             <a:r>
-              <a:t>ROS 2 Jazzy · Gazebo Harmonic · M02 · 따라 하기형 AGV 실습</a:t>
+              <a:t>ROS 2 기반 AGV End-to-End 개발 커리큘럼 · M02 · Block A</a:t>
             </a:r>
           </a:p>
         </p:txBody>
@@ -20158,7 +20158,7 @@
               <a:spcAft>
                 <a:spcPts val="0"/>
               </a:spcAft>
-              <a:defRPr sz="1000" b="0">
+              <a:defRPr sz="900" b="0">
                 <a:solidFill>
                   <a:srgbClr val="5C6672"/>
                 </a:solidFill>
@@ -20166,7 +20166,7 @@
               </a:defRPr>
             </a:pPr>
             <a:r>
-              <a:t>ROS 2 Jazzy · Gazebo Harmonic · M02 · 따라 하기형 AGV 실습</a:t>
+              <a:t>ROS 2 기반 AGV End-to-End 개발 커리큘럼 · M02 · Block A</a:t>
             </a:r>
           </a:p>
         </p:txBody>
@@ -20577,7 +20577,7 @@
               <a:spcAft>
                 <a:spcPts val="0"/>
               </a:spcAft>
-              <a:defRPr sz="1000" b="0">
+              <a:defRPr sz="900" b="0">
                 <a:solidFill>
                   <a:srgbClr val="5C6672"/>
                 </a:solidFill>
@@ -20585,7 +20585,7 @@
               </a:defRPr>
             </a:pPr>
             <a:r>
-              <a:t>ROS 2 Jazzy · Gazebo Harmonic · M02 · 따라 하기형 AGV 실습</a:t>
+              <a:t>ROS 2 기반 AGV End-to-End 개발 커리큘럼 · M02 · Block A</a:t>
             </a:r>
           </a:p>
         </p:txBody>
@@ -21048,7 +21048,7 @@
               <a:spcAft>
                 <a:spcPts val="0"/>
               </a:spcAft>
-              <a:defRPr sz="1000" b="0">
+              <a:defRPr sz="900" b="0">
                 <a:solidFill>
                   <a:srgbClr val="5C6672"/>
                 </a:solidFill>
@@ -21056,7 +21056,7 @@
               </a:defRPr>
             </a:pPr>
             <a:r>
-              <a:t>ROS 2 Jazzy · Gazebo Harmonic · M02 · 따라 하기형 AGV 실습</a:t>
+              <a:t>ROS 2 기반 AGV End-to-End 개발 커리큘럼 · M02 · Block A</a:t>
             </a:r>
           </a:p>
         </p:txBody>
@@ -21516,7 +21516,7 @@
               <a:spcAft>
                 <a:spcPts val="0"/>
               </a:spcAft>
-              <a:defRPr sz="1000" b="0">
+              <a:defRPr sz="900" b="0">
                 <a:solidFill>
                   <a:srgbClr val="5C6672"/>
                 </a:solidFill>
@@ -21524,7 +21524,7 @@
               </a:defRPr>
             </a:pPr>
             <a:r>
-              <a:t>ROS 2 Jazzy · Gazebo Harmonic · M02 · 따라 하기형 AGV 실습</a:t>
+              <a:t>ROS 2 기반 AGV End-to-End 개발 커리큘럼 · M02 · Block A</a:t>
             </a:r>
           </a:p>
         </p:txBody>
@@ -21979,7 +21979,7 @@
               <a:spcAft>
                 <a:spcPts val="0"/>
               </a:spcAft>
-              <a:defRPr sz="1000" b="0">
+              <a:defRPr sz="900" b="0">
                 <a:solidFill>
                   <a:srgbClr val="5C6672"/>
                 </a:solidFill>
@@ -21987,7 +21987,7 @@
               </a:defRPr>
             </a:pPr>
             <a:r>
-              <a:t>ROS 2 Jazzy · Gazebo Harmonic · M02 · 따라 하기형 AGV 실습</a:t>
+              <a:t>ROS 2 기반 AGV End-to-End 개발 커리큘럼 · M02 · Block A</a:t>
             </a:r>
           </a:p>
         </p:txBody>
@@ -22429,7 +22429,7 @@
               <a:spcAft>
                 <a:spcPts val="0"/>
               </a:spcAft>
-              <a:defRPr sz="1000" b="0">
+              <a:defRPr sz="900" b="0">
                 <a:solidFill>
                   <a:srgbClr val="5C6672"/>
                 </a:solidFill>
@@ -22437,7 +22437,7 @@
               </a:defRPr>
             </a:pPr>
             <a:r>
-              <a:t>ROS 2 Jazzy · Gazebo Harmonic · M02 · 따라 하기형 AGV 실습</a:t>
+              <a:t>ROS 2 기반 AGV End-to-End 개발 커리큘럼 · M02 · Block A</a:t>
             </a:r>
           </a:p>
         </p:txBody>
@@ -22883,7 +22883,7 @@
               <a:spcAft>
                 <a:spcPts val="0"/>
               </a:spcAft>
-              <a:defRPr sz="1000" b="0">
+              <a:defRPr sz="900" b="0">
                 <a:solidFill>
                   <a:srgbClr val="5C6672"/>
                 </a:solidFill>
@@ -22891,7 +22891,7 @@
               </a:defRPr>
             </a:pPr>
             <a:r>
-              <a:t>ROS 2 Jazzy · Gazebo Harmonic · M02 · 따라 하기형 AGV 실습</a:t>
+              <a:t>ROS 2 기반 AGV End-to-End 개발 커리큘럼 · M02 · Block A</a:t>
             </a:r>
           </a:p>
         </p:txBody>
@@ -23267,7 +23267,7 @@
               <a:spcAft>
                 <a:spcPts val="0"/>
               </a:spcAft>
-              <a:defRPr sz="1000" b="0">
+              <a:defRPr sz="900" b="0">
                 <a:solidFill>
                   <a:srgbClr val="5C6672"/>
                 </a:solidFill>
@@ -23275,7 +23275,7 @@
               </a:defRPr>
             </a:pPr>
             <a:r>
-              <a:t>ROS 2 Jazzy · Gazebo Harmonic · M02 · 따라 하기형 AGV 실습</a:t>
+              <a:t>ROS 2 기반 AGV End-to-End 개발 커리큘럼 · M02 · Block A</a:t>
             </a:r>
           </a:p>
         </p:txBody>
@@ -23504,7 +23504,7 @@
               <a:spcAft>
                 <a:spcPts val="0"/>
               </a:spcAft>
-              <a:defRPr sz="1000" b="0">
+              <a:defRPr sz="900" b="0">
                 <a:solidFill>
                   <a:srgbClr val="5C6672"/>
                 </a:solidFill>
@@ -23512,7 +23512,7 @@
               </a:defRPr>
             </a:pPr>
             <a:r>
-              <a:t>ROS 2 Jazzy · Gazebo Harmonic · M02 · 따라 하기형 AGV 실습</a:t>
+              <a:t>ROS 2 기반 AGV End-to-End 개발 커리큘럼 · M02 · Block A</a:t>
             </a:r>
           </a:p>
         </p:txBody>
@@ -23911,7 +23911,7 @@
               <a:spcAft>
                 <a:spcPts val="0"/>
               </a:spcAft>
-              <a:defRPr sz="1000" b="0">
+              <a:defRPr sz="900" b="0">
                 <a:solidFill>
                   <a:srgbClr val="5C6672"/>
                 </a:solidFill>
@@ -23919,7 +23919,7 @@
               </a:defRPr>
             </a:pPr>
             <a:r>
-              <a:t>ROS 2 Jazzy · Gazebo Harmonic · M02 · 따라 하기형 AGV 실습</a:t>
+              <a:t>ROS 2 기반 AGV End-to-End 개발 커리큘럼 · M02 · Block A</a:t>
             </a:r>
           </a:p>
         </p:txBody>
@@ -24436,7 +24436,7 @@
               <a:spcAft>
                 <a:spcPts val="0"/>
               </a:spcAft>
-              <a:defRPr sz="1000" b="0">
+              <a:defRPr sz="900" b="0">
                 <a:solidFill>
                   <a:srgbClr val="5C6672"/>
                 </a:solidFill>
@@ -24444,7 +24444,7 @@
               </a:defRPr>
             </a:pPr>
             <a:r>
-              <a:t>ROS 2 Jazzy · Gazebo Harmonic · M02 · 따라 하기형 AGV 실습</a:t>
+              <a:t>ROS 2 기반 AGV End-to-End 개발 커리큘럼 · M02 · Block A</a:t>
             </a:r>
           </a:p>
         </p:txBody>
@@ -24820,7 +24820,7 @@
               <a:spcAft>
                 <a:spcPts val="0"/>
               </a:spcAft>
-              <a:defRPr sz="1000" b="0">
+              <a:defRPr sz="900" b="0">
                 <a:solidFill>
                   <a:srgbClr val="5C6672"/>
                 </a:solidFill>
@@ -24828,7 +24828,7 @@
               </a:defRPr>
             </a:pPr>
             <a:r>
-              <a:t>ROS 2 Jazzy · Gazebo Harmonic · M02 · 따라 하기형 AGV 실습</a:t>
+              <a:t>ROS 2 기반 AGV End-to-End 개발 커리큘럼 · M02 · Block A</a:t>
             </a:r>
           </a:p>
         </p:txBody>
@@ -25153,7 +25153,7 @@
               <a:spcAft>
                 <a:spcPts val="0"/>
               </a:spcAft>
-              <a:defRPr sz="1000" b="0">
+              <a:defRPr sz="900" b="0">
                 <a:solidFill>
                   <a:srgbClr val="5C6672"/>
                 </a:solidFill>
@@ -25161,7 +25161,7 @@
               </a:defRPr>
             </a:pPr>
             <a:r>
-              <a:t>ROS 2 Jazzy · Gazebo Harmonic · M02 · 따라 하기형 AGV 실습</a:t>
+              <a:t>ROS 2 기반 AGV End-to-End 개발 커리큘럼 · M02 · Block A</a:t>
             </a:r>
           </a:p>
         </p:txBody>
@@ -25482,7 +25482,7 @@
               <a:spcAft>
                 <a:spcPts val="0"/>
               </a:spcAft>
-              <a:defRPr sz="1000" b="0">
+              <a:defRPr sz="900" b="0">
                 <a:solidFill>
                   <a:srgbClr val="5C6672"/>
                 </a:solidFill>
@@ -25490,7 +25490,7 @@
               </a:defRPr>
             </a:pPr>
             <a:r>
-              <a:t>ROS 2 Jazzy · Gazebo Harmonic · M02 · 따라 하기형 AGV 실습</a:t>
+              <a:t>ROS 2 기반 AGV End-to-End 개발 커리큘럼 · M02 · Block A</a:t>
             </a:r>
           </a:p>
         </p:txBody>
@@ -25901,7 +25901,7 @@
               <a:spcAft>
                 <a:spcPts val="0"/>
               </a:spcAft>
-              <a:defRPr sz="1000" b="0">
+              <a:defRPr sz="900" b="0">
                 <a:solidFill>
                   <a:srgbClr val="5C6672"/>
                 </a:solidFill>
@@ -25909,7 +25909,7 @@
               </a:defRPr>
             </a:pPr>
             <a:r>
-              <a:t>ROS 2 Jazzy · Gazebo Harmonic · M02 · 따라 하기형 AGV 실습</a:t>
+              <a:t>ROS 2 기반 AGV End-to-End 개발 커리큘럼 · M02 · Block A</a:t>
             </a:r>
           </a:p>
         </p:txBody>
@@ -26432,7 +26432,7 @@
               <a:spcAft>
                 <a:spcPts val="0"/>
               </a:spcAft>
-              <a:defRPr sz="1000" b="0">
+              <a:defRPr sz="900" b="0">
                 <a:solidFill>
                   <a:srgbClr val="5C6672"/>
                 </a:solidFill>
@@ -26440,7 +26440,7 @@
               </a:defRPr>
             </a:pPr>
             <a:r>
-              <a:t>ROS 2 Jazzy · Gazebo Harmonic · M02 · 따라 하기형 AGV 실습</a:t>
+              <a:t>ROS 2 기반 AGV End-to-End 개발 커리큘럼 · M02 · Block A</a:t>
             </a:r>
           </a:p>
         </p:txBody>
@@ -27072,7 +27072,7 @@
               <a:spcAft>
                 <a:spcPts val="0"/>
               </a:spcAft>
-              <a:defRPr sz="1000" b="0">
+              <a:defRPr sz="900" b="0">
                 <a:solidFill>
                   <a:srgbClr val="5C6672"/>
                 </a:solidFill>
@@ -27080,7 +27080,7 @@
               </a:defRPr>
             </a:pPr>
             <a:r>
-              <a:t>ROS 2 Jazzy · Gazebo Harmonic · M02 · 따라 하기형 AGV 실습</a:t>
+              <a:t>ROS 2 기반 AGV End-to-End 개발 커리큘럼 · M02 · Block A</a:t>
             </a:r>
           </a:p>
         </p:txBody>
@@ -27537,7 +27537,7 @@
               <a:spcAft>
                 <a:spcPts val="0"/>
               </a:spcAft>
-              <a:defRPr sz="1000" b="0">
+              <a:defRPr sz="900" b="0">
                 <a:solidFill>
                   <a:srgbClr val="5C6672"/>
                 </a:solidFill>
@@ -27545,7 +27545,7 @@
               </a:defRPr>
             </a:pPr>
             <a:r>
-              <a:t>ROS 2 Jazzy · Gazebo Harmonic · M02 · 따라 하기형 AGV 실습</a:t>
+              <a:t>ROS 2 기반 AGV End-to-End 개발 커리큘럼 · M02 · Block A</a:t>
             </a:r>
           </a:p>
         </p:txBody>
@@ -27824,7 +27824,7 @@
               <a:spcAft>
                 <a:spcPts val="0"/>
               </a:spcAft>
-              <a:defRPr sz="1000" b="0">
+              <a:defRPr sz="900" b="0">
                 <a:solidFill>
                   <a:srgbClr val="5C6672"/>
                 </a:solidFill>
@@ -27832,7 +27832,7 @@
               </a:defRPr>
             </a:pPr>
             <a:r>
-              <a:t>ROS 2 Jazzy · Gazebo Harmonic · M02 · 따라 하기형 AGV 실습</a:t>
+              <a:t>ROS 2 기반 AGV End-to-End 개발 커리큘럼 · M02 · Block A</a:t>
             </a:r>
           </a:p>
         </p:txBody>
@@ -28700,7 +28700,7 @@
               <a:spcAft>
                 <a:spcPts val="0"/>
               </a:spcAft>
-              <a:defRPr sz="1000" b="0">
+              <a:defRPr sz="900" b="0">
                 <a:solidFill>
                   <a:srgbClr val="5C6672"/>
                 </a:solidFill>
@@ -28708,7 +28708,7 @@
               </a:defRPr>
             </a:pPr>
             <a:r>
-              <a:t>ROS 2 Jazzy · Gazebo Harmonic · M02 · 따라 하기형 AGV 실습</a:t>
+              <a:t>ROS 2 기반 AGV End-to-End 개발 커리큘럼 · M02 · Block A</a:t>
             </a:r>
           </a:p>
         </p:txBody>

--- a/blocks/A_ros2_basics/M02_workspace_package/M02_Workspace_생성과_빌드.pptx
+++ b/blocks/A_ros2_basics/M02_workspace_package/M02_Workspace_생성과_빌드.pptx
@@ -7983,7 +7983,7 @@
           </a:fontRef>
         </p:style>
         <p:txBody>
-          <a:bodyPr rtlCol="0" anchor="ctr" wrap="square" lIns="73152" rIns="73152" tIns="36576" bIns="36576"/>
+          <a:bodyPr rtlCol="0" anchor="ctr" wrap="square" lIns="109728" rIns="109728" tIns="73152" bIns="73152"/>
           <a:lstStyle/>
           <a:p>
             <a:pPr algn="l">
@@ -8000,15 +8000,51 @@
             <a:r>
               <a:t>mkdir -p ~/ros2_curri/my_agv_ws/src</a:t>
             </a:r>
-            <a:br/>
+          </a:p>
+          <a:p>
+            <a:pPr algn="l">
+              <a:spcAft>
+                <a:spcPts val="0"/>
+              </a:spcAft>
+              <a:defRPr sz="1500" b="0">
+                <a:solidFill>
+                  <a:srgbClr val="FFFFFF"/>
+                </a:solidFill>
+                <a:latin typeface="DejaVu Sans Mono"/>
+              </a:defRPr>
+            </a:pPr>
             <a:r>
               <a:t>cd ~/ros2_curri/my_agv_ws/src</a:t>
             </a:r>
-            <a:br/>
+          </a:p>
+          <a:p>
+            <a:pPr algn="l">
+              <a:spcAft>
+                <a:spcPts val="0"/>
+              </a:spcAft>
+              <a:defRPr sz="1500" b="0">
+                <a:solidFill>
+                  <a:srgbClr val="FFFFFF"/>
+                </a:solidFill>
+                <a:latin typeface="DejaVu Sans Mono"/>
+              </a:defRPr>
+            </a:pPr>
             <a:r>
               <a:t>ros2 pkg create --build-type ament_python --dependencies rclpy std_msgs geometry_msgs agv_control</a:t>
             </a:r>
-            <a:br/>
+          </a:p>
+          <a:p>
+            <a:pPr algn="l">
+              <a:spcAft>
+                <a:spcPts val="0"/>
+              </a:spcAft>
+              <a:defRPr sz="1500" b="0">
+                <a:solidFill>
+                  <a:srgbClr val="FFFFFF"/>
+                </a:solidFill>
+                <a:latin typeface="DejaVu Sans Mono"/>
+              </a:defRPr>
+            </a:pPr>
             <a:r>
               <a:t>ros2 pkg create --build-type ament_cmake --dependencies rclcpp std_msgs agv_cpp_examples</a:t>
             </a:r>
@@ -8519,7 +8555,7 @@
           </a:fontRef>
         </p:style>
         <p:txBody>
-          <a:bodyPr rtlCol="0" anchor="ctr" wrap="square" lIns="73152" rIns="73152" tIns="36576" bIns="36576"/>
+          <a:bodyPr rtlCol="0" anchor="ctr" wrap="square" lIns="109728" rIns="109728" tIns="73152" bIns="73152"/>
           <a:lstStyle/>
           <a:p>
             <a:pPr algn="l">
@@ -8536,7 +8572,19 @@
             <a:r>
               <a:t>mkdir -p ~/ros2_curri/my_agv_ws/src/agv_control</a:t>
             </a:r>
-            <a:br/>
+          </a:p>
+          <a:p>
+            <a:pPr algn="l">
+              <a:spcAft>
+                <a:spcPts val="0"/>
+              </a:spcAft>
+              <a:defRPr sz="1600" b="0">
+                <a:solidFill>
+                  <a:srgbClr val="FFFFFF"/>
+                </a:solidFill>
+                <a:latin typeface="DejaVu Sans Mono"/>
+              </a:defRPr>
+            </a:pPr>
             <a:r>
               <a:t>nano ~/ros2_curri/my_agv_ws/src/agv_control/package.xml</a:t>
             </a:r>
@@ -10350,7 +10398,7 @@
           </a:fontRef>
         </p:style>
         <p:txBody>
-          <a:bodyPr rtlCol="0" anchor="ctr" wrap="square" lIns="164592" rIns="164592" tIns="109728" bIns="36576"/>
+          <a:bodyPr rtlCol="0" anchor="ctr" wrap="square" lIns="164592" rIns="164592" tIns="109728" bIns="73152"/>
           <a:lstStyle/>
           <a:p>
             <a:pPr algn="l">
@@ -10367,47 +10415,179 @@
             <a:r>
               <a:t>&lt;?xml version="1.0" ?&gt;</a:t>
             </a:r>
-            <a:br/>
+          </a:p>
+          <a:p>
+            <a:pPr algn="l">
+              <a:spcAft>
+                <a:spcPts val="0"/>
+              </a:spcAft>
+              <a:defRPr sz="1400" b="0">
+                <a:solidFill>
+                  <a:srgbClr val="FFFFFF"/>
+                </a:solidFill>
+                <a:latin typeface="DejaVu Sans Mono"/>
+              </a:defRPr>
+            </a:pPr>
             <a:r>
               <a:t>&lt;package format="3"&gt;</a:t>
             </a:r>
-            <a:br/>
+          </a:p>
+          <a:p>
+            <a:pPr algn="l">
+              <a:spcAft>
+                <a:spcPts val="0"/>
+              </a:spcAft>
+              <a:defRPr sz="1400" b="0">
+                <a:solidFill>
+                  <a:srgbClr val="FFFFFF"/>
+                </a:solidFill>
+                <a:latin typeface="DejaVu Sans Mono"/>
+              </a:defRPr>
+            </a:pPr>
             <a:r>
               <a:t>  </a:t>
             </a:r>
-            <a:br/>
+          </a:p>
+          <a:p>
+            <a:pPr algn="l">
+              <a:spcAft>
+                <a:spcPts val="0"/>
+              </a:spcAft>
+              <a:defRPr sz="1400" b="0">
+                <a:solidFill>
+                  <a:srgbClr val="FFFFFF"/>
+                </a:solidFill>
+                <a:latin typeface="DejaVu Sans Mono"/>
+              </a:defRPr>
+            </a:pPr>
             <a:r>
               <a:t>  </a:t>
             </a:r>
-            <a:br/>
+          </a:p>
+          <a:p>
+            <a:pPr algn="l">
+              <a:spcAft>
+                <a:spcPts val="0"/>
+              </a:spcAft>
+              <a:defRPr sz="1400" b="0">
+                <a:solidFill>
+                  <a:srgbClr val="FFFFFF"/>
+                </a:solidFill>
+                <a:latin typeface="DejaVu Sans Mono"/>
+              </a:defRPr>
+            </a:pPr>
             <a:r>
               <a:t>  &lt;name&gt;agv_control&lt;/name&gt;</a:t>
             </a:r>
-            <a:br/>
+          </a:p>
+          <a:p>
+            <a:pPr algn="l">
+              <a:spcAft>
+                <a:spcPts val="0"/>
+              </a:spcAft>
+              <a:defRPr sz="1400" b="0">
+                <a:solidFill>
+                  <a:srgbClr val="FFFFFF"/>
+                </a:solidFill>
+                <a:latin typeface="DejaVu Sans Mono"/>
+              </a:defRPr>
+            </a:pPr>
             <a:r>
               <a:t>  &lt;version&gt;0.1.0&lt;/version&gt;</a:t>
             </a:r>
-            <a:br/>
+          </a:p>
+          <a:p>
+            <a:pPr algn="l">
+              <a:spcAft>
+                <a:spcPts val="0"/>
+              </a:spcAft>
+              <a:defRPr sz="1400" b="0">
+                <a:solidFill>
+                  <a:srgbClr val="FFFFFF"/>
+                </a:solidFill>
+                <a:latin typeface="DejaVu Sans Mono"/>
+              </a:defRPr>
+            </a:pPr>
             <a:r>
               <a:t>  </a:t>
             </a:r>
-            <a:br/>
+          </a:p>
+          <a:p>
+            <a:pPr algn="l">
+              <a:spcAft>
+                <a:spcPts val="0"/>
+              </a:spcAft>
+              <a:defRPr sz="1400" b="0">
+                <a:solidFill>
+                  <a:srgbClr val="FFFFFF"/>
+                </a:solidFill>
+                <a:latin typeface="DejaVu Sans Mono"/>
+              </a:defRPr>
+            </a:pPr>
             <a:r>
               <a:t>  </a:t>
             </a:r>
-            <a:br/>
+          </a:p>
+          <a:p>
+            <a:pPr algn="l">
+              <a:spcAft>
+                <a:spcPts val="0"/>
+              </a:spcAft>
+              <a:defRPr sz="1400" b="0">
+                <a:solidFill>
+                  <a:srgbClr val="FFFFFF"/>
+                </a:solidFill>
+                <a:latin typeface="DejaVu Sans Mono"/>
+              </a:defRPr>
+            </a:pPr>
             <a:r>
               <a:t>  &lt;description&gt;Small ROS 2 control nodes for the educational AGV.&lt;/description&gt;</a:t>
             </a:r>
-            <a:br/>
+          </a:p>
+          <a:p>
+            <a:pPr algn="l">
+              <a:spcAft>
+                <a:spcPts val="0"/>
+              </a:spcAft>
+              <a:defRPr sz="1400" b="0">
+                <a:solidFill>
+                  <a:srgbClr val="FFFFFF"/>
+                </a:solidFill>
+                <a:latin typeface="DejaVu Sans Mono"/>
+              </a:defRPr>
+            </a:pPr>
             <a:r>
               <a:t>  </a:t>
             </a:r>
-            <a:br/>
+          </a:p>
+          <a:p>
+            <a:pPr algn="l">
+              <a:spcAft>
+                <a:spcPts val="0"/>
+              </a:spcAft>
+              <a:defRPr sz="1400" b="0">
+                <a:solidFill>
+                  <a:srgbClr val="FFFFFF"/>
+                </a:solidFill>
+                <a:latin typeface="DejaVu Sans Mono"/>
+              </a:defRPr>
+            </a:pPr>
             <a:r>
               <a:t>  </a:t>
             </a:r>
-            <a:br/>
+          </a:p>
+          <a:p>
+            <a:pPr algn="l">
+              <a:spcAft>
+                <a:spcPts val="0"/>
+              </a:spcAft>
+              <a:defRPr sz="1400" b="0">
+                <a:solidFill>
+                  <a:srgbClr val="FFFFFF"/>
+                </a:solidFill>
+                <a:latin typeface="DejaVu Sans Mono"/>
+              </a:defRPr>
+            </a:pPr>
             <a:r>
               <a:t>  &lt;maintainer email="student@example.com"&gt;AGV student&lt;/maintainer&gt;</a:t>
             </a:r>
@@ -10824,7 +11004,7 @@
           </a:fontRef>
         </p:style>
         <p:txBody>
-          <a:bodyPr rtlCol="0" anchor="ctr" wrap="square" lIns="164592" rIns="164592" tIns="109728" bIns="36576"/>
+          <a:bodyPr rtlCol="0" anchor="ctr" wrap="square" lIns="164592" rIns="164592" tIns="109728" bIns="73152"/>
           <a:lstStyle/>
           <a:p>
             <a:pPr algn="l">
@@ -10841,47 +11021,179 @@
             <a:r>
               <a:t>  &lt;license&gt;Apache-2.0&lt;/license&gt;</a:t>
             </a:r>
-            <a:br/>
+          </a:p>
+          <a:p>
+            <a:pPr algn="l">
+              <a:spcAft>
+                <a:spcPts val="0"/>
+              </a:spcAft>
+              <a:defRPr sz="1400" b="0">
+                <a:solidFill>
+                  <a:srgbClr val="FFFFFF"/>
+                </a:solidFill>
+                <a:latin typeface="DejaVu Sans Mono"/>
+              </a:defRPr>
+            </a:pPr>
             <a:r>
               <a:t>  </a:t>
             </a:r>
-            <a:br/>
+          </a:p>
+          <a:p>
+            <a:pPr algn="l">
+              <a:spcAft>
+                <a:spcPts val="0"/>
+              </a:spcAft>
+              <a:defRPr sz="1400" b="0">
+                <a:solidFill>
+                  <a:srgbClr val="FFFFFF"/>
+                </a:solidFill>
+                <a:latin typeface="DejaVu Sans Mono"/>
+              </a:defRPr>
+            </a:pPr>
             <a:r>
               <a:t>  </a:t>
             </a:r>
-            <a:br/>
+          </a:p>
+          <a:p>
+            <a:pPr algn="l">
+              <a:spcAft>
+                <a:spcPts val="0"/>
+              </a:spcAft>
+              <a:defRPr sz="1400" b="0">
+                <a:solidFill>
+                  <a:srgbClr val="FFFFFF"/>
+                </a:solidFill>
+                <a:latin typeface="DejaVu Sans Mono"/>
+              </a:defRPr>
+            </a:pPr>
             <a:r>
               <a:t>  &lt;buildtool_depend&gt;ament_python&lt;/buildtool_depend&gt;</a:t>
             </a:r>
-            <a:br/>
+          </a:p>
+          <a:p>
+            <a:pPr algn="l">
+              <a:spcAft>
+                <a:spcPts val="0"/>
+              </a:spcAft>
+              <a:defRPr sz="1400" b="0">
+                <a:solidFill>
+                  <a:srgbClr val="FFFFFF"/>
+                </a:solidFill>
+                <a:latin typeface="DejaVu Sans Mono"/>
+              </a:defRPr>
+            </a:pPr>
             <a:r>
               <a:t>  </a:t>
             </a:r>
-            <a:br/>
+          </a:p>
+          <a:p>
+            <a:pPr algn="l">
+              <a:spcAft>
+                <a:spcPts val="0"/>
+              </a:spcAft>
+              <a:defRPr sz="1400" b="0">
+                <a:solidFill>
+                  <a:srgbClr val="FFFFFF"/>
+                </a:solidFill>
+                <a:latin typeface="DejaVu Sans Mono"/>
+              </a:defRPr>
+            </a:pPr>
             <a:r>
               <a:t>  </a:t>
             </a:r>
-            <a:br/>
+          </a:p>
+          <a:p>
+            <a:pPr algn="l">
+              <a:spcAft>
+                <a:spcPts val="0"/>
+              </a:spcAft>
+              <a:defRPr sz="1400" b="0">
+                <a:solidFill>
+                  <a:srgbClr val="FFFFFF"/>
+                </a:solidFill>
+                <a:latin typeface="DejaVu Sans Mono"/>
+              </a:defRPr>
+            </a:pPr>
             <a:r>
               <a:t>  &lt;exec_depend&gt;rclpy&lt;/exec_depend&gt;</a:t>
             </a:r>
-            <a:br/>
+          </a:p>
+          <a:p>
+            <a:pPr algn="l">
+              <a:spcAft>
+                <a:spcPts val="0"/>
+              </a:spcAft>
+              <a:defRPr sz="1400" b="0">
+                <a:solidFill>
+                  <a:srgbClr val="FFFFFF"/>
+                </a:solidFill>
+                <a:latin typeface="DejaVu Sans Mono"/>
+              </a:defRPr>
+            </a:pPr>
             <a:r>
               <a:t>  &lt;exec_depend&gt;std_msgs&lt;/exec_depend&gt;</a:t>
             </a:r>
-            <a:br/>
+          </a:p>
+          <a:p>
+            <a:pPr algn="l">
+              <a:spcAft>
+                <a:spcPts val="0"/>
+              </a:spcAft>
+              <a:defRPr sz="1400" b="0">
+                <a:solidFill>
+                  <a:srgbClr val="FFFFFF"/>
+                </a:solidFill>
+                <a:latin typeface="DejaVu Sans Mono"/>
+              </a:defRPr>
+            </a:pPr>
             <a:r>
               <a:t>  &lt;exec_depend&gt;geometry_msgs&lt;/exec_depend&gt;</a:t>
             </a:r>
-            <a:br/>
+          </a:p>
+          <a:p>
+            <a:pPr algn="l">
+              <a:spcAft>
+                <a:spcPts val="0"/>
+              </a:spcAft>
+              <a:defRPr sz="1400" b="0">
+                <a:solidFill>
+                  <a:srgbClr val="FFFFFF"/>
+                </a:solidFill>
+                <a:latin typeface="DejaVu Sans Mono"/>
+              </a:defRPr>
+            </a:pPr>
             <a:r>
               <a:t>  </a:t>
             </a:r>
-            <a:br/>
+          </a:p>
+          <a:p>
+            <a:pPr algn="l">
+              <a:spcAft>
+                <a:spcPts val="0"/>
+              </a:spcAft>
+              <a:defRPr sz="1400" b="0">
+                <a:solidFill>
+                  <a:srgbClr val="FFFFFF"/>
+                </a:solidFill>
+                <a:latin typeface="DejaVu Sans Mono"/>
+              </a:defRPr>
+            </a:pPr>
             <a:r>
               <a:t>  </a:t>
             </a:r>
-            <a:br/>
+          </a:p>
+          <a:p>
+            <a:pPr algn="l">
+              <a:spcAft>
+                <a:spcPts val="0"/>
+              </a:spcAft>
+              <a:defRPr sz="1400" b="0">
+                <a:solidFill>
+                  <a:srgbClr val="FFFFFF"/>
+                </a:solidFill>
+                <a:latin typeface="DejaVu Sans Mono"/>
+              </a:defRPr>
+            </a:pPr>
             <a:r>
               <a:t>  &lt;exec_depend&gt;sensor_msgs&lt;/exec_depend&gt;</a:t>
             </a:r>
@@ -11298,7 +11610,7 @@
           </a:fontRef>
         </p:style>
         <p:txBody>
-          <a:bodyPr rtlCol="0" anchor="ctr" wrap="square" lIns="164592" rIns="164592" tIns="109728" bIns="36576"/>
+          <a:bodyPr rtlCol="0" anchor="ctr" wrap="square" lIns="164592" rIns="164592" tIns="109728" bIns="73152"/>
           <a:lstStyle/>
           <a:p>
             <a:pPr algn="l">
@@ -11315,32 +11627,128 @@
             <a:r>
               <a:t>  &lt;exec_depend&gt;nav_msgs&lt;/exec_depend&gt;</a:t>
             </a:r>
-            <a:br/>
+          </a:p>
+          <a:p>
+            <a:pPr algn="l">
+              <a:spcAft>
+                <a:spcPts val="0"/>
+              </a:spcAft>
+              <a:defRPr sz="1400" b="0">
+                <a:solidFill>
+                  <a:srgbClr val="FFFFFF"/>
+                </a:solidFill>
+                <a:latin typeface="DejaVu Sans Mono"/>
+              </a:defRPr>
+            </a:pPr>
             <a:r>
               <a:t>  </a:t>
             </a:r>
-            <a:br/>
+          </a:p>
+          <a:p>
+            <a:pPr algn="l">
+              <a:spcAft>
+                <a:spcPts val="0"/>
+              </a:spcAft>
+              <a:defRPr sz="1400" b="0">
+                <a:solidFill>
+                  <a:srgbClr val="FFFFFF"/>
+                </a:solidFill>
+                <a:latin typeface="DejaVu Sans Mono"/>
+              </a:defRPr>
+            </a:pPr>
             <a:r>
               <a:t>  </a:t>
             </a:r>
-            <a:br/>
+          </a:p>
+          <a:p>
+            <a:pPr algn="l">
+              <a:spcAft>
+                <a:spcPts val="0"/>
+              </a:spcAft>
+              <a:defRPr sz="1400" b="0">
+                <a:solidFill>
+                  <a:srgbClr val="FFFFFF"/>
+                </a:solidFill>
+                <a:latin typeface="DejaVu Sans Mono"/>
+              </a:defRPr>
+            </a:pPr>
             <a:r>
               <a:t>  &lt;export&gt;</a:t>
             </a:r>
-            <a:br/>
+          </a:p>
+          <a:p>
+            <a:pPr algn="l">
+              <a:spcAft>
+                <a:spcPts val="0"/>
+              </a:spcAft>
+              <a:defRPr sz="1400" b="0">
+                <a:solidFill>
+                  <a:srgbClr val="FFFFFF"/>
+                </a:solidFill>
+                <a:latin typeface="DejaVu Sans Mono"/>
+              </a:defRPr>
+            </a:pPr>
             <a:r>
               <a:t>    &lt;build_type&gt;ament_python&lt;/build_type&gt;</a:t>
             </a:r>
-            <a:br/>
+          </a:p>
+          <a:p>
+            <a:pPr algn="l">
+              <a:spcAft>
+                <a:spcPts val="0"/>
+              </a:spcAft>
+              <a:defRPr sz="1400" b="0">
+                <a:solidFill>
+                  <a:srgbClr val="FFFFFF"/>
+                </a:solidFill>
+                <a:latin typeface="DejaVu Sans Mono"/>
+              </a:defRPr>
+            </a:pPr>
             <a:r>
               <a:t>  &lt;/export&gt;</a:t>
             </a:r>
-            <a:br/>
+          </a:p>
+          <a:p>
+            <a:pPr algn="l">
+              <a:spcAft>
+                <a:spcPts val="0"/>
+              </a:spcAft>
+              <a:defRPr sz="1400" b="0">
+                <a:solidFill>
+                  <a:srgbClr val="FFFFFF"/>
+                </a:solidFill>
+                <a:latin typeface="DejaVu Sans Mono"/>
+              </a:defRPr>
+            </a:pPr>
             <a:r>
               <a:t>  </a:t>
             </a:r>
-            <a:br/>
-            <a:br/>
+          </a:p>
+          <a:p>
+            <a:pPr algn="l">
+              <a:spcAft>
+                <a:spcPts val="0"/>
+              </a:spcAft>
+              <a:defRPr sz="1400" b="0">
+                <a:solidFill>
+                  <a:srgbClr val="FFFFFF"/>
+                </a:solidFill>
+                <a:latin typeface="DejaVu Sans Mono"/>
+              </a:defRPr>
+            </a:pPr>
+          </a:p>
+          <a:p>
+            <a:pPr algn="l">
+              <a:spcAft>
+                <a:spcPts val="0"/>
+              </a:spcAft>
+              <a:defRPr sz="1400" b="0">
+                <a:solidFill>
+                  <a:srgbClr val="FFFFFF"/>
+                </a:solidFill>
+                <a:latin typeface="DejaVu Sans Mono"/>
+              </a:defRPr>
+            </a:pPr>
             <a:r>
               <a:t>&lt;/package&gt;</a:t>
             </a:r>
@@ -11812,7 +12220,7 @@
           </a:fontRef>
         </p:style>
         <p:txBody>
-          <a:bodyPr rtlCol="0" anchor="ctr" wrap="square" lIns="73152" rIns="73152" tIns="36576" bIns="36576"/>
+          <a:bodyPr rtlCol="0" anchor="ctr" wrap="square" lIns="109728" rIns="109728" tIns="73152" bIns="73152"/>
           <a:lstStyle/>
           <a:p>
             <a:pPr algn="l">
@@ -11829,7 +12237,19 @@
             <a:r>
               <a:t>mkdir -p ~/ros2_curri/my_agv_ws/src/agv_control</a:t>
             </a:r>
-            <a:br/>
+          </a:p>
+          <a:p>
+            <a:pPr algn="l">
+              <a:spcAft>
+                <a:spcPts val="0"/>
+              </a:spcAft>
+              <a:defRPr sz="1600" b="0">
+                <a:solidFill>
+                  <a:srgbClr val="FFFFFF"/>
+                </a:solidFill>
+                <a:latin typeface="DejaVu Sans Mono"/>
+              </a:defRPr>
+            </a:pPr>
             <a:r>
               <a:t>nano ~/ros2_curri/my_agv_ws/src/agv_control/setup.py</a:t>
             </a:r>
@@ -14332,7 +14752,7 @@
           </a:fontRef>
         </p:style>
         <p:txBody>
-          <a:bodyPr rtlCol="0" anchor="ctr" wrap="square" lIns="164592" rIns="164592" tIns="109728" bIns="36576"/>
+          <a:bodyPr rtlCol="0" anchor="ctr" wrap="square" lIns="164592" rIns="164592" tIns="109728" bIns="73152"/>
           <a:lstStyle/>
           <a:p>
             <a:pPr algn="l">
@@ -14349,47 +14769,179 @@
             <a:r>
               <a:t>from setuptools import find_packages, setup</a:t>
             </a:r>
-            <a:br/>
+          </a:p>
+          <a:p>
+            <a:pPr algn="l">
+              <a:spcAft>
+                <a:spcPts val="0"/>
+              </a:spcAft>
+              <a:defRPr sz="1400" b="0">
+                <a:solidFill>
+                  <a:srgbClr val="FFFFFF"/>
+                </a:solidFill>
+                <a:latin typeface="DejaVu Sans Mono"/>
+              </a:defRPr>
+            </a:pPr>
             <a:r>
               <a:t>package_name = 'agv_control'</a:t>
             </a:r>
-            <a:br/>
+          </a:p>
+          <a:p>
+            <a:pPr algn="l">
+              <a:spcAft>
+                <a:spcPts val="0"/>
+              </a:spcAft>
+              <a:defRPr sz="1400" b="0">
+                <a:solidFill>
+                  <a:srgbClr val="FFFFFF"/>
+                </a:solidFill>
+                <a:latin typeface="DejaVu Sans Mono"/>
+              </a:defRPr>
+            </a:pPr>
             <a:r>
               <a:t>setup(name=package_name, version='0.1.0', packages=find_packages(exclude=['test']),</a:t>
             </a:r>
-            <a:br/>
+          </a:p>
+          <a:p>
+            <a:pPr algn="l">
+              <a:spcAft>
+                <a:spcPts val="0"/>
+              </a:spcAft>
+              <a:defRPr sz="1400" b="0">
+                <a:solidFill>
+                  <a:srgbClr val="FFFFFF"/>
+                </a:solidFill>
+                <a:latin typeface="DejaVu Sans Mono"/>
+              </a:defRPr>
+            </a:pPr>
             <a:r>
               <a:t>    data_files=[('share/ament_index/resource_index/packages',</a:t>
             </a:r>
-            <a:br/>
+          </a:p>
+          <a:p>
+            <a:pPr algn="l">
+              <a:spcAft>
+                <a:spcPts val="0"/>
+              </a:spcAft>
+              <a:defRPr sz="1400" b="0">
+                <a:solidFill>
+                  <a:srgbClr val="FFFFFF"/>
+                </a:solidFill>
+                <a:latin typeface="DejaVu Sans Mono"/>
+              </a:defRPr>
+            </a:pPr>
             <a:r>
               <a:t>    ['resource/' + package_name]), ('share/' + package_name, ['package.xml']),</a:t>
             </a:r>
-            <a:br/>
+          </a:p>
+          <a:p>
+            <a:pPr algn="l">
+              <a:spcAft>
+                <a:spcPts val="0"/>
+              </a:spcAft>
+              <a:defRPr sz="1400" b="0">
+                <a:solidFill>
+                  <a:srgbClr val="FFFFFF"/>
+                </a:solidFill>
+                <a:latin typeface="DejaVu Sans Mono"/>
+              </a:defRPr>
+            </a:pPr>
             <a:r>
               <a:t>    ('share/' + package_name + '/config', ['config/controllers.yaml'])],</a:t>
             </a:r>
-            <a:br/>
+          </a:p>
+          <a:p>
+            <a:pPr algn="l">
+              <a:spcAft>
+                <a:spcPts val="0"/>
+              </a:spcAft>
+              <a:defRPr sz="1400" b="0">
+                <a:solidFill>
+                  <a:srgbClr val="FFFFFF"/>
+                </a:solidFill>
+                <a:latin typeface="DejaVu Sans Mono"/>
+              </a:defRPr>
+            </a:pPr>
             <a:r>
               <a:t>    install_requires=['setuptools'], zip_safe=True, maintainer='AGV student',</a:t>
             </a:r>
-            <a:br/>
+          </a:p>
+          <a:p>
+            <a:pPr algn="l">
+              <a:spcAft>
+                <a:spcPts val="0"/>
+              </a:spcAft>
+              <a:defRPr sz="1400" b="0">
+                <a:solidFill>
+                  <a:srgbClr val="FFFFFF"/>
+                </a:solidFill>
+                <a:latin typeface="DejaVu Sans Mono"/>
+              </a:defRPr>
+            </a:pPr>
             <a:r>
               <a:t>    maintainer_email='student@example.com', license='Apache-2.0',</a:t>
             </a:r>
-            <a:br/>
+          </a:p>
+          <a:p>
+            <a:pPr algn="l">
+              <a:spcAft>
+                <a:spcPts val="0"/>
+              </a:spcAft>
+              <a:defRPr sz="1400" b="0">
+                <a:solidFill>
+                  <a:srgbClr val="FFFFFF"/>
+                </a:solidFill>
+                <a:latin typeface="DejaVu Sans Mono"/>
+              </a:defRPr>
+            </a:pPr>
             <a:r>
               <a:t>    entry_points={'console_scripts': ['counter_publisher = agv_control.counter_publisher:main',</a:t>
             </a:r>
-            <a:br/>
+          </a:p>
+          <a:p>
+            <a:pPr algn="l">
+              <a:spcAft>
+                <a:spcPts val="0"/>
+              </a:spcAft>
+              <a:defRPr sz="1400" b="0">
+                <a:solidFill>
+                  <a:srgbClr val="FFFFFF"/>
+                </a:solidFill>
+                <a:latin typeface="DejaVu Sans Mono"/>
+              </a:defRPr>
+            </a:pPr>
             <a:r>
               <a:t>     'counter_monitor = agv_control.counter_monitor:main', 'cmd_test_node = agv_control.cmd_test_node:main',</a:t>
             </a:r>
-            <a:br/>
+          </a:p>
+          <a:p>
+            <a:pPr algn="l">
+              <a:spcAft>
+                <a:spcPts val="0"/>
+              </a:spcAft>
+              <a:defRPr sz="1400" b="0">
+                <a:solidFill>
+                  <a:srgbClr val="FFFFFF"/>
+                </a:solidFill>
+                <a:latin typeface="DejaVu Sans Mono"/>
+              </a:defRPr>
+            </a:pPr>
             <a:r>
               <a:t>     'velocity_monitor = agv_control.velocity_monitor:main', 'safety_controller = agv_control.safety_controller:main',</a:t>
             </a:r>
-            <a:br/>
+          </a:p>
+          <a:p>
+            <a:pPr algn="l">
+              <a:spcAft>
+                <a:spcPts val="0"/>
+              </a:spcAft>
+              <a:defRPr sz="1400" b="0">
+                <a:solidFill>
+                  <a:srgbClr val="FFFFFF"/>
+                </a:solidFill>
+                <a:latin typeface="DejaVu Sans Mono"/>
+              </a:defRPr>
+            </a:pPr>
             <a:r>
               <a:t>     'pid_controller = agv_control.pid_controller:main']})</a:t>
             </a:r>
@@ -14861,7 +15413,7 @@
           </a:fontRef>
         </p:style>
         <p:txBody>
-          <a:bodyPr rtlCol="0" anchor="ctr" wrap="square" lIns="73152" rIns="73152" tIns="36576" bIns="36576"/>
+          <a:bodyPr rtlCol="0" anchor="ctr" wrap="square" lIns="109728" rIns="109728" tIns="73152" bIns="73152"/>
           <a:lstStyle/>
           <a:p>
             <a:pPr algn="l">
@@ -14878,7 +15430,19 @@
             <a:r>
               <a:t>mkdir -p ~/ros2_curri/my_agv_ws/src/agv_cpp_examples</a:t>
             </a:r>
-            <a:br/>
+          </a:p>
+          <a:p>
+            <a:pPr algn="l">
+              <a:spcAft>
+                <a:spcPts val="0"/>
+              </a:spcAft>
+              <a:defRPr sz="1600" b="0">
+                <a:solidFill>
+                  <a:srgbClr val="FFFFFF"/>
+                </a:solidFill>
+                <a:latin typeface="DejaVu Sans Mono"/>
+              </a:defRPr>
+            </a:pPr>
             <a:r>
               <a:t>nano ~/ros2_curri/my_agv_ws/src/agv_cpp_examples/CMakeLists.txt</a:t>
             </a:r>
@@ -16916,7 +17480,7 @@
           </a:fontRef>
         </p:style>
         <p:txBody>
-          <a:bodyPr rtlCol="0" anchor="ctr" wrap="square" lIns="164592" rIns="164592" tIns="109728" bIns="36576"/>
+          <a:bodyPr rtlCol="0" anchor="ctr" wrap="square" lIns="164592" rIns="164592" tIns="109728" bIns="73152"/>
           <a:lstStyle/>
           <a:p>
             <a:pPr algn="l">
@@ -16933,41 +17497,160 @@
             <a:r>
               <a:t>cmake_minimum_required(VERSION 3.8)</a:t>
             </a:r>
-            <a:br/>
+          </a:p>
+          <a:p>
+            <a:pPr algn="l">
+              <a:spcAft>
+                <a:spcPts val="0"/>
+              </a:spcAft>
+              <a:defRPr sz="1400" b="0">
+                <a:solidFill>
+                  <a:srgbClr val="FFFFFF"/>
+                </a:solidFill>
+                <a:latin typeface="DejaVu Sans Mono"/>
+              </a:defRPr>
+            </a:pPr>
             <a:r>
               <a:t>project(agv_cpp_examples)</a:t>
             </a:r>
-            <a:br/>
-            <a:br/>
+          </a:p>
+          <a:p>
+            <a:pPr algn="l">
+              <a:spcAft>
+                <a:spcPts val="0"/>
+              </a:spcAft>
+              <a:defRPr sz="1400" b="0">
+                <a:solidFill>
+                  <a:srgbClr val="FFFFFF"/>
+                </a:solidFill>
+                <a:latin typeface="DejaVu Sans Mono"/>
+              </a:defRPr>
+            </a:pPr>
+          </a:p>
+          <a:p>
+            <a:pPr algn="l">
+              <a:spcAft>
+                <a:spcPts val="0"/>
+              </a:spcAft>
+              <a:defRPr sz="1400" b="0">
+                <a:solidFill>
+                  <a:srgbClr val="FFFFFF"/>
+                </a:solidFill>
+                <a:latin typeface="DejaVu Sans Mono"/>
+              </a:defRPr>
+            </a:pPr>
             <a:r>
               <a:t># ament_cmake가 ROS 2 패키지를 빌드·설치하는 기본 도구입니다.</a:t>
             </a:r>
-            <a:br/>
+          </a:p>
+          <a:p>
+            <a:pPr algn="l">
+              <a:spcAft>
+                <a:spcPts val="0"/>
+              </a:spcAft>
+              <a:defRPr sz="1400" b="0">
+                <a:solidFill>
+                  <a:srgbClr val="FFFFFF"/>
+                </a:solidFill>
+                <a:latin typeface="DejaVu Sans Mono"/>
+              </a:defRPr>
+            </a:pPr>
             <a:r>
               <a:t>find_package(ament_cmake REQUIRED)</a:t>
             </a:r>
-            <a:br/>
+          </a:p>
+          <a:p>
+            <a:pPr algn="l">
+              <a:spcAft>
+                <a:spcPts val="0"/>
+              </a:spcAft>
+              <a:defRPr sz="1400" b="0">
+                <a:solidFill>
+                  <a:srgbClr val="FFFFFF"/>
+                </a:solidFill>
+                <a:latin typeface="DejaVu Sans Mono"/>
+              </a:defRPr>
+            </a:pPr>
             <a:r>
               <a:t>find_package(rclcpp REQUIRED)</a:t>
             </a:r>
-            <a:br/>
+          </a:p>
+          <a:p>
+            <a:pPr algn="l">
+              <a:spcAft>
+                <a:spcPts val="0"/>
+              </a:spcAft>
+              <a:defRPr sz="1400" b="0">
+                <a:solidFill>
+                  <a:srgbClr val="FFFFFF"/>
+                </a:solidFill>
+                <a:latin typeface="DejaVu Sans Mono"/>
+              </a:defRPr>
+            </a:pPr>
             <a:r>
               <a:t>find_package(std_msgs REQUIRED)</a:t>
             </a:r>
-            <a:br/>
-            <a:br/>
+          </a:p>
+          <a:p>
+            <a:pPr algn="l">
+              <a:spcAft>
+                <a:spcPts val="0"/>
+              </a:spcAft>
+              <a:defRPr sz="1400" b="0">
+                <a:solidFill>
+                  <a:srgbClr val="FFFFFF"/>
+                </a:solidFill>
+                <a:latin typeface="DejaVu Sans Mono"/>
+              </a:defRPr>
+            </a:pPr>
+          </a:p>
+          <a:p>
+            <a:pPr algn="l">
+              <a:spcAft>
+                <a:spcPts val="0"/>
+              </a:spcAft>
+              <a:defRPr sz="1400" b="0">
+                <a:solidFill>
+                  <a:srgbClr val="FFFFFF"/>
+                </a:solidFill>
+                <a:latin typeface="DejaVu Sans Mono"/>
+              </a:defRPr>
+            </a:pPr>
             <a:r>
               <a:t># src/status_publisher.cpp를 실행 파일 하나로 컴파일합니다.</a:t>
             </a:r>
-            <a:br/>
+          </a:p>
+          <a:p>
+            <a:pPr algn="l">
+              <a:spcAft>
+                <a:spcPts val="0"/>
+              </a:spcAft>
+              <a:defRPr sz="1400" b="0">
+                <a:solidFill>
+                  <a:srgbClr val="FFFFFF"/>
+                </a:solidFill>
+                <a:latin typeface="DejaVu Sans Mono"/>
+              </a:defRPr>
+            </a:pPr>
             <a:r>
               <a:t>add_executable(status_publisher src/status_publisher.cpp)</a:t>
             </a:r>
-            <a:br/>
+          </a:p>
+          <a:p>
+            <a:pPr algn="l">
+              <a:spcAft>
+                <a:spcPts val="0"/>
+              </a:spcAft>
+              <a:defRPr sz="1400" b="0">
+                <a:solidFill>
+                  <a:srgbClr val="FFFFFF"/>
+                </a:solidFill>
+                <a:latin typeface="DejaVu Sans Mono"/>
+              </a:defRPr>
+            </a:pPr>
             <a:r>
               <a:t>ament_target_dependencies(status_publisher rclcpp std_msgs)</a:t>
             </a:r>
-            <a:br/>
           </a:p>
         </p:txBody>
       </p:sp>
@@ -17381,7 +18064,7 @@
           </a:fontRef>
         </p:style>
         <p:txBody>
-          <a:bodyPr rtlCol="0" anchor="ctr" wrap="square" lIns="164592" rIns="164592" tIns="109728" bIns="36576"/>
+          <a:bodyPr rtlCol="0" anchor="ctr" wrap="square" lIns="164592" rIns="164592" tIns="109728" bIns="73152"/>
           <a:lstStyle/>
           <a:p>
             <a:pPr algn="l">
@@ -17398,20 +18081,80 @@
             <a:r>
               <a:t># ros2 run agv_cpp_examples status_publisher가 찾는 설치 경로입니다.</a:t>
             </a:r>
-            <a:br/>
+          </a:p>
+          <a:p>
+            <a:pPr algn="l">
+              <a:spcAft>
+                <a:spcPts val="0"/>
+              </a:spcAft>
+              <a:defRPr sz="1400" b="0">
+                <a:solidFill>
+                  <a:srgbClr val="FFFFFF"/>
+                </a:solidFill>
+                <a:latin typeface="DejaVu Sans Mono"/>
+              </a:defRPr>
+            </a:pPr>
             <a:r>
               <a:t>install(TARGETS</a:t>
             </a:r>
-            <a:br/>
+          </a:p>
+          <a:p>
+            <a:pPr algn="l">
+              <a:spcAft>
+                <a:spcPts val="0"/>
+              </a:spcAft>
+              <a:defRPr sz="1400" b="0">
+                <a:solidFill>
+                  <a:srgbClr val="FFFFFF"/>
+                </a:solidFill>
+                <a:latin typeface="DejaVu Sans Mono"/>
+              </a:defRPr>
+            </a:pPr>
             <a:r>
               <a:t>  status_publisher</a:t>
             </a:r>
-            <a:br/>
+          </a:p>
+          <a:p>
+            <a:pPr algn="l">
+              <a:spcAft>
+                <a:spcPts val="0"/>
+              </a:spcAft>
+              <a:defRPr sz="1400" b="0">
+                <a:solidFill>
+                  <a:srgbClr val="FFFFFF"/>
+                </a:solidFill>
+                <a:latin typeface="DejaVu Sans Mono"/>
+              </a:defRPr>
+            </a:pPr>
             <a:r>
               <a:t>  DESTINATION lib/${PROJECT_NAME})</a:t>
             </a:r>
-            <a:br/>
-            <a:br/>
+          </a:p>
+          <a:p>
+            <a:pPr algn="l">
+              <a:spcAft>
+                <a:spcPts val="0"/>
+              </a:spcAft>
+              <a:defRPr sz="1400" b="0">
+                <a:solidFill>
+                  <a:srgbClr val="FFFFFF"/>
+                </a:solidFill>
+                <a:latin typeface="DejaVu Sans Mono"/>
+              </a:defRPr>
+            </a:pPr>
+          </a:p>
+          <a:p>
+            <a:pPr algn="l">
+              <a:spcAft>
+                <a:spcPts val="0"/>
+              </a:spcAft>
+              <a:defRPr sz="1400" b="0">
+                <a:solidFill>
+                  <a:srgbClr val="FFFFFF"/>
+                </a:solidFill>
+                <a:latin typeface="DejaVu Sans Mono"/>
+              </a:defRPr>
+            </a:pPr>
             <a:r>
               <a:t>ament_package()</a:t>
             </a:r>
@@ -17883,7 +18626,7 @@
           </a:fontRef>
         </p:style>
         <p:txBody>
-          <a:bodyPr rtlCol="0" anchor="ctr" wrap="square" lIns="73152" rIns="73152" tIns="36576" bIns="36576"/>
+          <a:bodyPr rtlCol="0" anchor="ctr" wrap="square" lIns="109728" rIns="109728" tIns="73152" bIns="73152"/>
           <a:lstStyle/>
           <a:p>
             <a:pPr algn="l">
@@ -17900,7 +18643,19 @@
             <a:r>
               <a:t>mkdir -p ~/ros2_curri/my_agv_ws/src/agv_cpp_examples/src</a:t>
             </a:r>
-            <a:br/>
+          </a:p>
+          <a:p>
+            <a:pPr algn="l">
+              <a:spcAft>
+                <a:spcPts val="0"/>
+              </a:spcAft>
+              <a:defRPr sz="1600" b="0">
+                <a:solidFill>
+                  <a:srgbClr val="FFFFFF"/>
+                </a:solidFill>
+                <a:latin typeface="DejaVu Sans Mono"/>
+              </a:defRPr>
+            </a:pPr>
             <a:r>
               <a:t>nano ~/ros2_curri/my_agv_ws/src/agv_cpp_examples/src/status_publisher.cpp</a:t>
             </a:r>
@@ -19942,7 +20697,7 @@
           </a:fontRef>
         </p:style>
         <p:txBody>
-          <a:bodyPr rtlCol="0" anchor="ctr" wrap="square" lIns="164592" rIns="164592" tIns="109728" bIns="36576"/>
+          <a:bodyPr rtlCol="0" anchor="ctr" wrap="square" lIns="164592" rIns="164592" tIns="109728" bIns="73152"/>
           <a:lstStyle/>
           <a:p>
             <a:pPr algn="l">
@@ -19959,38 +20714,170 @@
             <a:r>
               <a:t>#include &lt;chrono&gt;</a:t>
             </a:r>
-            <a:br/>
+          </a:p>
+          <a:p>
+            <a:pPr algn="l">
+              <a:spcAft>
+                <a:spcPts val="0"/>
+              </a:spcAft>
+              <a:defRPr sz="1400" b="0">
+                <a:solidFill>
+                  <a:srgbClr val="FFFFFF"/>
+                </a:solidFill>
+                <a:latin typeface="DejaVu Sans Mono"/>
+              </a:defRPr>
+            </a:pPr>
             <a:r>
               <a:t>#include &lt;functional&gt;</a:t>
             </a:r>
-            <a:br/>
+          </a:p>
+          <a:p>
+            <a:pPr algn="l">
+              <a:spcAft>
+                <a:spcPts val="0"/>
+              </a:spcAft>
+              <a:defRPr sz="1400" b="0">
+                <a:solidFill>
+                  <a:srgbClr val="FFFFFF"/>
+                </a:solidFill>
+                <a:latin typeface="DejaVu Sans Mono"/>
+              </a:defRPr>
+            </a:pPr>
             <a:r>
               <a:t>#include &lt;memory&gt;</a:t>
             </a:r>
-            <a:br/>
+          </a:p>
+          <a:p>
+            <a:pPr algn="l">
+              <a:spcAft>
+                <a:spcPts val="0"/>
+              </a:spcAft>
+              <a:defRPr sz="1400" b="0">
+                <a:solidFill>
+                  <a:srgbClr val="FFFFFF"/>
+                </a:solidFill>
+                <a:latin typeface="DejaVu Sans Mono"/>
+              </a:defRPr>
+            </a:pPr>
             <a:r>
               <a:t>#include &lt;string&gt;</a:t>
             </a:r>
-            <a:br/>
-            <a:br/>
+          </a:p>
+          <a:p>
+            <a:pPr algn="l">
+              <a:spcAft>
+                <a:spcPts val="0"/>
+              </a:spcAft>
+              <a:defRPr sz="1400" b="0">
+                <a:solidFill>
+                  <a:srgbClr val="FFFFFF"/>
+                </a:solidFill>
+                <a:latin typeface="DejaVu Sans Mono"/>
+              </a:defRPr>
+            </a:pPr>
+          </a:p>
+          <a:p>
+            <a:pPr algn="l">
+              <a:spcAft>
+                <a:spcPts val="0"/>
+              </a:spcAft>
+              <a:defRPr sz="1400" b="0">
+                <a:solidFill>
+                  <a:srgbClr val="FFFFFF"/>
+                </a:solidFill>
+                <a:latin typeface="DejaVu Sans Mono"/>
+              </a:defRPr>
+            </a:pPr>
             <a:r>
               <a:t>#include "rclcpp/rclcpp.hpp"</a:t>
             </a:r>
-            <a:br/>
+          </a:p>
+          <a:p>
+            <a:pPr algn="l">
+              <a:spcAft>
+                <a:spcPts val="0"/>
+              </a:spcAft>
+              <a:defRPr sz="1400" b="0">
+                <a:solidFill>
+                  <a:srgbClr val="FFFFFF"/>
+                </a:solidFill>
+                <a:latin typeface="DejaVu Sans Mono"/>
+              </a:defRPr>
+            </a:pPr>
             <a:r>
               <a:t>#include "std_msgs/msg/string.hpp"</a:t>
             </a:r>
-            <a:br/>
-            <a:br/>
+          </a:p>
+          <a:p>
+            <a:pPr algn="l">
+              <a:spcAft>
+                <a:spcPts val="0"/>
+              </a:spcAft>
+              <a:defRPr sz="1400" b="0">
+                <a:solidFill>
+                  <a:srgbClr val="FFFFFF"/>
+                </a:solidFill>
+                <a:latin typeface="DejaVu Sans Mono"/>
+              </a:defRPr>
+            </a:pPr>
+          </a:p>
+          <a:p>
+            <a:pPr algn="l">
+              <a:spcAft>
+                <a:spcPts val="0"/>
+              </a:spcAft>
+              <a:defRPr sz="1400" b="0">
+                <a:solidFill>
+                  <a:srgbClr val="FFFFFF"/>
+                </a:solidFill>
+                <a:latin typeface="DejaVu Sans Mono"/>
+              </a:defRPr>
+            </a:pPr>
             <a:r>
               <a:t>using namespace std::chrono_literals;</a:t>
             </a:r>
-            <a:br/>
-            <a:br/>
+          </a:p>
+          <a:p>
+            <a:pPr algn="l">
+              <a:spcAft>
+                <a:spcPts val="0"/>
+              </a:spcAft>
+              <a:defRPr sz="1400" b="0">
+                <a:solidFill>
+                  <a:srgbClr val="FFFFFF"/>
+                </a:solidFill>
+                <a:latin typeface="DejaVu Sans Mono"/>
+              </a:defRPr>
+            </a:pPr>
+          </a:p>
+          <a:p>
+            <a:pPr algn="l">
+              <a:spcAft>
+                <a:spcPts val="0"/>
+              </a:spcAft>
+              <a:defRPr sz="1400" b="0">
+                <a:solidFill>
+                  <a:srgbClr val="FFFFFF"/>
+                </a:solidFill>
+                <a:latin typeface="DejaVu Sans Mono"/>
+              </a:defRPr>
+            </a:pPr>
             <a:r>
               <a:t>// Python의 Node 클래스와 같은 역할을 하는 C++ ROS 2 node입니다.</a:t>
             </a:r>
-            <a:br/>
+          </a:p>
+          <a:p>
+            <a:pPr algn="l">
+              <a:spcAft>
+                <a:spcPts val="0"/>
+              </a:spcAft>
+              <a:defRPr sz="1400" b="0">
+                <a:solidFill>
+                  <a:srgbClr val="FFFFFF"/>
+                </a:solidFill>
+                <a:latin typeface="DejaVu Sans Mono"/>
+              </a:defRPr>
+            </a:pPr>
             <a:r>
               <a:t>class StatusPublisher : public rclcpp::Node</a:t>
             </a:r>
@@ -20826,7 +21713,7 @@
           </a:fontRef>
         </p:style>
         <p:txBody>
-          <a:bodyPr rtlCol="0" anchor="ctr" wrap="square" lIns="164592" rIns="164592" tIns="109728" bIns="36576"/>
+          <a:bodyPr rtlCol="0" anchor="ctr" wrap="square" lIns="164592" rIns="164592" tIns="109728" bIns="73152"/>
           <a:lstStyle/>
           <a:p>
             <a:pPr algn="l">
@@ -20843,44 +21730,176 @@
             <a:r>
               <a:t>{</a:t>
             </a:r>
-            <a:br/>
+          </a:p>
+          <a:p>
+            <a:pPr algn="l">
+              <a:spcAft>
+                <a:spcPts val="0"/>
+              </a:spcAft>
+              <a:defRPr sz="1400" b="0">
+                <a:solidFill>
+                  <a:srgbClr val="FFFFFF"/>
+                </a:solidFill>
+                <a:latin typeface="DejaVu Sans Mono"/>
+              </a:defRPr>
+            </a:pPr>
             <a:r>
               <a:t>public:</a:t>
             </a:r>
-            <a:br/>
+          </a:p>
+          <a:p>
+            <a:pPr algn="l">
+              <a:spcAft>
+                <a:spcPts val="0"/>
+              </a:spcAft>
+              <a:defRPr sz="1400" b="0">
+                <a:solidFill>
+                  <a:srgbClr val="FFFFFF"/>
+                </a:solidFill>
+                <a:latin typeface="DejaVu Sans Mono"/>
+              </a:defRPr>
+            </a:pPr>
             <a:r>
               <a:t>  StatusPublisher()</a:t>
             </a:r>
-            <a:br/>
+          </a:p>
+          <a:p>
+            <a:pPr algn="l">
+              <a:spcAft>
+                <a:spcPts val="0"/>
+              </a:spcAft>
+              <a:defRPr sz="1400" b="0">
+                <a:solidFill>
+                  <a:srgbClr val="FFFFFF"/>
+                </a:solidFill>
+                <a:latin typeface="DejaVu Sans Mono"/>
+              </a:defRPr>
+            </a:pPr>
             <a:r>
               <a:t>  : Node("cpp_status_publisher"), sequence_(0)</a:t>
             </a:r>
-            <a:br/>
+          </a:p>
+          <a:p>
+            <a:pPr algn="l">
+              <a:spcAft>
+                <a:spcPts val="0"/>
+              </a:spcAft>
+              <a:defRPr sz="1400" b="0">
+                <a:solidFill>
+                  <a:srgbClr val="FFFFFF"/>
+                </a:solidFill>
+                <a:latin typeface="DejaVu Sans Mono"/>
+              </a:defRPr>
+            </a:pPr>
             <a:r>
               <a:t>  {</a:t>
             </a:r>
-            <a:br/>
+          </a:p>
+          <a:p>
+            <a:pPr algn="l">
+              <a:spcAft>
+                <a:spcPts val="0"/>
+              </a:spcAft>
+              <a:defRPr sz="1400" b="0">
+                <a:solidFill>
+                  <a:srgbClr val="FFFFFF"/>
+                </a:solidFill>
+                <a:latin typeface="DejaVu Sans Mono"/>
+              </a:defRPr>
+            </a:pPr>
             <a:r>
               <a:t>    // ros2 run 뒤 --ros-args -p message:=... 로 바꿀 수 있는 parameter입니다.</a:t>
             </a:r>
-            <a:br/>
+          </a:p>
+          <a:p>
+            <a:pPr algn="l">
+              <a:spcAft>
+                <a:spcPts val="0"/>
+              </a:spcAft>
+              <a:defRPr sz="1400" b="0">
+                <a:solidFill>
+                  <a:srgbClr val="FFFFFF"/>
+                </a:solidFill>
+                <a:latin typeface="DejaVu Sans Mono"/>
+              </a:defRPr>
+            </a:pPr>
             <a:r>
               <a:t>    this-&gt;declare_parameter&lt;std::string&gt;("message", "C++ AGV 상태 정상");</a:t>
             </a:r>
-            <a:br/>
-            <a:br/>
+          </a:p>
+          <a:p>
+            <a:pPr algn="l">
+              <a:spcAft>
+                <a:spcPts val="0"/>
+              </a:spcAft>
+              <a:defRPr sz="1400" b="0">
+                <a:solidFill>
+                  <a:srgbClr val="FFFFFF"/>
+                </a:solidFill>
+                <a:latin typeface="DejaVu Sans Mono"/>
+              </a:defRPr>
+            </a:pPr>
+          </a:p>
+          <a:p>
+            <a:pPr algn="l">
+              <a:spcAft>
+                <a:spcPts val="0"/>
+              </a:spcAft>
+              <a:defRPr sz="1400" b="0">
+                <a:solidFill>
+                  <a:srgbClr val="FFFFFF"/>
+                </a:solidFill>
+                <a:latin typeface="DejaVu Sans Mono"/>
+              </a:defRPr>
+            </a:pPr>
             <a:r>
               <a:t>    // String 메시지를 /cpp_status topic으로 publish합니다. 마지막 10은 queue depth입니다.</a:t>
             </a:r>
-            <a:br/>
+          </a:p>
+          <a:p>
+            <a:pPr algn="l">
+              <a:spcAft>
+                <a:spcPts val="0"/>
+              </a:spcAft>
+              <a:defRPr sz="1400" b="0">
+                <a:solidFill>
+                  <a:srgbClr val="FFFFFF"/>
+                </a:solidFill>
+                <a:latin typeface="DejaVu Sans Mono"/>
+              </a:defRPr>
+            </a:pPr>
             <a:r>
               <a:t>    publisher_ = this-&gt;create_publisher&lt;std_msgs::msg::String&gt;("/cpp_status", 10);</a:t>
             </a:r>
-            <a:br/>
+          </a:p>
+          <a:p>
+            <a:pPr algn="l">
+              <a:spcAft>
+                <a:spcPts val="0"/>
+              </a:spcAft>
+              <a:defRPr sz="1400" b="0">
+                <a:solidFill>
+                  <a:srgbClr val="FFFFFF"/>
+                </a:solidFill>
+                <a:latin typeface="DejaVu Sans Mono"/>
+              </a:defRPr>
+            </a:pPr>
             <a:r>
               <a:t>    timer_ = this-&gt;create_wall_timer(1s, std::bind(&amp;StatusPublisher::publish_status, this));</a:t>
             </a:r>
-            <a:br/>
+          </a:p>
+          <a:p>
+            <a:pPr algn="l">
+              <a:spcAft>
+                <a:spcPts val="0"/>
+              </a:spcAft>
+              <a:defRPr sz="1400" b="0">
+                <a:solidFill>
+                  <a:srgbClr val="FFFFFF"/>
+                </a:solidFill>
+                <a:latin typeface="DejaVu Sans Mono"/>
+              </a:defRPr>
+            </a:pPr>
             <a:r>
               <a:t>  }</a:t>
             </a:r>
@@ -21297,7 +22316,7 @@
           </a:fontRef>
         </p:style>
         <p:txBody>
-          <a:bodyPr rtlCol="0" anchor="ctr" wrap="square" lIns="164592" rIns="164592" tIns="109728" bIns="36576"/>
+          <a:bodyPr rtlCol="0" anchor="ctr" wrap="square" lIns="164592" rIns="164592" tIns="109728" bIns="73152"/>
           <a:lstStyle/>
           <a:p>
             <a:pPr algn="l">
@@ -21311,44 +22330,176 @@
                 <a:latin typeface="DejaVu Sans Mono"/>
               </a:defRPr>
             </a:pPr>
-            <a:br/>
+          </a:p>
+          <a:p>
+            <a:pPr algn="l">
+              <a:spcAft>
+                <a:spcPts val="0"/>
+              </a:spcAft>
+              <a:defRPr sz="1400" b="0">
+                <a:solidFill>
+                  <a:srgbClr val="FFFFFF"/>
+                </a:solidFill>
+                <a:latin typeface="DejaVu Sans Mono"/>
+              </a:defRPr>
+            </a:pPr>
             <a:r>
               <a:t>private:</a:t>
             </a:r>
-            <a:br/>
+          </a:p>
+          <a:p>
+            <a:pPr algn="l">
+              <a:spcAft>
+                <a:spcPts val="0"/>
+              </a:spcAft>
+              <a:defRPr sz="1400" b="0">
+                <a:solidFill>
+                  <a:srgbClr val="FFFFFF"/>
+                </a:solidFill>
+                <a:latin typeface="DejaVu Sans Mono"/>
+              </a:defRPr>
+            </a:pPr>
             <a:r>
               <a:t>  void publish_status()</a:t>
             </a:r>
-            <a:br/>
+          </a:p>
+          <a:p>
+            <a:pPr algn="l">
+              <a:spcAft>
+                <a:spcPts val="0"/>
+              </a:spcAft>
+              <a:defRPr sz="1400" b="0">
+                <a:solidFill>
+                  <a:srgbClr val="FFFFFF"/>
+                </a:solidFill>
+                <a:latin typeface="DejaVu Sans Mono"/>
+              </a:defRPr>
+            </a:pPr>
             <a:r>
               <a:t>  {</a:t>
             </a:r>
-            <a:br/>
+          </a:p>
+          <a:p>
+            <a:pPr algn="l">
+              <a:spcAft>
+                <a:spcPts val="0"/>
+              </a:spcAft>
+              <a:defRPr sz="1400" b="0">
+                <a:solidFill>
+                  <a:srgbClr val="FFFFFF"/>
+                </a:solidFill>
+                <a:latin typeface="DejaVu Sans Mono"/>
+              </a:defRPr>
+            </a:pPr>
             <a:r>
               <a:t>    auto message = std_msgs::msg::String();</a:t>
             </a:r>
-            <a:br/>
+          </a:p>
+          <a:p>
+            <a:pPr algn="l">
+              <a:spcAft>
+                <a:spcPts val="0"/>
+              </a:spcAft>
+              <a:defRPr sz="1400" b="0">
+                <a:solidFill>
+                  <a:srgbClr val="FFFFFF"/>
+                </a:solidFill>
+                <a:latin typeface="DejaVu Sans Mono"/>
+              </a:defRPr>
+            </a:pPr>
             <a:r>
               <a:t>    message.data = this-&gt;get_parameter("message").as_string() + " #" + std::to_string(sequence_++);</a:t>
             </a:r>
-            <a:br/>
+          </a:p>
+          <a:p>
+            <a:pPr algn="l">
+              <a:spcAft>
+                <a:spcPts val="0"/>
+              </a:spcAft>
+              <a:defRPr sz="1400" b="0">
+                <a:solidFill>
+                  <a:srgbClr val="FFFFFF"/>
+                </a:solidFill>
+                <a:latin typeface="DejaVu Sans Mono"/>
+              </a:defRPr>
+            </a:pPr>
             <a:r>
               <a:t>    publisher_-&gt;publish(message);</a:t>
             </a:r>
-            <a:br/>
+          </a:p>
+          <a:p>
+            <a:pPr algn="l">
+              <a:spcAft>
+                <a:spcPts val="0"/>
+              </a:spcAft>
+              <a:defRPr sz="1400" b="0">
+                <a:solidFill>
+                  <a:srgbClr val="FFFFFF"/>
+                </a:solidFill>
+                <a:latin typeface="DejaVu Sans Mono"/>
+              </a:defRPr>
+            </a:pPr>
             <a:r>
               <a:t>    RCLCPP_INFO(this-&gt;get_logger(), "published: %s", message.data.c_str());</a:t>
             </a:r>
-            <a:br/>
+          </a:p>
+          <a:p>
+            <a:pPr algn="l">
+              <a:spcAft>
+                <a:spcPts val="0"/>
+              </a:spcAft>
+              <a:defRPr sz="1400" b="0">
+                <a:solidFill>
+                  <a:srgbClr val="FFFFFF"/>
+                </a:solidFill>
+                <a:latin typeface="DejaVu Sans Mono"/>
+              </a:defRPr>
+            </a:pPr>
             <a:r>
               <a:t>  }</a:t>
             </a:r>
-            <a:br/>
-            <a:br/>
+          </a:p>
+          <a:p>
+            <a:pPr algn="l">
+              <a:spcAft>
+                <a:spcPts val="0"/>
+              </a:spcAft>
+              <a:defRPr sz="1400" b="0">
+                <a:solidFill>
+                  <a:srgbClr val="FFFFFF"/>
+                </a:solidFill>
+                <a:latin typeface="DejaVu Sans Mono"/>
+              </a:defRPr>
+            </a:pPr>
+          </a:p>
+          <a:p>
+            <a:pPr algn="l">
+              <a:spcAft>
+                <a:spcPts val="0"/>
+              </a:spcAft>
+              <a:defRPr sz="1400" b="0">
+                <a:solidFill>
+                  <a:srgbClr val="FFFFFF"/>
+                </a:solidFill>
+                <a:latin typeface="DejaVu Sans Mono"/>
+              </a:defRPr>
+            </a:pPr>
             <a:r>
               <a:t>  std::size_t sequence_;</a:t>
             </a:r>
-            <a:br/>
+          </a:p>
+          <a:p>
+            <a:pPr algn="l">
+              <a:spcAft>
+                <a:spcPts val="0"/>
+              </a:spcAft>
+              <a:defRPr sz="1400" b="0">
+                <a:solidFill>
+                  <a:srgbClr val="FFFFFF"/>
+                </a:solidFill>
+                <a:latin typeface="DejaVu Sans Mono"/>
+              </a:defRPr>
+            </a:pPr>
             <a:r>
               <a:t>  rclcpp::Publisher&lt;std_msgs::msg::String&gt;::SharedPtr publisher_;</a:t>
             </a:r>
@@ -21765,7 +22916,7 @@
           </a:fontRef>
         </p:style>
         <p:txBody>
-          <a:bodyPr rtlCol="0" anchor="ctr" wrap="square" lIns="164592" rIns="164592" tIns="109728" bIns="36576"/>
+          <a:bodyPr rtlCol="0" anchor="ctr" wrap="square" lIns="164592" rIns="164592" tIns="109728" bIns="73152"/>
           <a:lstStyle/>
           <a:p>
             <a:pPr algn="l">
@@ -21782,36 +22933,144 @@
             <a:r>
               <a:t>  rclcpp::TimerBase::SharedPtr timer_;</a:t>
             </a:r>
-            <a:br/>
+          </a:p>
+          <a:p>
+            <a:pPr algn="l">
+              <a:spcAft>
+                <a:spcPts val="0"/>
+              </a:spcAft>
+              <a:defRPr sz="1400" b="0">
+                <a:solidFill>
+                  <a:srgbClr val="FFFFFF"/>
+                </a:solidFill>
+                <a:latin typeface="DejaVu Sans Mono"/>
+              </a:defRPr>
+            </a:pPr>
             <a:r>
               <a:t>};</a:t>
             </a:r>
-            <a:br/>
-            <a:br/>
+          </a:p>
+          <a:p>
+            <a:pPr algn="l">
+              <a:spcAft>
+                <a:spcPts val="0"/>
+              </a:spcAft>
+              <a:defRPr sz="1400" b="0">
+                <a:solidFill>
+                  <a:srgbClr val="FFFFFF"/>
+                </a:solidFill>
+                <a:latin typeface="DejaVu Sans Mono"/>
+              </a:defRPr>
+            </a:pPr>
+          </a:p>
+          <a:p>
+            <a:pPr algn="l">
+              <a:spcAft>
+                <a:spcPts val="0"/>
+              </a:spcAft>
+              <a:defRPr sz="1400" b="0">
+                <a:solidFill>
+                  <a:srgbClr val="FFFFFF"/>
+                </a:solidFill>
+                <a:latin typeface="DejaVu Sans Mono"/>
+              </a:defRPr>
+            </a:pPr>
             <a:r>
               <a:t>int main(int argc, char * argv[])</a:t>
             </a:r>
-            <a:br/>
+          </a:p>
+          <a:p>
+            <a:pPr algn="l">
+              <a:spcAft>
+                <a:spcPts val="0"/>
+              </a:spcAft>
+              <a:defRPr sz="1400" b="0">
+                <a:solidFill>
+                  <a:srgbClr val="FFFFFF"/>
+                </a:solidFill>
+                <a:latin typeface="DejaVu Sans Mono"/>
+              </a:defRPr>
+            </a:pPr>
             <a:r>
               <a:t>{</a:t>
             </a:r>
-            <a:br/>
+          </a:p>
+          <a:p>
+            <a:pPr algn="l">
+              <a:spcAft>
+                <a:spcPts val="0"/>
+              </a:spcAft>
+              <a:defRPr sz="1400" b="0">
+                <a:solidFill>
+                  <a:srgbClr val="FFFFFF"/>
+                </a:solidFill>
+                <a:latin typeface="DejaVu Sans Mono"/>
+              </a:defRPr>
+            </a:pPr>
             <a:r>
               <a:t>  rclcpp::init(argc, argv);</a:t>
             </a:r>
-            <a:br/>
+          </a:p>
+          <a:p>
+            <a:pPr algn="l">
+              <a:spcAft>
+                <a:spcPts val="0"/>
+              </a:spcAft>
+              <a:defRPr sz="1400" b="0">
+                <a:solidFill>
+                  <a:srgbClr val="FFFFFF"/>
+                </a:solidFill>
+                <a:latin typeface="DejaVu Sans Mono"/>
+              </a:defRPr>
+            </a:pPr>
             <a:r>
               <a:t>  rclcpp::spin(std::make_shared&lt;StatusPublisher&gt;());</a:t>
             </a:r>
-            <a:br/>
+          </a:p>
+          <a:p>
+            <a:pPr algn="l">
+              <a:spcAft>
+                <a:spcPts val="0"/>
+              </a:spcAft>
+              <a:defRPr sz="1400" b="0">
+                <a:solidFill>
+                  <a:srgbClr val="FFFFFF"/>
+                </a:solidFill>
+                <a:latin typeface="DejaVu Sans Mono"/>
+              </a:defRPr>
+            </a:pPr>
             <a:r>
               <a:t>  rclcpp::shutdown();</a:t>
             </a:r>
-            <a:br/>
+          </a:p>
+          <a:p>
+            <a:pPr algn="l">
+              <a:spcAft>
+                <a:spcPts val="0"/>
+              </a:spcAft>
+              <a:defRPr sz="1400" b="0">
+                <a:solidFill>
+                  <a:srgbClr val="FFFFFF"/>
+                </a:solidFill>
+                <a:latin typeface="DejaVu Sans Mono"/>
+              </a:defRPr>
+            </a:pPr>
             <a:r>
               <a:t>  return 0;</a:t>
             </a:r>
-            <a:br/>
+          </a:p>
+          <a:p>
+            <a:pPr algn="l">
+              <a:spcAft>
+                <a:spcPts val="0"/>
+              </a:spcAft>
+              <a:defRPr sz="1400" b="0">
+                <a:solidFill>
+                  <a:srgbClr val="FFFFFF"/>
+                </a:solidFill>
+                <a:latin typeface="DejaVu Sans Mono"/>
+              </a:defRPr>
+            </a:pPr>
             <a:r>
               <a:t>}</a:t>
             </a:r>
@@ -22084,7 +23343,7 @@
               </a:defRPr>
             </a:pPr>
             <a:r>
-              <a:t>현재 단계 실행 1/2    |    현재 폴더 ~/ros2_curri/my_agv_ws    |    현재 터미널</a:t>
+              <a:t>현재 단계 실행 1/2    |    현재 폴더 ~/ros2_curri/my_agv_ws    |    터미널 1</a:t>
             </a:r>
           </a:p>
         </p:txBody>
@@ -22097,25 +23356,25 @@
         </p:nvSpPr>
         <p:spPr>
           <a:xfrm>
-            <a:off x="676656" y="1764792"/>
-            <a:ext cx="1828800" cy="347472"/>
-          </a:xfrm>
-          <a:prstGeom prst="rect">
-            <a:avLst/>
-          </a:prstGeom>
-          <a:noFill/>
-        </p:spPr>
-        <p:txBody>
-          <a:bodyPr wrap="square" lIns="73152" rIns="73152" tIns="36576" bIns="36576">
-            <a:spAutoFit/>
-          </a:bodyPr>
-          <a:lstStyle/>
-          <a:p>
-            <a:pPr algn="l">
-              <a:spcAft>
-                <a:spcPts val="0"/>
-              </a:spcAft>
-              <a:defRPr sz="1800" b="1">
+            <a:off x="676656" y="1719072"/>
+            <a:ext cx="1691640" cy="274320"/>
+          </a:xfrm>
+          <a:prstGeom prst="rect">
+            <a:avLst/>
+          </a:prstGeom>
+          <a:noFill/>
+        </p:spPr>
+        <p:txBody>
+          <a:bodyPr wrap="square" lIns="73152" rIns="73152" tIns="36576" bIns="36576">
+            <a:spAutoFit/>
+          </a:bodyPr>
+          <a:lstStyle/>
+          <a:p>
+            <a:pPr algn="l">
+              <a:spcAft>
+                <a:spcPts val="0"/>
+              </a:spcAft>
+              <a:defRPr sz="1700" b="1">
                 <a:solidFill>
                   <a:srgbClr val="225B9B"/>
                 </a:solidFill>
@@ -22123,7 +23382,7 @@
               </a:defRPr>
             </a:pPr>
             <a:r>
-              <a:t>왜 하는가</a:t>
+              <a:t>명령의 목적</a:t>
             </a:r>
           </a:p>
         </p:txBody>
@@ -22136,7 +23395,7 @@
         </p:nvSpPr>
         <p:spPr>
           <a:xfrm>
-            <a:off x="676656" y="2103120"/>
+            <a:off x="676656" y="2002536"/>
             <a:ext cx="10789920" cy="512064"/>
           </a:xfrm>
           <a:prstGeom prst="rect">
@@ -22154,7 +23413,7 @@
               <a:spcAft>
                 <a:spcPts val="0"/>
               </a:spcAft>
-              <a:defRPr sz="2000" b="0">
+              <a:defRPr sz="1800" b="0">
                 <a:solidFill>
                   <a:srgbClr val="122C4E"/>
                 </a:solidFill>
@@ -22169,14 +23428,53 @@
       </p:sp>
       <p:sp>
         <p:nvSpPr>
-          <p:cNvPr id="9" name="Rounded Rectangle 8"/>
+          <p:cNvPr id="9" name="TextBox 8"/>
+          <p:cNvSpPr txBox="1"/>
+          <p:nvPr/>
+        </p:nvSpPr>
+        <p:spPr>
+          <a:xfrm>
+            <a:off x="676656" y="2816352"/>
+            <a:ext cx="10835640" cy="256032"/>
+          </a:xfrm>
+          <a:prstGeom prst="rect">
+            <a:avLst/>
+          </a:prstGeom>
+          <a:noFill/>
+        </p:spPr>
+        <p:txBody>
+          <a:bodyPr wrap="square" lIns="73152" rIns="73152" tIns="36576" bIns="36576">
+            <a:spAutoFit/>
+          </a:bodyPr>
+          <a:lstStyle/>
+          <a:p>
+            <a:pPr algn="ctr">
+              <a:spcAft>
+                <a:spcPts val="0"/>
+              </a:spcAft>
+              <a:defRPr sz="1600" b="1">
+                <a:solidFill>
+                  <a:srgbClr val="225B9B"/>
+                </a:solidFill>
+                <a:latin typeface="Noto Sans CJK KR"/>
+              </a:defRPr>
+            </a:pPr>
+            <a:r>
+              <a:t>터미널 1 — 아래 검은 블록은 명령만 복사합니다.</a:t>
+            </a:r>
+          </a:p>
+        </p:txBody>
+      </p:sp>
+      <p:sp>
+        <p:nvSpPr>
+          <p:cNvPr id="10" name="Rounded Rectangle 9"/>
           <p:cNvSpPr/>
           <p:nvPr/>
         </p:nvSpPr>
         <p:spPr>
           <a:xfrm>
-            <a:off x="676656" y="2871216"/>
-            <a:ext cx="10835640" cy="2331720"/>
+            <a:off x="676656" y="3154680"/>
+            <a:ext cx="10835640" cy="1938528"/>
           </a:xfrm>
           <a:prstGeom prst="roundRect">
             <a:avLst/>
@@ -22205,7 +23503,7 @@
           </a:fontRef>
         </p:style>
         <p:txBody>
-          <a:bodyPr rtlCol="0" anchor="ctr" wrap="square" lIns="73152" rIns="73152" tIns="36576" bIns="36576"/>
+          <a:bodyPr rtlCol="0" anchor="ctr" wrap="square" lIns="109728" rIns="109728" tIns="73152" bIns="73152"/>
           <a:lstStyle/>
           <a:p>
             <a:pPr algn="l">
@@ -22222,7 +23520,19 @@
             <a:r>
               <a:t>cd ~/ros2_curri/my_agv_ws</a:t>
             </a:r>
-            <a:br/>
+          </a:p>
+          <a:p>
+            <a:pPr algn="l">
+              <a:spcAft>
+                <a:spcPts val="0"/>
+              </a:spcAft>
+              <a:defRPr sz="1600" b="0">
+                <a:solidFill>
+                  <a:srgbClr val="FFFFFF"/>
+                </a:solidFill>
+                <a:latin typeface="DejaVu Sans Mono"/>
+              </a:defRPr>
+            </a:pPr>
             <a:r>
               <a:t>colcon build --symlink-install</a:t>
             </a:r>
@@ -22231,31 +23541,31 @@
       </p:sp>
       <p:sp>
         <p:nvSpPr>
-          <p:cNvPr id="10" name="TextBox 9"/>
-          <p:cNvSpPr txBox="1"/>
-          <p:nvPr/>
-        </p:nvSpPr>
-        <p:spPr>
-          <a:xfrm>
-            <a:off x="768096" y="5468112"/>
-            <a:ext cx="1143000" cy="256032"/>
-          </a:xfrm>
-          <a:prstGeom prst="rect">
-            <a:avLst/>
-          </a:prstGeom>
-          <a:noFill/>
-        </p:spPr>
-        <p:txBody>
-          <a:bodyPr wrap="square" lIns="73152" rIns="73152" tIns="36576" bIns="36576">
-            <a:spAutoFit/>
-          </a:bodyPr>
-          <a:lstStyle/>
-          <a:p>
-            <a:pPr algn="l">
-              <a:spcAft>
-                <a:spcPts val="0"/>
-              </a:spcAft>
-              <a:defRPr sz="1800" b="1">
+          <p:cNvPr id="11" name="TextBox 10"/>
+          <p:cNvSpPr txBox="1"/>
+          <p:nvPr/>
+        </p:nvSpPr>
+        <p:spPr>
+          <a:xfrm>
+            <a:off x="768096" y="5276088"/>
+            <a:ext cx="10561320" cy="384048"/>
+          </a:xfrm>
+          <a:prstGeom prst="rect">
+            <a:avLst/>
+          </a:prstGeom>
+          <a:noFill/>
+        </p:spPr>
+        <p:txBody>
+          <a:bodyPr wrap="square" lIns="73152" rIns="73152" tIns="36576" bIns="36576">
+            <a:spAutoFit/>
+          </a:bodyPr>
+          <a:lstStyle/>
+          <a:p>
+            <a:pPr algn="ctr">
+              <a:spcAft>
+                <a:spcPts val="0"/>
+              </a:spcAft>
+              <a:defRPr sz="1500" b="1">
                 <a:solidFill>
                   <a:srgbClr val="2A8B5A"/>
                 </a:solidFill>
@@ -22263,38 +23573,38 @@
               </a:defRPr>
             </a:pPr>
             <a:r>
-              <a:t>확인</a:t>
-            </a:r>
-          </a:p>
-        </p:txBody>
-      </p:sp>
-      <p:sp>
-        <p:nvSpPr>
-          <p:cNvPr id="11" name="TextBox 10"/>
-          <p:cNvSpPr txBox="1"/>
-          <p:nvPr/>
-        </p:nvSpPr>
-        <p:spPr>
-          <a:xfrm>
-            <a:off x="768096" y="5742432"/>
-            <a:ext cx="10561320" cy="347472"/>
-          </a:xfrm>
-          <a:prstGeom prst="rect">
-            <a:avLst/>
-          </a:prstGeom>
-          <a:noFill/>
-        </p:spPr>
-        <p:txBody>
-          <a:bodyPr wrap="square" lIns="73152" rIns="73152" tIns="36576" bIns="36576">
-            <a:spAutoFit/>
-          </a:bodyPr>
-          <a:lstStyle/>
-          <a:p>
-            <a:pPr algn="l">
-              <a:spcAft>
-                <a:spcPts val="0"/>
-              </a:spcAft>
-              <a:defRPr sz="1800" b="0">
+              <a:t>터미널 1 역할: 터미널 1에서 이 명령만 그대로 복사해 실행합니다.</a:t>
+            </a:r>
+          </a:p>
+        </p:txBody>
+      </p:sp>
+      <p:sp>
+        <p:nvSpPr>
+          <p:cNvPr id="12" name="TextBox 11"/>
+          <p:cNvSpPr txBox="1"/>
+          <p:nvPr/>
+        </p:nvSpPr>
+        <p:spPr>
+          <a:xfrm>
+            <a:off x="768096" y="5916168"/>
+            <a:ext cx="10561320" cy="292608"/>
+          </a:xfrm>
+          <a:prstGeom prst="rect">
+            <a:avLst/>
+          </a:prstGeom>
+          <a:noFill/>
+        </p:spPr>
+        <p:txBody>
+          <a:bodyPr wrap="square" lIns="73152" rIns="73152" tIns="36576" bIns="36576">
+            <a:spAutoFit/>
+          </a:bodyPr>
+          <a:lstStyle/>
+          <a:p>
+            <a:pPr algn="ctr">
+              <a:spcAft>
+                <a:spcPts val="0"/>
+              </a:spcAft>
+              <a:defRPr sz="1500" b="1">
                 <a:solidFill>
                   <a:srgbClr val="122C4E"/>
                 </a:solidFill>
@@ -22302,7 +23612,7 @@
               </a:defRPr>
             </a:pPr>
             <a:r>
-              <a:t>출력에서 topic·frame·파일 이름 또는 성공 메시지를 찾고, 맞지 않으면 다음 파일로 가지 않습니다.</a:t>
+              <a:t>확인: 출력에서 topic·frame·파일 이름 또는 성공 메시지를 찾고, 맞지 않으면 다음 파일로 가지 않습니다.</a:t>
             </a:r>
           </a:p>
         </p:txBody>
@@ -22534,7 +23844,7 @@
               </a:defRPr>
             </a:pPr>
             <a:r>
-              <a:t>현재 단계 실행 2/2    |    현재 폴더 ~/ros2_curri/my_agv_ws    |    현재 터미널</a:t>
+              <a:t>현재 단계 실행 2/2    |    현재 폴더 ~/ros2_curri/my_agv_ws    |    터미널 1</a:t>
             </a:r>
           </a:p>
         </p:txBody>
@@ -22547,25 +23857,25 @@
         </p:nvSpPr>
         <p:spPr>
           <a:xfrm>
-            <a:off x="676656" y="1764792"/>
-            <a:ext cx="1828800" cy="347472"/>
-          </a:xfrm>
-          <a:prstGeom prst="rect">
-            <a:avLst/>
-          </a:prstGeom>
-          <a:noFill/>
-        </p:spPr>
-        <p:txBody>
-          <a:bodyPr wrap="square" lIns="73152" rIns="73152" tIns="36576" bIns="36576">
-            <a:spAutoFit/>
-          </a:bodyPr>
-          <a:lstStyle/>
-          <a:p>
-            <a:pPr algn="l">
-              <a:spcAft>
-                <a:spcPts val="0"/>
-              </a:spcAft>
-              <a:defRPr sz="1800" b="1">
+            <a:off x="676656" y="1719072"/>
+            <a:ext cx="1691640" cy="274320"/>
+          </a:xfrm>
+          <a:prstGeom prst="rect">
+            <a:avLst/>
+          </a:prstGeom>
+          <a:noFill/>
+        </p:spPr>
+        <p:txBody>
+          <a:bodyPr wrap="square" lIns="73152" rIns="73152" tIns="36576" bIns="36576">
+            <a:spAutoFit/>
+          </a:bodyPr>
+          <a:lstStyle/>
+          <a:p>
+            <a:pPr algn="l">
+              <a:spcAft>
+                <a:spcPts val="0"/>
+              </a:spcAft>
+              <a:defRPr sz="1700" b="1">
                 <a:solidFill>
                   <a:srgbClr val="225B9B"/>
                 </a:solidFill>
@@ -22573,7 +23883,7 @@
               </a:defRPr>
             </a:pPr>
             <a:r>
-              <a:t>왜 하는가</a:t>
+              <a:t>명령의 목적</a:t>
             </a:r>
           </a:p>
         </p:txBody>
@@ -22586,7 +23896,7 @@
         </p:nvSpPr>
         <p:spPr>
           <a:xfrm>
-            <a:off x="676656" y="2103120"/>
+            <a:off x="676656" y="2002536"/>
             <a:ext cx="10789920" cy="512064"/>
           </a:xfrm>
           <a:prstGeom prst="rect">
@@ -22604,7 +23914,7 @@
               <a:spcAft>
                 <a:spcPts val="0"/>
               </a:spcAft>
-              <a:defRPr sz="2000" b="0">
+              <a:defRPr sz="1800" b="0">
                 <a:solidFill>
                   <a:srgbClr val="122C4E"/>
                 </a:solidFill>
@@ -22619,14 +23929,53 @@
       </p:sp>
       <p:sp>
         <p:nvSpPr>
-          <p:cNvPr id="9" name="Rounded Rectangle 8"/>
+          <p:cNvPr id="9" name="TextBox 8"/>
+          <p:cNvSpPr txBox="1"/>
+          <p:nvPr/>
+        </p:nvSpPr>
+        <p:spPr>
+          <a:xfrm>
+            <a:off x="676656" y="2816352"/>
+            <a:ext cx="10835640" cy="256032"/>
+          </a:xfrm>
+          <a:prstGeom prst="rect">
+            <a:avLst/>
+          </a:prstGeom>
+          <a:noFill/>
+        </p:spPr>
+        <p:txBody>
+          <a:bodyPr wrap="square" lIns="73152" rIns="73152" tIns="36576" bIns="36576">
+            <a:spAutoFit/>
+          </a:bodyPr>
+          <a:lstStyle/>
+          <a:p>
+            <a:pPr algn="ctr">
+              <a:spcAft>
+                <a:spcPts val="0"/>
+              </a:spcAft>
+              <a:defRPr sz="1600" b="1">
+                <a:solidFill>
+                  <a:srgbClr val="225B9B"/>
+                </a:solidFill>
+                <a:latin typeface="Noto Sans CJK KR"/>
+              </a:defRPr>
+            </a:pPr>
+            <a:r>
+              <a:t>터미널 1 — 아래 검은 블록은 명령만 복사합니다.</a:t>
+            </a:r>
+          </a:p>
+        </p:txBody>
+      </p:sp>
+      <p:sp>
+        <p:nvSpPr>
+          <p:cNvPr id="10" name="Rounded Rectangle 9"/>
           <p:cNvSpPr/>
           <p:nvPr/>
         </p:nvSpPr>
         <p:spPr>
           <a:xfrm>
-            <a:off x="676656" y="2871216"/>
-            <a:ext cx="10835640" cy="2331720"/>
+            <a:off x="676656" y="3154680"/>
+            <a:ext cx="10835640" cy="1938528"/>
           </a:xfrm>
           <a:prstGeom prst="roundRect">
             <a:avLst/>
@@ -22655,7 +24004,7 @@
           </a:fontRef>
         </p:style>
         <p:txBody>
-          <a:bodyPr rtlCol="0" anchor="ctr" wrap="square" lIns="73152" rIns="73152" tIns="36576" bIns="36576"/>
+          <a:bodyPr rtlCol="0" anchor="ctr" wrap="square" lIns="109728" rIns="109728" tIns="73152" bIns="73152"/>
           <a:lstStyle/>
           <a:p>
             <a:pPr algn="l">
@@ -22672,11 +24021,35 @@
             <a:r>
               <a:t>source /opt/ros/jazzy/setup.bash</a:t>
             </a:r>
-            <a:br/>
+          </a:p>
+          <a:p>
+            <a:pPr algn="l">
+              <a:spcAft>
+                <a:spcPts val="0"/>
+              </a:spcAft>
+              <a:defRPr sz="1600" b="0">
+                <a:solidFill>
+                  <a:srgbClr val="FFFFFF"/>
+                </a:solidFill>
+                <a:latin typeface="DejaVu Sans Mono"/>
+              </a:defRPr>
+            </a:pPr>
             <a:r>
               <a:t>source ~/ros2_curri/my_agv_ws/install/setup.bash</a:t>
             </a:r>
-            <a:br/>
+          </a:p>
+          <a:p>
+            <a:pPr algn="l">
+              <a:spcAft>
+                <a:spcPts val="0"/>
+              </a:spcAft>
+              <a:defRPr sz="1600" b="0">
+                <a:solidFill>
+                  <a:srgbClr val="FFFFFF"/>
+                </a:solidFill>
+                <a:latin typeface="DejaVu Sans Mono"/>
+              </a:defRPr>
+            </a:pPr>
             <a:r>
               <a:t>ros2 pkg executables agv_cpp_examples</a:t>
             </a:r>
@@ -22685,31 +24058,31 @@
       </p:sp>
       <p:sp>
         <p:nvSpPr>
-          <p:cNvPr id="10" name="TextBox 9"/>
-          <p:cNvSpPr txBox="1"/>
-          <p:nvPr/>
-        </p:nvSpPr>
-        <p:spPr>
-          <a:xfrm>
-            <a:off x="768096" y="5468112"/>
-            <a:ext cx="1143000" cy="256032"/>
-          </a:xfrm>
-          <a:prstGeom prst="rect">
-            <a:avLst/>
-          </a:prstGeom>
-          <a:noFill/>
-        </p:spPr>
-        <p:txBody>
-          <a:bodyPr wrap="square" lIns="73152" rIns="73152" tIns="36576" bIns="36576">
-            <a:spAutoFit/>
-          </a:bodyPr>
-          <a:lstStyle/>
-          <a:p>
-            <a:pPr algn="l">
-              <a:spcAft>
-                <a:spcPts val="0"/>
-              </a:spcAft>
-              <a:defRPr sz="1800" b="1">
+          <p:cNvPr id="11" name="TextBox 10"/>
+          <p:cNvSpPr txBox="1"/>
+          <p:nvPr/>
+        </p:nvSpPr>
+        <p:spPr>
+          <a:xfrm>
+            <a:off x="768096" y="5276088"/>
+            <a:ext cx="10561320" cy="384048"/>
+          </a:xfrm>
+          <a:prstGeom prst="rect">
+            <a:avLst/>
+          </a:prstGeom>
+          <a:noFill/>
+        </p:spPr>
+        <p:txBody>
+          <a:bodyPr wrap="square" lIns="73152" rIns="73152" tIns="36576" bIns="36576">
+            <a:spAutoFit/>
+          </a:bodyPr>
+          <a:lstStyle/>
+          <a:p>
+            <a:pPr algn="ctr">
+              <a:spcAft>
+                <a:spcPts val="0"/>
+              </a:spcAft>
+              <a:defRPr sz="1500" b="1">
                 <a:solidFill>
                   <a:srgbClr val="2A8B5A"/>
                 </a:solidFill>
@@ -22717,38 +24090,38 @@
               </a:defRPr>
             </a:pPr>
             <a:r>
-              <a:t>확인</a:t>
-            </a:r>
-          </a:p>
-        </p:txBody>
-      </p:sp>
-      <p:sp>
-        <p:nvSpPr>
-          <p:cNvPr id="11" name="TextBox 10"/>
-          <p:cNvSpPr txBox="1"/>
-          <p:nvPr/>
-        </p:nvSpPr>
-        <p:spPr>
-          <a:xfrm>
-            <a:off x="768096" y="5742432"/>
-            <a:ext cx="10561320" cy="347472"/>
-          </a:xfrm>
-          <a:prstGeom prst="rect">
-            <a:avLst/>
-          </a:prstGeom>
-          <a:noFill/>
-        </p:spPr>
-        <p:txBody>
-          <a:bodyPr wrap="square" lIns="73152" rIns="73152" tIns="36576" bIns="36576">
-            <a:spAutoFit/>
-          </a:bodyPr>
-          <a:lstStyle/>
-          <a:p>
-            <a:pPr algn="l">
-              <a:spcAft>
-                <a:spcPts val="0"/>
-              </a:spcAft>
-              <a:defRPr sz="1800" b="0">
+              <a:t>터미널 1 역할: 터미널 1에서 이 명령만 그대로 복사해 실행합니다.</a:t>
+            </a:r>
+          </a:p>
+        </p:txBody>
+      </p:sp>
+      <p:sp>
+        <p:nvSpPr>
+          <p:cNvPr id="12" name="TextBox 11"/>
+          <p:cNvSpPr txBox="1"/>
+          <p:nvPr/>
+        </p:nvSpPr>
+        <p:spPr>
+          <a:xfrm>
+            <a:off x="768096" y="5916168"/>
+            <a:ext cx="10561320" cy="292608"/>
+          </a:xfrm>
+          <a:prstGeom prst="rect">
+            <a:avLst/>
+          </a:prstGeom>
+          <a:noFill/>
+        </p:spPr>
+        <p:txBody>
+          <a:bodyPr wrap="square" lIns="73152" rIns="73152" tIns="36576" bIns="36576">
+            <a:spAutoFit/>
+          </a:bodyPr>
+          <a:lstStyle/>
+          <a:p>
+            <a:pPr algn="ctr">
+              <a:spcAft>
+                <a:spcPts val="0"/>
+              </a:spcAft>
+              <a:defRPr sz="1500" b="1">
                 <a:solidFill>
                   <a:srgbClr val="122C4E"/>
                 </a:solidFill>
@@ -22756,7 +24129,7 @@
               </a:defRPr>
             </a:pPr>
             <a:r>
-              <a:t>출력에서 topic·frame·파일 이름 또는 성공 메시지를 찾고, 맞지 않으면 다음 파일로 가지 않습니다.</a:t>
+              <a:t>확인: 출력에서 topic·frame·파일 이름 또는 성공 메시지를 찾고, 맞지 않으면 다음 파일로 가지 않습니다.</a:t>
             </a:r>
           </a:p>
         </p:txBody>
@@ -22988,21 +24361,138 @@
               </a:defRPr>
             </a:pPr>
             <a:r>
-              <a:t>현재 단계 실행    |    현재 폴더 ~/ros2_curri/my_agv_ws    |    현재 터미널</a:t>
-            </a:r>
-          </a:p>
-        </p:txBody>
-      </p:sp>
-      <p:sp>
-        <p:nvSpPr>
-          <p:cNvPr id="7" name="Rounded Rectangle 6"/>
+              <a:t>현재 단계 실행    |    현재 폴더 ~/ros2_curri/my_agv_ws    |    터미널 1</a:t>
+            </a:r>
+          </a:p>
+        </p:txBody>
+      </p:sp>
+      <p:sp>
+        <p:nvSpPr>
+          <p:cNvPr id="7" name="TextBox 6"/>
+          <p:cNvSpPr txBox="1"/>
+          <p:nvPr/>
+        </p:nvSpPr>
+        <p:spPr>
+          <a:xfrm>
+            <a:off x="676656" y="1719072"/>
+            <a:ext cx="1691640" cy="274320"/>
+          </a:xfrm>
+          <a:prstGeom prst="rect">
+            <a:avLst/>
+          </a:prstGeom>
+          <a:noFill/>
+        </p:spPr>
+        <p:txBody>
+          <a:bodyPr wrap="square" lIns="73152" rIns="73152" tIns="36576" bIns="36576">
+            <a:spAutoFit/>
+          </a:bodyPr>
+          <a:lstStyle/>
+          <a:p>
+            <a:pPr algn="l">
+              <a:spcAft>
+                <a:spcPts val="0"/>
+              </a:spcAft>
+              <a:defRPr sz="1700" b="1">
+                <a:solidFill>
+                  <a:srgbClr val="225B9B"/>
+                </a:solidFill>
+                <a:latin typeface="Noto Sans CJK KR"/>
+              </a:defRPr>
+            </a:pPr>
+            <a:r>
+              <a:t>명령의 목적</a:t>
+            </a:r>
+          </a:p>
+        </p:txBody>
+      </p:sp>
+      <p:sp>
+        <p:nvSpPr>
+          <p:cNvPr id="8" name="TextBox 7"/>
+          <p:cNvSpPr txBox="1"/>
+          <p:nvPr/>
+        </p:nvSpPr>
+        <p:spPr>
+          <a:xfrm>
+            <a:off x="676656" y="2002536"/>
+            <a:ext cx="10789920" cy="512064"/>
+          </a:xfrm>
+          <a:prstGeom prst="rect">
+            <a:avLst/>
+          </a:prstGeom>
+          <a:noFill/>
+        </p:spPr>
+        <p:txBody>
+          <a:bodyPr wrap="square" lIns="73152" rIns="73152" tIns="36576" bIns="36576">
+            <a:spAutoFit/>
+          </a:bodyPr>
+          <a:lstStyle/>
+          <a:p>
+            <a:pPr algn="l">
+              <a:spcAft>
+                <a:spcPts val="0"/>
+              </a:spcAft>
+              <a:defRPr sz="1800" b="0">
+                <a:solidFill>
+                  <a:srgbClr val="122C4E"/>
+                </a:solidFill>
+                <a:latin typeface="Noto Sans CJK KR"/>
+              </a:defRPr>
+            </a:pPr>
+            <a:r>
+              <a:t>명령 순서를 바꾸지 않습니다. build가 끝난 뒤 source하고, 마지막 명령으로 node·Gazebo·RViz를 실행합니다.</a:t>
+            </a:r>
+          </a:p>
+        </p:txBody>
+      </p:sp>
+      <p:sp>
+        <p:nvSpPr>
+          <p:cNvPr id="9" name="TextBox 8"/>
+          <p:cNvSpPr txBox="1"/>
+          <p:nvPr/>
+        </p:nvSpPr>
+        <p:spPr>
+          <a:xfrm>
+            <a:off x="676656" y="2816352"/>
+            <a:ext cx="10835640" cy="256032"/>
+          </a:xfrm>
+          <a:prstGeom prst="rect">
+            <a:avLst/>
+          </a:prstGeom>
+          <a:noFill/>
+        </p:spPr>
+        <p:txBody>
+          <a:bodyPr wrap="square" lIns="73152" rIns="73152" tIns="36576" bIns="36576">
+            <a:spAutoFit/>
+          </a:bodyPr>
+          <a:lstStyle/>
+          <a:p>
+            <a:pPr algn="ctr">
+              <a:spcAft>
+                <a:spcPts val="0"/>
+              </a:spcAft>
+              <a:defRPr sz="1600" b="1">
+                <a:solidFill>
+                  <a:srgbClr val="225B9B"/>
+                </a:solidFill>
+                <a:latin typeface="Noto Sans CJK KR"/>
+              </a:defRPr>
+            </a:pPr>
+            <a:r>
+              <a:t>터미널 1 — 아래 검은 블록은 명령만 복사합니다.</a:t>
+            </a:r>
+          </a:p>
+        </p:txBody>
+      </p:sp>
+      <p:sp>
+        <p:nvSpPr>
+          <p:cNvPr id="10" name="Rounded Rectangle 9"/>
           <p:cNvSpPr/>
           <p:nvPr/>
         </p:nvSpPr>
         <p:spPr>
           <a:xfrm>
-            <a:off x="658368" y="1700784"/>
-            <a:ext cx="10972800" cy="3182112"/>
+            <a:off x="676656" y="3154680"/>
+            <a:ext cx="10835640" cy="1938528"/>
           </a:xfrm>
           <a:prstGeom prst="roundRect">
             <a:avLst/>
@@ -23031,7 +24521,7 @@
           </a:fontRef>
         </p:style>
         <p:txBody>
-          <a:bodyPr rtlCol="0" anchor="ctr" wrap="square" lIns="73152" rIns="73152" tIns="36576" bIns="36576"/>
+          <a:bodyPr rtlCol="0" anchor="ctr" wrap="square" lIns="109728" rIns="109728" tIns="73152" bIns="73152"/>
           <a:lstStyle/>
           <a:p>
             <a:pPr algn="l">
@@ -23048,19 +24538,67 @@
             <a:r>
               <a:t>cd ~/ros2_curri/my_agv_ws</a:t>
             </a:r>
-            <a:br/>
+          </a:p>
+          <a:p>
+            <a:pPr algn="l">
+              <a:spcAft>
+                <a:spcPts val="0"/>
+              </a:spcAft>
+              <a:defRPr sz="1600" b="0">
+                <a:solidFill>
+                  <a:srgbClr val="FFFFFF"/>
+                </a:solidFill>
+                <a:latin typeface="DejaVu Sans Mono"/>
+              </a:defRPr>
+            </a:pPr>
             <a:r>
               <a:t>source /opt/ros/jazzy/setup.bash</a:t>
             </a:r>
-            <a:br/>
+          </a:p>
+          <a:p>
+            <a:pPr algn="l">
+              <a:spcAft>
+                <a:spcPts val="0"/>
+              </a:spcAft>
+              <a:defRPr sz="1600" b="0">
+                <a:solidFill>
+                  <a:srgbClr val="FFFFFF"/>
+                </a:solidFill>
+                <a:latin typeface="DejaVu Sans Mono"/>
+              </a:defRPr>
+            </a:pPr>
             <a:r>
               <a:t>colcon build --symlink-install</a:t>
             </a:r>
-            <a:br/>
+          </a:p>
+          <a:p>
+            <a:pPr algn="l">
+              <a:spcAft>
+                <a:spcPts val="0"/>
+              </a:spcAft>
+              <a:defRPr sz="1600" b="0">
+                <a:solidFill>
+                  <a:srgbClr val="FFFFFF"/>
+                </a:solidFill>
+                <a:latin typeface="DejaVu Sans Mono"/>
+              </a:defRPr>
+            </a:pPr>
             <a:r>
               <a:t>source install/setup.bash</a:t>
             </a:r>
-            <a:br/>
+          </a:p>
+          <a:p>
+            <a:pPr algn="l">
+              <a:spcAft>
+                <a:spcPts val="0"/>
+              </a:spcAft>
+              <a:defRPr sz="1600" b="0">
+                <a:solidFill>
+                  <a:srgbClr val="FFFFFF"/>
+                </a:solidFill>
+                <a:latin typeface="DejaVu Sans Mono"/>
+              </a:defRPr>
+            </a:pPr>
             <a:r>
               <a:t>ros2 run agv_cpp_examples status_publisher</a:t>
             </a:r>
@@ -23069,31 +24607,31 @@
       </p:sp>
       <p:sp>
         <p:nvSpPr>
-          <p:cNvPr id="8" name="TextBox 7"/>
-          <p:cNvSpPr txBox="1"/>
-          <p:nvPr/>
-        </p:nvSpPr>
-        <p:spPr>
-          <a:xfrm>
-            <a:off x="786384" y="5239512"/>
-            <a:ext cx="1261872" cy="237744"/>
-          </a:xfrm>
-          <a:prstGeom prst="rect">
-            <a:avLst/>
-          </a:prstGeom>
-          <a:noFill/>
-        </p:spPr>
-        <p:txBody>
-          <a:bodyPr wrap="square" lIns="73152" rIns="73152" tIns="36576" bIns="36576">
-            <a:spAutoFit/>
-          </a:bodyPr>
-          <a:lstStyle/>
-          <a:p>
-            <a:pPr algn="l">
-              <a:spcAft>
-                <a:spcPts val="0"/>
-              </a:spcAft>
-              <a:defRPr sz="1800" b="1">
+          <p:cNvPr id="11" name="TextBox 10"/>
+          <p:cNvSpPr txBox="1"/>
+          <p:nvPr/>
+        </p:nvSpPr>
+        <p:spPr>
+          <a:xfrm>
+            <a:off x="768096" y="5276088"/>
+            <a:ext cx="10561320" cy="384048"/>
+          </a:xfrm>
+          <a:prstGeom prst="rect">
+            <a:avLst/>
+          </a:prstGeom>
+          <a:noFill/>
+        </p:spPr>
+        <p:txBody>
+          <a:bodyPr wrap="square" lIns="73152" rIns="73152" tIns="36576" bIns="36576">
+            <a:spAutoFit/>
+          </a:bodyPr>
+          <a:lstStyle/>
+          <a:p>
+            <a:pPr algn="ctr">
+              <a:spcAft>
+                <a:spcPts val="0"/>
+              </a:spcAft>
+              <a:defRPr sz="1500" b="1">
                 <a:solidFill>
                   <a:srgbClr val="2A8B5A"/>
                 </a:solidFill>
@@ -23101,38 +24639,38 @@
               </a:defRPr>
             </a:pPr>
             <a:r>
-              <a:t>확인 기준</a:t>
-            </a:r>
-          </a:p>
-        </p:txBody>
-      </p:sp>
-      <p:sp>
-        <p:nvSpPr>
-          <p:cNvPr id="9" name="TextBox 8"/>
-          <p:cNvSpPr txBox="1"/>
-          <p:nvPr/>
-        </p:nvSpPr>
-        <p:spPr>
-          <a:xfrm>
-            <a:off x="786384" y="5532120"/>
-            <a:ext cx="10469880" cy="420624"/>
-          </a:xfrm>
-          <a:prstGeom prst="rect">
-            <a:avLst/>
-          </a:prstGeom>
-          <a:noFill/>
-        </p:spPr>
-        <p:txBody>
-          <a:bodyPr wrap="square" lIns="73152" rIns="73152" tIns="36576" bIns="36576">
-            <a:spAutoFit/>
-          </a:bodyPr>
-          <a:lstStyle/>
-          <a:p>
-            <a:pPr algn="l">
-              <a:spcAft>
-                <a:spcPts val="0"/>
-              </a:spcAft>
-              <a:defRPr sz="1800" b="0">
+              <a:t>터미널 1 역할: 이 node를 실행합니다. 출력이 계속 나오는 동안 Ctrl+C로 종료하지 않습니다.</a:t>
+            </a:r>
+          </a:p>
+        </p:txBody>
+      </p:sp>
+      <p:sp>
+        <p:nvSpPr>
+          <p:cNvPr id="12" name="TextBox 11"/>
+          <p:cNvSpPr txBox="1"/>
+          <p:nvPr/>
+        </p:nvSpPr>
+        <p:spPr>
+          <a:xfrm>
+            <a:off x="768096" y="5916168"/>
+            <a:ext cx="10561320" cy="292608"/>
+          </a:xfrm>
+          <a:prstGeom prst="rect">
+            <a:avLst/>
+          </a:prstGeom>
+          <a:noFill/>
+        </p:spPr>
+        <p:txBody>
+          <a:bodyPr wrap="square" lIns="73152" rIns="73152" tIns="36576" bIns="36576">
+            <a:spAutoFit/>
+          </a:bodyPr>
+          <a:lstStyle/>
+          <a:p>
+            <a:pPr algn="ctr">
+              <a:spcAft>
+                <a:spcPts val="0"/>
+              </a:spcAft>
+              <a:defRPr sz="1500" b="1">
                 <a:solidFill>
                   <a:srgbClr val="122C4E"/>
                 </a:solidFill>
@@ -23140,7 +24678,7 @@
               </a:defRPr>
             </a:pPr>
             <a:r>
-              <a:t>build/install/log와 두 언어의 실행 파일을 source 뒤에 확인한다.</a:t>
+              <a:t>확인: build/install/log와 두 언어의 실행 파일을 source 뒤에 확인한다.</a:t>
             </a:r>
           </a:p>
         </p:txBody>
@@ -23652,7 +25190,7 @@
           </a:fontRef>
         </p:style>
         <p:txBody>
-          <a:bodyPr rtlCol="0" anchor="ctr" wrap="square" lIns="73152" rIns="73152" tIns="36576" bIns="36576"/>
+          <a:bodyPr rtlCol="0" anchor="ctr" wrap="square" lIns="109728" rIns="109728" tIns="73152" bIns="73152"/>
           <a:lstStyle/>
           <a:p>
             <a:pPr algn="l">
@@ -23669,11 +25207,35 @@
             <a:r>
               <a:t>pwd</a:t>
             </a:r>
-            <a:br/>
+          </a:p>
+          <a:p>
+            <a:pPr algn="l">
+              <a:spcAft>
+                <a:spcPts val="0"/>
+              </a:spcAft>
+              <a:defRPr sz="1600" b="0">
+                <a:solidFill>
+                  <a:srgbClr val="FFFFFF"/>
+                </a:solidFill>
+                <a:latin typeface="DejaVu Sans Mono"/>
+              </a:defRPr>
+            </a:pPr>
             <a:r>
               <a:t>find src -maxdepth 2 -name package.xml -o -name CMakeLists.txt</a:t>
             </a:r>
-            <a:br/>
+          </a:p>
+          <a:p>
+            <a:pPr algn="l">
+              <a:spcAft>
+                <a:spcPts val="0"/>
+              </a:spcAft>
+              <a:defRPr sz="1600" b="0">
+                <a:solidFill>
+                  <a:srgbClr val="FFFFFF"/>
+                </a:solidFill>
+                <a:latin typeface="DejaVu Sans Mono"/>
+              </a:defRPr>
+            </a:pPr>
             <a:r>
               <a:t>ros2 pkg prefix agv_cpp_examples</a:t>
             </a:r>
@@ -24623,7 +26185,7 @@
           </a:fontRef>
         </p:style>
         <p:txBody>
-          <a:bodyPr rtlCol="0" anchor="ctr" wrap="square" lIns="73152" rIns="73152" tIns="36576" bIns="36576"/>
+          <a:bodyPr rtlCol="0" anchor="ctr" wrap="square" lIns="109728" rIns="109728" tIns="73152" bIns="73152"/>
           <a:lstStyle/>
           <a:p>
             <a:pPr algn="l">
@@ -24640,19 +26202,67 @@
             <a:r>
               <a:t>cd ~/ros2_curri</a:t>
             </a:r>
-            <a:br/>
+          </a:p>
+          <a:p>
+            <a:pPr algn="l">
+              <a:spcAft>
+                <a:spcPts val="0"/>
+              </a:spcAft>
+              <a:defRPr sz="1400" b="0">
+                <a:solidFill>
+                  <a:srgbClr val="FFFFFF"/>
+                </a:solidFill>
+                <a:latin typeface="DejaVu Sans Mono"/>
+              </a:defRPr>
+            </a:pPr>
             <a:r>
               <a:t>diff -ru my_agv_ws/src blocks/A_ros2_basics/M02_workspace_package/complete/agv_ws/src || true</a:t>
             </a:r>
-            <a:br/>
+          </a:p>
+          <a:p>
+            <a:pPr algn="l">
+              <a:spcAft>
+                <a:spcPts val="0"/>
+              </a:spcAft>
+              <a:defRPr sz="1400" b="0">
+                <a:solidFill>
+                  <a:srgbClr val="FFFFFF"/>
+                </a:solidFill>
+                <a:latin typeface="DejaVu Sans Mono"/>
+              </a:defRPr>
+            </a:pPr>
             <a:r>
               <a:t>cp -a my_agv_ws/src my_agv_ws/src_before_M02</a:t>
             </a:r>
-            <a:br/>
+          </a:p>
+          <a:p>
+            <a:pPr algn="l">
+              <a:spcAft>
+                <a:spcPts val="0"/>
+              </a:spcAft>
+              <a:defRPr sz="1400" b="0">
+                <a:solidFill>
+                  <a:srgbClr val="FFFFFF"/>
+                </a:solidFill>
+                <a:latin typeface="DejaVu Sans Mono"/>
+              </a:defRPr>
+            </a:pPr>
             <a:r>
               <a:t>cp -a blocks/A_ros2_basics/M02_workspace_package/complete/agv_ws/src/. my_agv_ws/src/</a:t>
             </a:r>
-            <a:br/>
+          </a:p>
+          <a:p>
+            <a:pPr algn="l">
+              <a:spcAft>
+                <a:spcPts val="0"/>
+              </a:spcAft>
+              <a:defRPr sz="1400" b="0">
+                <a:solidFill>
+                  <a:srgbClr val="FFFFFF"/>
+                </a:solidFill>
+                <a:latin typeface="DejaVu Sans Mono"/>
+              </a:defRPr>
+            </a:pPr>
             <a:r>
               <a:t>cd my_agv_ws &amp;&amp; colcon build --symlink-install &amp;&amp; source install/setup.bash</a:t>
             </a:r>
